--- a/docs/2026ESWContest_자유공모_파인더_개발완료보고서.pptx
+++ b/docs/2026ESWContest_자유공모_파인더_개발완료보고서.pptx
@@ -2,31 +2,31 @@
 <file path=ppt/presentation.xml><?xml version="1.0" encoding="utf-8"?>
 <p:presentation xmlns:p="http://schemas.openxmlformats.org/presentationml/2006/main">
   <p:sldMasterIdLst>
-    <p:sldMasterId xmlns:r="http://schemas.openxmlformats.org/officeDocument/2006/relationships" id="2147483648" r:id="R034a999137924ed2"/>
+    <p:sldMasterId xmlns:r="http://schemas.openxmlformats.org/officeDocument/2006/relationships" id="2147483648" r:id="R497ee2d578d144cf"/>
   </p:sldMasterIdLst>
   <p:notesMasterIdLst>
-    <p:notesMasterId xmlns:r="http://schemas.openxmlformats.org/officeDocument/2006/relationships" r:id="Rf66c86a88cd54846"/>
+    <p:notesMasterId xmlns:r="http://schemas.openxmlformats.org/officeDocument/2006/relationships" r:id="R998c4b3dcfb84241"/>
   </p:notesMasterIdLst>
   <p:sldIdLst>
-    <p:sldId xmlns:r="http://schemas.openxmlformats.org/officeDocument/2006/relationships" id="256" r:id="R2913e9e6a5c94f3b"/>
-    <p:sldId xmlns:r="http://schemas.openxmlformats.org/officeDocument/2006/relationships" id="257" r:id="Ra172794c9da74199"/>
-    <p:sldId xmlns:r="http://schemas.openxmlformats.org/officeDocument/2006/relationships" id="258" r:id="R8979a34e8a624432"/>
-    <p:sldId xmlns:r="http://schemas.openxmlformats.org/officeDocument/2006/relationships" id="259" r:id="Rcf49c9bc1e1b4e1c"/>
-    <p:sldId xmlns:r="http://schemas.openxmlformats.org/officeDocument/2006/relationships" id="260" r:id="R600ba67055fe4a6c"/>
-    <p:sldId xmlns:r="http://schemas.openxmlformats.org/officeDocument/2006/relationships" id="261" r:id="R522745b3db944ee4"/>
-    <p:sldId xmlns:r="http://schemas.openxmlformats.org/officeDocument/2006/relationships" id="262" r:id="R41cedadb45b646d4"/>
-    <p:sldId xmlns:r="http://schemas.openxmlformats.org/officeDocument/2006/relationships" id="263" r:id="R2db62d2ff11841fe"/>
-    <p:sldId xmlns:r="http://schemas.openxmlformats.org/officeDocument/2006/relationships" id="264" r:id="R3c8648b3a9ba4f4f"/>
-    <p:sldId xmlns:r="http://schemas.openxmlformats.org/officeDocument/2006/relationships" id="265" r:id="Rbd94a8c442fb4ace"/>
-    <p:sldId xmlns:r="http://schemas.openxmlformats.org/officeDocument/2006/relationships" id="266" r:id="R0a233aa0f40a4578"/>
-    <p:sldId xmlns:r="http://schemas.openxmlformats.org/officeDocument/2006/relationships" id="267" r:id="R198255b28e7c4b87"/>
-    <p:sldId xmlns:r="http://schemas.openxmlformats.org/officeDocument/2006/relationships" id="268" r:id="R31df3835e47747ce"/>
-    <p:sldId xmlns:r="http://schemas.openxmlformats.org/officeDocument/2006/relationships" id="269" r:id="Re76dc7bd638c41ac"/>
-    <p:sldId xmlns:r="http://schemas.openxmlformats.org/officeDocument/2006/relationships" id="270" r:id="R8ef99411e8544f2c"/>
-    <p:sldId xmlns:r="http://schemas.openxmlformats.org/officeDocument/2006/relationships" id="271" r:id="Rd20aa89115db4ae3"/>
-    <p:sldId xmlns:r="http://schemas.openxmlformats.org/officeDocument/2006/relationships" id="272" r:id="Re2cebfa43d05431b"/>
-    <p:sldId xmlns:r="http://schemas.openxmlformats.org/officeDocument/2006/relationships" id="273" r:id="R548c50c8811a4667"/>
-    <p:sldId xmlns:r="http://schemas.openxmlformats.org/officeDocument/2006/relationships" id="274" r:id="R7084e2d3a9c747f3"/>
+    <p:sldId xmlns:r="http://schemas.openxmlformats.org/officeDocument/2006/relationships" id="256" r:id="Rc2ecce46452c4dc0"/>
+    <p:sldId xmlns:r="http://schemas.openxmlformats.org/officeDocument/2006/relationships" id="257" r:id="Rc45c3b48be0540cb"/>
+    <p:sldId xmlns:r="http://schemas.openxmlformats.org/officeDocument/2006/relationships" id="258" r:id="R9aac72f4ea624a7e"/>
+    <p:sldId xmlns:r="http://schemas.openxmlformats.org/officeDocument/2006/relationships" id="259" r:id="Rd714214425d94905"/>
+    <p:sldId xmlns:r="http://schemas.openxmlformats.org/officeDocument/2006/relationships" id="260" r:id="R41de5a49b7c74843"/>
+    <p:sldId xmlns:r="http://schemas.openxmlformats.org/officeDocument/2006/relationships" id="261" r:id="R85b3e7b9f9124b8c"/>
+    <p:sldId xmlns:r="http://schemas.openxmlformats.org/officeDocument/2006/relationships" id="262" r:id="R8ef4afeacb004dd0"/>
+    <p:sldId xmlns:r="http://schemas.openxmlformats.org/officeDocument/2006/relationships" id="263" r:id="R081f960204014ae4"/>
+    <p:sldId xmlns:r="http://schemas.openxmlformats.org/officeDocument/2006/relationships" id="264" r:id="Rf8e834b2d96a4a57"/>
+    <p:sldId xmlns:r="http://schemas.openxmlformats.org/officeDocument/2006/relationships" id="265" r:id="Rf103f8cde97a4913"/>
+    <p:sldId xmlns:r="http://schemas.openxmlformats.org/officeDocument/2006/relationships" id="266" r:id="Rfc79da22394e432d"/>
+    <p:sldId xmlns:r="http://schemas.openxmlformats.org/officeDocument/2006/relationships" id="267" r:id="R11501ddc08324f53"/>
+    <p:sldId xmlns:r="http://schemas.openxmlformats.org/officeDocument/2006/relationships" id="268" r:id="R435d569a0ac9468b"/>
+    <p:sldId xmlns:r="http://schemas.openxmlformats.org/officeDocument/2006/relationships" id="269" r:id="R2942ab4a9ee14ab6"/>
+    <p:sldId xmlns:r="http://schemas.openxmlformats.org/officeDocument/2006/relationships" id="270" r:id="Rf625a0a7170d4404"/>
+    <p:sldId xmlns:r="http://schemas.openxmlformats.org/officeDocument/2006/relationships" id="271" r:id="Rd746b4669fd54ad2"/>
+    <p:sldId xmlns:r="http://schemas.openxmlformats.org/officeDocument/2006/relationships" id="272" r:id="Ra815c8b1f5464cf9"/>
+    <p:sldId xmlns:r="http://schemas.openxmlformats.org/officeDocument/2006/relationships" id="273" r:id="R7b49741f96a04ff3"/>
+    <p:sldId xmlns:r="http://schemas.openxmlformats.org/officeDocument/2006/relationships" id="274" r:id="Rfeb51929fee9443e"/>
   </p:sldIdLst>
   <p:sldSz cx="12192000" cy="6858000"/>
   <p:notesSz cx="6858000" cy="9144000"/>
@@ -2208,7 +2208,7 @@
   </p:cSld>
   <p:clrMap bg1="lt1" tx1="dk1" bg2="lt2" tx2="dk2" accent1="accent1" accent2="accent2" accent3="accent3" accent4="accent4" accent5="accent5" accent6="accent6" hlink="hlink" folHlink="folHlink"/>
   <p:sldLayoutIdLst>
-    <p:sldLayoutId xmlns:r="http://schemas.openxmlformats.org/officeDocument/2006/relationships" id="2147483649" r:id="Rae394a96be0144a3"/>
+    <p:sldLayoutId xmlns:r="http://schemas.openxmlformats.org/officeDocument/2006/relationships" id="2147483649" r:id="Rc17088d8bc4d451f"/>
   </p:sldLayoutIdLst>
   <p:txStyles>
     <p:titleStyle>
@@ -2759,7 +2759,7 @@
           <p:cNvPr id="21" name="">
             <a:extLst xmlns:a="http://schemas.openxmlformats.org/drawingml/2006/main">
               <a:ext uri="{FF2B5EF4-FFF2-40B4-BE49-F238E27FC236}">
-                <a16:creationId xmlns:a16="http://schemas.microsoft.com/office/drawing/2014/main" id="{F0B55496-2A73-482C-A296-5A1D78E4053C}"/>
+                <a16:creationId xmlns:a16="http://schemas.microsoft.com/office/drawing/2014/main" id="{523B1801-CAA1-4D04-B0BB-5AF60C240434}"/>
               </a:ext>
             </a:extLst>
           </p:cNvPr>
@@ -2792,7 +2792,7 @@
           <p:cNvPr id="2" name="">
             <a:extLst xmlns:a="http://schemas.openxmlformats.org/drawingml/2006/main">
               <a:ext uri="{FF2B5EF4-FFF2-40B4-BE49-F238E27FC236}">
-                <a16:creationId xmlns:a16="http://schemas.microsoft.com/office/drawing/2014/main" id="{D2485540-A757-421A-9EBC-FE954876C6E9}"/>
+                <a16:creationId xmlns:a16="http://schemas.microsoft.com/office/drawing/2014/main" id="{ABF597A6-2299-4779-9881-ABED0DDB8268}"/>
               </a:ext>
             </a:extLst>
           </p:cNvPr>
@@ -2827,7 +2827,7 @@
           <p:cNvPr id="3" name="">
             <a:extLst xmlns:a="http://schemas.openxmlformats.org/drawingml/2006/main">
               <a:ext uri="{FF2B5EF4-FFF2-40B4-BE49-F238E27FC236}">
-                <a16:creationId xmlns:a16="http://schemas.microsoft.com/office/drawing/2014/main" id="{4B9F96E1-4BC7-46D0-A193-D203FF5FC427}"/>
+                <a16:creationId xmlns:a16="http://schemas.microsoft.com/office/drawing/2014/main" id="{0610E6EC-F2D0-4F98-9D4F-EB55B39229F8}"/>
               </a:ext>
             </a:extLst>
           </p:cNvPr>
@@ -2889,7 +2889,7 @@
           <p:cNvPr id="4" name="">
             <a:extLst xmlns:a="http://schemas.openxmlformats.org/drawingml/2006/main">
               <a:ext uri="{FF2B5EF4-FFF2-40B4-BE49-F238E27FC236}">
-                <a16:creationId xmlns:a16="http://schemas.microsoft.com/office/drawing/2014/main" id="{BD443478-8B0E-4A9C-B15E-8FF5964CE191}"/>
+                <a16:creationId xmlns:a16="http://schemas.microsoft.com/office/drawing/2014/main" id="{D97C5C1A-8804-4EDC-BFB3-281958B02C0A}"/>
               </a:ext>
             </a:extLst>
           </p:cNvPr>
@@ -2951,7 +2951,7 @@
           <p:cNvPr id="5" name="">
             <a:extLst xmlns:a="http://schemas.openxmlformats.org/drawingml/2006/main">
               <a:ext uri="{FF2B5EF4-FFF2-40B4-BE49-F238E27FC236}">
-                <a16:creationId xmlns:a16="http://schemas.microsoft.com/office/drawing/2014/main" id="{50362646-1000-454F-8EF6-CDCAA8880075}"/>
+                <a16:creationId xmlns:a16="http://schemas.microsoft.com/office/drawing/2014/main" id="{0F11A90A-B2CD-4329-A000-C652CC4AAD20}"/>
               </a:ext>
             </a:extLst>
           </p:cNvPr>
@@ -3013,7 +3013,7 @@
           <p:cNvPr id="6" name="">
             <a:extLst xmlns:a="http://schemas.openxmlformats.org/drawingml/2006/main">
               <a:ext uri="{FF2B5EF4-FFF2-40B4-BE49-F238E27FC236}">
-                <a16:creationId xmlns:a16="http://schemas.microsoft.com/office/drawing/2014/main" id="{AEE79E28-AE6A-4ADA-B240-ECDEC47FEC47}"/>
+                <a16:creationId xmlns:a16="http://schemas.microsoft.com/office/drawing/2014/main" id="{30CFF6E7-8822-4867-A6A5-A3F02C435939}"/>
               </a:ext>
             </a:extLst>
           </p:cNvPr>
@@ -3102,7 +3102,7 @@
           <p:cNvPr id="7" name="">
             <a:extLst xmlns:a="http://schemas.openxmlformats.org/drawingml/2006/main">
               <a:ext uri="{FF2B5EF4-FFF2-40B4-BE49-F238E27FC236}">
-                <a16:creationId xmlns:a16="http://schemas.microsoft.com/office/drawing/2014/main" id="{D00FBE56-63C8-4F59-8948-358FDA0A8634}"/>
+                <a16:creationId xmlns:a16="http://schemas.microsoft.com/office/drawing/2014/main" id="{E877395F-A561-4076-9BC6-3F876495703D}"/>
               </a:ext>
             </a:extLst>
           </p:cNvPr>
@@ -3137,7 +3137,7 @@
           <p:cNvPr id="8" name="">
             <a:extLst xmlns:a="http://schemas.openxmlformats.org/drawingml/2006/main">
               <a:ext uri="{FF2B5EF4-FFF2-40B4-BE49-F238E27FC236}">
-                <a16:creationId xmlns:a16="http://schemas.microsoft.com/office/drawing/2014/main" id="{553A5EE7-4537-4B70-BA6B-7DB3789894EF}"/>
+                <a16:creationId xmlns:a16="http://schemas.microsoft.com/office/drawing/2014/main" id="{80707705-35BB-4B43-91E0-DD03FF343A49}"/>
               </a:ext>
             </a:extLst>
           </p:cNvPr>
@@ -3199,7 +3199,7 @@
           <p:cNvPr id="9" name="">
             <a:extLst xmlns:a="http://schemas.openxmlformats.org/drawingml/2006/main">
               <a:ext uri="{FF2B5EF4-FFF2-40B4-BE49-F238E27FC236}">
-                <a16:creationId xmlns:a16="http://schemas.microsoft.com/office/drawing/2014/main" id="{F7B82F87-8F14-460F-9F4F-938B05E288AB}"/>
+                <a16:creationId xmlns:a16="http://schemas.microsoft.com/office/drawing/2014/main" id="{20A04AE7-2225-4BB2-A82C-BBFF6A3D5CE6}"/>
               </a:ext>
             </a:extLst>
           </p:cNvPr>
@@ -3234,7 +3234,7 @@
           <p:cNvPr id="10" name="">
             <a:extLst xmlns:a="http://schemas.openxmlformats.org/drawingml/2006/main">
               <a:ext uri="{FF2B5EF4-FFF2-40B4-BE49-F238E27FC236}">
-                <a16:creationId xmlns:a16="http://schemas.microsoft.com/office/drawing/2014/main" id="{E00C14B5-C42E-4E01-83F8-5902E9668053}"/>
+                <a16:creationId xmlns:a16="http://schemas.microsoft.com/office/drawing/2014/main" id="{CD35B76D-F272-4A64-89D1-D422B7C97BFB}"/>
               </a:ext>
             </a:extLst>
           </p:cNvPr>
@@ -3296,7 +3296,7 @@
           <p:cNvPr id="11" name="">
             <a:extLst xmlns:a="http://schemas.openxmlformats.org/drawingml/2006/main">
               <a:ext uri="{FF2B5EF4-FFF2-40B4-BE49-F238E27FC236}">
-                <a16:creationId xmlns:a16="http://schemas.microsoft.com/office/drawing/2014/main" id="{D23ED2A4-E60C-46ED-B4DA-CC4629293B12}"/>
+                <a16:creationId xmlns:a16="http://schemas.microsoft.com/office/drawing/2014/main" id="{A620263B-E4A9-4B34-8212-F9835F5682E0}"/>
               </a:ext>
             </a:extLst>
           </p:cNvPr>
@@ -3331,7 +3331,7 @@
           <p:cNvPr id="12" name="">
             <a:extLst xmlns:a="http://schemas.openxmlformats.org/drawingml/2006/main">
               <a:ext uri="{FF2B5EF4-FFF2-40B4-BE49-F238E27FC236}">
-                <a16:creationId xmlns:a16="http://schemas.microsoft.com/office/drawing/2014/main" id="{559BECEE-B130-4A8C-9428-F506FCF6B5C4}"/>
+                <a16:creationId xmlns:a16="http://schemas.microsoft.com/office/drawing/2014/main" id="{D5C78091-51C8-4E10-9CC5-93D3C20BAEAA}"/>
               </a:ext>
             </a:extLst>
           </p:cNvPr>
@@ -3393,7 +3393,7 @@
           <p:cNvPr id="13" name="">
             <a:extLst xmlns:a="http://schemas.openxmlformats.org/drawingml/2006/main">
               <a:ext uri="{FF2B5EF4-FFF2-40B4-BE49-F238E27FC236}">
-                <a16:creationId xmlns:a16="http://schemas.microsoft.com/office/drawing/2014/main" id="{2E6B50A1-58DE-4982-B0FA-1D57A5D5F019}"/>
+                <a16:creationId xmlns:a16="http://schemas.microsoft.com/office/drawing/2014/main" id="{D3428E2D-E397-4F81-90CF-9AB2D3E08543}"/>
               </a:ext>
             </a:extLst>
           </p:cNvPr>
@@ -3445,7 +3445,7 @@
                 <a:ea typeface="Malgun Gothic"/>
                 <a:cs typeface="Malgun Gothic"/>
               </a:rPr>
-              <a:t>팀장 김민수 · 팀번호 [확인 필요]</a:t>
+              <a:t>팀장 이휘 · 팀원 김민수 · 팀번호 [확인 필요]</a:t>
             </a:r>
           </a:p>
         </p:txBody>
@@ -3455,7 +3455,7 @@
           <p:cNvPr id="14" name="">
             <a:extLst xmlns:a="http://schemas.openxmlformats.org/drawingml/2006/main">
               <a:ext uri="{FF2B5EF4-FFF2-40B4-BE49-F238E27FC236}">
-                <a16:creationId xmlns:a16="http://schemas.microsoft.com/office/drawing/2014/main" id="{F536CEB4-288E-48C2-A726-1FA61C3789DD}"/>
+                <a16:creationId xmlns:a16="http://schemas.microsoft.com/office/drawing/2014/main" id="{114EB9B9-1887-474F-9778-7B26B5405779}"/>
               </a:ext>
             </a:extLst>
           </p:cNvPr>
@@ -3517,7 +3517,7 @@
           <p:cNvPr id="15" name="">
             <a:extLst xmlns:a="http://schemas.openxmlformats.org/drawingml/2006/main">
               <a:ext uri="{FF2B5EF4-FFF2-40B4-BE49-F238E27FC236}">
-                <a16:creationId xmlns:a16="http://schemas.microsoft.com/office/drawing/2014/main" id="{7B7E7784-E5F7-41CF-A353-9E015E847CCD}"/>
+                <a16:creationId xmlns:a16="http://schemas.microsoft.com/office/drawing/2014/main" id="{6F317EBB-5AEA-477A-BFEE-2AAED6A835F9}"/>
               </a:ext>
             </a:extLst>
           </p:cNvPr>
@@ -3558,7 +3558,7 @@
           <p:cNvPr id="16" name="">
             <a:extLst xmlns:a="http://schemas.openxmlformats.org/drawingml/2006/main">
               <a:ext uri="{FF2B5EF4-FFF2-40B4-BE49-F238E27FC236}">
-                <a16:creationId xmlns:a16="http://schemas.microsoft.com/office/drawing/2014/main" id="{A821E6B9-D2DE-400C-A760-1AAA2C40756F}"/>
+                <a16:creationId xmlns:a16="http://schemas.microsoft.com/office/drawing/2014/main" id="{7A267012-D6D9-4A8E-A963-9208CFC77218}"/>
               </a:ext>
             </a:extLst>
           </p:cNvPr>
@@ -3620,7 +3620,7 @@
           <p:cNvPr id="17" name="">
             <a:extLst xmlns:a="http://schemas.openxmlformats.org/drawingml/2006/main">
               <a:ext uri="{FF2B5EF4-FFF2-40B4-BE49-F238E27FC236}">
-                <a16:creationId xmlns:a16="http://schemas.microsoft.com/office/drawing/2014/main" id="{DE001BB3-E03D-4A96-9C7D-F010DCBB1681}"/>
+                <a16:creationId xmlns:a16="http://schemas.microsoft.com/office/drawing/2014/main" id="{75958D21-4882-46E6-8D47-83C75C836C3B}"/>
               </a:ext>
             </a:extLst>
           </p:cNvPr>
@@ -3661,7 +3661,7 @@
           <p:cNvPr id="18" name="">
             <a:extLst xmlns:a="http://schemas.openxmlformats.org/drawingml/2006/main">
               <a:ext uri="{FF2B5EF4-FFF2-40B4-BE49-F238E27FC236}">
-                <a16:creationId xmlns:a16="http://schemas.microsoft.com/office/drawing/2014/main" id="{38441E51-F864-416B-B357-30B6E691481C}"/>
+                <a16:creationId xmlns:a16="http://schemas.microsoft.com/office/drawing/2014/main" id="{1B7048A8-FF50-4252-AE41-61703292059E}"/>
               </a:ext>
             </a:extLst>
           </p:cNvPr>
@@ -3723,7 +3723,7 @@
           <p:cNvPr id="19" name="">
             <a:extLst xmlns:a="http://schemas.openxmlformats.org/drawingml/2006/main">
               <a:ext uri="{FF2B5EF4-FFF2-40B4-BE49-F238E27FC236}">
-                <a16:creationId xmlns:a16="http://schemas.microsoft.com/office/drawing/2014/main" id="{920ABCC9-2609-405D-97F3-AE15B0E94848}"/>
+                <a16:creationId xmlns:a16="http://schemas.microsoft.com/office/drawing/2014/main" id="{5515A160-4F3F-413E-9A9D-025AB54FD7F9}"/>
               </a:ext>
             </a:extLst>
           </p:cNvPr>
@@ -3764,7 +3764,7 @@
           <p:cNvPr id="20" name="">
             <a:extLst xmlns:a="http://schemas.openxmlformats.org/drawingml/2006/main">
               <a:ext uri="{FF2B5EF4-FFF2-40B4-BE49-F238E27FC236}">
-                <a16:creationId xmlns:a16="http://schemas.microsoft.com/office/drawing/2014/main" id="{CDB43757-1D22-415A-877A-0E299EEF1429}"/>
+                <a16:creationId xmlns:a16="http://schemas.microsoft.com/office/drawing/2014/main" id="{7D5086E6-B411-4F08-9E20-0160EBF9832E}"/>
               </a:ext>
             </a:extLst>
           </p:cNvPr>
@@ -3824,7 +3824,7 @@
     </p:spTree>
     <p:extLst>
       <p:ext uri="{BB962C8B-B14F-4D97-AF65-F5344CB8AC3E}">
-        <p14:creationId xmlns:p14="http://schemas.microsoft.com/office/powerpoint/2010/main" val="562269970"/>
+        <p14:creationId xmlns:p14="http://schemas.microsoft.com/office/powerpoint/2010/main" val="619585449"/>
       </p:ext>
     </p:extLst>
   </p:cSld>
@@ -3855,7 +3855,7 @@
           <p:cNvPr id="35" name="">
             <a:extLst xmlns:a="http://schemas.openxmlformats.org/drawingml/2006/main">
               <a:ext uri="{FF2B5EF4-FFF2-40B4-BE49-F238E27FC236}">
-                <a16:creationId xmlns:a16="http://schemas.microsoft.com/office/drawing/2014/main" id="{B8D5605A-79C0-4F1E-9571-E4DA8324993F}"/>
+                <a16:creationId xmlns:a16="http://schemas.microsoft.com/office/drawing/2014/main" id="{D6F2A2F4-0EBA-40BC-81D2-A3AAF1776CE5}"/>
               </a:ext>
             </a:extLst>
           </p:cNvPr>
@@ -3888,7 +3888,7 @@
           <p:cNvPr id="2" name="">
             <a:extLst xmlns:a="http://schemas.openxmlformats.org/drawingml/2006/main">
               <a:ext uri="{FF2B5EF4-FFF2-40B4-BE49-F238E27FC236}">
-                <a16:creationId xmlns:a16="http://schemas.microsoft.com/office/drawing/2014/main" id="{6435A1C4-4336-4087-B248-B6B8BA11DD7C}"/>
+                <a16:creationId xmlns:a16="http://schemas.microsoft.com/office/drawing/2014/main" id="{0CDF808A-9514-4407-A04E-B064A52E8418}"/>
               </a:ext>
             </a:extLst>
           </p:cNvPr>
@@ -3950,7 +3950,7 @@
           <p:cNvPr id="3" name="">
             <a:extLst xmlns:a="http://schemas.openxmlformats.org/drawingml/2006/main">
               <a:ext uri="{FF2B5EF4-FFF2-40B4-BE49-F238E27FC236}">
-                <a16:creationId xmlns:a16="http://schemas.microsoft.com/office/drawing/2014/main" id="{C99A3CBB-C4E0-4E5F-84CC-C86F633D6827}"/>
+                <a16:creationId xmlns:a16="http://schemas.microsoft.com/office/drawing/2014/main" id="{F19FD599-546A-4EF3-954C-E550B58A1ACF}"/>
               </a:ext>
             </a:extLst>
           </p:cNvPr>
@@ -4012,7 +4012,7 @@
           <p:cNvPr id="4" name="">
             <a:extLst xmlns:a="http://schemas.openxmlformats.org/drawingml/2006/main">
               <a:ext uri="{FF2B5EF4-FFF2-40B4-BE49-F238E27FC236}">
-                <a16:creationId xmlns:a16="http://schemas.microsoft.com/office/drawing/2014/main" id="{65443747-FEE8-4663-8CAE-BE68154BA74B}"/>
+                <a16:creationId xmlns:a16="http://schemas.microsoft.com/office/drawing/2014/main" id="{C8068B4F-3FEF-4B90-9572-D53F5A2F0D4A}"/>
               </a:ext>
             </a:extLst>
           </p:cNvPr>
@@ -4045,7 +4045,7 @@
           <p:cNvPr id="5" name="">
             <a:extLst xmlns:a="http://schemas.openxmlformats.org/drawingml/2006/main">
               <a:ext uri="{FF2B5EF4-FFF2-40B4-BE49-F238E27FC236}">
-                <a16:creationId xmlns:a16="http://schemas.microsoft.com/office/drawing/2014/main" id="{7DA55719-822D-436E-A06B-5D3B8524FED5}"/>
+                <a16:creationId xmlns:a16="http://schemas.microsoft.com/office/drawing/2014/main" id="{7277540B-FD0E-40FD-906D-DB9E533A7E90}"/>
               </a:ext>
             </a:extLst>
           </p:cNvPr>
@@ -4107,7 +4107,7 @@
           <p:cNvPr id="6" name="">
             <a:extLst xmlns:a="http://schemas.openxmlformats.org/drawingml/2006/main">
               <a:ext uri="{FF2B5EF4-FFF2-40B4-BE49-F238E27FC236}">
-                <a16:creationId xmlns:a16="http://schemas.microsoft.com/office/drawing/2014/main" id="{A1831356-00ED-4B29-B98D-B063F08E9DF0}"/>
+                <a16:creationId xmlns:a16="http://schemas.microsoft.com/office/drawing/2014/main" id="{00B8C722-66A4-4494-B9F6-6297CD393401}"/>
               </a:ext>
             </a:extLst>
           </p:cNvPr>
@@ -4169,7 +4169,7 @@
           <p:cNvPr id="7" name="">
             <a:extLst xmlns:a="http://schemas.openxmlformats.org/drawingml/2006/main">
               <a:ext uri="{FF2B5EF4-FFF2-40B4-BE49-F238E27FC236}">
-                <a16:creationId xmlns:a16="http://schemas.microsoft.com/office/drawing/2014/main" id="{DC12CDEA-2F26-4509-AC4F-60EF0D829141}"/>
+                <a16:creationId xmlns:a16="http://schemas.microsoft.com/office/drawing/2014/main" id="{2EE3A85F-4BFB-4777-858A-9B67ACA54AFF}"/>
               </a:ext>
             </a:extLst>
           </p:cNvPr>
@@ -4204,7 +4204,7 @@
           <p:cNvPr id="8" name="">
             <a:extLst xmlns:a="http://schemas.openxmlformats.org/drawingml/2006/main">
               <a:ext uri="{FF2B5EF4-FFF2-40B4-BE49-F238E27FC236}">
-                <a16:creationId xmlns:a16="http://schemas.microsoft.com/office/drawing/2014/main" id="{B4D4E103-A194-471E-8AF3-F9AB337E1658}"/>
+                <a16:creationId xmlns:a16="http://schemas.microsoft.com/office/drawing/2014/main" id="{04842307-CDBD-40E8-867D-AB2A0D8CFF43}"/>
               </a:ext>
             </a:extLst>
           </p:cNvPr>
@@ -4266,7 +4266,7 @@
           <p:cNvPr id="9" name="">
             <a:extLst xmlns:a="http://schemas.openxmlformats.org/drawingml/2006/main">
               <a:ext uri="{FF2B5EF4-FFF2-40B4-BE49-F238E27FC236}">
-                <a16:creationId xmlns:a16="http://schemas.microsoft.com/office/drawing/2014/main" id="{C2AC04A8-D015-45D7-915A-BAEF6F369B70}"/>
+                <a16:creationId xmlns:a16="http://schemas.microsoft.com/office/drawing/2014/main" id="{24368A56-8A25-4065-8DCC-E2CE18D6028E}"/>
               </a:ext>
             </a:extLst>
           </p:cNvPr>
@@ -4307,7 +4307,7 @@
           <p:cNvPr id="10" name="">
             <a:extLst xmlns:a="http://schemas.openxmlformats.org/drawingml/2006/main">
               <a:ext uri="{FF2B5EF4-FFF2-40B4-BE49-F238E27FC236}">
-                <a16:creationId xmlns:a16="http://schemas.microsoft.com/office/drawing/2014/main" id="{65016911-CA0F-4D7A-AC1B-9E2D86ADC23A}"/>
+                <a16:creationId xmlns:a16="http://schemas.microsoft.com/office/drawing/2014/main" id="{2DE4FE2D-F000-43AB-BFAC-01BF1AAB15AF}"/>
               </a:ext>
             </a:extLst>
           </p:cNvPr>
@@ -4369,7 +4369,7 @@
           <p:cNvPr id="11" name="">
             <a:extLst xmlns:a="http://schemas.openxmlformats.org/drawingml/2006/main">
               <a:ext uri="{FF2B5EF4-FFF2-40B4-BE49-F238E27FC236}">
-                <a16:creationId xmlns:a16="http://schemas.microsoft.com/office/drawing/2014/main" id="{F5F0BE93-FBAB-4614-A68D-BEF96784F0D6}"/>
+                <a16:creationId xmlns:a16="http://schemas.microsoft.com/office/drawing/2014/main" id="{88FB6AFE-825C-4E02-ADB0-E0029F52ACCE}"/>
               </a:ext>
             </a:extLst>
           </p:cNvPr>
@@ -4431,7 +4431,7 @@
           <p:cNvPr id="12" name="">
             <a:extLst xmlns:a="http://schemas.openxmlformats.org/drawingml/2006/main">
               <a:ext uri="{FF2B5EF4-FFF2-40B4-BE49-F238E27FC236}">
-                <a16:creationId xmlns:a16="http://schemas.microsoft.com/office/drawing/2014/main" id="{E90419D7-39FF-42A6-A61D-D8B56434F39B}"/>
+                <a16:creationId xmlns:a16="http://schemas.microsoft.com/office/drawing/2014/main" id="{D8E01FEA-A3C1-4760-8BAC-B7C36737E3C3}"/>
               </a:ext>
             </a:extLst>
           </p:cNvPr>
@@ -4472,7 +4472,7 @@
           <p:cNvPr id="13" name="">
             <a:extLst xmlns:a="http://schemas.openxmlformats.org/drawingml/2006/main">
               <a:ext uri="{FF2B5EF4-FFF2-40B4-BE49-F238E27FC236}">
-                <a16:creationId xmlns:a16="http://schemas.microsoft.com/office/drawing/2014/main" id="{CFBE1A37-B35F-475B-8B5E-391CB2C60C69}"/>
+                <a16:creationId xmlns:a16="http://schemas.microsoft.com/office/drawing/2014/main" id="{93717233-3127-416D-A6EE-95F4D8074E93}"/>
               </a:ext>
             </a:extLst>
           </p:cNvPr>
@@ -4534,7 +4534,7 @@
           <p:cNvPr id="14" name="">
             <a:extLst xmlns:a="http://schemas.openxmlformats.org/drawingml/2006/main">
               <a:ext uri="{FF2B5EF4-FFF2-40B4-BE49-F238E27FC236}">
-                <a16:creationId xmlns:a16="http://schemas.microsoft.com/office/drawing/2014/main" id="{10540569-D385-4DE4-B9CD-E6C510EA7D92}"/>
+                <a16:creationId xmlns:a16="http://schemas.microsoft.com/office/drawing/2014/main" id="{C623A089-4D8F-44C7-A6D3-E35D04327964}"/>
               </a:ext>
             </a:extLst>
           </p:cNvPr>
@@ -4596,7 +4596,7 @@
           <p:cNvPr id="15" name="">
             <a:extLst xmlns:a="http://schemas.openxmlformats.org/drawingml/2006/main">
               <a:ext uri="{FF2B5EF4-FFF2-40B4-BE49-F238E27FC236}">
-                <a16:creationId xmlns:a16="http://schemas.microsoft.com/office/drawing/2014/main" id="{50782E2B-311B-42BD-BF3A-550552F1BE1E}"/>
+                <a16:creationId xmlns:a16="http://schemas.microsoft.com/office/drawing/2014/main" id="{3EE0B4BD-995C-4C24-A295-0908809311D5}"/>
               </a:ext>
             </a:extLst>
           </p:cNvPr>
@@ -4637,7 +4637,7 @@
           <p:cNvPr id="16" name="">
             <a:extLst xmlns:a="http://schemas.openxmlformats.org/drawingml/2006/main">
               <a:ext uri="{FF2B5EF4-FFF2-40B4-BE49-F238E27FC236}">
-                <a16:creationId xmlns:a16="http://schemas.microsoft.com/office/drawing/2014/main" id="{8E04AA10-7982-4A0D-B924-58B42190BDAB}"/>
+                <a16:creationId xmlns:a16="http://schemas.microsoft.com/office/drawing/2014/main" id="{40E49D1C-D62C-4FD6-85F2-02A1E566E2A0}"/>
               </a:ext>
             </a:extLst>
           </p:cNvPr>
@@ -4699,7 +4699,7 @@
           <p:cNvPr id="17" name="">
             <a:extLst xmlns:a="http://schemas.openxmlformats.org/drawingml/2006/main">
               <a:ext uri="{FF2B5EF4-FFF2-40B4-BE49-F238E27FC236}">
-                <a16:creationId xmlns:a16="http://schemas.microsoft.com/office/drawing/2014/main" id="{6DBE4D79-5097-44AE-AECE-908D6BA5418A}"/>
+                <a16:creationId xmlns:a16="http://schemas.microsoft.com/office/drawing/2014/main" id="{E17A0206-3F17-4BBA-9F8E-EC25A56ADD8E}"/>
               </a:ext>
             </a:extLst>
           </p:cNvPr>
@@ -4813,7 +4813,7 @@
           <p:cNvPr id="20" name="">
             <a:extLst xmlns:a="http://schemas.openxmlformats.org/drawingml/2006/main">
               <a:ext uri="{FF2B5EF4-FFF2-40B4-BE49-F238E27FC236}">
-                <a16:creationId xmlns:a16="http://schemas.microsoft.com/office/drawing/2014/main" id="{3777C43F-37D9-4528-BF06-EDA4E0C0BD68}"/>
+                <a16:creationId xmlns:a16="http://schemas.microsoft.com/office/drawing/2014/main" id="{27E2C487-7B97-4F85-BB6F-AAA84851BC11}"/>
               </a:ext>
             </a:extLst>
           </p:cNvPr>
@@ -4875,7 +4875,7 @@
           <p:cNvPr id="21" name="">
             <a:extLst xmlns:a="http://schemas.openxmlformats.org/drawingml/2006/main">
               <a:ext uri="{FF2B5EF4-FFF2-40B4-BE49-F238E27FC236}">
-                <a16:creationId xmlns:a16="http://schemas.microsoft.com/office/drawing/2014/main" id="{AD28D2E2-B181-424D-A81D-D5775CD1A4CD}"/>
+                <a16:creationId xmlns:a16="http://schemas.microsoft.com/office/drawing/2014/main" id="{00F1F69E-C3D4-471C-BE59-A7E300DCFBE4}"/>
               </a:ext>
             </a:extLst>
           </p:cNvPr>
@@ -4937,7 +4937,7 @@
           <p:cNvPr id="22" name="">
             <a:extLst xmlns:a="http://schemas.openxmlformats.org/drawingml/2006/main">
               <a:ext uri="{FF2B5EF4-FFF2-40B4-BE49-F238E27FC236}">
-                <a16:creationId xmlns:a16="http://schemas.microsoft.com/office/drawing/2014/main" id="{B9B964C1-CDBD-428C-821D-DCEE5D95C5DC}"/>
+                <a16:creationId xmlns:a16="http://schemas.microsoft.com/office/drawing/2014/main" id="{85A9DF58-54CB-4EBD-BEFD-9CD7DADAA7B8}"/>
               </a:ext>
             </a:extLst>
           </p:cNvPr>
@@ -4972,7 +4972,7 @@
           <p:cNvPr id="23" name="">
             <a:extLst xmlns:a="http://schemas.openxmlformats.org/drawingml/2006/main">
               <a:ext uri="{FF2B5EF4-FFF2-40B4-BE49-F238E27FC236}">
-                <a16:creationId xmlns:a16="http://schemas.microsoft.com/office/drawing/2014/main" id="{29E3FF9B-8B9A-40C1-BCF0-DD366013364A}"/>
+                <a16:creationId xmlns:a16="http://schemas.microsoft.com/office/drawing/2014/main" id="{56223C62-23F3-4273-8438-85F25B55B7B2}"/>
               </a:ext>
             </a:extLst>
           </p:cNvPr>
@@ -5034,7 +5034,7 @@
           <p:cNvPr id="24" name="">
             <a:extLst xmlns:a="http://schemas.openxmlformats.org/drawingml/2006/main">
               <a:ext uri="{FF2B5EF4-FFF2-40B4-BE49-F238E27FC236}">
-                <a16:creationId xmlns:a16="http://schemas.microsoft.com/office/drawing/2014/main" id="{91224428-9FB0-4C9E-9A4B-736B326E9949}"/>
+                <a16:creationId xmlns:a16="http://schemas.microsoft.com/office/drawing/2014/main" id="{037D3DF8-EE7F-4381-A879-57C74BA48331}"/>
               </a:ext>
             </a:extLst>
           </p:cNvPr>
@@ -5096,7 +5096,7 @@
           <p:cNvPr id="25" name="">
             <a:extLst xmlns:a="http://schemas.openxmlformats.org/drawingml/2006/main">
               <a:ext uri="{FF2B5EF4-FFF2-40B4-BE49-F238E27FC236}">
-                <a16:creationId xmlns:a16="http://schemas.microsoft.com/office/drawing/2014/main" id="{079F9843-01BA-4693-A0D9-427DB00A3C18}"/>
+                <a16:creationId xmlns:a16="http://schemas.microsoft.com/office/drawing/2014/main" id="{196E8067-87BE-4DD0-B260-2E50B57FF868}"/>
               </a:ext>
             </a:extLst>
           </p:cNvPr>
@@ -5131,7 +5131,7 @@
           <p:cNvPr id="26" name="">
             <a:extLst xmlns:a="http://schemas.openxmlformats.org/drawingml/2006/main">
               <a:ext uri="{FF2B5EF4-FFF2-40B4-BE49-F238E27FC236}">
-                <a16:creationId xmlns:a16="http://schemas.microsoft.com/office/drawing/2014/main" id="{2AAC9237-D844-4701-8ED4-3E8CD8A888E4}"/>
+                <a16:creationId xmlns:a16="http://schemas.microsoft.com/office/drawing/2014/main" id="{EC5FF023-BD1E-482B-9A5C-D6C03F9E5B77}"/>
               </a:ext>
             </a:extLst>
           </p:cNvPr>
@@ -5193,7 +5193,7 @@
           <p:cNvPr id="27" name="">
             <a:extLst xmlns:a="http://schemas.openxmlformats.org/drawingml/2006/main">
               <a:ext uri="{FF2B5EF4-FFF2-40B4-BE49-F238E27FC236}">
-                <a16:creationId xmlns:a16="http://schemas.microsoft.com/office/drawing/2014/main" id="{D86D792B-D1A6-4A7C-89BF-E4D28AB1C987}"/>
+                <a16:creationId xmlns:a16="http://schemas.microsoft.com/office/drawing/2014/main" id="{8351252F-7052-4274-A81C-C965230A1B30}"/>
               </a:ext>
             </a:extLst>
           </p:cNvPr>
@@ -5255,7 +5255,7 @@
           <p:cNvPr id="28" name="">
             <a:extLst xmlns:a="http://schemas.openxmlformats.org/drawingml/2006/main">
               <a:ext uri="{FF2B5EF4-FFF2-40B4-BE49-F238E27FC236}">
-                <a16:creationId xmlns:a16="http://schemas.microsoft.com/office/drawing/2014/main" id="{A3CBCD00-2D84-49CF-9FC1-C7E458C908D0}"/>
+                <a16:creationId xmlns:a16="http://schemas.microsoft.com/office/drawing/2014/main" id="{C81B4D49-3AE1-42A4-BAB9-3684ACE92101}"/>
               </a:ext>
             </a:extLst>
           </p:cNvPr>
@@ -5290,7 +5290,7 @@
           <p:cNvPr id="29" name="">
             <a:extLst xmlns:a="http://schemas.openxmlformats.org/drawingml/2006/main">
               <a:ext uri="{FF2B5EF4-FFF2-40B4-BE49-F238E27FC236}">
-                <a16:creationId xmlns:a16="http://schemas.microsoft.com/office/drawing/2014/main" id="{F941644F-59B9-4C00-824B-647002282110}"/>
+                <a16:creationId xmlns:a16="http://schemas.microsoft.com/office/drawing/2014/main" id="{E55DEE4F-D4F7-4F97-8C90-9FC40A1F42C7}"/>
               </a:ext>
             </a:extLst>
           </p:cNvPr>
@@ -5352,7 +5352,7 @@
           <p:cNvPr id="30" name="">
             <a:extLst xmlns:a="http://schemas.openxmlformats.org/drawingml/2006/main">
               <a:ext uri="{FF2B5EF4-FFF2-40B4-BE49-F238E27FC236}">
-                <a16:creationId xmlns:a16="http://schemas.microsoft.com/office/drawing/2014/main" id="{DD3E1117-BB1D-4B1B-8608-7C371346877E}"/>
+                <a16:creationId xmlns:a16="http://schemas.microsoft.com/office/drawing/2014/main" id="{C7DE7086-104E-4868-8373-4C067EE6C7D1}"/>
               </a:ext>
             </a:extLst>
           </p:cNvPr>
@@ -5414,7 +5414,7 @@
           <p:cNvPr id="31" name="">
             <a:extLst xmlns:a="http://schemas.openxmlformats.org/drawingml/2006/main">
               <a:ext uri="{FF2B5EF4-FFF2-40B4-BE49-F238E27FC236}">
-                <a16:creationId xmlns:a16="http://schemas.microsoft.com/office/drawing/2014/main" id="{D6AEF6B6-8455-4923-A4CC-45F68CA73F6C}"/>
+                <a16:creationId xmlns:a16="http://schemas.microsoft.com/office/drawing/2014/main" id="{F17B35BF-4875-4AF1-BDD6-1C9F59356D29}"/>
               </a:ext>
             </a:extLst>
           </p:cNvPr>
@@ -5449,7 +5449,7 @@
           <p:cNvPr id="32" name="">
             <a:extLst xmlns:a="http://schemas.openxmlformats.org/drawingml/2006/main">
               <a:ext uri="{FF2B5EF4-FFF2-40B4-BE49-F238E27FC236}">
-                <a16:creationId xmlns:a16="http://schemas.microsoft.com/office/drawing/2014/main" id="{A32DABAA-4D96-4DA7-8FD5-CE1320E26818}"/>
+                <a16:creationId xmlns:a16="http://schemas.microsoft.com/office/drawing/2014/main" id="{115C84D1-3219-4FA8-836A-A140B6338A60}"/>
               </a:ext>
             </a:extLst>
           </p:cNvPr>
@@ -5511,7 +5511,7 @@
           <p:cNvPr id="33" name="">
             <a:extLst xmlns:a="http://schemas.openxmlformats.org/drawingml/2006/main">
               <a:ext uri="{FF2B5EF4-FFF2-40B4-BE49-F238E27FC236}">
-                <a16:creationId xmlns:a16="http://schemas.microsoft.com/office/drawing/2014/main" id="{13A08299-6EC5-401D-9D3D-3E45F64C894E}"/>
+                <a16:creationId xmlns:a16="http://schemas.microsoft.com/office/drawing/2014/main" id="{481A0616-3E5E-4287-88EA-4CDE9901FA34}"/>
               </a:ext>
             </a:extLst>
           </p:cNvPr>
@@ -5573,7 +5573,7 @@
           <p:cNvPr id="34" name="">
             <a:extLst xmlns:a="http://schemas.openxmlformats.org/drawingml/2006/main">
               <a:ext uri="{FF2B5EF4-FFF2-40B4-BE49-F238E27FC236}">
-                <a16:creationId xmlns:a16="http://schemas.microsoft.com/office/drawing/2014/main" id="{39936718-BA2C-405D-8DDD-55870F6F70A5}"/>
+                <a16:creationId xmlns:a16="http://schemas.microsoft.com/office/drawing/2014/main" id="{7ADC7DAD-3939-438E-9071-0DD4607DD745}"/>
               </a:ext>
             </a:extLst>
           </p:cNvPr>
@@ -5633,7 +5633,7 @@
     </p:spTree>
     <p:extLst>
       <p:ext uri="{BB962C8B-B14F-4D97-AF65-F5344CB8AC3E}">
-        <p14:creationId xmlns:p14="http://schemas.microsoft.com/office/powerpoint/2010/main" val="1272161493"/>
+        <p14:creationId xmlns:p14="http://schemas.microsoft.com/office/powerpoint/2010/main" val="814060564"/>
       </p:ext>
     </p:extLst>
   </p:cSld>
@@ -5664,7 +5664,7 @@
           <p:cNvPr id="43" name="">
             <a:extLst xmlns:a="http://schemas.openxmlformats.org/drawingml/2006/main">
               <a:ext uri="{FF2B5EF4-FFF2-40B4-BE49-F238E27FC236}">
-                <a16:creationId xmlns:a16="http://schemas.microsoft.com/office/drawing/2014/main" id="{E401F7C2-2B10-49BB-8CCF-EEA549598766}"/>
+                <a16:creationId xmlns:a16="http://schemas.microsoft.com/office/drawing/2014/main" id="{3C87C979-96DF-42E4-9E93-1899CBB32D24}"/>
               </a:ext>
             </a:extLst>
           </p:cNvPr>
@@ -5697,7 +5697,7 @@
           <p:cNvPr id="2" name="">
             <a:extLst xmlns:a="http://schemas.openxmlformats.org/drawingml/2006/main">
               <a:ext uri="{FF2B5EF4-FFF2-40B4-BE49-F238E27FC236}">
-                <a16:creationId xmlns:a16="http://schemas.microsoft.com/office/drawing/2014/main" id="{22EA161A-C0C9-47F9-907A-F93B66387790}"/>
+                <a16:creationId xmlns:a16="http://schemas.microsoft.com/office/drawing/2014/main" id="{A06062D2-0992-4822-B091-1977FEFC322B}"/>
               </a:ext>
             </a:extLst>
           </p:cNvPr>
@@ -5759,7 +5759,7 @@
           <p:cNvPr id="3" name="">
             <a:extLst xmlns:a="http://schemas.openxmlformats.org/drawingml/2006/main">
               <a:ext uri="{FF2B5EF4-FFF2-40B4-BE49-F238E27FC236}">
-                <a16:creationId xmlns:a16="http://schemas.microsoft.com/office/drawing/2014/main" id="{7D3C6010-B398-4952-8D26-FC25A939AB71}"/>
+                <a16:creationId xmlns:a16="http://schemas.microsoft.com/office/drawing/2014/main" id="{085844E8-4146-4B45-954F-EDB24DBCFDC5}"/>
               </a:ext>
             </a:extLst>
           </p:cNvPr>
@@ -5821,7 +5821,7 @@
           <p:cNvPr id="4" name="">
             <a:extLst xmlns:a="http://schemas.openxmlformats.org/drawingml/2006/main">
               <a:ext uri="{FF2B5EF4-FFF2-40B4-BE49-F238E27FC236}">
-                <a16:creationId xmlns:a16="http://schemas.microsoft.com/office/drawing/2014/main" id="{49A0189E-8FF4-4977-9205-6AB0F08EEFCC}"/>
+                <a16:creationId xmlns:a16="http://schemas.microsoft.com/office/drawing/2014/main" id="{38DF3389-3F57-4FE7-A874-5BF67A2ADC70}"/>
               </a:ext>
             </a:extLst>
           </p:cNvPr>
@@ -5854,7 +5854,7 @@
           <p:cNvPr id="5" name="">
             <a:extLst xmlns:a="http://schemas.openxmlformats.org/drawingml/2006/main">
               <a:ext uri="{FF2B5EF4-FFF2-40B4-BE49-F238E27FC236}">
-                <a16:creationId xmlns:a16="http://schemas.microsoft.com/office/drawing/2014/main" id="{9118716E-5AE0-42AE-8F61-EE6B2D98EF15}"/>
+                <a16:creationId xmlns:a16="http://schemas.microsoft.com/office/drawing/2014/main" id="{4E4D1CB2-D292-480E-8A7D-CC6E867E407B}"/>
               </a:ext>
             </a:extLst>
           </p:cNvPr>
@@ -5916,7 +5916,7 @@
           <p:cNvPr id="6" name="">
             <a:extLst xmlns:a="http://schemas.openxmlformats.org/drawingml/2006/main">
               <a:ext uri="{FF2B5EF4-FFF2-40B4-BE49-F238E27FC236}">
-                <a16:creationId xmlns:a16="http://schemas.microsoft.com/office/drawing/2014/main" id="{A5E3DA2D-B0C0-47C5-915F-269443C41617}"/>
+                <a16:creationId xmlns:a16="http://schemas.microsoft.com/office/drawing/2014/main" id="{1D10AD2B-B473-4242-89BC-CDB0E8E631F8}"/>
               </a:ext>
             </a:extLst>
           </p:cNvPr>
@@ -5978,7 +5978,7 @@
           <p:cNvPr id="7" name="">
             <a:extLst xmlns:a="http://schemas.openxmlformats.org/drawingml/2006/main">
               <a:ext uri="{FF2B5EF4-FFF2-40B4-BE49-F238E27FC236}">
-                <a16:creationId xmlns:a16="http://schemas.microsoft.com/office/drawing/2014/main" id="{8D2FF74C-CDDE-4047-BFBC-9644FD3BF016}"/>
+                <a16:creationId xmlns:a16="http://schemas.microsoft.com/office/drawing/2014/main" id="{BC9C7E52-D95D-4C1A-B1E8-9B88151606CC}"/>
               </a:ext>
             </a:extLst>
           </p:cNvPr>
@@ -6019,7 +6019,7 @@
           <p:cNvPr id="8" name="">
             <a:extLst xmlns:a="http://schemas.openxmlformats.org/drawingml/2006/main">
               <a:ext uri="{FF2B5EF4-FFF2-40B4-BE49-F238E27FC236}">
-                <a16:creationId xmlns:a16="http://schemas.microsoft.com/office/drawing/2014/main" id="{3E2E04FD-4C08-4CF8-845E-FB811B575AAB}"/>
+                <a16:creationId xmlns:a16="http://schemas.microsoft.com/office/drawing/2014/main" id="{3A3B0781-CD06-4F00-89DE-EFBB9CF697AF}"/>
               </a:ext>
             </a:extLst>
           </p:cNvPr>
@@ -6052,7 +6052,7 @@
           <p:cNvPr id="9" name="">
             <a:extLst xmlns:a="http://schemas.openxmlformats.org/drawingml/2006/main">
               <a:ext uri="{FF2B5EF4-FFF2-40B4-BE49-F238E27FC236}">
-                <a16:creationId xmlns:a16="http://schemas.microsoft.com/office/drawing/2014/main" id="{99F4DBCE-96F5-4270-A6E0-762DD1172579}"/>
+                <a16:creationId xmlns:a16="http://schemas.microsoft.com/office/drawing/2014/main" id="{482A24CD-4B85-498A-A4E9-28BB5204B647}"/>
               </a:ext>
             </a:extLst>
           </p:cNvPr>
@@ -6114,7 +6114,7 @@
           <p:cNvPr id="10" name="">
             <a:extLst xmlns:a="http://schemas.openxmlformats.org/drawingml/2006/main">
               <a:ext uri="{FF2B5EF4-FFF2-40B4-BE49-F238E27FC236}">
-                <a16:creationId xmlns:a16="http://schemas.microsoft.com/office/drawing/2014/main" id="{82EBEC6E-CC37-485B-B49E-4422A7265969}"/>
+                <a16:creationId xmlns:a16="http://schemas.microsoft.com/office/drawing/2014/main" id="{B49EB3E3-BB90-4BBB-BAB1-8F3F9C168CA0}"/>
               </a:ext>
             </a:extLst>
           </p:cNvPr>
@@ -6147,7 +6147,7 @@
           <p:cNvPr id="11" name="">
             <a:extLst xmlns:a="http://schemas.openxmlformats.org/drawingml/2006/main">
               <a:ext uri="{FF2B5EF4-FFF2-40B4-BE49-F238E27FC236}">
-                <a16:creationId xmlns:a16="http://schemas.microsoft.com/office/drawing/2014/main" id="{EDE155FB-2680-4B2D-934F-0E20B8C7FF32}"/>
+                <a16:creationId xmlns:a16="http://schemas.microsoft.com/office/drawing/2014/main" id="{9C0E3648-E930-476B-A940-09EB31216E16}"/>
               </a:ext>
             </a:extLst>
           </p:cNvPr>
@@ -6209,7 +6209,7 @@
           <p:cNvPr id="12" name="">
             <a:extLst xmlns:a="http://schemas.openxmlformats.org/drawingml/2006/main">
               <a:ext uri="{FF2B5EF4-FFF2-40B4-BE49-F238E27FC236}">
-                <a16:creationId xmlns:a16="http://schemas.microsoft.com/office/drawing/2014/main" id="{98EC95AF-2FC2-49E9-B50D-F3BC298A7EAF}"/>
+                <a16:creationId xmlns:a16="http://schemas.microsoft.com/office/drawing/2014/main" id="{7DB08327-D916-4BD3-A5D8-7D54C3BA6562}"/>
               </a:ext>
             </a:extLst>
           </p:cNvPr>
@@ -6271,7 +6271,7 @@
           <p:cNvPr id="13" name="">
             <a:extLst xmlns:a="http://schemas.openxmlformats.org/drawingml/2006/main">
               <a:ext uri="{FF2B5EF4-FFF2-40B4-BE49-F238E27FC236}">
-                <a16:creationId xmlns:a16="http://schemas.microsoft.com/office/drawing/2014/main" id="{3439F531-8D1D-4F72-A32B-CED110C7F542}"/>
+                <a16:creationId xmlns:a16="http://schemas.microsoft.com/office/drawing/2014/main" id="{BBE9D1FB-37D2-420B-804C-970DA53E0956}"/>
               </a:ext>
             </a:extLst>
           </p:cNvPr>
@@ -6304,7 +6304,7 @@
           <p:cNvPr id="14" name="">
             <a:extLst xmlns:a="http://schemas.openxmlformats.org/drawingml/2006/main">
               <a:ext uri="{FF2B5EF4-FFF2-40B4-BE49-F238E27FC236}">
-                <a16:creationId xmlns:a16="http://schemas.microsoft.com/office/drawing/2014/main" id="{608C5063-8016-4C76-ADE3-CFD191BEB4CB}"/>
+                <a16:creationId xmlns:a16="http://schemas.microsoft.com/office/drawing/2014/main" id="{09AEC1CA-DD38-4DC1-8117-E63BCB401AD2}"/>
               </a:ext>
             </a:extLst>
           </p:cNvPr>
@@ -6366,7 +6366,7 @@
           <p:cNvPr id="15" name="">
             <a:extLst xmlns:a="http://schemas.openxmlformats.org/drawingml/2006/main">
               <a:ext uri="{FF2B5EF4-FFF2-40B4-BE49-F238E27FC236}">
-                <a16:creationId xmlns:a16="http://schemas.microsoft.com/office/drawing/2014/main" id="{B6D85C05-8FE5-4F68-B2B4-979160AE1D8C}"/>
+                <a16:creationId xmlns:a16="http://schemas.microsoft.com/office/drawing/2014/main" id="{A5E4B4E9-A8F9-4023-9A29-E73091E90755}"/>
               </a:ext>
             </a:extLst>
           </p:cNvPr>
@@ -6428,7 +6428,7 @@
           <p:cNvPr id="16" name="">
             <a:extLst xmlns:a="http://schemas.openxmlformats.org/drawingml/2006/main">
               <a:ext uri="{FF2B5EF4-FFF2-40B4-BE49-F238E27FC236}">
-                <a16:creationId xmlns:a16="http://schemas.microsoft.com/office/drawing/2014/main" id="{9EE48F7F-35BC-4868-A697-058DBACFCEFA}"/>
+                <a16:creationId xmlns:a16="http://schemas.microsoft.com/office/drawing/2014/main" id="{D6C53D13-EDE1-4E29-B754-268894C33769}"/>
               </a:ext>
             </a:extLst>
           </p:cNvPr>
@@ -6461,7 +6461,7 @@
           <p:cNvPr id="17" name="">
             <a:extLst xmlns:a="http://schemas.openxmlformats.org/drawingml/2006/main">
               <a:ext uri="{FF2B5EF4-FFF2-40B4-BE49-F238E27FC236}">
-                <a16:creationId xmlns:a16="http://schemas.microsoft.com/office/drawing/2014/main" id="{15225477-0576-4B0D-97BE-8A2B0AC678FD}"/>
+                <a16:creationId xmlns:a16="http://schemas.microsoft.com/office/drawing/2014/main" id="{2C1E21D8-A030-49E2-A8B8-0E3B00996C63}"/>
               </a:ext>
             </a:extLst>
           </p:cNvPr>
@@ -6523,7 +6523,7 @@
           <p:cNvPr id="18" name="">
             <a:extLst xmlns:a="http://schemas.openxmlformats.org/drawingml/2006/main">
               <a:ext uri="{FF2B5EF4-FFF2-40B4-BE49-F238E27FC236}">
-                <a16:creationId xmlns:a16="http://schemas.microsoft.com/office/drawing/2014/main" id="{3958E6CD-34D8-4D28-A897-57489FAE56C0}"/>
+                <a16:creationId xmlns:a16="http://schemas.microsoft.com/office/drawing/2014/main" id="{537B37ED-FB3F-4259-8AD7-3C7501065D0D}"/>
               </a:ext>
             </a:extLst>
           </p:cNvPr>
@@ -6585,7 +6585,7 @@
           <p:cNvPr id="19" name="">
             <a:extLst xmlns:a="http://schemas.openxmlformats.org/drawingml/2006/main">
               <a:ext uri="{FF2B5EF4-FFF2-40B4-BE49-F238E27FC236}">
-                <a16:creationId xmlns:a16="http://schemas.microsoft.com/office/drawing/2014/main" id="{313052A6-FDB7-4D16-A317-5892599C3AA1}"/>
+                <a16:creationId xmlns:a16="http://schemas.microsoft.com/office/drawing/2014/main" id="{34BF4EF3-07A7-4B20-A172-2170134308F5}"/>
               </a:ext>
             </a:extLst>
           </p:cNvPr>
@@ -6618,7 +6618,7 @@
           <p:cNvPr id="20" name="">
             <a:extLst xmlns:a="http://schemas.openxmlformats.org/drawingml/2006/main">
               <a:ext uri="{FF2B5EF4-FFF2-40B4-BE49-F238E27FC236}">
-                <a16:creationId xmlns:a16="http://schemas.microsoft.com/office/drawing/2014/main" id="{76D7B42E-33C6-4510-AEE0-B88D997EF00E}"/>
+                <a16:creationId xmlns:a16="http://schemas.microsoft.com/office/drawing/2014/main" id="{3156894F-FF6D-4B17-A3C3-BD150C5BF983}"/>
               </a:ext>
             </a:extLst>
           </p:cNvPr>
@@ -6680,7 +6680,7 @@
           <p:cNvPr id="21" name="">
             <a:extLst xmlns:a="http://schemas.openxmlformats.org/drawingml/2006/main">
               <a:ext uri="{FF2B5EF4-FFF2-40B4-BE49-F238E27FC236}">
-                <a16:creationId xmlns:a16="http://schemas.microsoft.com/office/drawing/2014/main" id="{B214A26A-C8AC-4291-93CA-825CC764E751}"/>
+                <a16:creationId xmlns:a16="http://schemas.microsoft.com/office/drawing/2014/main" id="{7CF97B33-D359-4814-9151-1852957B46AA}"/>
               </a:ext>
             </a:extLst>
           </p:cNvPr>
@@ -6742,7 +6742,7 @@
           <p:cNvPr id="22" name="">
             <a:extLst xmlns:a="http://schemas.openxmlformats.org/drawingml/2006/main">
               <a:ext uri="{FF2B5EF4-FFF2-40B4-BE49-F238E27FC236}">
-                <a16:creationId xmlns:a16="http://schemas.microsoft.com/office/drawing/2014/main" id="{62FDA341-F113-4050-985A-213663A50222}"/>
+                <a16:creationId xmlns:a16="http://schemas.microsoft.com/office/drawing/2014/main" id="{667DBEF9-559E-4EC6-9749-AB0E8CE49307}"/>
               </a:ext>
             </a:extLst>
           </p:cNvPr>
@@ -6775,7 +6775,7 @@
           <p:cNvPr id="23" name="">
             <a:extLst xmlns:a="http://schemas.openxmlformats.org/drawingml/2006/main">
               <a:ext uri="{FF2B5EF4-FFF2-40B4-BE49-F238E27FC236}">
-                <a16:creationId xmlns:a16="http://schemas.microsoft.com/office/drawing/2014/main" id="{02F1F819-1B97-49A2-B59B-F48AD9858A34}"/>
+                <a16:creationId xmlns:a16="http://schemas.microsoft.com/office/drawing/2014/main" id="{1AB08035-255B-4742-9D38-B644BBE5EF66}"/>
               </a:ext>
             </a:extLst>
           </p:cNvPr>
@@ -6837,7 +6837,7 @@
           <p:cNvPr id="24" name="">
             <a:extLst xmlns:a="http://schemas.openxmlformats.org/drawingml/2006/main">
               <a:ext uri="{FF2B5EF4-FFF2-40B4-BE49-F238E27FC236}">
-                <a16:creationId xmlns:a16="http://schemas.microsoft.com/office/drawing/2014/main" id="{122E55EE-1D87-449C-992F-F6103097CD9C}"/>
+                <a16:creationId xmlns:a16="http://schemas.microsoft.com/office/drawing/2014/main" id="{7BD4C184-41D7-4398-A1B7-040653705C3D}"/>
               </a:ext>
             </a:extLst>
           </p:cNvPr>
@@ -6899,7 +6899,7 @@
           <p:cNvPr id="25" name="">
             <a:extLst xmlns:a="http://schemas.openxmlformats.org/drawingml/2006/main">
               <a:ext uri="{FF2B5EF4-FFF2-40B4-BE49-F238E27FC236}">
-                <a16:creationId xmlns:a16="http://schemas.microsoft.com/office/drawing/2014/main" id="{3B93BD5E-49FC-4F59-80F0-D2E0546C5AAC}"/>
+                <a16:creationId xmlns:a16="http://schemas.microsoft.com/office/drawing/2014/main" id="{30F06EBD-23FE-456F-BFC8-DCE5BA5EC7BA}"/>
               </a:ext>
             </a:extLst>
           </p:cNvPr>
@@ -6934,7 +6934,7 @@
           <p:cNvPr id="26" name="">
             <a:extLst xmlns:a="http://schemas.openxmlformats.org/drawingml/2006/main">
               <a:ext uri="{FF2B5EF4-FFF2-40B4-BE49-F238E27FC236}">
-                <a16:creationId xmlns:a16="http://schemas.microsoft.com/office/drawing/2014/main" id="{C381E78D-84A6-4513-A4A1-3FC991FDD115}"/>
+                <a16:creationId xmlns:a16="http://schemas.microsoft.com/office/drawing/2014/main" id="{16F30A41-511D-42A5-B3B4-A222DCC14E2D}"/>
               </a:ext>
             </a:extLst>
           </p:cNvPr>
@@ -6996,7 +6996,7 @@
           <p:cNvPr id="27" name="">
             <a:extLst xmlns:a="http://schemas.openxmlformats.org/drawingml/2006/main">
               <a:ext uri="{FF2B5EF4-FFF2-40B4-BE49-F238E27FC236}">
-                <a16:creationId xmlns:a16="http://schemas.microsoft.com/office/drawing/2014/main" id="{4E4E0C8C-F03A-4F4C-B378-09E6A7DD6BBD}"/>
+                <a16:creationId xmlns:a16="http://schemas.microsoft.com/office/drawing/2014/main" id="{542B972A-B9E6-4528-A315-9BD6FDCFA45A}"/>
               </a:ext>
             </a:extLst>
           </p:cNvPr>
@@ -7031,7 +7031,7 @@
           <p:cNvPr id="28" name="">
             <a:extLst xmlns:a="http://schemas.openxmlformats.org/drawingml/2006/main">
               <a:ext uri="{FF2B5EF4-FFF2-40B4-BE49-F238E27FC236}">
-                <a16:creationId xmlns:a16="http://schemas.microsoft.com/office/drawing/2014/main" id="{CD747666-4699-4F99-A8DB-FF02C5CECCBD}"/>
+                <a16:creationId xmlns:a16="http://schemas.microsoft.com/office/drawing/2014/main" id="{A91649B4-E093-4373-B3E9-14EBF9F98153}"/>
               </a:ext>
             </a:extLst>
           </p:cNvPr>
@@ -7093,7 +7093,7 @@
           <p:cNvPr id="29" name="">
             <a:extLst xmlns:a="http://schemas.openxmlformats.org/drawingml/2006/main">
               <a:ext uri="{FF2B5EF4-FFF2-40B4-BE49-F238E27FC236}">
-                <a16:creationId xmlns:a16="http://schemas.microsoft.com/office/drawing/2014/main" id="{11D37D2C-5585-4574-B992-B4FC922FFD29}"/>
+                <a16:creationId xmlns:a16="http://schemas.microsoft.com/office/drawing/2014/main" id="{C7F7AFA7-B528-42CD-B641-825CB5FFD7B9}"/>
               </a:ext>
             </a:extLst>
           </p:cNvPr>
@@ -7128,7 +7128,7 @@
           <p:cNvPr id="30" name="">
             <a:extLst xmlns:a="http://schemas.openxmlformats.org/drawingml/2006/main">
               <a:ext uri="{FF2B5EF4-FFF2-40B4-BE49-F238E27FC236}">
-                <a16:creationId xmlns:a16="http://schemas.microsoft.com/office/drawing/2014/main" id="{CB5FD849-2BC5-4E48-ACA3-33003E218F7D}"/>
+                <a16:creationId xmlns:a16="http://schemas.microsoft.com/office/drawing/2014/main" id="{9B0392BC-ECBF-4221-B896-46C94AC2CEDC}"/>
               </a:ext>
             </a:extLst>
           </p:cNvPr>
@@ -7190,7 +7190,7 @@
           <p:cNvPr id="31" name="">
             <a:extLst xmlns:a="http://schemas.openxmlformats.org/drawingml/2006/main">
               <a:ext uri="{FF2B5EF4-FFF2-40B4-BE49-F238E27FC236}">
-                <a16:creationId xmlns:a16="http://schemas.microsoft.com/office/drawing/2014/main" id="{7A8A1FF0-27ED-4F65-B3A4-6C3410B45F74}"/>
+                <a16:creationId xmlns:a16="http://schemas.microsoft.com/office/drawing/2014/main" id="{602B689F-28A6-4294-B097-93103E0D02A0}"/>
               </a:ext>
             </a:extLst>
           </p:cNvPr>
@@ -7252,7 +7252,7 @@
           <p:cNvPr id="32" name="">
             <a:extLst xmlns:a="http://schemas.openxmlformats.org/drawingml/2006/main">
               <a:ext uri="{FF2B5EF4-FFF2-40B4-BE49-F238E27FC236}">
-                <a16:creationId xmlns:a16="http://schemas.microsoft.com/office/drawing/2014/main" id="{44462C8E-B433-49CA-BF8F-7D37EE147E35}"/>
+                <a16:creationId xmlns:a16="http://schemas.microsoft.com/office/drawing/2014/main" id="{C95B50FD-8271-4416-87A7-13FFB7BDC624}"/>
               </a:ext>
             </a:extLst>
           </p:cNvPr>
@@ -7287,7 +7287,7 @@
           <p:cNvPr id="33" name="">
             <a:extLst xmlns:a="http://schemas.openxmlformats.org/drawingml/2006/main">
               <a:ext uri="{FF2B5EF4-FFF2-40B4-BE49-F238E27FC236}">
-                <a16:creationId xmlns:a16="http://schemas.microsoft.com/office/drawing/2014/main" id="{B6FA3A32-58B0-464C-AD88-6CF1D4008FD0}"/>
+                <a16:creationId xmlns:a16="http://schemas.microsoft.com/office/drawing/2014/main" id="{1A499E91-12BA-461C-BE24-74AF374983C5}"/>
               </a:ext>
             </a:extLst>
           </p:cNvPr>
@@ -7349,7 +7349,7 @@
           <p:cNvPr id="34" name="">
             <a:extLst xmlns:a="http://schemas.openxmlformats.org/drawingml/2006/main">
               <a:ext uri="{FF2B5EF4-FFF2-40B4-BE49-F238E27FC236}">
-                <a16:creationId xmlns:a16="http://schemas.microsoft.com/office/drawing/2014/main" id="{4556E94A-02DB-4F69-A6FF-DB7D11984D33}"/>
+                <a16:creationId xmlns:a16="http://schemas.microsoft.com/office/drawing/2014/main" id="{9B767E91-E513-44AE-A01B-1CE80B30085B}"/>
               </a:ext>
             </a:extLst>
           </p:cNvPr>
@@ -7411,7 +7411,7 @@
           <p:cNvPr id="35" name="">
             <a:extLst xmlns:a="http://schemas.openxmlformats.org/drawingml/2006/main">
               <a:ext uri="{FF2B5EF4-FFF2-40B4-BE49-F238E27FC236}">
-                <a16:creationId xmlns:a16="http://schemas.microsoft.com/office/drawing/2014/main" id="{7D0CEFDD-2243-4A5B-94B8-BA95E55AB0BD}"/>
+                <a16:creationId xmlns:a16="http://schemas.microsoft.com/office/drawing/2014/main" id="{F9709B6A-5E53-45D4-B46F-431A0544A626}"/>
               </a:ext>
             </a:extLst>
           </p:cNvPr>
@@ -7446,7 +7446,7 @@
           <p:cNvPr id="36" name="">
             <a:extLst xmlns:a="http://schemas.openxmlformats.org/drawingml/2006/main">
               <a:ext uri="{FF2B5EF4-FFF2-40B4-BE49-F238E27FC236}">
-                <a16:creationId xmlns:a16="http://schemas.microsoft.com/office/drawing/2014/main" id="{70C7E393-42B4-40D1-B2BB-39DAA0B90385}"/>
+                <a16:creationId xmlns:a16="http://schemas.microsoft.com/office/drawing/2014/main" id="{459F67FF-AAE0-48AE-A51C-A232F2BF6699}"/>
               </a:ext>
             </a:extLst>
           </p:cNvPr>
@@ -7508,7 +7508,7 @@
           <p:cNvPr id="37" name="">
             <a:extLst xmlns:a="http://schemas.openxmlformats.org/drawingml/2006/main">
               <a:ext uri="{FF2B5EF4-FFF2-40B4-BE49-F238E27FC236}">
-                <a16:creationId xmlns:a16="http://schemas.microsoft.com/office/drawing/2014/main" id="{FBB8E2EF-B972-4F60-9F5A-944C49B7C9BF}"/>
+                <a16:creationId xmlns:a16="http://schemas.microsoft.com/office/drawing/2014/main" id="{82C3E9B7-A42A-4CAC-BAF1-BC4B650310C9}"/>
               </a:ext>
             </a:extLst>
           </p:cNvPr>
@@ -7570,7 +7570,7 @@
           <p:cNvPr id="38" name="">
             <a:extLst xmlns:a="http://schemas.openxmlformats.org/drawingml/2006/main">
               <a:ext uri="{FF2B5EF4-FFF2-40B4-BE49-F238E27FC236}">
-                <a16:creationId xmlns:a16="http://schemas.microsoft.com/office/drawing/2014/main" id="{9890B49F-D0B0-4209-8F27-F10385EB51ED}"/>
+                <a16:creationId xmlns:a16="http://schemas.microsoft.com/office/drawing/2014/main" id="{87C709F5-F1B4-443C-802A-711B5493187B}"/>
               </a:ext>
             </a:extLst>
           </p:cNvPr>
@@ -7605,7 +7605,7 @@
           <p:cNvPr id="39" name="">
             <a:extLst xmlns:a="http://schemas.openxmlformats.org/drawingml/2006/main">
               <a:ext uri="{FF2B5EF4-FFF2-40B4-BE49-F238E27FC236}">
-                <a16:creationId xmlns:a16="http://schemas.microsoft.com/office/drawing/2014/main" id="{B4FDAEBE-4512-45F2-A142-CF5D76ACC9B9}"/>
+                <a16:creationId xmlns:a16="http://schemas.microsoft.com/office/drawing/2014/main" id="{3C34D31A-843F-4C45-9BA0-95A2534C89C3}"/>
               </a:ext>
             </a:extLst>
           </p:cNvPr>
@@ -7667,7 +7667,7 @@
           <p:cNvPr id="40" name="">
             <a:extLst xmlns:a="http://schemas.openxmlformats.org/drawingml/2006/main">
               <a:ext uri="{FF2B5EF4-FFF2-40B4-BE49-F238E27FC236}">
-                <a16:creationId xmlns:a16="http://schemas.microsoft.com/office/drawing/2014/main" id="{78CE5479-B853-4A38-AF17-76A5BAB6DDCB}"/>
+                <a16:creationId xmlns:a16="http://schemas.microsoft.com/office/drawing/2014/main" id="{CCEACD85-1258-4ADA-8789-0FF43D01E556}"/>
               </a:ext>
             </a:extLst>
           </p:cNvPr>
@@ -7729,7 +7729,7 @@
           <p:cNvPr id="41" name="">
             <a:extLst xmlns:a="http://schemas.openxmlformats.org/drawingml/2006/main">
               <a:ext uri="{FF2B5EF4-FFF2-40B4-BE49-F238E27FC236}">
-                <a16:creationId xmlns:a16="http://schemas.microsoft.com/office/drawing/2014/main" id="{56224DE9-236F-4A65-8721-475B0DA9E560}"/>
+                <a16:creationId xmlns:a16="http://schemas.microsoft.com/office/drawing/2014/main" id="{4EF25AE5-22BE-4FA5-9030-6DAAEFFC29A0}"/>
               </a:ext>
             </a:extLst>
           </p:cNvPr>
@@ -7764,7 +7764,7 @@
           <p:cNvPr id="42" name="">
             <a:extLst xmlns:a="http://schemas.openxmlformats.org/drawingml/2006/main">
               <a:ext uri="{FF2B5EF4-FFF2-40B4-BE49-F238E27FC236}">
-                <a16:creationId xmlns:a16="http://schemas.microsoft.com/office/drawing/2014/main" id="{256AB5AC-6AD2-4019-B219-BF36F3EC294B}"/>
+                <a16:creationId xmlns:a16="http://schemas.microsoft.com/office/drawing/2014/main" id="{6D877E5E-EB2E-410D-9324-492E75E71099}"/>
               </a:ext>
             </a:extLst>
           </p:cNvPr>
@@ -7824,7 +7824,7 @@
     </p:spTree>
     <p:extLst>
       <p:ext uri="{BB962C8B-B14F-4D97-AF65-F5344CB8AC3E}">
-        <p14:creationId xmlns:p14="http://schemas.microsoft.com/office/powerpoint/2010/main" val="37169896"/>
+        <p14:creationId xmlns:p14="http://schemas.microsoft.com/office/powerpoint/2010/main" val="1407601569"/>
       </p:ext>
     </p:extLst>
   </p:cSld>
@@ -7855,7 +7855,7 @@
           <p:cNvPr id="28" name="">
             <a:extLst xmlns:a="http://schemas.openxmlformats.org/drawingml/2006/main">
               <a:ext uri="{FF2B5EF4-FFF2-40B4-BE49-F238E27FC236}">
-                <a16:creationId xmlns:a16="http://schemas.microsoft.com/office/drawing/2014/main" id="{53489680-3CC0-4E9E-B2CA-D4568994387C}"/>
+                <a16:creationId xmlns:a16="http://schemas.microsoft.com/office/drawing/2014/main" id="{DF300D23-2983-4655-BDCD-FD76A4A1BDE6}"/>
               </a:ext>
             </a:extLst>
           </p:cNvPr>
@@ -7888,7 +7888,7 @@
           <p:cNvPr id="2" name="">
             <a:extLst xmlns:a="http://schemas.openxmlformats.org/drawingml/2006/main">
               <a:ext uri="{FF2B5EF4-FFF2-40B4-BE49-F238E27FC236}">
-                <a16:creationId xmlns:a16="http://schemas.microsoft.com/office/drawing/2014/main" id="{3DEA1235-19BC-4E43-8BA9-23795E725BFC}"/>
+                <a16:creationId xmlns:a16="http://schemas.microsoft.com/office/drawing/2014/main" id="{B20EA728-FD1B-46CF-866D-49B9155EBDA8}"/>
               </a:ext>
             </a:extLst>
           </p:cNvPr>
@@ -7950,7 +7950,7 @@
           <p:cNvPr id="3" name="">
             <a:extLst xmlns:a="http://schemas.openxmlformats.org/drawingml/2006/main">
               <a:ext uri="{FF2B5EF4-FFF2-40B4-BE49-F238E27FC236}">
-                <a16:creationId xmlns:a16="http://schemas.microsoft.com/office/drawing/2014/main" id="{0043CEA1-E2C0-46D7-B33F-77FBCE9C2306}"/>
+                <a16:creationId xmlns:a16="http://schemas.microsoft.com/office/drawing/2014/main" id="{98673EC4-6045-4C43-941F-A59C8871C31D}"/>
               </a:ext>
             </a:extLst>
           </p:cNvPr>
@@ -8012,7 +8012,7 @@
           <p:cNvPr id="4" name="">
             <a:extLst xmlns:a="http://schemas.openxmlformats.org/drawingml/2006/main">
               <a:ext uri="{FF2B5EF4-FFF2-40B4-BE49-F238E27FC236}">
-                <a16:creationId xmlns:a16="http://schemas.microsoft.com/office/drawing/2014/main" id="{DD3042E3-5E47-4F14-967C-606EB4A3A289}"/>
+                <a16:creationId xmlns:a16="http://schemas.microsoft.com/office/drawing/2014/main" id="{38E64BAC-DDEF-4909-A891-186D8168AEF6}"/>
               </a:ext>
             </a:extLst>
           </p:cNvPr>
@@ -8045,7 +8045,7 @@
           <p:cNvPr id="5" name="">
             <a:extLst xmlns:a="http://schemas.openxmlformats.org/drawingml/2006/main">
               <a:ext uri="{FF2B5EF4-FFF2-40B4-BE49-F238E27FC236}">
-                <a16:creationId xmlns:a16="http://schemas.microsoft.com/office/drawing/2014/main" id="{6F312C4F-7DE5-4770-85F1-3163034E7202}"/>
+                <a16:creationId xmlns:a16="http://schemas.microsoft.com/office/drawing/2014/main" id="{6ADDFD4C-EB8B-4365-8B89-7EE7804F7F10}"/>
               </a:ext>
             </a:extLst>
           </p:cNvPr>
@@ -8107,7 +8107,7 @@
           <p:cNvPr id="6" name="">
             <a:extLst xmlns:a="http://schemas.openxmlformats.org/drawingml/2006/main">
               <a:ext uri="{FF2B5EF4-FFF2-40B4-BE49-F238E27FC236}">
-                <a16:creationId xmlns:a16="http://schemas.microsoft.com/office/drawing/2014/main" id="{F2E89725-F26E-4341-AACD-ECE47D14E606}"/>
+                <a16:creationId xmlns:a16="http://schemas.microsoft.com/office/drawing/2014/main" id="{D71EDFAD-6F97-4D41-868B-397919BA1251}"/>
               </a:ext>
             </a:extLst>
           </p:cNvPr>
@@ -8169,7 +8169,7 @@
           <p:cNvPr id="7" name="">
             <a:extLst xmlns:a="http://schemas.openxmlformats.org/drawingml/2006/main">
               <a:ext uri="{FF2B5EF4-FFF2-40B4-BE49-F238E27FC236}">
-                <a16:creationId xmlns:a16="http://schemas.microsoft.com/office/drawing/2014/main" id="{502594A9-558C-4CAD-9CA9-E322EBE0EA5B}"/>
+                <a16:creationId xmlns:a16="http://schemas.microsoft.com/office/drawing/2014/main" id="{C9056FAD-002C-4B25-8DE0-4324AEAF6251}"/>
               </a:ext>
             </a:extLst>
           </p:cNvPr>
@@ -8210,7 +8210,7 @@
           <p:cNvPr id="8" name="">
             <a:extLst xmlns:a="http://schemas.openxmlformats.org/drawingml/2006/main">
               <a:ext uri="{FF2B5EF4-FFF2-40B4-BE49-F238E27FC236}">
-                <a16:creationId xmlns:a16="http://schemas.microsoft.com/office/drawing/2014/main" id="{739A019A-1B19-44A5-ABA4-4F485759BEF9}"/>
+                <a16:creationId xmlns:a16="http://schemas.microsoft.com/office/drawing/2014/main" id="{43DE6186-DFF0-4946-BA88-E177C0384BEC}"/>
               </a:ext>
             </a:extLst>
           </p:cNvPr>
@@ -8243,7 +8243,7 @@
           <p:cNvPr id="9" name="">
             <a:extLst xmlns:a="http://schemas.openxmlformats.org/drawingml/2006/main">
               <a:ext uri="{FF2B5EF4-FFF2-40B4-BE49-F238E27FC236}">
-                <a16:creationId xmlns:a16="http://schemas.microsoft.com/office/drawing/2014/main" id="{6AA91D45-625F-479D-9E0C-FE88FF4F2FD4}"/>
+                <a16:creationId xmlns:a16="http://schemas.microsoft.com/office/drawing/2014/main" id="{FB5CF799-DDAB-4E50-9AD2-CF5C77DDE680}"/>
               </a:ext>
             </a:extLst>
           </p:cNvPr>
@@ -8305,7 +8305,7 @@
           <p:cNvPr id="10" name="">
             <a:extLst xmlns:a="http://schemas.openxmlformats.org/drawingml/2006/main">
               <a:ext uri="{FF2B5EF4-FFF2-40B4-BE49-F238E27FC236}">
-                <a16:creationId xmlns:a16="http://schemas.microsoft.com/office/drawing/2014/main" id="{21D3229C-1768-4209-A580-2ABFBACEA666}"/>
+                <a16:creationId xmlns:a16="http://schemas.microsoft.com/office/drawing/2014/main" id="{723EC5D5-AD7A-447B-9A58-28CE92215F0A}"/>
               </a:ext>
             </a:extLst>
           </p:cNvPr>
@@ -8475,7 +8475,7 @@
           <p:cNvPr id="11" name="">
             <a:extLst xmlns:a="http://schemas.openxmlformats.org/drawingml/2006/main">
               <a:ext uri="{FF2B5EF4-FFF2-40B4-BE49-F238E27FC236}">
-                <a16:creationId xmlns:a16="http://schemas.microsoft.com/office/drawing/2014/main" id="{55B90914-404C-423D-AE59-3992FFBE0C41}"/>
+                <a16:creationId xmlns:a16="http://schemas.microsoft.com/office/drawing/2014/main" id="{79A9BC13-1520-443E-872F-83E02F421C92}"/>
               </a:ext>
             </a:extLst>
           </p:cNvPr>
@@ -8516,7 +8516,7 @@
           <p:cNvPr id="12" name="">
             <a:extLst xmlns:a="http://schemas.openxmlformats.org/drawingml/2006/main">
               <a:ext uri="{FF2B5EF4-FFF2-40B4-BE49-F238E27FC236}">
-                <a16:creationId xmlns:a16="http://schemas.microsoft.com/office/drawing/2014/main" id="{1AE38FCB-79FA-4FED-AB9C-68EAFE24FA4E}"/>
+                <a16:creationId xmlns:a16="http://schemas.microsoft.com/office/drawing/2014/main" id="{5F0D45DD-8ED6-40B9-A7F9-4EBD0B10EC4F}"/>
               </a:ext>
             </a:extLst>
           </p:cNvPr>
@@ -8549,7 +8549,7 @@
           <p:cNvPr id="13" name="">
             <a:extLst xmlns:a="http://schemas.openxmlformats.org/drawingml/2006/main">
               <a:ext uri="{FF2B5EF4-FFF2-40B4-BE49-F238E27FC236}">
-                <a16:creationId xmlns:a16="http://schemas.microsoft.com/office/drawing/2014/main" id="{217185A6-08A1-4879-9231-3D341CFFB400}"/>
+                <a16:creationId xmlns:a16="http://schemas.microsoft.com/office/drawing/2014/main" id="{08519EFA-15A6-4DC9-B27D-5062C2BA221D}"/>
               </a:ext>
             </a:extLst>
           </p:cNvPr>
@@ -8611,7 +8611,7 @@
           <p:cNvPr id="14" name="">
             <a:extLst xmlns:a="http://schemas.openxmlformats.org/drawingml/2006/main">
               <a:ext uri="{FF2B5EF4-FFF2-40B4-BE49-F238E27FC236}">
-                <a16:creationId xmlns:a16="http://schemas.microsoft.com/office/drawing/2014/main" id="{9C199467-60E4-493C-B987-752A7D1861B5}"/>
+                <a16:creationId xmlns:a16="http://schemas.microsoft.com/office/drawing/2014/main" id="{58C7E1A6-6B67-48A6-861E-BF472338D446}"/>
               </a:ext>
             </a:extLst>
           </p:cNvPr>
@@ -8754,7 +8754,7 @@
           <p:cNvPr id="15" name="">
             <a:extLst xmlns:a="http://schemas.openxmlformats.org/drawingml/2006/main">
               <a:ext uri="{FF2B5EF4-FFF2-40B4-BE49-F238E27FC236}">
-                <a16:creationId xmlns:a16="http://schemas.microsoft.com/office/drawing/2014/main" id="{A0757DA9-98E9-4077-A19B-1608AA3F9F6B}"/>
+                <a16:creationId xmlns:a16="http://schemas.microsoft.com/office/drawing/2014/main" id="{BA686FEC-5EBF-4CA6-804E-159DFE491EC0}"/>
               </a:ext>
             </a:extLst>
           </p:cNvPr>
@@ -8789,7 +8789,7 @@
           <p:cNvPr id="16" name="">
             <a:extLst xmlns:a="http://schemas.openxmlformats.org/drawingml/2006/main">
               <a:ext uri="{FF2B5EF4-FFF2-40B4-BE49-F238E27FC236}">
-                <a16:creationId xmlns:a16="http://schemas.microsoft.com/office/drawing/2014/main" id="{C94A79CE-D647-49C8-BBF1-9FEDC6129065}"/>
+                <a16:creationId xmlns:a16="http://schemas.microsoft.com/office/drawing/2014/main" id="{2838AC37-1266-4674-8B75-3225FD12893F}"/>
               </a:ext>
             </a:extLst>
           </p:cNvPr>
@@ -8851,7 +8851,7 @@
           <p:cNvPr id="17" name="">
             <a:extLst xmlns:a="http://schemas.openxmlformats.org/drawingml/2006/main">
               <a:ext uri="{FF2B5EF4-FFF2-40B4-BE49-F238E27FC236}">
-                <a16:creationId xmlns:a16="http://schemas.microsoft.com/office/drawing/2014/main" id="{BF015DB8-7EC4-442B-B348-AE8B2FA0E145}"/>
+                <a16:creationId xmlns:a16="http://schemas.microsoft.com/office/drawing/2014/main" id="{57C2FCC5-6132-43DA-BD14-5EA82E61EBD9}"/>
               </a:ext>
             </a:extLst>
           </p:cNvPr>
@@ -8913,7 +8913,7 @@
           <p:cNvPr id="18" name="">
             <a:extLst xmlns:a="http://schemas.openxmlformats.org/drawingml/2006/main">
               <a:ext uri="{FF2B5EF4-FFF2-40B4-BE49-F238E27FC236}">
-                <a16:creationId xmlns:a16="http://schemas.microsoft.com/office/drawing/2014/main" id="{BACD592C-F952-49EE-B8EE-864FBE02F5A9}"/>
+                <a16:creationId xmlns:a16="http://schemas.microsoft.com/office/drawing/2014/main" id="{BE067007-EA3F-43BD-BF7F-9617C0B73DF0}"/>
               </a:ext>
             </a:extLst>
           </p:cNvPr>
@@ -8948,7 +8948,7 @@
           <p:cNvPr id="19" name="">
             <a:extLst xmlns:a="http://schemas.openxmlformats.org/drawingml/2006/main">
               <a:ext uri="{FF2B5EF4-FFF2-40B4-BE49-F238E27FC236}">
-                <a16:creationId xmlns:a16="http://schemas.microsoft.com/office/drawing/2014/main" id="{F2131510-8DE1-4E34-913A-803FFF5C3A69}"/>
+                <a16:creationId xmlns:a16="http://schemas.microsoft.com/office/drawing/2014/main" id="{E53EFBDD-BA5C-4115-BCE0-DF37D54B44A9}"/>
               </a:ext>
             </a:extLst>
           </p:cNvPr>
@@ -9010,7 +9010,7 @@
           <p:cNvPr id="20" name="">
             <a:extLst xmlns:a="http://schemas.openxmlformats.org/drawingml/2006/main">
               <a:ext uri="{FF2B5EF4-FFF2-40B4-BE49-F238E27FC236}">
-                <a16:creationId xmlns:a16="http://schemas.microsoft.com/office/drawing/2014/main" id="{BA349DB3-3663-4425-80F0-FF81CEFD1EF0}"/>
+                <a16:creationId xmlns:a16="http://schemas.microsoft.com/office/drawing/2014/main" id="{254449F8-1EDA-4B03-AF7D-9E6CC127CB04}"/>
               </a:ext>
             </a:extLst>
           </p:cNvPr>
@@ -9072,7 +9072,7 @@
           <p:cNvPr id="21" name="">
             <a:extLst xmlns:a="http://schemas.openxmlformats.org/drawingml/2006/main">
               <a:ext uri="{FF2B5EF4-FFF2-40B4-BE49-F238E27FC236}">
-                <a16:creationId xmlns:a16="http://schemas.microsoft.com/office/drawing/2014/main" id="{BAFCAC40-B607-4051-82A3-32C883D580C2}"/>
+                <a16:creationId xmlns:a16="http://schemas.microsoft.com/office/drawing/2014/main" id="{6BF06D8E-2A55-4683-B12E-87A63F9726CA}"/>
               </a:ext>
             </a:extLst>
           </p:cNvPr>
@@ -9107,7 +9107,7 @@
           <p:cNvPr id="22" name="">
             <a:extLst xmlns:a="http://schemas.openxmlformats.org/drawingml/2006/main">
               <a:ext uri="{FF2B5EF4-FFF2-40B4-BE49-F238E27FC236}">
-                <a16:creationId xmlns:a16="http://schemas.microsoft.com/office/drawing/2014/main" id="{27ACAEFC-DBAE-4C0A-AE4B-DF2353FFDF92}"/>
+                <a16:creationId xmlns:a16="http://schemas.microsoft.com/office/drawing/2014/main" id="{FE04BCE8-52CB-4E67-BB94-B9685793DCDB}"/>
               </a:ext>
             </a:extLst>
           </p:cNvPr>
@@ -9169,7 +9169,7 @@
           <p:cNvPr id="23" name="">
             <a:extLst xmlns:a="http://schemas.openxmlformats.org/drawingml/2006/main">
               <a:ext uri="{FF2B5EF4-FFF2-40B4-BE49-F238E27FC236}">
-                <a16:creationId xmlns:a16="http://schemas.microsoft.com/office/drawing/2014/main" id="{E6F50854-9690-4A12-A7E7-C7E30800462D}"/>
+                <a16:creationId xmlns:a16="http://schemas.microsoft.com/office/drawing/2014/main" id="{8DCA4F8D-7C38-45E1-9008-B086FDF551F8}"/>
               </a:ext>
             </a:extLst>
           </p:cNvPr>
@@ -9231,7 +9231,7 @@
           <p:cNvPr id="24" name="">
             <a:extLst xmlns:a="http://schemas.openxmlformats.org/drawingml/2006/main">
               <a:ext uri="{FF2B5EF4-FFF2-40B4-BE49-F238E27FC236}">
-                <a16:creationId xmlns:a16="http://schemas.microsoft.com/office/drawing/2014/main" id="{AB3F2E3E-C4E5-4CFB-A404-5CAB75EFE9F1}"/>
+                <a16:creationId xmlns:a16="http://schemas.microsoft.com/office/drawing/2014/main" id="{5B9129E4-8AFB-4241-8D1B-E6B9DB061AEB}"/>
               </a:ext>
             </a:extLst>
           </p:cNvPr>
@@ -9266,7 +9266,7 @@
           <p:cNvPr id="25" name="">
             <a:extLst xmlns:a="http://schemas.openxmlformats.org/drawingml/2006/main">
               <a:ext uri="{FF2B5EF4-FFF2-40B4-BE49-F238E27FC236}">
-                <a16:creationId xmlns:a16="http://schemas.microsoft.com/office/drawing/2014/main" id="{570916CA-2097-4BC4-B1F8-9CF2B6B58951}"/>
+                <a16:creationId xmlns:a16="http://schemas.microsoft.com/office/drawing/2014/main" id="{53B15824-FB2F-44CF-9EA9-92B71C0C049B}"/>
               </a:ext>
             </a:extLst>
           </p:cNvPr>
@@ -9328,7 +9328,7 @@
           <p:cNvPr id="26" name="">
             <a:extLst xmlns:a="http://schemas.openxmlformats.org/drawingml/2006/main">
               <a:ext uri="{FF2B5EF4-FFF2-40B4-BE49-F238E27FC236}">
-                <a16:creationId xmlns:a16="http://schemas.microsoft.com/office/drawing/2014/main" id="{57601B94-6150-4E9B-BFD8-878F90475AB2}"/>
+                <a16:creationId xmlns:a16="http://schemas.microsoft.com/office/drawing/2014/main" id="{2917E9D4-1208-472B-BA70-04EB073AA695}"/>
               </a:ext>
             </a:extLst>
           </p:cNvPr>
@@ -9390,7 +9390,7 @@
           <p:cNvPr id="27" name="">
             <a:extLst xmlns:a="http://schemas.openxmlformats.org/drawingml/2006/main">
               <a:ext uri="{FF2B5EF4-FFF2-40B4-BE49-F238E27FC236}">
-                <a16:creationId xmlns:a16="http://schemas.microsoft.com/office/drawing/2014/main" id="{2FCBB40C-5D11-4A15-8A23-11B077CC51A7}"/>
+                <a16:creationId xmlns:a16="http://schemas.microsoft.com/office/drawing/2014/main" id="{A1E8C381-4B48-4C6D-8933-40CB291540D3}"/>
               </a:ext>
             </a:extLst>
           </p:cNvPr>
@@ -9450,7 +9450,7 @@
     </p:spTree>
     <p:extLst>
       <p:ext uri="{BB962C8B-B14F-4D97-AF65-F5344CB8AC3E}">
-        <p14:creationId xmlns:p14="http://schemas.microsoft.com/office/powerpoint/2010/main" val="189577093"/>
+        <p14:creationId xmlns:p14="http://schemas.microsoft.com/office/powerpoint/2010/main" val="65382081"/>
       </p:ext>
     </p:extLst>
   </p:cSld>
@@ -9481,7 +9481,7 @@
           <p:cNvPr id="27" name="">
             <a:extLst xmlns:a="http://schemas.openxmlformats.org/drawingml/2006/main">
               <a:ext uri="{FF2B5EF4-FFF2-40B4-BE49-F238E27FC236}">
-                <a16:creationId xmlns:a16="http://schemas.microsoft.com/office/drawing/2014/main" id="{28A886DE-C6D3-49CB-931E-0DDAD183BF70}"/>
+                <a16:creationId xmlns:a16="http://schemas.microsoft.com/office/drawing/2014/main" id="{A4A56FEF-2387-47A1-83B5-642D116B6828}"/>
               </a:ext>
             </a:extLst>
           </p:cNvPr>
@@ -9514,7 +9514,7 @@
           <p:cNvPr id="2" name="">
             <a:extLst xmlns:a="http://schemas.openxmlformats.org/drawingml/2006/main">
               <a:ext uri="{FF2B5EF4-FFF2-40B4-BE49-F238E27FC236}">
-                <a16:creationId xmlns:a16="http://schemas.microsoft.com/office/drawing/2014/main" id="{B63E8A8D-BF45-4584-B67F-4815B5E19A21}"/>
+                <a16:creationId xmlns:a16="http://schemas.microsoft.com/office/drawing/2014/main" id="{B6F5FE7B-108D-43E9-A799-3C79B2593730}"/>
               </a:ext>
             </a:extLst>
           </p:cNvPr>
@@ -9576,7 +9576,7 @@
           <p:cNvPr id="3" name="">
             <a:extLst xmlns:a="http://schemas.openxmlformats.org/drawingml/2006/main">
               <a:ext uri="{FF2B5EF4-FFF2-40B4-BE49-F238E27FC236}">
-                <a16:creationId xmlns:a16="http://schemas.microsoft.com/office/drawing/2014/main" id="{E1906BAF-01F0-44BD-83CB-BADE1D32604F}"/>
+                <a16:creationId xmlns:a16="http://schemas.microsoft.com/office/drawing/2014/main" id="{02086B7E-25B4-4900-9F08-3B17EE2B13B7}"/>
               </a:ext>
             </a:extLst>
           </p:cNvPr>
@@ -9638,7 +9638,7 @@
           <p:cNvPr id="4" name="">
             <a:extLst xmlns:a="http://schemas.openxmlformats.org/drawingml/2006/main">
               <a:ext uri="{FF2B5EF4-FFF2-40B4-BE49-F238E27FC236}">
-                <a16:creationId xmlns:a16="http://schemas.microsoft.com/office/drawing/2014/main" id="{CA71B576-D1C8-47AF-A2F3-28D7D83F7360}"/>
+                <a16:creationId xmlns:a16="http://schemas.microsoft.com/office/drawing/2014/main" id="{72D277D0-2A5E-499B-82A1-F0196C0525B1}"/>
               </a:ext>
             </a:extLst>
           </p:cNvPr>
@@ -9671,7 +9671,7 @@
           <p:cNvPr id="5" name="">
             <a:extLst xmlns:a="http://schemas.openxmlformats.org/drawingml/2006/main">
               <a:ext uri="{FF2B5EF4-FFF2-40B4-BE49-F238E27FC236}">
-                <a16:creationId xmlns:a16="http://schemas.microsoft.com/office/drawing/2014/main" id="{D777F462-CA7C-4D3C-A355-C4899ADBCE38}"/>
+                <a16:creationId xmlns:a16="http://schemas.microsoft.com/office/drawing/2014/main" id="{EDF54A6D-5337-4F40-A633-AC23BEB76E75}"/>
               </a:ext>
             </a:extLst>
           </p:cNvPr>
@@ -9733,7 +9733,7 @@
           <p:cNvPr id="6" name="">
             <a:extLst xmlns:a="http://schemas.openxmlformats.org/drawingml/2006/main">
               <a:ext uri="{FF2B5EF4-FFF2-40B4-BE49-F238E27FC236}">
-                <a16:creationId xmlns:a16="http://schemas.microsoft.com/office/drawing/2014/main" id="{9C06436A-018C-4F1C-A7B0-996D62194725}"/>
+                <a16:creationId xmlns:a16="http://schemas.microsoft.com/office/drawing/2014/main" id="{BDB14BE8-A3D3-4C64-9BF4-CBF5FC3648CC}"/>
               </a:ext>
             </a:extLst>
           </p:cNvPr>
@@ -9795,7 +9795,7 @@
           <p:cNvPr id="7" name="">
             <a:extLst xmlns:a="http://schemas.openxmlformats.org/drawingml/2006/main">
               <a:ext uri="{FF2B5EF4-FFF2-40B4-BE49-F238E27FC236}">
-                <a16:creationId xmlns:a16="http://schemas.microsoft.com/office/drawing/2014/main" id="{CA59173A-5401-46E0-84EE-1A6B5A2BD1CC}"/>
+                <a16:creationId xmlns:a16="http://schemas.microsoft.com/office/drawing/2014/main" id="{B681FBA3-B7E2-40EA-BDB8-E6C4F22C30EA}"/>
               </a:ext>
             </a:extLst>
           </p:cNvPr>
@@ -9836,7 +9836,7 @@
           <p:cNvPr id="8" name="">
             <a:extLst xmlns:a="http://schemas.openxmlformats.org/drawingml/2006/main">
               <a:ext uri="{FF2B5EF4-FFF2-40B4-BE49-F238E27FC236}">
-                <a16:creationId xmlns:a16="http://schemas.microsoft.com/office/drawing/2014/main" id="{3EA66547-278D-43AE-B7AB-E8D14EA69054}"/>
+                <a16:creationId xmlns:a16="http://schemas.microsoft.com/office/drawing/2014/main" id="{9D587CDD-CCF6-4E31-A947-FF434264E29D}"/>
               </a:ext>
             </a:extLst>
           </p:cNvPr>
@@ -9869,7 +9869,7 @@
           <p:cNvPr id="9" name="">
             <a:extLst xmlns:a="http://schemas.openxmlformats.org/drawingml/2006/main">
               <a:ext uri="{FF2B5EF4-FFF2-40B4-BE49-F238E27FC236}">
-                <a16:creationId xmlns:a16="http://schemas.microsoft.com/office/drawing/2014/main" id="{0AB37157-DE65-4B28-BA79-326090059791}"/>
+                <a16:creationId xmlns:a16="http://schemas.microsoft.com/office/drawing/2014/main" id="{63E0EFA9-958B-4E7C-AF0B-A188C23C9AA7}"/>
               </a:ext>
             </a:extLst>
           </p:cNvPr>
@@ -9931,7 +9931,7 @@
           <p:cNvPr id="10" name="">
             <a:extLst xmlns:a="http://schemas.openxmlformats.org/drawingml/2006/main">
               <a:ext uri="{FF2B5EF4-FFF2-40B4-BE49-F238E27FC236}">
-                <a16:creationId xmlns:a16="http://schemas.microsoft.com/office/drawing/2014/main" id="{8D454FD2-8E4D-43E7-B9E1-751B9D2B7364}"/>
+                <a16:creationId xmlns:a16="http://schemas.microsoft.com/office/drawing/2014/main" id="{DB007EE6-3465-4D0C-A8E1-72FB12924545}"/>
               </a:ext>
             </a:extLst>
           </p:cNvPr>
@@ -9993,7 +9993,7 @@
           <p:cNvPr id="11" name="">
             <a:extLst xmlns:a="http://schemas.openxmlformats.org/drawingml/2006/main">
               <a:ext uri="{FF2B5EF4-FFF2-40B4-BE49-F238E27FC236}">
-                <a16:creationId xmlns:a16="http://schemas.microsoft.com/office/drawing/2014/main" id="{949D6464-2640-4C14-865B-382ECC4908D3}"/>
+                <a16:creationId xmlns:a16="http://schemas.microsoft.com/office/drawing/2014/main" id="{000D3182-5E24-4275-A28B-C3CC9C19644B}"/>
               </a:ext>
             </a:extLst>
           </p:cNvPr>
@@ -10034,7 +10034,7 @@
           <p:cNvPr id="12" name="">
             <a:extLst xmlns:a="http://schemas.openxmlformats.org/drawingml/2006/main">
               <a:ext uri="{FF2B5EF4-FFF2-40B4-BE49-F238E27FC236}">
-                <a16:creationId xmlns:a16="http://schemas.microsoft.com/office/drawing/2014/main" id="{E3994014-234B-44F5-9E15-4E5175F467CF}"/>
+                <a16:creationId xmlns:a16="http://schemas.microsoft.com/office/drawing/2014/main" id="{824D45C0-0728-4715-82FE-BC28FA26A559}"/>
               </a:ext>
             </a:extLst>
           </p:cNvPr>
@@ -10067,7 +10067,7 @@
           <p:cNvPr id="13" name="">
             <a:extLst xmlns:a="http://schemas.openxmlformats.org/drawingml/2006/main">
               <a:ext uri="{FF2B5EF4-FFF2-40B4-BE49-F238E27FC236}">
-                <a16:creationId xmlns:a16="http://schemas.microsoft.com/office/drawing/2014/main" id="{D4710B86-6539-43C2-ABE9-1650891FB957}"/>
+                <a16:creationId xmlns:a16="http://schemas.microsoft.com/office/drawing/2014/main" id="{AC119BB4-1A5B-4A59-97D7-870062803DF8}"/>
               </a:ext>
             </a:extLst>
           </p:cNvPr>
@@ -10129,7 +10129,7 @@
           <p:cNvPr id="14" name="">
             <a:extLst xmlns:a="http://schemas.openxmlformats.org/drawingml/2006/main">
               <a:ext uri="{FF2B5EF4-FFF2-40B4-BE49-F238E27FC236}">
-                <a16:creationId xmlns:a16="http://schemas.microsoft.com/office/drawing/2014/main" id="{9117AECE-8455-4535-80AF-051FFCCCF956}"/>
+                <a16:creationId xmlns:a16="http://schemas.microsoft.com/office/drawing/2014/main" id="{389053C4-3982-4458-8B6F-631522BAE723}"/>
               </a:ext>
             </a:extLst>
           </p:cNvPr>
@@ -10191,7 +10191,7 @@
           <p:cNvPr id="15" name="">
             <a:extLst xmlns:a="http://schemas.openxmlformats.org/drawingml/2006/main">
               <a:ext uri="{FF2B5EF4-FFF2-40B4-BE49-F238E27FC236}">
-                <a16:creationId xmlns:a16="http://schemas.microsoft.com/office/drawing/2014/main" id="{BD3BAFAB-EB2F-4EE4-97BA-7D15B26CFF9B}"/>
+                <a16:creationId xmlns:a16="http://schemas.microsoft.com/office/drawing/2014/main" id="{F58A5F6C-F504-40F4-A9DB-730FFFCFD0DC}"/>
               </a:ext>
             </a:extLst>
           </p:cNvPr>
@@ -10232,7 +10232,7 @@
           <p:cNvPr id="16" name="">
             <a:extLst xmlns:a="http://schemas.openxmlformats.org/drawingml/2006/main">
               <a:ext uri="{FF2B5EF4-FFF2-40B4-BE49-F238E27FC236}">
-                <a16:creationId xmlns:a16="http://schemas.microsoft.com/office/drawing/2014/main" id="{1552ED81-2C0A-48F0-87B4-DAC430A61961}"/>
+                <a16:creationId xmlns:a16="http://schemas.microsoft.com/office/drawing/2014/main" id="{0F1F1C38-8ACD-4AB1-9509-2916BE7E2AE5}"/>
               </a:ext>
             </a:extLst>
           </p:cNvPr>
@@ -10265,7 +10265,7 @@
           <p:cNvPr id="17" name="">
             <a:extLst xmlns:a="http://schemas.openxmlformats.org/drawingml/2006/main">
               <a:ext uri="{FF2B5EF4-FFF2-40B4-BE49-F238E27FC236}">
-                <a16:creationId xmlns:a16="http://schemas.microsoft.com/office/drawing/2014/main" id="{63AC76E2-846E-43AC-8705-EAE3CC49FA9E}"/>
+                <a16:creationId xmlns:a16="http://schemas.microsoft.com/office/drawing/2014/main" id="{10A5CAE9-9C72-414E-B5CB-6251F73D13E2}"/>
               </a:ext>
             </a:extLst>
           </p:cNvPr>
@@ -10327,7 +10327,7 @@
           <p:cNvPr id="18" name="">
             <a:extLst xmlns:a="http://schemas.openxmlformats.org/drawingml/2006/main">
               <a:ext uri="{FF2B5EF4-FFF2-40B4-BE49-F238E27FC236}">
-                <a16:creationId xmlns:a16="http://schemas.microsoft.com/office/drawing/2014/main" id="{94C8E25F-18C6-4E7D-ABAC-3FA6037DF3BD}"/>
+                <a16:creationId xmlns:a16="http://schemas.microsoft.com/office/drawing/2014/main" id="{0AC7BF32-EC6A-496C-BA46-765EBAC5FC1C}"/>
               </a:ext>
             </a:extLst>
           </p:cNvPr>
@@ -10389,7 +10389,7 @@
           <p:cNvPr id="19" name="">
             <a:extLst xmlns:a="http://schemas.openxmlformats.org/drawingml/2006/main">
               <a:ext uri="{FF2B5EF4-FFF2-40B4-BE49-F238E27FC236}">
-                <a16:creationId xmlns:a16="http://schemas.microsoft.com/office/drawing/2014/main" id="{20FB7EEB-8ADA-41D6-A925-3FEB88EBC552}"/>
+                <a16:creationId xmlns:a16="http://schemas.microsoft.com/office/drawing/2014/main" id="{84837FB1-D7CE-4296-8E86-7850F2205B1B}"/>
               </a:ext>
             </a:extLst>
           </p:cNvPr>
@@ -10424,7 +10424,7 @@
           <p:cNvPr id="20" name="">
             <a:extLst xmlns:a="http://schemas.openxmlformats.org/drawingml/2006/main">
               <a:ext uri="{FF2B5EF4-FFF2-40B4-BE49-F238E27FC236}">
-                <a16:creationId xmlns:a16="http://schemas.microsoft.com/office/drawing/2014/main" id="{EF77E7DF-270B-47CE-8225-694D7F0AC92D}"/>
+                <a16:creationId xmlns:a16="http://schemas.microsoft.com/office/drawing/2014/main" id="{58D4059A-FC94-4646-8A92-D7212BD87C05}"/>
               </a:ext>
             </a:extLst>
           </p:cNvPr>
@@ -10486,7 +10486,7 @@
           <p:cNvPr id="21" name="">
             <a:extLst xmlns:a="http://schemas.openxmlformats.org/drawingml/2006/main">
               <a:ext uri="{FF2B5EF4-FFF2-40B4-BE49-F238E27FC236}">
-                <a16:creationId xmlns:a16="http://schemas.microsoft.com/office/drawing/2014/main" id="{FB714572-9D6C-4F08-93E1-FC563FC666AE}"/>
+                <a16:creationId xmlns:a16="http://schemas.microsoft.com/office/drawing/2014/main" id="{9E0BDE76-ACA2-4013-9B38-DC28309186F4}"/>
               </a:ext>
             </a:extLst>
           </p:cNvPr>
@@ -10548,7 +10548,7 @@
           <p:cNvPr id="22" name="">
             <a:extLst xmlns:a="http://schemas.openxmlformats.org/drawingml/2006/main">
               <a:ext uri="{FF2B5EF4-FFF2-40B4-BE49-F238E27FC236}">
-                <a16:creationId xmlns:a16="http://schemas.microsoft.com/office/drawing/2014/main" id="{C5F23AE2-00B6-4BF6-9ACC-3A54B59C9516}"/>
+                <a16:creationId xmlns:a16="http://schemas.microsoft.com/office/drawing/2014/main" id="{6496B3DC-2D03-477C-8035-44250302E919}"/>
               </a:ext>
             </a:extLst>
           </p:cNvPr>
@@ -10583,7 +10583,7 @@
           <p:cNvPr id="23" name="">
             <a:extLst xmlns:a="http://schemas.openxmlformats.org/drawingml/2006/main">
               <a:ext uri="{FF2B5EF4-FFF2-40B4-BE49-F238E27FC236}">
-                <a16:creationId xmlns:a16="http://schemas.microsoft.com/office/drawing/2014/main" id="{6CA040DD-499B-4BE6-9889-2D26A604DC25}"/>
+                <a16:creationId xmlns:a16="http://schemas.microsoft.com/office/drawing/2014/main" id="{AF5E5699-CC51-4CA4-9055-74EC19C0B5FB}"/>
               </a:ext>
             </a:extLst>
           </p:cNvPr>
@@ -10645,7 +10645,7 @@
           <p:cNvPr id="24" name="">
             <a:extLst xmlns:a="http://schemas.openxmlformats.org/drawingml/2006/main">
               <a:ext uri="{FF2B5EF4-FFF2-40B4-BE49-F238E27FC236}">
-                <a16:creationId xmlns:a16="http://schemas.microsoft.com/office/drawing/2014/main" id="{2C966CF9-273F-4FC3-BBE4-6C2CB01D8245}"/>
+                <a16:creationId xmlns:a16="http://schemas.microsoft.com/office/drawing/2014/main" id="{3E9C29B6-870A-4F30-B413-271C7B019629}"/>
               </a:ext>
             </a:extLst>
           </p:cNvPr>
@@ -10707,7 +10707,7 @@
           <p:cNvPr id="25" name="">
             <a:extLst xmlns:a="http://schemas.openxmlformats.org/drawingml/2006/main">
               <a:ext uri="{FF2B5EF4-FFF2-40B4-BE49-F238E27FC236}">
-                <a16:creationId xmlns:a16="http://schemas.microsoft.com/office/drawing/2014/main" id="{E791E170-F266-4B89-AB85-DA76F29309E0}"/>
+                <a16:creationId xmlns:a16="http://schemas.microsoft.com/office/drawing/2014/main" id="{946E70C1-7A64-4127-8EBE-743D58053962}"/>
               </a:ext>
             </a:extLst>
           </p:cNvPr>
@@ -10742,7 +10742,7 @@
           <p:cNvPr id="26" name="">
             <a:extLst xmlns:a="http://schemas.openxmlformats.org/drawingml/2006/main">
               <a:ext uri="{FF2B5EF4-FFF2-40B4-BE49-F238E27FC236}">
-                <a16:creationId xmlns:a16="http://schemas.microsoft.com/office/drawing/2014/main" id="{A6F1D9A6-A3AC-4C3C-8F42-586A407B255C}"/>
+                <a16:creationId xmlns:a16="http://schemas.microsoft.com/office/drawing/2014/main" id="{28404402-EB6D-4CBD-BAD9-26A87AF1CD07}"/>
               </a:ext>
             </a:extLst>
           </p:cNvPr>
@@ -10802,7 +10802,7 @@
     </p:spTree>
     <p:extLst>
       <p:ext uri="{BB962C8B-B14F-4D97-AF65-F5344CB8AC3E}">
-        <p14:creationId xmlns:p14="http://schemas.microsoft.com/office/powerpoint/2010/main" val="1322338190"/>
+        <p14:creationId xmlns:p14="http://schemas.microsoft.com/office/powerpoint/2010/main" val="1189176877"/>
       </p:ext>
     </p:extLst>
   </p:cSld>
@@ -10833,7 +10833,7 @@
           <p:cNvPr id="41" name="">
             <a:extLst xmlns:a="http://schemas.openxmlformats.org/drawingml/2006/main">
               <a:ext uri="{FF2B5EF4-FFF2-40B4-BE49-F238E27FC236}">
-                <a16:creationId xmlns:a16="http://schemas.microsoft.com/office/drawing/2014/main" id="{C17A84C3-BF07-4C8B-AC80-E7647ACB6974}"/>
+                <a16:creationId xmlns:a16="http://schemas.microsoft.com/office/drawing/2014/main" id="{04F56656-3301-4816-8CED-4247F84E00BB}"/>
               </a:ext>
             </a:extLst>
           </p:cNvPr>
@@ -10866,7 +10866,7 @@
           <p:cNvPr id="2" name="">
             <a:extLst xmlns:a="http://schemas.openxmlformats.org/drawingml/2006/main">
               <a:ext uri="{FF2B5EF4-FFF2-40B4-BE49-F238E27FC236}">
-                <a16:creationId xmlns:a16="http://schemas.microsoft.com/office/drawing/2014/main" id="{CFAC7F9A-CD30-4E6C-B004-F40AE47A175F}"/>
+                <a16:creationId xmlns:a16="http://schemas.microsoft.com/office/drawing/2014/main" id="{1897B5A2-7883-4B24-8645-40E58D842CCC}"/>
               </a:ext>
             </a:extLst>
           </p:cNvPr>
@@ -10928,7 +10928,7 @@
           <p:cNvPr id="3" name="">
             <a:extLst xmlns:a="http://schemas.openxmlformats.org/drawingml/2006/main">
               <a:ext uri="{FF2B5EF4-FFF2-40B4-BE49-F238E27FC236}">
-                <a16:creationId xmlns:a16="http://schemas.microsoft.com/office/drawing/2014/main" id="{6D2BE593-DBEC-420F-8E54-5ED062B02A4D}"/>
+                <a16:creationId xmlns:a16="http://schemas.microsoft.com/office/drawing/2014/main" id="{FBB3B427-427A-4264-9A01-641647F1372C}"/>
               </a:ext>
             </a:extLst>
           </p:cNvPr>
@@ -10990,7 +10990,7 @@
           <p:cNvPr id="4" name="">
             <a:extLst xmlns:a="http://schemas.openxmlformats.org/drawingml/2006/main">
               <a:ext uri="{FF2B5EF4-FFF2-40B4-BE49-F238E27FC236}">
-                <a16:creationId xmlns:a16="http://schemas.microsoft.com/office/drawing/2014/main" id="{639FE97E-2BCE-4EF3-9DA5-DF7E241387E5}"/>
+                <a16:creationId xmlns:a16="http://schemas.microsoft.com/office/drawing/2014/main" id="{68578853-26D8-47BE-AAD8-ABB72EE7C955}"/>
               </a:ext>
             </a:extLst>
           </p:cNvPr>
@@ -11023,7 +11023,7 @@
           <p:cNvPr id="5" name="">
             <a:extLst xmlns:a="http://schemas.openxmlformats.org/drawingml/2006/main">
               <a:ext uri="{FF2B5EF4-FFF2-40B4-BE49-F238E27FC236}">
-                <a16:creationId xmlns:a16="http://schemas.microsoft.com/office/drawing/2014/main" id="{BF5D1904-A88D-48B8-A766-E5691D208C02}"/>
+                <a16:creationId xmlns:a16="http://schemas.microsoft.com/office/drawing/2014/main" id="{36C40F24-50B4-4925-BF0A-EA0BD6C85193}"/>
               </a:ext>
             </a:extLst>
           </p:cNvPr>
@@ -11085,7 +11085,7 @@
           <p:cNvPr id="6" name="">
             <a:extLst xmlns:a="http://schemas.openxmlformats.org/drawingml/2006/main">
               <a:ext uri="{FF2B5EF4-FFF2-40B4-BE49-F238E27FC236}">
-                <a16:creationId xmlns:a16="http://schemas.microsoft.com/office/drawing/2014/main" id="{1BD22D0C-FD6F-4DA8-A5FF-1F507A243C44}"/>
+                <a16:creationId xmlns:a16="http://schemas.microsoft.com/office/drawing/2014/main" id="{3D3D2EC8-A40B-4AE1-860C-5C530F4124BF}"/>
               </a:ext>
             </a:extLst>
           </p:cNvPr>
@@ -11147,7 +11147,7 @@
           <p:cNvPr id="7" name="">
             <a:extLst xmlns:a="http://schemas.openxmlformats.org/drawingml/2006/main">
               <a:ext uri="{FF2B5EF4-FFF2-40B4-BE49-F238E27FC236}">
-                <a16:creationId xmlns:a16="http://schemas.microsoft.com/office/drawing/2014/main" id="{F37443DF-6C17-46ED-A292-05A1F3C4DF15}"/>
+                <a16:creationId xmlns:a16="http://schemas.microsoft.com/office/drawing/2014/main" id="{3953706C-3BA3-4952-9718-E572F00D2643}"/>
               </a:ext>
             </a:extLst>
           </p:cNvPr>
@@ -11182,7 +11182,7 @@
           <p:cNvPr id="8" name="">
             <a:extLst xmlns:a="http://schemas.openxmlformats.org/drawingml/2006/main">
               <a:ext uri="{FF2B5EF4-FFF2-40B4-BE49-F238E27FC236}">
-                <a16:creationId xmlns:a16="http://schemas.microsoft.com/office/drawing/2014/main" id="{4F68A117-4FE7-4871-972A-3B0063A02EAF}"/>
+                <a16:creationId xmlns:a16="http://schemas.microsoft.com/office/drawing/2014/main" id="{AD9443D0-DD70-4034-B5AB-C4D55873973F}"/>
               </a:ext>
             </a:extLst>
           </p:cNvPr>
@@ -11244,7 +11244,7 @@
           <p:cNvPr id="9" name="">
             <a:extLst xmlns:a="http://schemas.openxmlformats.org/drawingml/2006/main">
               <a:ext uri="{FF2B5EF4-FFF2-40B4-BE49-F238E27FC236}">
-                <a16:creationId xmlns:a16="http://schemas.microsoft.com/office/drawing/2014/main" id="{50CA5460-2718-4B61-A674-900D1867C86E}"/>
+                <a16:creationId xmlns:a16="http://schemas.microsoft.com/office/drawing/2014/main" id="{E617DECB-4206-4873-82C3-BA1EBA0FE376}"/>
               </a:ext>
             </a:extLst>
           </p:cNvPr>
@@ -11285,7 +11285,7 @@
           <p:cNvPr id="10" name="">
             <a:extLst xmlns:a="http://schemas.openxmlformats.org/drawingml/2006/main">
               <a:ext uri="{FF2B5EF4-FFF2-40B4-BE49-F238E27FC236}">
-                <a16:creationId xmlns:a16="http://schemas.microsoft.com/office/drawing/2014/main" id="{780AE1BF-BB64-414C-81D8-9A4AD1E9F99D}"/>
+                <a16:creationId xmlns:a16="http://schemas.microsoft.com/office/drawing/2014/main" id="{C11E4568-D1F2-45AC-A437-AAD4E5ED62C7}"/>
               </a:ext>
             </a:extLst>
           </p:cNvPr>
@@ -11347,7 +11347,7 @@
           <p:cNvPr id="11" name="">
             <a:extLst xmlns:a="http://schemas.openxmlformats.org/drawingml/2006/main">
               <a:ext uri="{FF2B5EF4-FFF2-40B4-BE49-F238E27FC236}">
-                <a16:creationId xmlns:a16="http://schemas.microsoft.com/office/drawing/2014/main" id="{4AF6B4E1-C6B6-4BC0-A160-31EB622BED8A}"/>
+                <a16:creationId xmlns:a16="http://schemas.microsoft.com/office/drawing/2014/main" id="{E7A48F68-32D4-417B-AEA1-2BB3FD8B30FA}"/>
               </a:ext>
             </a:extLst>
           </p:cNvPr>
@@ -11409,7 +11409,7 @@
           <p:cNvPr id="12" name="">
             <a:extLst xmlns:a="http://schemas.openxmlformats.org/drawingml/2006/main">
               <a:ext uri="{FF2B5EF4-FFF2-40B4-BE49-F238E27FC236}">
-                <a16:creationId xmlns:a16="http://schemas.microsoft.com/office/drawing/2014/main" id="{EDEE89BA-9FF6-4DA0-83EF-DEF114A42D28}"/>
+                <a16:creationId xmlns:a16="http://schemas.microsoft.com/office/drawing/2014/main" id="{38FE8153-1CC9-4CCF-B1AC-297D6A1BD26A}"/>
               </a:ext>
             </a:extLst>
           </p:cNvPr>
@@ -11450,7 +11450,7 @@
           <p:cNvPr id="13" name="">
             <a:extLst xmlns:a="http://schemas.openxmlformats.org/drawingml/2006/main">
               <a:ext uri="{FF2B5EF4-FFF2-40B4-BE49-F238E27FC236}">
-                <a16:creationId xmlns:a16="http://schemas.microsoft.com/office/drawing/2014/main" id="{8A2847C4-B50A-469F-967E-7502248F411B}"/>
+                <a16:creationId xmlns:a16="http://schemas.microsoft.com/office/drawing/2014/main" id="{8CE85683-A8BC-43A7-8A84-83CE8D1D8565}"/>
               </a:ext>
             </a:extLst>
           </p:cNvPr>
@@ -11512,7 +11512,7 @@
           <p:cNvPr id="14" name="">
             <a:extLst xmlns:a="http://schemas.openxmlformats.org/drawingml/2006/main">
               <a:ext uri="{FF2B5EF4-FFF2-40B4-BE49-F238E27FC236}">
-                <a16:creationId xmlns:a16="http://schemas.microsoft.com/office/drawing/2014/main" id="{AE166F20-A827-4A1D-8C62-9C0D6D08B2EC}"/>
+                <a16:creationId xmlns:a16="http://schemas.microsoft.com/office/drawing/2014/main" id="{1441716E-686D-4F22-B9C6-C79937AF9492}"/>
               </a:ext>
             </a:extLst>
           </p:cNvPr>
@@ -11574,7 +11574,7 @@
           <p:cNvPr id="15" name="">
             <a:extLst xmlns:a="http://schemas.openxmlformats.org/drawingml/2006/main">
               <a:ext uri="{FF2B5EF4-FFF2-40B4-BE49-F238E27FC236}">
-                <a16:creationId xmlns:a16="http://schemas.microsoft.com/office/drawing/2014/main" id="{58E0499A-BAD1-4AD0-B3F4-5370FE1EEE7B}"/>
+                <a16:creationId xmlns:a16="http://schemas.microsoft.com/office/drawing/2014/main" id="{C3B3C1C6-C943-4C67-8615-F12AC8A5A989}"/>
               </a:ext>
             </a:extLst>
           </p:cNvPr>
@@ -11615,7 +11615,7 @@
           <p:cNvPr id="16" name="">
             <a:extLst xmlns:a="http://schemas.openxmlformats.org/drawingml/2006/main">
               <a:ext uri="{FF2B5EF4-FFF2-40B4-BE49-F238E27FC236}">
-                <a16:creationId xmlns:a16="http://schemas.microsoft.com/office/drawing/2014/main" id="{3DFDF70A-0677-40A3-8FC7-E58DCEEE0C6C}"/>
+                <a16:creationId xmlns:a16="http://schemas.microsoft.com/office/drawing/2014/main" id="{329B3966-8CEA-463A-B187-063B62F5CD72}"/>
               </a:ext>
             </a:extLst>
           </p:cNvPr>
@@ -11677,7 +11677,7 @@
           <p:cNvPr id="17" name="">
             <a:extLst xmlns:a="http://schemas.openxmlformats.org/drawingml/2006/main">
               <a:ext uri="{FF2B5EF4-FFF2-40B4-BE49-F238E27FC236}">
-                <a16:creationId xmlns:a16="http://schemas.microsoft.com/office/drawing/2014/main" id="{9619DF31-8DB4-4A01-BB5C-3BDF4C94A168}"/>
+                <a16:creationId xmlns:a16="http://schemas.microsoft.com/office/drawing/2014/main" id="{E088D4B6-5F45-4E7F-B93A-6CF01610C788}"/>
               </a:ext>
             </a:extLst>
           </p:cNvPr>
@@ -11739,7 +11739,7 @@
           <p:cNvPr id="18" name="">
             <a:extLst xmlns:a="http://schemas.openxmlformats.org/drawingml/2006/main">
               <a:ext uri="{FF2B5EF4-FFF2-40B4-BE49-F238E27FC236}">
-                <a16:creationId xmlns:a16="http://schemas.microsoft.com/office/drawing/2014/main" id="{BC5F1C97-1EF4-423F-B765-F8E7B857DCCC}"/>
+                <a16:creationId xmlns:a16="http://schemas.microsoft.com/office/drawing/2014/main" id="{DC6E6958-F32E-436D-8224-99580CFD3C7F}"/>
               </a:ext>
             </a:extLst>
           </p:cNvPr>
@@ -11780,7 +11780,7 @@
           <p:cNvPr id="19" name="">
             <a:extLst xmlns:a="http://schemas.openxmlformats.org/drawingml/2006/main">
               <a:ext uri="{FF2B5EF4-FFF2-40B4-BE49-F238E27FC236}">
-                <a16:creationId xmlns:a16="http://schemas.microsoft.com/office/drawing/2014/main" id="{46402EF4-6E88-48FE-9491-8326D864FB3D}"/>
+                <a16:creationId xmlns:a16="http://schemas.microsoft.com/office/drawing/2014/main" id="{8229E251-A8A1-4B6B-9E39-9F77E4B5BED6}"/>
               </a:ext>
             </a:extLst>
           </p:cNvPr>
@@ -11842,7 +11842,7 @@
           <p:cNvPr id="20" name="">
             <a:extLst xmlns:a="http://schemas.openxmlformats.org/drawingml/2006/main">
               <a:ext uri="{FF2B5EF4-FFF2-40B4-BE49-F238E27FC236}">
-                <a16:creationId xmlns:a16="http://schemas.microsoft.com/office/drawing/2014/main" id="{540A66D0-1880-4B33-B26B-500099A56BE4}"/>
+                <a16:creationId xmlns:a16="http://schemas.microsoft.com/office/drawing/2014/main" id="{F61CFCA0-1213-4F22-9779-021C4ECA943B}"/>
               </a:ext>
             </a:extLst>
           </p:cNvPr>
@@ -12008,7 +12008,7 @@
           <p:cNvPr id="25" name="">
             <a:extLst xmlns:a="http://schemas.openxmlformats.org/drawingml/2006/main">
               <a:ext uri="{FF2B5EF4-FFF2-40B4-BE49-F238E27FC236}">
-                <a16:creationId xmlns:a16="http://schemas.microsoft.com/office/drawing/2014/main" id="{8C819ED2-C819-45D1-9508-08D6AB33EF0C}"/>
+                <a16:creationId xmlns:a16="http://schemas.microsoft.com/office/drawing/2014/main" id="{3AAC9F5D-D24B-44B5-876F-24CBFCFB535A}"/>
               </a:ext>
             </a:extLst>
           </p:cNvPr>
@@ -12041,7 +12041,7 @@
           <p:cNvPr id="26" name="">
             <a:extLst xmlns:a="http://schemas.openxmlformats.org/drawingml/2006/main">
               <a:ext uri="{FF2B5EF4-FFF2-40B4-BE49-F238E27FC236}">
-                <a16:creationId xmlns:a16="http://schemas.microsoft.com/office/drawing/2014/main" id="{E808CF6A-5381-4915-967F-1A04A821C380}"/>
+                <a16:creationId xmlns:a16="http://schemas.microsoft.com/office/drawing/2014/main" id="{7AC2988E-85D6-4F27-845B-7554D76D6F46}"/>
               </a:ext>
             </a:extLst>
           </p:cNvPr>
@@ -12103,7 +12103,7 @@
           <p:cNvPr id="27" name="">
             <a:extLst xmlns:a="http://schemas.openxmlformats.org/drawingml/2006/main">
               <a:ext uri="{FF2B5EF4-FFF2-40B4-BE49-F238E27FC236}">
-                <a16:creationId xmlns:a16="http://schemas.microsoft.com/office/drawing/2014/main" id="{E1C015B2-8DE6-48FF-9EBC-690083F8741B}"/>
+                <a16:creationId xmlns:a16="http://schemas.microsoft.com/office/drawing/2014/main" id="{09CA1445-5D08-4A23-A89C-B9FCD2882F08}"/>
               </a:ext>
             </a:extLst>
           </p:cNvPr>
@@ -12144,7 +12144,7 @@
           <p:cNvPr id="28" name="">
             <a:extLst xmlns:a="http://schemas.openxmlformats.org/drawingml/2006/main">
               <a:ext uri="{FF2B5EF4-FFF2-40B4-BE49-F238E27FC236}">
-                <a16:creationId xmlns:a16="http://schemas.microsoft.com/office/drawing/2014/main" id="{46929686-AFB1-4664-B3EB-6D9D4AA59ED7}"/>
+                <a16:creationId xmlns:a16="http://schemas.microsoft.com/office/drawing/2014/main" id="{4A353ABC-CCE6-46E4-BE95-DD9D59838238}"/>
               </a:ext>
             </a:extLst>
           </p:cNvPr>
@@ -12177,7 +12177,7 @@
           <p:cNvPr id="29" name="">
             <a:extLst xmlns:a="http://schemas.openxmlformats.org/drawingml/2006/main">
               <a:ext uri="{FF2B5EF4-FFF2-40B4-BE49-F238E27FC236}">
-                <a16:creationId xmlns:a16="http://schemas.microsoft.com/office/drawing/2014/main" id="{1195B073-6C8F-4735-A424-766DE4F8A2FE}"/>
+                <a16:creationId xmlns:a16="http://schemas.microsoft.com/office/drawing/2014/main" id="{2DDE9D0F-5D8E-4262-BCB6-190E1359F65F}"/>
               </a:ext>
             </a:extLst>
           </p:cNvPr>
@@ -12239,7 +12239,7 @@
           <p:cNvPr id="30" name="">
             <a:extLst xmlns:a="http://schemas.openxmlformats.org/drawingml/2006/main">
               <a:ext uri="{FF2B5EF4-FFF2-40B4-BE49-F238E27FC236}">
-                <a16:creationId xmlns:a16="http://schemas.microsoft.com/office/drawing/2014/main" id="{70B4756D-C0AA-4C72-A67E-A72BEFF040BF}"/>
+                <a16:creationId xmlns:a16="http://schemas.microsoft.com/office/drawing/2014/main" id="{9FDE0ADC-25B2-43D5-9CA1-EE83228AE431}"/>
               </a:ext>
             </a:extLst>
           </p:cNvPr>
@@ -12301,7 +12301,7 @@
           <p:cNvPr id="31" name="">
             <a:extLst xmlns:a="http://schemas.openxmlformats.org/drawingml/2006/main">
               <a:ext uri="{FF2B5EF4-FFF2-40B4-BE49-F238E27FC236}">
-                <a16:creationId xmlns:a16="http://schemas.microsoft.com/office/drawing/2014/main" id="{5FDFDB91-8A1E-4327-8B5E-4383C1C7CA17}"/>
+                <a16:creationId xmlns:a16="http://schemas.microsoft.com/office/drawing/2014/main" id="{6BCC5C15-691A-4CC4-B2A4-BA1D9E8A4338}"/>
               </a:ext>
             </a:extLst>
           </p:cNvPr>
@@ -12342,7 +12342,7 @@
           <p:cNvPr id="32" name="">
             <a:extLst xmlns:a="http://schemas.openxmlformats.org/drawingml/2006/main">
               <a:ext uri="{FF2B5EF4-FFF2-40B4-BE49-F238E27FC236}">
-                <a16:creationId xmlns:a16="http://schemas.microsoft.com/office/drawing/2014/main" id="{9C2436C7-8098-4051-B40C-10BC9C8B29DC}"/>
+                <a16:creationId xmlns:a16="http://schemas.microsoft.com/office/drawing/2014/main" id="{C8274DF2-F719-4EC9-80F9-8DE753449C75}"/>
               </a:ext>
             </a:extLst>
           </p:cNvPr>
@@ -12375,7 +12375,7 @@
           <p:cNvPr id="33" name="">
             <a:extLst xmlns:a="http://schemas.openxmlformats.org/drawingml/2006/main">
               <a:ext uri="{FF2B5EF4-FFF2-40B4-BE49-F238E27FC236}">
-                <a16:creationId xmlns:a16="http://schemas.microsoft.com/office/drawing/2014/main" id="{19943452-0572-46D4-A4B1-256F0A86D27F}"/>
+                <a16:creationId xmlns:a16="http://schemas.microsoft.com/office/drawing/2014/main" id="{4EA344B7-C5C0-4D5A-9BB6-30BABED936A6}"/>
               </a:ext>
             </a:extLst>
           </p:cNvPr>
@@ -12437,7 +12437,7 @@
           <p:cNvPr id="34" name="">
             <a:extLst xmlns:a="http://schemas.openxmlformats.org/drawingml/2006/main">
               <a:ext uri="{FF2B5EF4-FFF2-40B4-BE49-F238E27FC236}">
-                <a16:creationId xmlns:a16="http://schemas.microsoft.com/office/drawing/2014/main" id="{FB986358-2F15-4500-81D8-AEF8B5C41BFE}"/>
+                <a16:creationId xmlns:a16="http://schemas.microsoft.com/office/drawing/2014/main" id="{21CBBFE1-8C01-472B-B4EE-FD98187F8ADC}"/>
               </a:ext>
             </a:extLst>
           </p:cNvPr>
@@ -12499,7 +12499,7 @@
           <p:cNvPr id="35" name="">
             <a:extLst xmlns:a="http://schemas.openxmlformats.org/drawingml/2006/main">
               <a:ext uri="{FF2B5EF4-FFF2-40B4-BE49-F238E27FC236}">
-                <a16:creationId xmlns:a16="http://schemas.microsoft.com/office/drawing/2014/main" id="{98818DC7-5D33-4E3D-9C55-BBCA6FF710FC}"/>
+                <a16:creationId xmlns:a16="http://schemas.microsoft.com/office/drawing/2014/main" id="{5FC9BE96-35CA-40BB-BFA5-14286B65B598}"/>
               </a:ext>
             </a:extLst>
           </p:cNvPr>
@@ -12540,7 +12540,7 @@
           <p:cNvPr id="36" name="">
             <a:extLst xmlns:a="http://schemas.openxmlformats.org/drawingml/2006/main">
               <a:ext uri="{FF2B5EF4-FFF2-40B4-BE49-F238E27FC236}">
-                <a16:creationId xmlns:a16="http://schemas.microsoft.com/office/drawing/2014/main" id="{A73EFBD8-F0D9-4F44-88E9-5AFF60EAD7E4}"/>
+                <a16:creationId xmlns:a16="http://schemas.microsoft.com/office/drawing/2014/main" id="{36C95AA2-4BC1-4870-AAB5-DCB84A092EC7}"/>
               </a:ext>
             </a:extLst>
           </p:cNvPr>
@@ -12573,7 +12573,7 @@
           <p:cNvPr id="37" name="">
             <a:extLst xmlns:a="http://schemas.openxmlformats.org/drawingml/2006/main">
               <a:ext uri="{FF2B5EF4-FFF2-40B4-BE49-F238E27FC236}">
-                <a16:creationId xmlns:a16="http://schemas.microsoft.com/office/drawing/2014/main" id="{F2D4ACD1-F62E-4EE2-9E25-029833986B9B}"/>
+                <a16:creationId xmlns:a16="http://schemas.microsoft.com/office/drawing/2014/main" id="{672E5151-7C62-45CC-B1BF-F5C4D3F8557F}"/>
               </a:ext>
             </a:extLst>
           </p:cNvPr>
@@ -12635,7 +12635,7 @@
           <p:cNvPr id="38" name="">
             <a:extLst xmlns:a="http://schemas.openxmlformats.org/drawingml/2006/main">
               <a:ext uri="{FF2B5EF4-FFF2-40B4-BE49-F238E27FC236}">
-                <a16:creationId xmlns:a16="http://schemas.microsoft.com/office/drawing/2014/main" id="{89D7B859-0101-4A6F-AA13-7A415320334D}"/>
+                <a16:creationId xmlns:a16="http://schemas.microsoft.com/office/drawing/2014/main" id="{FFB2EE60-5CE1-47A2-9483-71A6DED09944}"/>
               </a:ext>
             </a:extLst>
           </p:cNvPr>
@@ -12697,7 +12697,7 @@
           <p:cNvPr id="39" name="">
             <a:extLst xmlns:a="http://schemas.openxmlformats.org/drawingml/2006/main">
               <a:ext uri="{FF2B5EF4-FFF2-40B4-BE49-F238E27FC236}">
-                <a16:creationId xmlns:a16="http://schemas.microsoft.com/office/drawing/2014/main" id="{38BE74AB-A58C-494A-9A59-799E1D4DF75C}"/>
+                <a16:creationId xmlns:a16="http://schemas.microsoft.com/office/drawing/2014/main" id="{974EEDFC-4B82-49DF-84D9-FA72DF99C38B}"/>
               </a:ext>
             </a:extLst>
           </p:cNvPr>
@@ -12732,7 +12732,7 @@
           <p:cNvPr id="40" name="">
             <a:extLst xmlns:a="http://schemas.openxmlformats.org/drawingml/2006/main">
               <a:ext uri="{FF2B5EF4-FFF2-40B4-BE49-F238E27FC236}">
-                <a16:creationId xmlns:a16="http://schemas.microsoft.com/office/drawing/2014/main" id="{59F70D61-0B22-4D18-92F0-73B203C09EA3}"/>
+                <a16:creationId xmlns:a16="http://schemas.microsoft.com/office/drawing/2014/main" id="{56BAD5CD-9113-43CF-8865-63B98F4BF1FC}"/>
               </a:ext>
             </a:extLst>
           </p:cNvPr>
@@ -12792,7 +12792,7 @@
     </p:spTree>
     <p:extLst>
       <p:ext uri="{BB962C8B-B14F-4D97-AF65-F5344CB8AC3E}">
-        <p14:creationId xmlns:p14="http://schemas.microsoft.com/office/powerpoint/2010/main" val="912788711"/>
+        <p14:creationId xmlns:p14="http://schemas.microsoft.com/office/powerpoint/2010/main" val="916151014"/>
       </p:ext>
     </p:extLst>
   </p:cSld>
@@ -12823,7 +12823,7 @@
           <p:cNvPr id="71" name="">
             <a:extLst xmlns:a="http://schemas.openxmlformats.org/drawingml/2006/main">
               <a:ext uri="{FF2B5EF4-FFF2-40B4-BE49-F238E27FC236}">
-                <a16:creationId xmlns:a16="http://schemas.microsoft.com/office/drawing/2014/main" id="{34FF98AC-BC6A-47E3-A41D-DAB4210D8F87}"/>
+                <a16:creationId xmlns:a16="http://schemas.microsoft.com/office/drawing/2014/main" id="{308DEC77-2693-45BB-9093-3026FF11D1B8}"/>
               </a:ext>
             </a:extLst>
           </p:cNvPr>
@@ -12856,7 +12856,7 @@
           <p:cNvPr id="2" name="">
             <a:extLst xmlns:a="http://schemas.openxmlformats.org/drawingml/2006/main">
               <a:ext uri="{FF2B5EF4-FFF2-40B4-BE49-F238E27FC236}">
-                <a16:creationId xmlns:a16="http://schemas.microsoft.com/office/drawing/2014/main" id="{4D1FB1E8-29C6-4678-BC1A-6EAC35464CBF}"/>
+                <a16:creationId xmlns:a16="http://schemas.microsoft.com/office/drawing/2014/main" id="{741B8A91-4FE5-4B9C-9B5B-A59F00754C66}"/>
               </a:ext>
             </a:extLst>
           </p:cNvPr>
@@ -12918,7 +12918,7 @@
           <p:cNvPr id="3" name="">
             <a:extLst xmlns:a="http://schemas.openxmlformats.org/drawingml/2006/main">
               <a:ext uri="{FF2B5EF4-FFF2-40B4-BE49-F238E27FC236}">
-                <a16:creationId xmlns:a16="http://schemas.microsoft.com/office/drawing/2014/main" id="{10D1BE94-8BC2-4460-89EB-3770EEEF8573}"/>
+                <a16:creationId xmlns:a16="http://schemas.microsoft.com/office/drawing/2014/main" id="{FD3518F5-9FFB-4EDA-9114-A6BD5CA15276}"/>
               </a:ext>
             </a:extLst>
           </p:cNvPr>
@@ -12980,7 +12980,7 @@
           <p:cNvPr id="4" name="">
             <a:extLst xmlns:a="http://schemas.openxmlformats.org/drawingml/2006/main">
               <a:ext uri="{FF2B5EF4-FFF2-40B4-BE49-F238E27FC236}">
-                <a16:creationId xmlns:a16="http://schemas.microsoft.com/office/drawing/2014/main" id="{F807D772-3202-4057-8EF2-EE507074FC9D}"/>
+                <a16:creationId xmlns:a16="http://schemas.microsoft.com/office/drawing/2014/main" id="{DC0C1081-DC7A-42C4-8B39-79093B6F3D62}"/>
               </a:ext>
             </a:extLst>
           </p:cNvPr>
@@ -13013,7 +13013,7 @@
           <p:cNvPr id="5" name="">
             <a:extLst xmlns:a="http://schemas.openxmlformats.org/drawingml/2006/main">
               <a:ext uri="{FF2B5EF4-FFF2-40B4-BE49-F238E27FC236}">
-                <a16:creationId xmlns:a16="http://schemas.microsoft.com/office/drawing/2014/main" id="{20B40019-507D-4160-9E81-A6ABB67331C1}"/>
+                <a16:creationId xmlns:a16="http://schemas.microsoft.com/office/drawing/2014/main" id="{F7FAA549-47E1-42FA-9E59-54477ECAA17C}"/>
               </a:ext>
             </a:extLst>
           </p:cNvPr>
@@ -13075,7 +13075,7 @@
           <p:cNvPr id="6" name="">
             <a:extLst xmlns:a="http://schemas.openxmlformats.org/drawingml/2006/main">
               <a:ext uri="{FF2B5EF4-FFF2-40B4-BE49-F238E27FC236}">
-                <a16:creationId xmlns:a16="http://schemas.microsoft.com/office/drawing/2014/main" id="{92AE4555-7341-4F09-A74B-19461EDC1967}"/>
+                <a16:creationId xmlns:a16="http://schemas.microsoft.com/office/drawing/2014/main" id="{76FEBDF3-5745-429F-8A7C-897DC6CAB3E7}"/>
               </a:ext>
             </a:extLst>
           </p:cNvPr>
@@ -13137,7 +13137,7 @@
           <p:cNvPr id="7" name="">
             <a:extLst xmlns:a="http://schemas.openxmlformats.org/drawingml/2006/main">
               <a:ext uri="{FF2B5EF4-FFF2-40B4-BE49-F238E27FC236}">
-                <a16:creationId xmlns:a16="http://schemas.microsoft.com/office/drawing/2014/main" id="{6F932858-90E1-4ECC-B23D-E01378A516C6}"/>
+                <a16:creationId xmlns:a16="http://schemas.microsoft.com/office/drawing/2014/main" id="{D2D627F9-37D6-4753-8051-D5C7E1DCE49E}"/>
               </a:ext>
             </a:extLst>
           </p:cNvPr>
@@ -13172,7 +13172,7 @@
           <p:cNvPr id="8" name="">
             <a:extLst xmlns:a="http://schemas.openxmlformats.org/drawingml/2006/main">
               <a:ext uri="{FF2B5EF4-FFF2-40B4-BE49-F238E27FC236}">
-                <a16:creationId xmlns:a16="http://schemas.microsoft.com/office/drawing/2014/main" id="{A180C064-8584-4852-831C-7D2B5DCD6FA7}"/>
+                <a16:creationId xmlns:a16="http://schemas.microsoft.com/office/drawing/2014/main" id="{B8B15B4D-ACA2-4136-B5C2-010204C308C3}"/>
               </a:ext>
             </a:extLst>
           </p:cNvPr>
@@ -13234,7 +13234,7 @@
           <p:cNvPr id="9" name="">
             <a:extLst xmlns:a="http://schemas.openxmlformats.org/drawingml/2006/main">
               <a:ext uri="{FF2B5EF4-FFF2-40B4-BE49-F238E27FC236}">
-                <a16:creationId xmlns:a16="http://schemas.microsoft.com/office/drawing/2014/main" id="{61346E99-2EDC-4C87-94A3-D5A0CB0C67C9}"/>
+                <a16:creationId xmlns:a16="http://schemas.microsoft.com/office/drawing/2014/main" id="{7C389798-0850-4CC2-94E4-7C1D2514AC49}"/>
               </a:ext>
             </a:extLst>
           </p:cNvPr>
@@ -13269,7 +13269,7 @@
           <p:cNvPr id="10" name="">
             <a:extLst xmlns:a="http://schemas.openxmlformats.org/drawingml/2006/main">
               <a:ext uri="{FF2B5EF4-FFF2-40B4-BE49-F238E27FC236}">
-                <a16:creationId xmlns:a16="http://schemas.microsoft.com/office/drawing/2014/main" id="{D148257E-5339-4263-BD60-18257AAF9EA7}"/>
+                <a16:creationId xmlns:a16="http://schemas.microsoft.com/office/drawing/2014/main" id="{F1BD2B63-8277-4FEC-9D2C-AF0FAFD188AD}"/>
               </a:ext>
             </a:extLst>
           </p:cNvPr>
@@ -13331,7 +13331,7 @@
           <p:cNvPr id="11" name="">
             <a:extLst xmlns:a="http://schemas.openxmlformats.org/drawingml/2006/main">
               <a:ext uri="{FF2B5EF4-FFF2-40B4-BE49-F238E27FC236}">
-                <a16:creationId xmlns:a16="http://schemas.microsoft.com/office/drawing/2014/main" id="{F7EEADED-C9AD-4EBA-8129-483BA1CA7362}"/>
+                <a16:creationId xmlns:a16="http://schemas.microsoft.com/office/drawing/2014/main" id="{1CE84BD5-A6FE-4A43-821C-5D070C6F4BE7}"/>
               </a:ext>
             </a:extLst>
           </p:cNvPr>
@@ -13366,7 +13366,7 @@
           <p:cNvPr id="12" name="">
             <a:extLst xmlns:a="http://schemas.openxmlformats.org/drawingml/2006/main">
               <a:ext uri="{FF2B5EF4-FFF2-40B4-BE49-F238E27FC236}">
-                <a16:creationId xmlns:a16="http://schemas.microsoft.com/office/drawing/2014/main" id="{799959C1-DDA7-4105-AC54-22281FDB2E10}"/>
+                <a16:creationId xmlns:a16="http://schemas.microsoft.com/office/drawing/2014/main" id="{1E3CD40A-7076-4E61-80A1-A6062A37E5AF}"/>
               </a:ext>
             </a:extLst>
           </p:cNvPr>
@@ -13428,7 +13428,7 @@
           <p:cNvPr id="13" name="">
             <a:extLst xmlns:a="http://schemas.openxmlformats.org/drawingml/2006/main">
               <a:ext uri="{FF2B5EF4-FFF2-40B4-BE49-F238E27FC236}">
-                <a16:creationId xmlns:a16="http://schemas.microsoft.com/office/drawing/2014/main" id="{BC1CBA4D-E517-451A-ADBD-E2246752CB5A}"/>
+                <a16:creationId xmlns:a16="http://schemas.microsoft.com/office/drawing/2014/main" id="{880FC359-93AF-45BE-B317-93AFC9A45DB9}"/>
               </a:ext>
             </a:extLst>
           </p:cNvPr>
@@ -13461,7 +13461,7 @@
           <p:cNvPr id="14" name="">
             <a:extLst xmlns:a="http://schemas.openxmlformats.org/drawingml/2006/main">
               <a:ext uri="{FF2B5EF4-FFF2-40B4-BE49-F238E27FC236}">
-                <a16:creationId xmlns:a16="http://schemas.microsoft.com/office/drawing/2014/main" id="{C04C446A-C6E9-4981-A9E2-8280A377DB0D}"/>
+                <a16:creationId xmlns:a16="http://schemas.microsoft.com/office/drawing/2014/main" id="{5290867F-7FB6-4E31-A894-754B81173DDE}"/>
               </a:ext>
             </a:extLst>
           </p:cNvPr>
@@ -13523,7 +13523,7 @@
           <p:cNvPr id="15" name="">
             <a:extLst xmlns:a="http://schemas.openxmlformats.org/drawingml/2006/main">
               <a:ext uri="{FF2B5EF4-FFF2-40B4-BE49-F238E27FC236}">
-                <a16:creationId xmlns:a16="http://schemas.microsoft.com/office/drawing/2014/main" id="{795BC2F8-3F7D-4244-BBDC-43C7CC0D4187}"/>
+                <a16:creationId xmlns:a16="http://schemas.microsoft.com/office/drawing/2014/main" id="{0B921E15-6461-40C6-B9A1-3D1F8B1D1562}"/>
               </a:ext>
             </a:extLst>
           </p:cNvPr>
@@ -13556,7 +13556,7 @@
           <p:cNvPr id="16" name="">
             <a:extLst xmlns:a="http://schemas.openxmlformats.org/drawingml/2006/main">
               <a:ext uri="{FF2B5EF4-FFF2-40B4-BE49-F238E27FC236}">
-                <a16:creationId xmlns:a16="http://schemas.microsoft.com/office/drawing/2014/main" id="{C139E067-9B05-40FE-9049-621A3F3207B2}"/>
+                <a16:creationId xmlns:a16="http://schemas.microsoft.com/office/drawing/2014/main" id="{F4DF493E-7470-45EB-8006-CFAF03D1D8F4}"/>
               </a:ext>
             </a:extLst>
           </p:cNvPr>
@@ -13618,7 +13618,7 @@
           <p:cNvPr id="17" name="">
             <a:extLst xmlns:a="http://schemas.openxmlformats.org/drawingml/2006/main">
               <a:ext uri="{FF2B5EF4-FFF2-40B4-BE49-F238E27FC236}">
-                <a16:creationId xmlns:a16="http://schemas.microsoft.com/office/drawing/2014/main" id="{0D882FF5-D93A-40D4-B2BD-F22DD559C68E}"/>
+                <a16:creationId xmlns:a16="http://schemas.microsoft.com/office/drawing/2014/main" id="{C15892F9-6C0E-4BF5-9761-1FC7879667D6}"/>
               </a:ext>
             </a:extLst>
           </p:cNvPr>
@@ -13651,7 +13651,7 @@
           <p:cNvPr id="18" name="">
             <a:extLst xmlns:a="http://schemas.openxmlformats.org/drawingml/2006/main">
               <a:ext uri="{FF2B5EF4-FFF2-40B4-BE49-F238E27FC236}">
-                <a16:creationId xmlns:a16="http://schemas.microsoft.com/office/drawing/2014/main" id="{5BA2DCE7-FB85-454F-8527-967F35A27378}"/>
+                <a16:creationId xmlns:a16="http://schemas.microsoft.com/office/drawing/2014/main" id="{998552D9-BBBF-42B3-B524-6C6DC4FF2D9F}"/>
               </a:ext>
             </a:extLst>
           </p:cNvPr>
@@ -13713,7 +13713,7 @@
           <p:cNvPr id="19" name="">
             <a:extLst xmlns:a="http://schemas.openxmlformats.org/drawingml/2006/main">
               <a:ext uri="{FF2B5EF4-FFF2-40B4-BE49-F238E27FC236}">
-                <a16:creationId xmlns:a16="http://schemas.microsoft.com/office/drawing/2014/main" id="{F011EE0B-61AD-4010-9A6A-ABE952F90F3B}"/>
+                <a16:creationId xmlns:a16="http://schemas.microsoft.com/office/drawing/2014/main" id="{CA8B6AA2-9F52-4482-948F-69008F21FDC3}"/>
               </a:ext>
             </a:extLst>
           </p:cNvPr>
@@ -13746,7 +13746,7 @@
           <p:cNvPr id="20" name="">
             <a:extLst xmlns:a="http://schemas.openxmlformats.org/drawingml/2006/main">
               <a:ext uri="{FF2B5EF4-FFF2-40B4-BE49-F238E27FC236}">
-                <a16:creationId xmlns:a16="http://schemas.microsoft.com/office/drawing/2014/main" id="{CF5CD1A5-7DDE-4361-9464-5A95175CE803}"/>
+                <a16:creationId xmlns:a16="http://schemas.microsoft.com/office/drawing/2014/main" id="{D7621AEE-760B-4688-8ABF-667D5BF05AC6}"/>
               </a:ext>
             </a:extLst>
           </p:cNvPr>
@@ -13808,7 +13808,7 @@
           <p:cNvPr id="21" name="">
             <a:extLst xmlns:a="http://schemas.openxmlformats.org/drawingml/2006/main">
               <a:ext uri="{FF2B5EF4-FFF2-40B4-BE49-F238E27FC236}">
-                <a16:creationId xmlns:a16="http://schemas.microsoft.com/office/drawing/2014/main" id="{00971F2A-7F1C-49D0-BC76-D208BFE9D3DF}"/>
+                <a16:creationId xmlns:a16="http://schemas.microsoft.com/office/drawing/2014/main" id="{E68FA57C-2E2E-4025-B93D-283B58CF5B9F}"/>
               </a:ext>
             </a:extLst>
           </p:cNvPr>
@@ -13841,7 +13841,7 @@
           <p:cNvPr id="22" name="">
             <a:extLst xmlns:a="http://schemas.openxmlformats.org/drawingml/2006/main">
               <a:ext uri="{FF2B5EF4-FFF2-40B4-BE49-F238E27FC236}">
-                <a16:creationId xmlns:a16="http://schemas.microsoft.com/office/drawing/2014/main" id="{C75B6404-8776-4CB8-BD33-B594654FA905}"/>
+                <a16:creationId xmlns:a16="http://schemas.microsoft.com/office/drawing/2014/main" id="{CA0EF516-F4C3-4D20-A238-A24CAB09D065}"/>
               </a:ext>
             </a:extLst>
           </p:cNvPr>
@@ -13903,7 +13903,7 @@
           <p:cNvPr id="23" name="">
             <a:extLst xmlns:a="http://schemas.openxmlformats.org/drawingml/2006/main">
               <a:ext uri="{FF2B5EF4-FFF2-40B4-BE49-F238E27FC236}">
-                <a16:creationId xmlns:a16="http://schemas.microsoft.com/office/drawing/2014/main" id="{20F47BFC-DCA1-42FC-9B65-4E83D08F3DE3}"/>
+                <a16:creationId xmlns:a16="http://schemas.microsoft.com/office/drawing/2014/main" id="{A978B09C-4B05-4623-B8BD-CCAED0B4F9EF}"/>
               </a:ext>
             </a:extLst>
           </p:cNvPr>
@@ -13936,7 +13936,7 @@
           <p:cNvPr id="24" name="">
             <a:extLst xmlns:a="http://schemas.openxmlformats.org/drawingml/2006/main">
               <a:ext uri="{FF2B5EF4-FFF2-40B4-BE49-F238E27FC236}">
-                <a16:creationId xmlns:a16="http://schemas.microsoft.com/office/drawing/2014/main" id="{C5F82376-C6F8-45F4-8634-120A51CB275B}"/>
+                <a16:creationId xmlns:a16="http://schemas.microsoft.com/office/drawing/2014/main" id="{FA4DF790-479A-4CE6-B99C-41D09BEC386C}"/>
               </a:ext>
             </a:extLst>
           </p:cNvPr>
@@ -13998,7 +13998,7 @@
           <p:cNvPr id="25" name="">
             <a:extLst xmlns:a="http://schemas.openxmlformats.org/drawingml/2006/main">
               <a:ext uri="{FF2B5EF4-FFF2-40B4-BE49-F238E27FC236}">
-                <a16:creationId xmlns:a16="http://schemas.microsoft.com/office/drawing/2014/main" id="{18EE929F-6744-4E23-98D4-CFB3A4AF9A00}"/>
+                <a16:creationId xmlns:a16="http://schemas.microsoft.com/office/drawing/2014/main" id="{B66ACE3A-D3E6-4BD3-80F0-01281209032D}"/>
               </a:ext>
             </a:extLst>
           </p:cNvPr>
@@ -14031,7 +14031,7 @@
           <p:cNvPr id="26" name="">
             <a:extLst xmlns:a="http://schemas.openxmlformats.org/drawingml/2006/main">
               <a:ext uri="{FF2B5EF4-FFF2-40B4-BE49-F238E27FC236}">
-                <a16:creationId xmlns:a16="http://schemas.microsoft.com/office/drawing/2014/main" id="{633E3080-49D9-4AC7-B916-5E78D1113377}"/>
+                <a16:creationId xmlns:a16="http://schemas.microsoft.com/office/drawing/2014/main" id="{22B7C12D-7331-435C-AE9A-B8C1EDC62234}"/>
               </a:ext>
             </a:extLst>
           </p:cNvPr>
@@ -14093,7 +14093,7 @@
           <p:cNvPr id="27" name="">
             <a:extLst xmlns:a="http://schemas.openxmlformats.org/drawingml/2006/main">
               <a:ext uri="{FF2B5EF4-FFF2-40B4-BE49-F238E27FC236}">
-                <a16:creationId xmlns:a16="http://schemas.microsoft.com/office/drawing/2014/main" id="{72769392-A508-4FA4-AB3D-3D956F5D027E}"/>
+                <a16:creationId xmlns:a16="http://schemas.microsoft.com/office/drawing/2014/main" id="{A268407F-A6F8-4BE2-B0A6-EDFB19E63C9B}"/>
               </a:ext>
             </a:extLst>
           </p:cNvPr>
@@ -14126,7 +14126,7 @@
           <p:cNvPr id="28" name="">
             <a:extLst xmlns:a="http://schemas.openxmlformats.org/drawingml/2006/main">
               <a:ext uri="{FF2B5EF4-FFF2-40B4-BE49-F238E27FC236}">
-                <a16:creationId xmlns:a16="http://schemas.microsoft.com/office/drawing/2014/main" id="{5BC39549-A99F-4678-B79E-9DB39B6475B6}"/>
+                <a16:creationId xmlns:a16="http://schemas.microsoft.com/office/drawing/2014/main" id="{BA58C30B-4BD6-419A-BFC4-BECD4FBB8C7F}"/>
               </a:ext>
             </a:extLst>
           </p:cNvPr>
@@ -14188,7 +14188,7 @@
           <p:cNvPr id="29" name="">
             <a:extLst xmlns:a="http://schemas.openxmlformats.org/drawingml/2006/main">
               <a:ext uri="{FF2B5EF4-FFF2-40B4-BE49-F238E27FC236}">
-                <a16:creationId xmlns:a16="http://schemas.microsoft.com/office/drawing/2014/main" id="{436BD1A7-48AB-4BAE-9CA6-482C6F267A5C}"/>
+                <a16:creationId xmlns:a16="http://schemas.microsoft.com/office/drawing/2014/main" id="{874C9F3A-4DF1-4457-A610-20F12DEB7A8D}"/>
               </a:ext>
             </a:extLst>
           </p:cNvPr>
@@ -14221,7 +14221,7 @@
           <p:cNvPr id="30" name="">
             <a:extLst xmlns:a="http://schemas.openxmlformats.org/drawingml/2006/main">
               <a:ext uri="{FF2B5EF4-FFF2-40B4-BE49-F238E27FC236}">
-                <a16:creationId xmlns:a16="http://schemas.microsoft.com/office/drawing/2014/main" id="{9A2B6BA8-B7D4-4BE0-8468-E066A70C6D27}"/>
+                <a16:creationId xmlns:a16="http://schemas.microsoft.com/office/drawing/2014/main" id="{BC775601-2E10-4B46-B88E-D2DF1B81C3FE}"/>
               </a:ext>
             </a:extLst>
           </p:cNvPr>
@@ -14283,7 +14283,7 @@
           <p:cNvPr id="31" name="">
             <a:extLst xmlns:a="http://schemas.openxmlformats.org/drawingml/2006/main">
               <a:ext uri="{FF2B5EF4-FFF2-40B4-BE49-F238E27FC236}">
-                <a16:creationId xmlns:a16="http://schemas.microsoft.com/office/drawing/2014/main" id="{BD8B9863-0B7B-4550-BBCC-49BEEAA4E845}"/>
+                <a16:creationId xmlns:a16="http://schemas.microsoft.com/office/drawing/2014/main" id="{05E801D4-34B6-466D-BC06-296A0C50A2FC}"/>
               </a:ext>
             </a:extLst>
           </p:cNvPr>
@@ -14316,7 +14316,7 @@
           <p:cNvPr id="32" name="">
             <a:extLst xmlns:a="http://schemas.openxmlformats.org/drawingml/2006/main">
               <a:ext uri="{FF2B5EF4-FFF2-40B4-BE49-F238E27FC236}">
-                <a16:creationId xmlns:a16="http://schemas.microsoft.com/office/drawing/2014/main" id="{F6C7B881-7AC8-4AD0-8253-43F838912BC4}"/>
+                <a16:creationId xmlns:a16="http://schemas.microsoft.com/office/drawing/2014/main" id="{4C32EF54-E3AD-4CBD-86D1-A0A6EA4E227E}"/>
               </a:ext>
             </a:extLst>
           </p:cNvPr>
@@ -14378,7 +14378,7 @@
           <p:cNvPr id="33" name="">
             <a:extLst xmlns:a="http://schemas.openxmlformats.org/drawingml/2006/main">
               <a:ext uri="{FF2B5EF4-FFF2-40B4-BE49-F238E27FC236}">
-                <a16:creationId xmlns:a16="http://schemas.microsoft.com/office/drawing/2014/main" id="{623202D5-75C5-4EC6-AA76-E63E40F0DFF7}"/>
+                <a16:creationId xmlns:a16="http://schemas.microsoft.com/office/drawing/2014/main" id="{9D2606EB-BA3A-41AF-8008-C96DAFBF7B77}"/>
               </a:ext>
             </a:extLst>
           </p:cNvPr>
@@ -14411,7 +14411,7 @@
           <p:cNvPr id="34" name="">
             <a:extLst xmlns:a="http://schemas.openxmlformats.org/drawingml/2006/main">
               <a:ext uri="{FF2B5EF4-FFF2-40B4-BE49-F238E27FC236}">
-                <a16:creationId xmlns:a16="http://schemas.microsoft.com/office/drawing/2014/main" id="{E8290C17-4E9E-40CC-85CE-4A5FE5D5C204}"/>
+                <a16:creationId xmlns:a16="http://schemas.microsoft.com/office/drawing/2014/main" id="{0B99444B-8E60-4A6D-9BD5-E50263C10E44}"/>
               </a:ext>
             </a:extLst>
           </p:cNvPr>
@@ -14473,7 +14473,7 @@
           <p:cNvPr id="35" name="">
             <a:extLst xmlns:a="http://schemas.openxmlformats.org/drawingml/2006/main">
               <a:ext uri="{FF2B5EF4-FFF2-40B4-BE49-F238E27FC236}">
-                <a16:creationId xmlns:a16="http://schemas.microsoft.com/office/drawing/2014/main" id="{EB3CB9A2-A8E9-4C73-A5CE-237640F7B104}"/>
+                <a16:creationId xmlns:a16="http://schemas.microsoft.com/office/drawing/2014/main" id="{348BF005-06C6-4ECB-A65A-5BD877E0B520}"/>
               </a:ext>
             </a:extLst>
           </p:cNvPr>
@@ -14506,7 +14506,7 @@
           <p:cNvPr id="36" name="">
             <a:extLst xmlns:a="http://schemas.openxmlformats.org/drawingml/2006/main">
               <a:ext uri="{FF2B5EF4-FFF2-40B4-BE49-F238E27FC236}">
-                <a16:creationId xmlns:a16="http://schemas.microsoft.com/office/drawing/2014/main" id="{C5AF1B55-981A-475B-8667-50D7CD39DB8D}"/>
+                <a16:creationId xmlns:a16="http://schemas.microsoft.com/office/drawing/2014/main" id="{C37B7F9C-6786-4D5C-B403-0E33F230CE5D}"/>
               </a:ext>
             </a:extLst>
           </p:cNvPr>
@@ -14568,7 +14568,7 @@
           <p:cNvPr id="37" name="">
             <a:extLst xmlns:a="http://schemas.openxmlformats.org/drawingml/2006/main">
               <a:ext uri="{FF2B5EF4-FFF2-40B4-BE49-F238E27FC236}">
-                <a16:creationId xmlns:a16="http://schemas.microsoft.com/office/drawing/2014/main" id="{59E6E5E8-8B85-49CF-B215-251E35A26EEB}"/>
+                <a16:creationId xmlns:a16="http://schemas.microsoft.com/office/drawing/2014/main" id="{2E672602-D54E-4201-8980-775F44FCD323}"/>
               </a:ext>
             </a:extLst>
           </p:cNvPr>
@@ -14601,7 +14601,7 @@
           <p:cNvPr id="38" name="">
             <a:extLst xmlns:a="http://schemas.openxmlformats.org/drawingml/2006/main">
               <a:ext uri="{FF2B5EF4-FFF2-40B4-BE49-F238E27FC236}">
-                <a16:creationId xmlns:a16="http://schemas.microsoft.com/office/drawing/2014/main" id="{E27E72FC-1127-4645-A64E-10BF6FB293B4}"/>
+                <a16:creationId xmlns:a16="http://schemas.microsoft.com/office/drawing/2014/main" id="{950DA206-8AFC-4E36-A995-0278EAB312C3}"/>
               </a:ext>
             </a:extLst>
           </p:cNvPr>
@@ -14663,7 +14663,7 @@
           <p:cNvPr id="39" name="">
             <a:extLst xmlns:a="http://schemas.openxmlformats.org/drawingml/2006/main">
               <a:ext uri="{FF2B5EF4-FFF2-40B4-BE49-F238E27FC236}">
-                <a16:creationId xmlns:a16="http://schemas.microsoft.com/office/drawing/2014/main" id="{D52B90E5-862B-4127-93CB-51C3338B04BE}"/>
+                <a16:creationId xmlns:a16="http://schemas.microsoft.com/office/drawing/2014/main" id="{397C5019-839B-4DAF-AE88-83B405221838}"/>
               </a:ext>
             </a:extLst>
           </p:cNvPr>
@@ -14696,7 +14696,7 @@
           <p:cNvPr id="40" name="">
             <a:extLst xmlns:a="http://schemas.openxmlformats.org/drawingml/2006/main">
               <a:ext uri="{FF2B5EF4-FFF2-40B4-BE49-F238E27FC236}">
-                <a16:creationId xmlns:a16="http://schemas.microsoft.com/office/drawing/2014/main" id="{19F57525-3E76-4601-9587-EC24CAFB34E3}"/>
+                <a16:creationId xmlns:a16="http://schemas.microsoft.com/office/drawing/2014/main" id="{10CCC68F-B28A-48A7-A99B-2DED3F853B74}"/>
               </a:ext>
             </a:extLst>
           </p:cNvPr>
@@ -14758,7 +14758,7 @@
           <p:cNvPr id="41" name="">
             <a:extLst xmlns:a="http://schemas.openxmlformats.org/drawingml/2006/main">
               <a:ext uri="{FF2B5EF4-FFF2-40B4-BE49-F238E27FC236}">
-                <a16:creationId xmlns:a16="http://schemas.microsoft.com/office/drawing/2014/main" id="{28CC1187-4C6C-4C66-B243-EC62990D84DA}"/>
+                <a16:creationId xmlns:a16="http://schemas.microsoft.com/office/drawing/2014/main" id="{35487842-85A8-41D5-95CF-34528E36DB03}"/>
               </a:ext>
             </a:extLst>
           </p:cNvPr>
@@ -14791,7 +14791,7 @@
           <p:cNvPr id="42" name="">
             <a:extLst xmlns:a="http://schemas.openxmlformats.org/drawingml/2006/main">
               <a:ext uri="{FF2B5EF4-FFF2-40B4-BE49-F238E27FC236}">
-                <a16:creationId xmlns:a16="http://schemas.microsoft.com/office/drawing/2014/main" id="{F8745B05-0E88-4534-BD07-24B94ADEE886}"/>
+                <a16:creationId xmlns:a16="http://schemas.microsoft.com/office/drawing/2014/main" id="{8F60B9C0-1C26-41D0-840D-64D174D61CF2}"/>
               </a:ext>
             </a:extLst>
           </p:cNvPr>
@@ -14853,7 +14853,7 @@
           <p:cNvPr id="43" name="">
             <a:extLst xmlns:a="http://schemas.openxmlformats.org/drawingml/2006/main">
               <a:ext uri="{FF2B5EF4-FFF2-40B4-BE49-F238E27FC236}">
-                <a16:creationId xmlns:a16="http://schemas.microsoft.com/office/drawing/2014/main" id="{7D8E676A-EF8B-433F-98F4-78F8E617F68C}"/>
+                <a16:creationId xmlns:a16="http://schemas.microsoft.com/office/drawing/2014/main" id="{23A307FC-27FE-4E95-9F3F-2D3E3ACF4CDD}"/>
               </a:ext>
             </a:extLst>
           </p:cNvPr>
@@ -14886,7 +14886,7 @@
           <p:cNvPr id="44" name="">
             <a:extLst xmlns:a="http://schemas.openxmlformats.org/drawingml/2006/main">
               <a:ext uri="{FF2B5EF4-FFF2-40B4-BE49-F238E27FC236}">
-                <a16:creationId xmlns:a16="http://schemas.microsoft.com/office/drawing/2014/main" id="{F919BB61-1BC3-49C3-A69D-1FBCDA32FFF9}"/>
+                <a16:creationId xmlns:a16="http://schemas.microsoft.com/office/drawing/2014/main" id="{15F36232-45AA-411C-868B-CA05A449E251}"/>
               </a:ext>
             </a:extLst>
           </p:cNvPr>
@@ -14948,7 +14948,7 @@
           <p:cNvPr id="45" name="">
             <a:extLst xmlns:a="http://schemas.openxmlformats.org/drawingml/2006/main">
               <a:ext uri="{FF2B5EF4-FFF2-40B4-BE49-F238E27FC236}">
-                <a16:creationId xmlns:a16="http://schemas.microsoft.com/office/drawing/2014/main" id="{57235FBA-F752-406E-8971-C4D2C4914A73}"/>
+                <a16:creationId xmlns:a16="http://schemas.microsoft.com/office/drawing/2014/main" id="{43B48150-B3AA-40CD-B39D-EFD324671DAF}"/>
               </a:ext>
             </a:extLst>
           </p:cNvPr>
@@ -14981,7 +14981,7 @@
           <p:cNvPr id="46" name="">
             <a:extLst xmlns:a="http://schemas.openxmlformats.org/drawingml/2006/main">
               <a:ext uri="{FF2B5EF4-FFF2-40B4-BE49-F238E27FC236}">
-                <a16:creationId xmlns:a16="http://schemas.microsoft.com/office/drawing/2014/main" id="{21778DE4-9687-45BC-B121-BC8775BDA64E}"/>
+                <a16:creationId xmlns:a16="http://schemas.microsoft.com/office/drawing/2014/main" id="{FAFBE31F-B3E1-4674-AD90-A4C5F5D891DF}"/>
               </a:ext>
             </a:extLst>
           </p:cNvPr>
@@ -15043,7 +15043,7 @@
           <p:cNvPr id="47" name="">
             <a:extLst xmlns:a="http://schemas.openxmlformats.org/drawingml/2006/main">
               <a:ext uri="{FF2B5EF4-FFF2-40B4-BE49-F238E27FC236}">
-                <a16:creationId xmlns:a16="http://schemas.microsoft.com/office/drawing/2014/main" id="{6CBD51C0-F90E-4F36-A65B-393C0A178D20}"/>
+                <a16:creationId xmlns:a16="http://schemas.microsoft.com/office/drawing/2014/main" id="{079FE4C4-BF52-4A9B-B29C-478F4DF79E65}"/>
               </a:ext>
             </a:extLst>
           </p:cNvPr>
@@ -15076,7 +15076,7 @@
           <p:cNvPr id="48" name="">
             <a:extLst xmlns:a="http://schemas.openxmlformats.org/drawingml/2006/main">
               <a:ext uri="{FF2B5EF4-FFF2-40B4-BE49-F238E27FC236}">
-                <a16:creationId xmlns:a16="http://schemas.microsoft.com/office/drawing/2014/main" id="{BC1ABC59-2F7C-4A75-810A-32233C486C13}"/>
+                <a16:creationId xmlns:a16="http://schemas.microsoft.com/office/drawing/2014/main" id="{7C8EA5C1-4A45-4124-9A7F-88E0CD1A4DEA}"/>
               </a:ext>
             </a:extLst>
           </p:cNvPr>
@@ -15138,7 +15138,7 @@
           <p:cNvPr id="49" name="">
             <a:extLst xmlns:a="http://schemas.openxmlformats.org/drawingml/2006/main">
               <a:ext uri="{FF2B5EF4-FFF2-40B4-BE49-F238E27FC236}">
-                <a16:creationId xmlns:a16="http://schemas.microsoft.com/office/drawing/2014/main" id="{EBE061EA-3082-4A59-993D-A8FFCD12AAF9}"/>
+                <a16:creationId xmlns:a16="http://schemas.microsoft.com/office/drawing/2014/main" id="{47DC072F-ED66-409B-A1CD-E9E05E090703}"/>
               </a:ext>
             </a:extLst>
           </p:cNvPr>
@@ -15171,7 +15171,7 @@
           <p:cNvPr id="50" name="">
             <a:extLst xmlns:a="http://schemas.openxmlformats.org/drawingml/2006/main">
               <a:ext uri="{FF2B5EF4-FFF2-40B4-BE49-F238E27FC236}">
-                <a16:creationId xmlns:a16="http://schemas.microsoft.com/office/drawing/2014/main" id="{ABE66EF5-A7F9-4B96-91D5-C750D0AB2E11}"/>
+                <a16:creationId xmlns:a16="http://schemas.microsoft.com/office/drawing/2014/main" id="{AFDFF6CA-2055-46E8-9C5D-1E7F9A402248}"/>
               </a:ext>
             </a:extLst>
           </p:cNvPr>
@@ -15233,7 +15233,7 @@
           <p:cNvPr id="51" name="">
             <a:extLst xmlns:a="http://schemas.openxmlformats.org/drawingml/2006/main">
               <a:ext uri="{FF2B5EF4-FFF2-40B4-BE49-F238E27FC236}">
-                <a16:creationId xmlns:a16="http://schemas.microsoft.com/office/drawing/2014/main" id="{662DAE6B-34B4-419E-AEB9-57C13D2FB201}"/>
+                <a16:creationId xmlns:a16="http://schemas.microsoft.com/office/drawing/2014/main" id="{35BE9D9B-F69D-4DB2-B27F-9856C4A02C1C}"/>
               </a:ext>
             </a:extLst>
           </p:cNvPr>
@@ -15266,7 +15266,7 @@
           <p:cNvPr id="52" name="">
             <a:extLst xmlns:a="http://schemas.openxmlformats.org/drawingml/2006/main">
               <a:ext uri="{FF2B5EF4-FFF2-40B4-BE49-F238E27FC236}">
-                <a16:creationId xmlns:a16="http://schemas.microsoft.com/office/drawing/2014/main" id="{31A24E60-1F7E-4A7B-8EA2-62C98336E13D}"/>
+                <a16:creationId xmlns:a16="http://schemas.microsoft.com/office/drawing/2014/main" id="{D5376EA8-8EAB-42F4-B022-F576D7F7FFF8}"/>
               </a:ext>
             </a:extLst>
           </p:cNvPr>
@@ -15328,7 +15328,7 @@
           <p:cNvPr id="53" name="">
             <a:extLst xmlns:a="http://schemas.openxmlformats.org/drawingml/2006/main">
               <a:ext uri="{FF2B5EF4-FFF2-40B4-BE49-F238E27FC236}">
-                <a16:creationId xmlns:a16="http://schemas.microsoft.com/office/drawing/2014/main" id="{918999B6-FAD6-4BD1-8D21-DF2619DBBEA5}"/>
+                <a16:creationId xmlns:a16="http://schemas.microsoft.com/office/drawing/2014/main" id="{1B175879-9CC6-4F4E-B4CE-44355DC7EA5B}"/>
               </a:ext>
             </a:extLst>
           </p:cNvPr>
@@ -15361,7 +15361,7 @@
           <p:cNvPr id="54" name="">
             <a:extLst xmlns:a="http://schemas.openxmlformats.org/drawingml/2006/main">
               <a:ext uri="{FF2B5EF4-FFF2-40B4-BE49-F238E27FC236}">
-                <a16:creationId xmlns:a16="http://schemas.microsoft.com/office/drawing/2014/main" id="{1B765E4F-35D1-4429-A615-276D041A2358}"/>
+                <a16:creationId xmlns:a16="http://schemas.microsoft.com/office/drawing/2014/main" id="{7F6D402C-DA75-455E-815E-0A313FC1A31F}"/>
               </a:ext>
             </a:extLst>
           </p:cNvPr>
@@ -15423,7 +15423,7 @@
           <p:cNvPr id="55" name="">
             <a:extLst xmlns:a="http://schemas.openxmlformats.org/drawingml/2006/main">
               <a:ext uri="{FF2B5EF4-FFF2-40B4-BE49-F238E27FC236}">
-                <a16:creationId xmlns:a16="http://schemas.microsoft.com/office/drawing/2014/main" id="{142A8612-7027-42C4-8ED5-2A309C944A3D}"/>
+                <a16:creationId xmlns:a16="http://schemas.microsoft.com/office/drawing/2014/main" id="{C8B22AAC-7588-4BD9-B08A-8BAAFBD9074E}"/>
               </a:ext>
             </a:extLst>
           </p:cNvPr>
@@ -15456,7 +15456,7 @@
           <p:cNvPr id="56" name="">
             <a:extLst xmlns:a="http://schemas.openxmlformats.org/drawingml/2006/main">
               <a:ext uri="{FF2B5EF4-FFF2-40B4-BE49-F238E27FC236}">
-                <a16:creationId xmlns:a16="http://schemas.microsoft.com/office/drawing/2014/main" id="{50A8B54A-CB18-4B3C-AA6C-1A71DDE4E328}"/>
+                <a16:creationId xmlns:a16="http://schemas.microsoft.com/office/drawing/2014/main" id="{F681B2F4-CB0F-4B3C-9369-2E9A39D1D96F}"/>
               </a:ext>
             </a:extLst>
           </p:cNvPr>
@@ -15518,7 +15518,7 @@
           <p:cNvPr id="57" name="">
             <a:extLst xmlns:a="http://schemas.openxmlformats.org/drawingml/2006/main">
               <a:ext uri="{FF2B5EF4-FFF2-40B4-BE49-F238E27FC236}">
-                <a16:creationId xmlns:a16="http://schemas.microsoft.com/office/drawing/2014/main" id="{F42934A1-33AA-4FAC-A490-B47D1DE042AF}"/>
+                <a16:creationId xmlns:a16="http://schemas.microsoft.com/office/drawing/2014/main" id="{03BBDC3E-92DF-4EA4-9D99-98111AC432F3}"/>
               </a:ext>
             </a:extLst>
           </p:cNvPr>
@@ -15551,7 +15551,7 @@
           <p:cNvPr id="58" name="">
             <a:extLst xmlns:a="http://schemas.openxmlformats.org/drawingml/2006/main">
               <a:ext uri="{FF2B5EF4-FFF2-40B4-BE49-F238E27FC236}">
-                <a16:creationId xmlns:a16="http://schemas.microsoft.com/office/drawing/2014/main" id="{5E146743-6EB7-4F7C-AACE-02D0528C7AEE}"/>
+                <a16:creationId xmlns:a16="http://schemas.microsoft.com/office/drawing/2014/main" id="{3BB673D4-5BE2-4045-B42A-EC1442D1E3BE}"/>
               </a:ext>
             </a:extLst>
           </p:cNvPr>
@@ -15613,7 +15613,7 @@
           <p:cNvPr id="59" name="">
             <a:extLst xmlns:a="http://schemas.openxmlformats.org/drawingml/2006/main">
               <a:ext uri="{FF2B5EF4-FFF2-40B4-BE49-F238E27FC236}">
-                <a16:creationId xmlns:a16="http://schemas.microsoft.com/office/drawing/2014/main" id="{06D734A0-D3AB-4AF2-9B15-03CDD8F21330}"/>
+                <a16:creationId xmlns:a16="http://schemas.microsoft.com/office/drawing/2014/main" id="{81ABEDC6-0391-496D-8AAA-75A5498CF45C}"/>
               </a:ext>
             </a:extLst>
           </p:cNvPr>
@@ -15646,7 +15646,7 @@
           <p:cNvPr id="60" name="">
             <a:extLst xmlns:a="http://schemas.openxmlformats.org/drawingml/2006/main">
               <a:ext uri="{FF2B5EF4-FFF2-40B4-BE49-F238E27FC236}">
-                <a16:creationId xmlns:a16="http://schemas.microsoft.com/office/drawing/2014/main" id="{E4EFE6F5-1E1D-4958-A931-C1C9C5218B91}"/>
+                <a16:creationId xmlns:a16="http://schemas.microsoft.com/office/drawing/2014/main" id="{402C9DC2-05FD-4844-B344-5021B930EFA0}"/>
               </a:ext>
             </a:extLst>
           </p:cNvPr>
@@ -15708,7 +15708,7 @@
           <p:cNvPr id="61" name="">
             <a:extLst xmlns:a="http://schemas.openxmlformats.org/drawingml/2006/main">
               <a:ext uri="{FF2B5EF4-FFF2-40B4-BE49-F238E27FC236}">
-                <a16:creationId xmlns:a16="http://schemas.microsoft.com/office/drawing/2014/main" id="{5F2A7FAC-E51C-42A0-80B5-45571A3C97C7}"/>
+                <a16:creationId xmlns:a16="http://schemas.microsoft.com/office/drawing/2014/main" id="{74CAC7BC-58AC-4E7C-994B-2F3FCBCCA4E6}"/>
               </a:ext>
             </a:extLst>
           </p:cNvPr>
@@ -15743,7 +15743,7 @@
           <p:cNvPr id="62" name="">
             <a:extLst xmlns:a="http://schemas.openxmlformats.org/drawingml/2006/main">
               <a:ext uri="{FF2B5EF4-FFF2-40B4-BE49-F238E27FC236}">
-                <a16:creationId xmlns:a16="http://schemas.microsoft.com/office/drawing/2014/main" id="{72789B66-3B60-4DD5-BDAA-6DEA95CC9F6B}"/>
+                <a16:creationId xmlns:a16="http://schemas.microsoft.com/office/drawing/2014/main" id="{D36AB3A4-1000-4324-AF61-2EF98BB30E99}"/>
               </a:ext>
             </a:extLst>
           </p:cNvPr>
@@ -15805,7 +15805,7 @@
           <p:cNvPr id="63" name="">
             <a:extLst xmlns:a="http://schemas.openxmlformats.org/drawingml/2006/main">
               <a:ext uri="{FF2B5EF4-FFF2-40B4-BE49-F238E27FC236}">
-                <a16:creationId xmlns:a16="http://schemas.microsoft.com/office/drawing/2014/main" id="{A3885388-14E9-4BD6-8C13-8A6CA5F134D7}"/>
+                <a16:creationId xmlns:a16="http://schemas.microsoft.com/office/drawing/2014/main" id="{C1F91549-C1AC-42D2-AF4A-78F41E2F1EB0}"/>
               </a:ext>
             </a:extLst>
           </p:cNvPr>
@@ -15867,7 +15867,7 @@
           <p:cNvPr id="64" name="">
             <a:extLst xmlns:a="http://schemas.openxmlformats.org/drawingml/2006/main">
               <a:ext uri="{FF2B5EF4-FFF2-40B4-BE49-F238E27FC236}">
-                <a16:creationId xmlns:a16="http://schemas.microsoft.com/office/drawing/2014/main" id="{F9072678-70E5-457B-9886-422E1973B572}"/>
+                <a16:creationId xmlns:a16="http://schemas.microsoft.com/office/drawing/2014/main" id="{0913098F-8C14-4306-8F0D-00E97F7A853C}"/>
               </a:ext>
             </a:extLst>
           </p:cNvPr>
@@ -15902,7 +15902,7 @@
           <p:cNvPr id="65" name="">
             <a:extLst xmlns:a="http://schemas.openxmlformats.org/drawingml/2006/main">
               <a:ext uri="{FF2B5EF4-FFF2-40B4-BE49-F238E27FC236}">
-                <a16:creationId xmlns:a16="http://schemas.microsoft.com/office/drawing/2014/main" id="{40A8B8BE-C6BF-44B3-8552-3D5C6AFF00FB}"/>
+                <a16:creationId xmlns:a16="http://schemas.microsoft.com/office/drawing/2014/main" id="{061F1D79-CCF8-475C-90B6-8A6CB849AFE8}"/>
               </a:ext>
             </a:extLst>
           </p:cNvPr>
@@ -15964,7 +15964,7 @@
           <p:cNvPr id="66" name="">
             <a:extLst xmlns:a="http://schemas.openxmlformats.org/drawingml/2006/main">
               <a:ext uri="{FF2B5EF4-FFF2-40B4-BE49-F238E27FC236}">
-                <a16:creationId xmlns:a16="http://schemas.microsoft.com/office/drawing/2014/main" id="{475731FF-1756-4A40-9BE3-F046548F2C99}"/>
+                <a16:creationId xmlns:a16="http://schemas.microsoft.com/office/drawing/2014/main" id="{A72BC051-4480-415B-9E3C-8CC26A885F13}"/>
               </a:ext>
             </a:extLst>
           </p:cNvPr>
@@ -16026,7 +16026,7 @@
           <p:cNvPr id="67" name="">
             <a:extLst xmlns:a="http://schemas.openxmlformats.org/drawingml/2006/main">
               <a:ext uri="{FF2B5EF4-FFF2-40B4-BE49-F238E27FC236}">
-                <a16:creationId xmlns:a16="http://schemas.microsoft.com/office/drawing/2014/main" id="{4C30A90E-5762-40A5-BDEB-D360B5EEE542}"/>
+                <a16:creationId xmlns:a16="http://schemas.microsoft.com/office/drawing/2014/main" id="{AC698C3A-2059-47B1-9C97-E94426AEB2CF}"/>
               </a:ext>
             </a:extLst>
           </p:cNvPr>
@@ -16067,7 +16067,7 @@
           <p:cNvPr id="68" name="">
             <a:extLst xmlns:a="http://schemas.openxmlformats.org/drawingml/2006/main">
               <a:ext uri="{FF2B5EF4-FFF2-40B4-BE49-F238E27FC236}">
-                <a16:creationId xmlns:a16="http://schemas.microsoft.com/office/drawing/2014/main" id="{241E0764-A858-429B-9F59-1D9DB3295554}"/>
+                <a16:creationId xmlns:a16="http://schemas.microsoft.com/office/drawing/2014/main" id="{92E456E5-AF97-413A-94E2-1C11E7449C04}"/>
               </a:ext>
             </a:extLst>
           </p:cNvPr>
@@ -16100,7 +16100,7 @@
           <p:cNvPr id="69" name="">
             <a:extLst xmlns:a="http://schemas.openxmlformats.org/drawingml/2006/main">
               <a:ext uri="{FF2B5EF4-FFF2-40B4-BE49-F238E27FC236}">
-                <a16:creationId xmlns:a16="http://schemas.microsoft.com/office/drawing/2014/main" id="{E2CA3651-309F-4A1D-B01A-ECF871597C7A}"/>
+                <a16:creationId xmlns:a16="http://schemas.microsoft.com/office/drawing/2014/main" id="{ABB73544-3326-4ACA-98E0-373495C13968}"/>
               </a:ext>
             </a:extLst>
           </p:cNvPr>
@@ -16162,7 +16162,7 @@
           <p:cNvPr id="70" name="">
             <a:extLst xmlns:a="http://schemas.openxmlformats.org/drawingml/2006/main">
               <a:ext uri="{FF2B5EF4-FFF2-40B4-BE49-F238E27FC236}">
-                <a16:creationId xmlns:a16="http://schemas.microsoft.com/office/drawing/2014/main" id="{C8FEAAAC-3FCE-4BCC-8247-711658A6A61D}"/>
+                <a16:creationId xmlns:a16="http://schemas.microsoft.com/office/drawing/2014/main" id="{47C40420-9DBF-4582-B3B9-19373A61A65C}"/>
               </a:ext>
             </a:extLst>
           </p:cNvPr>
@@ -16222,7 +16222,7 @@
     </p:spTree>
     <p:extLst>
       <p:ext uri="{BB962C8B-B14F-4D97-AF65-F5344CB8AC3E}">
-        <p14:creationId xmlns:p14="http://schemas.microsoft.com/office/powerpoint/2010/main" val="795654319"/>
+        <p14:creationId xmlns:p14="http://schemas.microsoft.com/office/powerpoint/2010/main" val="54004454"/>
       </p:ext>
     </p:extLst>
   </p:cSld>
@@ -16253,7 +16253,7 @@
           <p:cNvPr id="33" name="">
             <a:extLst xmlns:a="http://schemas.openxmlformats.org/drawingml/2006/main">
               <a:ext uri="{FF2B5EF4-FFF2-40B4-BE49-F238E27FC236}">
-                <a16:creationId xmlns:a16="http://schemas.microsoft.com/office/drawing/2014/main" id="{5F0913C3-5908-44A3-BEDF-53C5D8FC9DB4}"/>
+                <a16:creationId xmlns:a16="http://schemas.microsoft.com/office/drawing/2014/main" id="{76A3DC35-DA17-4AF4-9A68-86802A2C61B9}"/>
               </a:ext>
             </a:extLst>
           </p:cNvPr>
@@ -16286,7 +16286,7 @@
           <p:cNvPr id="2" name="">
             <a:extLst xmlns:a="http://schemas.openxmlformats.org/drawingml/2006/main">
               <a:ext uri="{FF2B5EF4-FFF2-40B4-BE49-F238E27FC236}">
-                <a16:creationId xmlns:a16="http://schemas.microsoft.com/office/drawing/2014/main" id="{06DAFBBF-9ADC-41DA-BA33-279388CE68D4}"/>
+                <a16:creationId xmlns:a16="http://schemas.microsoft.com/office/drawing/2014/main" id="{84F5AA2B-10F7-4B88-99CB-62DE78677B54}"/>
               </a:ext>
             </a:extLst>
           </p:cNvPr>
@@ -16348,7 +16348,7 @@
           <p:cNvPr id="3" name="">
             <a:extLst xmlns:a="http://schemas.openxmlformats.org/drawingml/2006/main">
               <a:ext uri="{FF2B5EF4-FFF2-40B4-BE49-F238E27FC236}">
-                <a16:creationId xmlns:a16="http://schemas.microsoft.com/office/drawing/2014/main" id="{EA11F7BB-AD99-41C9-B978-EB9E000B0BAD}"/>
+                <a16:creationId xmlns:a16="http://schemas.microsoft.com/office/drawing/2014/main" id="{1B8622C4-5560-45A1-8690-68F4C873C199}"/>
               </a:ext>
             </a:extLst>
           </p:cNvPr>
@@ -16410,7 +16410,7 @@
           <p:cNvPr id="4" name="">
             <a:extLst xmlns:a="http://schemas.openxmlformats.org/drawingml/2006/main">
               <a:ext uri="{FF2B5EF4-FFF2-40B4-BE49-F238E27FC236}">
-                <a16:creationId xmlns:a16="http://schemas.microsoft.com/office/drawing/2014/main" id="{6468C954-F49F-45E4-AA94-62E4B83CF820}"/>
+                <a16:creationId xmlns:a16="http://schemas.microsoft.com/office/drawing/2014/main" id="{2ECBCAC6-FD86-41A7-A72B-B3AAD79E6502}"/>
               </a:ext>
             </a:extLst>
           </p:cNvPr>
@@ -16443,7 +16443,7 @@
           <p:cNvPr id="5" name="">
             <a:extLst xmlns:a="http://schemas.openxmlformats.org/drawingml/2006/main">
               <a:ext uri="{FF2B5EF4-FFF2-40B4-BE49-F238E27FC236}">
-                <a16:creationId xmlns:a16="http://schemas.microsoft.com/office/drawing/2014/main" id="{9430A402-9075-408C-92E7-019487C1BBBE}"/>
+                <a16:creationId xmlns:a16="http://schemas.microsoft.com/office/drawing/2014/main" id="{62411745-8477-40FE-84B5-72A0710E1E33}"/>
               </a:ext>
             </a:extLst>
           </p:cNvPr>
@@ -16505,7 +16505,7 @@
           <p:cNvPr id="6" name="">
             <a:extLst xmlns:a="http://schemas.openxmlformats.org/drawingml/2006/main">
               <a:ext uri="{FF2B5EF4-FFF2-40B4-BE49-F238E27FC236}">
-                <a16:creationId xmlns:a16="http://schemas.microsoft.com/office/drawing/2014/main" id="{F6F27688-0B7E-44C6-9F83-28A073B27126}"/>
+                <a16:creationId xmlns:a16="http://schemas.microsoft.com/office/drawing/2014/main" id="{15286EC2-1DB5-4783-AC22-079C8BB14ECD}"/>
               </a:ext>
             </a:extLst>
           </p:cNvPr>
@@ -16567,7 +16567,7 @@
           <p:cNvPr id="7" name="">
             <a:extLst xmlns:a="http://schemas.openxmlformats.org/drawingml/2006/main">
               <a:ext uri="{FF2B5EF4-FFF2-40B4-BE49-F238E27FC236}">
-                <a16:creationId xmlns:a16="http://schemas.microsoft.com/office/drawing/2014/main" id="{952AF97C-8F3E-468D-B409-D415832148F1}"/>
+                <a16:creationId xmlns:a16="http://schemas.microsoft.com/office/drawing/2014/main" id="{341E951E-10AA-4A31-B2F0-8B36749C298E}"/>
               </a:ext>
             </a:extLst>
           </p:cNvPr>
@@ -16608,7 +16608,7 @@
           <p:cNvPr id="8" name="">
             <a:extLst xmlns:a="http://schemas.openxmlformats.org/drawingml/2006/main">
               <a:ext uri="{FF2B5EF4-FFF2-40B4-BE49-F238E27FC236}">
-                <a16:creationId xmlns:a16="http://schemas.microsoft.com/office/drawing/2014/main" id="{CC93D985-FB8E-4314-BDC3-2D20A1AD7BBC}"/>
+                <a16:creationId xmlns:a16="http://schemas.microsoft.com/office/drawing/2014/main" id="{30C59F67-F1A9-429A-85C4-9705BB177260}"/>
               </a:ext>
             </a:extLst>
           </p:cNvPr>
@@ -16641,7 +16641,7 @@
           <p:cNvPr id="9" name="">
             <a:extLst xmlns:a="http://schemas.openxmlformats.org/drawingml/2006/main">
               <a:ext uri="{FF2B5EF4-FFF2-40B4-BE49-F238E27FC236}">
-                <a16:creationId xmlns:a16="http://schemas.microsoft.com/office/drawing/2014/main" id="{F754EFD8-C883-4F1E-8181-76AF1338D9C4}"/>
+                <a16:creationId xmlns:a16="http://schemas.microsoft.com/office/drawing/2014/main" id="{65898157-28E5-486D-86BC-D30B81B1299A}"/>
               </a:ext>
             </a:extLst>
           </p:cNvPr>
@@ -16703,7 +16703,7 @@
           <p:cNvPr id="10" name="">
             <a:extLst xmlns:a="http://schemas.openxmlformats.org/drawingml/2006/main">
               <a:ext uri="{FF2B5EF4-FFF2-40B4-BE49-F238E27FC236}">
-                <a16:creationId xmlns:a16="http://schemas.microsoft.com/office/drawing/2014/main" id="{C8A67E36-8A28-4437-B712-CCED7BD5E3D4}"/>
+                <a16:creationId xmlns:a16="http://schemas.microsoft.com/office/drawing/2014/main" id="{8F9E52ED-DF3B-48C6-B681-1F07D4B76389}"/>
               </a:ext>
             </a:extLst>
           </p:cNvPr>
@@ -16765,7 +16765,7 @@
           <p:cNvPr id="11" name="">
             <a:extLst xmlns:a="http://schemas.openxmlformats.org/drawingml/2006/main">
               <a:ext uri="{FF2B5EF4-FFF2-40B4-BE49-F238E27FC236}">
-                <a16:creationId xmlns:a16="http://schemas.microsoft.com/office/drawing/2014/main" id="{316E1981-CDDB-40AD-A843-4AAAD5610A30}"/>
+                <a16:creationId xmlns:a16="http://schemas.microsoft.com/office/drawing/2014/main" id="{2EDF9EBC-BB1E-4FC8-89CA-A13E8C9D7249}"/>
               </a:ext>
             </a:extLst>
           </p:cNvPr>
@@ -16800,7 +16800,7 @@
           <p:cNvPr id="12" name="">
             <a:extLst xmlns:a="http://schemas.openxmlformats.org/drawingml/2006/main">
               <a:ext uri="{FF2B5EF4-FFF2-40B4-BE49-F238E27FC236}">
-                <a16:creationId xmlns:a16="http://schemas.microsoft.com/office/drawing/2014/main" id="{6BEBF1C2-F91D-49A2-86D3-2C16EAEBBCF3}"/>
+                <a16:creationId xmlns:a16="http://schemas.microsoft.com/office/drawing/2014/main" id="{61EFB857-6B2C-4509-805A-1FBF66D2B925}"/>
               </a:ext>
             </a:extLst>
           </p:cNvPr>
@@ -16862,7 +16862,7 @@
           <p:cNvPr id="13" name="">
             <a:extLst xmlns:a="http://schemas.openxmlformats.org/drawingml/2006/main">
               <a:ext uri="{FF2B5EF4-FFF2-40B4-BE49-F238E27FC236}">
-                <a16:creationId xmlns:a16="http://schemas.microsoft.com/office/drawing/2014/main" id="{91AF585F-C373-4B24-8AF8-9A3669114AE4}"/>
+                <a16:creationId xmlns:a16="http://schemas.microsoft.com/office/drawing/2014/main" id="{BC48434B-BB6D-4F85-839C-BA54A2535807}"/>
               </a:ext>
             </a:extLst>
           </p:cNvPr>
@@ -16903,7 +16903,7 @@
           <p:cNvPr id="14" name="">
             <a:extLst xmlns:a="http://schemas.openxmlformats.org/drawingml/2006/main">
               <a:ext uri="{FF2B5EF4-FFF2-40B4-BE49-F238E27FC236}">
-                <a16:creationId xmlns:a16="http://schemas.microsoft.com/office/drawing/2014/main" id="{8BBC7C3F-7551-4296-BC0C-9708F4B96984}"/>
+                <a16:creationId xmlns:a16="http://schemas.microsoft.com/office/drawing/2014/main" id="{2B336CA5-6A93-4A90-9B49-8AC31EFBC703}"/>
               </a:ext>
             </a:extLst>
           </p:cNvPr>
@@ -16936,7 +16936,7 @@
           <p:cNvPr id="15" name="">
             <a:extLst xmlns:a="http://schemas.openxmlformats.org/drawingml/2006/main">
               <a:ext uri="{FF2B5EF4-FFF2-40B4-BE49-F238E27FC236}">
-                <a16:creationId xmlns:a16="http://schemas.microsoft.com/office/drawing/2014/main" id="{EC108A09-C219-4DB9-BDDC-610462C859D6}"/>
+                <a16:creationId xmlns:a16="http://schemas.microsoft.com/office/drawing/2014/main" id="{C0B8DC7C-4ABE-486D-AC99-C40302FC22DF}"/>
               </a:ext>
             </a:extLst>
           </p:cNvPr>
@@ -16998,7 +16998,7 @@
           <p:cNvPr id="16" name="">
             <a:extLst xmlns:a="http://schemas.openxmlformats.org/drawingml/2006/main">
               <a:ext uri="{FF2B5EF4-FFF2-40B4-BE49-F238E27FC236}">
-                <a16:creationId xmlns:a16="http://schemas.microsoft.com/office/drawing/2014/main" id="{FBB7D471-0839-4354-BC0B-AA62EEF411A0}"/>
+                <a16:creationId xmlns:a16="http://schemas.microsoft.com/office/drawing/2014/main" id="{4230D308-CFE1-45D5-8453-1EC53A0940F1}"/>
               </a:ext>
             </a:extLst>
           </p:cNvPr>
@@ -17060,7 +17060,7 @@
           <p:cNvPr id="17" name="">
             <a:extLst xmlns:a="http://schemas.openxmlformats.org/drawingml/2006/main">
               <a:ext uri="{FF2B5EF4-FFF2-40B4-BE49-F238E27FC236}">
-                <a16:creationId xmlns:a16="http://schemas.microsoft.com/office/drawing/2014/main" id="{C0B4AA24-A0CD-4070-B48C-D7F38A62395C}"/>
+                <a16:creationId xmlns:a16="http://schemas.microsoft.com/office/drawing/2014/main" id="{5E5E7830-E17F-4866-B645-6439629A4444}"/>
               </a:ext>
             </a:extLst>
           </p:cNvPr>
@@ -17095,7 +17095,7 @@
           <p:cNvPr id="18" name="">
             <a:extLst xmlns:a="http://schemas.openxmlformats.org/drawingml/2006/main">
               <a:ext uri="{FF2B5EF4-FFF2-40B4-BE49-F238E27FC236}">
-                <a16:creationId xmlns:a16="http://schemas.microsoft.com/office/drawing/2014/main" id="{423F5789-1B7D-47A0-8195-0554C65F83D9}"/>
+                <a16:creationId xmlns:a16="http://schemas.microsoft.com/office/drawing/2014/main" id="{C0DD525F-5B8A-4F84-879B-38BEBED40151}"/>
               </a:ext>
             </a:extLst>
           </p:cNvPr>
@@ -17157,7 +17157,7 @@
           <p:cNvPr id="19" name="">
             <a:extLst xmlns:a="http://schemas.openxmlformats.org/drawingml/2006/main">
               <a:ext uri="{FF2B5EF4-FFF2-40B4-BE49-F238E27FC236}">
-                <a16:creationId xmlns:a16="http://schemas.microsoft.com/office/drawing/2014/main" id="{CC0B89AF-9785-4A0E-8E1B-D02F590C1CAD}"/>
+                <a16:creationId xmlns:a16="http://schemas.microsoft.com/office/drawing/2014/main" id="{B5AD0A37-454B-4280-8E3D-61214986E75A}"/>
               </a:ext>
             </a:extLst>
           </p:cNvPr>
@@ -17198,7 +17198,7 @@
           <p:cNvPr id="20" name="">
             <a:extLst xmlns:a="http://schemas.openxmlformats.org/drawingml/2006/main">
               <a:ext uri="{FF2B5EF4-FFF2-40B4-BE49-F238E27FC236}">
-                <a16:creationId xmlns:a16="http://schemas.microsoft.com/office/drawing/2014/main" id="{EC0CA376-5E28-40C7-B099-D081EBC7E0E5}"/>
+                <a16:creationId xmlns:a16="http://schemas.microsoft.com/office/drawing/2014/main" id="{E4E0D764-D269-4DF8-94D7-CF65C3AA1CCA}"/>
               </a:ext>
             </a:extLst>
           </p:cNvPr>
@@ -17231,7 +17231,7 @@
           <p:cNvPr id="21" name="">
             <a:extLst xmlns:a="http://schemas.openxmlformats.org/drawingml/2006/main">
               <a:ext uri="{FF2B5EF4-FFF2-40B4-BE49-F238E27FC236}">
-                <a16:creationId xmlns:a16="http://schemas.microsoft.com/office/drawing/2014/main" id="{2BA7EE80-5FE0-47BD-97FD-0DD9B594968D}"/>
+                <a16:creationId xmlns:a16="http://schemas.microsoft.com/office/drawing/2014/main" id="{8494F16E-F3E2-4C8F-949D-EFFD96BCF8EC}"/>
               </a:ext>
             </a:extLst>
           </p:cNvPr>
@@ -17293,7 +17293,7 @@
           <p:cNvPr id="22" name="">
             <a:extLst xmlns:a="http://schemas.openxmlformats.org/drawingml/2006/main">
               <a:ext uri="{FF2B5EF4-FFF2-40B4-BE49-F238E27FC236}">
-                <a16:creationId xmlns:a16="http://schemas.microsoft.com/office/drawing/2014/main" id="{484C8988-C890-4BB5-8575-69383596F3A6}"/>
+                <a16:creationId xmlns:a16="http://schemas.microsoft.com/office/drawing/2014/main" id="{56EDEC5E-4B76-4333-8A4F-092095F8699B}"/>
               </a:ext>
             </a:extLst>
           </p:cNvPr>
@@ -17355,7 +17355,7 @@
           <p:cNvPr id="23" name="">
             <a:extLst xmlns:a="http://schemas.openxmlformats.org/drawingml/2006/main">
               <a:ext uri="{FF2B5EF4-FFF2-40B4-BE49-F238E27FC236}">
-                <a16:creationId xmlns:a16="http://schemas.microsoft.com/office/drawing/2014/main" id="{BDD05422-AA74-4335-9945-E7352F7F94AF}"/>
+                <a16:creationId xmlns:a16="http://schemas.microsoft.com/office/drawing/2014/main" id="{C407C2C6-8CE9-4C5A-A794-D6144EC494B2}"/>
               </a:ext>
             </a:extLst>
           </p:cNvPr>
@@ -17390,7 +17390,7 @@
           <p:cNvPr id="24" name="">
             <a:extLst xmlns:a="http://schemas.openxmlformats.org/drawingml/2006/main">
               <a:ext uri="{FF2B5EF4-FFF2-40B4-BE49-F238E27FC236}">
-                <a16:creationId xmlns:a16="http://schemas.microsoft.com/office/drawing/2014/main" id="{984EDC88-DABD-4D0B-898F-210B21899F56}"/>
+                <a16:creationId xmlns:a16="http://schemas.microsoft.com/office/drawing/2014/main" id="{47E00F54-2098-4566-88DB-61BC9B10A211}"/>
               </a:ext>
             </a:extLst>
           </p:cNvPr>
@@ -17452,7 +17452,7 @@
           <p:cNvPr id="25" name="">
             <a:extLst xmlns:a="http://schemas.openxmlformats.org/drawingml/2006/main">
               <a:ext uri="{FF2B5EF4-FFF2-40B4-BE49-F238E27FC236}">
-                <a16:creationId xmlns:a16="http://schemas.microsoft.com/office/drawing/2014/main" id="{F8ECE85F-677F-4E33-9F28-5B64516618F9}"/>
+                <a16:creationId xmlns:a16="http://schemas.microsoft.com/office/drawing/2014/main" id="{35C84FE5-2594-49E4-9560-53E3CEC95733}"/>
               </a:ext>
             </a:extLst>
           </p:cNvPr>
@@ -17493,7 +17493,7 @@
           <p:cNvPr id="26" name="">
             <a:extLst xmlns:a="http://schemas.openxmlformats.org/drawingml/2006/main">
               <a:ext uri="{FF2B5EF4-FFF2-40B4-BE49-F238E27FC236}">
-                <a16:creationId xmlns:a16="http://schemas.microsoft.com/office/drawing/2014/main" id="{59818A1D-5A07-474A-9B72-1B3120B44734}"/>
+                <a16:creationId xmlns:a16="http://schemas.microsoft.com/office/drawing/2014/main" id="{4550913A-B293-4117-8B53-FB2EB9C851AC}"/>
               </a:ext>
             </a:extLst>
           </p:cNvPr>
@@ -17526,7 +17526,7 @@
           <p:cNvPr id="27" name="">
             <a:extLst xmlns:a="http://schemas.openxmlformats.org/drawingml/2006/main">
               <a:ext uri="{FF2B5EF4-FFF2-40B4-BE49-F238E27FC236}">
-                <a16:creationId xmlns:a16="http://schemas.microsoft.com/office/drawing/2014/main" id="{2BA9FFD2-21E4-4301-84A3-396F28992A25}"/>
+                <a16:creationId xmlns:a16="http://schemas.microsoft.com/office/drawing/2014/main" id="{20626D93-C047-4574-BE1D-9240017D332C}"/>
               </a:ext>
             </a:extLst>
           </p:cNvPr>
@@ -17588,7 +17588,7 @@
           <p:cNvPr id="28" name="">
             <a:extLst xmlns:a="http://schemas.openxmlformats.org/drawingml/2006/main">
               <a:ext uri="{FF2B5EF4-FFF2-40B4-BE49-F238E27FC236}">
-                <a16:creationId xmlns:a16="http://schemas.microsoft.com/office/drawing/2014/main" id="{808ED696-490F-41CF-99C4-901D6A8050BA}"/>
+                <a16:creationId xmlns:a16="http://schemas.microsoft.com/office/drawing/2014/main" id="{02119BD6-7FD7-4475-A974-5E76D37900BC}"/>
               </a:ext>
             </a:extLst>
           </p:cNvPr>
@@ -17650,7 +17650,7 @@
           <p:cNvPr id="29" name="">
             <a:extLst xmlns:a="http://schemas.openxmlformats.org/drawingml/2006/main">
               <a:ext uri="{FF2B5EF4-FFF2-40B4-BE49-F238E27FC236}">
-                <a16:creationId xmlns:a16="http://schemas.microsoft.com/office/drawing/2014/main" id="{BCF4EE22-A6F7-4CB2-A554-00D8B3EF02E6}"/>
+                <a16:creationId xmlns:a16="http://schemas.microsoft.com/office/drawing/2014/main" id="{E567E52D-BF5E-4AEE-A8BD-D9286BFAD9EA}"/>
               </a:ext>
             </a:extLst>
           </p:cNvPr>
@@ -17685,7 +17685,7 @@
           <p:cNvPr id="30" name="">
             <a:extLst xmlns:a="http://schemas.openxmlformats.org/drawingml/2006/main">
               <a:ext uri="{FF2B5EF4-FFF2-40B4-BE49-F238E27FC236}">
-                <a16:creationId xmlns:a16="http://schemas.microsoft.com/office/drawing/2014/main" id="{808822C1-C175-4BB6-8860-C835A1D5135E}"/>
+                <a16:creationId xmlns:a16="http://schemas.microsoft.com/office/drawing/2014/main" id="{BB150FDC-C78B-4742-9D74-B98A56A41154}"/>
               </a:ext>
             </a:extLst>
           </p:cNvPr>
@@ -17747,7 +17747,7 @@
           <p:cNvPr id="31" name="">
             <a:extLst xmlns:a="http://schemas.openxmlformats.org/drawingml/2006/main">
               <a:ext uri="{FF2B5EF4-FFF2-40B4-BE49-F238E27FC236}">
-                <a16:creationId xmlns:a16="http://schemas.microsoft.com/office/drawing/2014/main" id="{97A3EE29-4AC3-4B4F-8BAD-D535CE5B468F}"/>
+                <a16:creationId xmlns:a16="http://schemas.microsoft.com/office/drawing/2014/main" id="{9C87FAF2-A058-4DB8-8BB5-8A2974EA4A6C}"/>
               </a:ext>
             </a:extLst>
           </p:cNvPr>
@@ -17782,7 +17782,7 @@
           <p:cNvPr id="32" name="">
             <a:extLst xmlns:a="http://schemas.openxmlformats.org/drawingml/2006/main">
               <a:ext uri="{FF2B5EF4-FFF2-40B4-BE49-F238E27FC236}">
-                <a16:creationId xmlns:a16="http://schemas.microsoft.com/office/drawing/2014/main" id="{DB61F808-60B6-4F15-B515-35CAF12E8211}"/>
+                <a16:creationId xmlns:a16="http://schemas.microsoft.com/office/drawing/2014/main" id="{8D0EBE3A-1038-438F-8CBF-B9CF07939A70}"/>
               </a:ext>
             </a:extLst>
           </p:cNvPr>
@@ -17842,7 +17842,7 @@
     </p:spTree>
     <p:extLst>
       <p:ext uri="{BB962C8B-B14F-4D97-AF65-F5344CB8AC3E}">
-        <p14:creationId xmlns:p14="http://schemas.microsoft.com/office/powerpoint/2010/main" val="1787078159"/>
+        <p14:creationId xmlns:p14="http://schemas.microsoft.com/office/powerpoint/2010/main" val="1470392836"/>
       </p:ext>
     </p:extLst>
   </p:cSld>
@@ -17873,7 +17873,7 @@
           <p:cNvPr id="39" name="">
             <a:extLst xmlns:a="http://schemas.openxmlformats.org/drawingml/2006/main">
               <a:ext uri="{FF2B5EF4-FFF2-40B4-BE49-F238E27FC236}">
-                <a16:creationId xmlns:a16="http://schemas.microsoft.com/office/drawing/2014/main" id="{D530AA47-22BE-4AF7-A827-8EC2714164E5}"/>
+                <a16:creationId xmlns:a16="http://schemas.microsoft.com/office/drawing/2014/main" id="{1F909024-93E4-45D4-BBB4-CA1E41509CA1}"/>
               </a:ext>
             </a:extLst>
           </p:cNvPr>
@@ -17906,7 +17906,7 @@
           <p:cNvPr id="2" name="">
             <a:extLst xmlns:a="http://schemas.openxmlformats.org/drawingml/2006/main">
               <a:ext uri="{FF2B5EF4-FFF2-40B4-BE49-F238E27FC236}">
-                <a16:creationId xmlns:a16="http://schemas.microsoft.com/office/drawing/2014/main" id="{70BC725B-7036-4A04-8030-C9D87EDBDB58}"/>
+                <a16:creationId xmlns:a16="http://schemas.microsoft.com/office/drawing/2014/main" id="{77C96123-F998-4244-95BE-06D3CAE0925C}"/>
               </a:ext>
             </a:extLst>
           </p:cNvPr>
@@ -17968,7 +17968,7 @@
           <p:cNvPr id="3" name="">
             <a:extLst xmlns:a="http://schemas.openxmlformats.org/drawingml/2006/main">
               <a:ext uri="{FF2B5EF4-FFF2-40B4-BE49-F238E27FC236}">
-                <a16:creationId xmlns:a16="http://schemas.microsoft.com/office/drawing/2014/main" id="{37A72AA8-4FE6-439D-A420-F8B98F387AB5}"/>
+                <a16:creationId xmlns:a16="http://schemas.microsoft.com/office/drawing/2014/main" id="{28EB4000-F358-4A46-A674-EDF236D5200C}"/>
               </a:ext>
             </a:extLst>
           </p:cNvPr>
@@ -18030,7 +18030,7 @@
           <p:cNvPr id="4" name="">
             <a:extLst xmlns:a="http://schemas.openxmlformats.org/drawingml/2006/main">
               <a:ext uri="{FF2B5EF4-FFF2-40B4-BE49-F238E27FC236}">
-                <a16:creationId xmlns:a16="http://schemas.microsoft.com/office/drawing/2014/main" id="{5202B856-DB09-485C-AD22-29C235524B82}"/>
+                <a16:creationId xmlns:a16="http://schemas.microsoft.com/office/drawing/2014/main" id="{8B713313-4B55-4C2A-9E94-AE15AD88151D}"/>
               </a:ext>
             </a:extLst>
           </p:cNvPr>
@@ -18063,7 +18063,7 @@
           <p:cNvPr id="5" name="">
             <a:extLst xmlns:a="http://schemas.openxmlformats.org/drawingml/2006/main">
               <a:ext uri="{FF2B5EF4-FFF2-40B4-BE49-F238E27FC236}">
-                <a16:creationId xmlns:a16="http://schemas.microsoft.com/office/drawing/2014/main" id="{5B5F4686-1330-41F5-B3BE-E7B0BD80FED8}"/>
+                <a16:creationId xmlns:a16="http://schemas.microsoft.com/office/drawing/2014/main" id="{9D87B564-B4B9-4AAB-A9BB-CD6FA91D4163}"/>
               </a:ext>
             </a:extLst>
           </p:cNvPr>
@@ -18125,7 +18125,7 @@
           <p:cNvPr id="6" name="">
             <a:extLst xmlns:a="http://schemas.openxmlformats.org/drawingml/2006/main">
               <a:ext uri="{FF2B5EF4-FFF2-40B4-BE49-F238E27FC236}">
-                <a16:creationId xmlns:a16="http://schemas.microsoft.com/office/drawing/2014/main" id="{EC268093-53BE-4376-A13B-8F6AE1A622A1}"/>
+                <a16:creationId xmlns:a16="http://schemas.microsoft.com/office/drawing/2014/main" id="{C7B32CCF-7193-4D33-A09D-2F2C2F9EB623}"/>
               </a:ext>
             </a:extLst>
           </p:cNvPr>
@@ -18187,7 +18187,7 @@
           <p:cNvPr id="7" name="">
             <a:extLst xmlns:a="http://schemas.openxmlformats.org/drawingml/2006/main">
               <a:ext uri="{FF2B5EF4-FFF2-40B4-BE49-F238E27FC236}">
-                <a16:creationId xmlns:a16="http://schemas.microsoft.com/office/drawing/2014/main" id="{C3DC38C8-EF94-445A-82D5-183278D743E5}"/>
+                <a16:creationId xmlns:a16="http://schemas.microsoft.com/office/drawing/2014/main" id="{70C48593-CA5D-4EAC-A915-0C3B21FBF970}"/>
               </a:ext>
             </a:extLst>
           </p:cNvPr>
@@ -18249,7 +18249,7 @@
           <p:cNvPr id="8" name="">
             <a:extLst xmlns:a="http://schemas.openxmlformats.org/drawingml/2006/main">
               <a:ext uri="{FF2B5EF4-FFF2-40B4-BE49-F238E27FC236}">
-                <a16:creationId xmlns:a16="http://schemas.microsoft.com/office/drawing/2014/main" id="{D22F10EC-C2FF-4B71-AE65-E06DA3E99FF8}"/>
+                <a16:creationId xmlns:a16="http://schemas.microsoft.com/office/drawing/2014/main" id="{3804E9FC-71F8-4523-8CD0-5FF9EE47593C}"/>
               </a:ext>
             </a:extLst>
           </p:cNvPr>
@@ -18290,7 +18290,7 @@
           <p:cNvPr id="9" name="">
             <a:extLst xmlns:a="http://schemas.openxmlformats.org/drawingml/2006/main">
               <a:ext uri="{FF2B5EF4-FFF2-40B4-BE49-F238E27FC236}">
-                <a16:creationId xmlns:a16="http://schemas.microsoft.com/office/drawing/2014/main" id="{D07C9C59-A759-4C0E-AB5B-3966F4EA74E5}"/>
+                <a16:creationId xmlns:a16="http://schemas.microsoft.com/office/drawing/2014/main" id="{F0C84F99-3EC8-44FE-9C4E-84EF12C450AD}"/>
               </a:ext>
             </a:extLst>
           </p:cNvPr>
@@ -18323,7 +18323,7 @@
           <p:cNvPr id="10" name="">
             <a:extLst xmlns:a="http://schemas.openxmlformats.org/drawingml/2006/main">
               <a:ext uri="{FF2B5EF4-FFF2-40B4-BE49-F238E27FC236}">
-                <a16:creationId xmlns:a16="http://schemas.microsoft.com/office/drawing/2014/main" id="{BFF45E48-4608-4AC9-BD24-C6FFBD63355B}"/>
+                <a16:creationId xmlns:a16="http://schemas.microsoft.com/office/drawing/2014/main" id="{329E407D-C4DD-4575-951D-359232654BAB}"/>
               </a:ext>
             </a:extLst>
           </p:cNvPr>
@@ -18385,7 +18385,7 @@
           <p:cNvPr id="11" name="">
             <a:extLst xmlns:a="http://schemas.openxmlformats.org/drawingml/2006/main">
               <a:ext uri="{FF2B5EF4-FFF2-40B4-BE49-F238E27FC236}">
-                <a16:creationId xmlns:a16="http://schemas.microsoft.com/office/drawing/2014/main" id="{CBCA2ED3-92F1-4BF8-BFC0-453B6645DB43}"/>
+                <a16:creationId xmlns:a16="http://schemas.microsoft.com/office/drawing/2014/main" id="{2A1807DA-501B-42D3-86DA-B8F3C26B6B47}"/>
               </a:ext>
             </a:extLst>
           </p:cNvPr>
@@ -18447,7 +18447,7 @@
           <p:cNvPr id="12" name="">
             <a:extLst xmlns:a="http://schemas.openxmlformats.org/drawingml/2006/main">
               <a:ext uri="{FF2B5EF4-FFF2-40B4-BE49-F238E27FC236}">
-                <a16:creationId xmlns:a16="http://schemas.microsoft.com/office/drawing/2014/main" id="{742B029C-BF3C-4EB2-B4E3-E55112E8979B}"/>
+                <a16:creationId xmlns:a16="http://schemas.microsoft.com/office/drawing/2014/main" id="{409A6080-D17C-4341-AE41-95C3D2137A98}"/>
               </a:ext>
             </a:extLst>
           </p:cNvPr>
@@ -18488,7 +18488,7 @@
           <p:cNvPr id="13" name="">
             <a:extLst xmlns:a="http://schemas.openxmlformats.org/drawingml/2006/main">
               <a:ext uri="{FF2B5EF4-FFF2-40B4-BE49-F238E27FC236}">
-                <a16:creationId xmlns:a16="http://schemas.microsoft.com/office/drawing/2014/main" id="{9FF21923-0C2E-4F5D-8A79-A55C01569583}"/>
+                <a16:creationId xmlns:a16="http://schemas.microsoft.com/office/drawing/2014/main" id="{3559ED2A-841A-402F-BBFE-43FFA6F3975C}"/>
               </a:ext>
             </a:extLst>
           </p:cNvPr>
@@ -18521,7 +18521,7 @@
           <p:cNvPr id="14" name="">
             <a:extLst xmlns:a="http://schemas.openxmlformats.org/drawingml/2006/main">
               <a:ext uri="{FF2B5EF4-FFF2-40B4-BE49-F238E27FC236}">
-                <a16:creationId xmlns:a16="http://schemas.microsoft.com/office/drawing/2014/main" id="{9D995B46-9091-4FC8-960D-1E16496D6203}"/>
+                <a16:creationId xmlns:a16="http://schemas.microsoft.com/office/drawing/2014/main" id="{3C6A9432-A0D4-473F-88EF-4F1D34225C73}"/>
               </a:ext>
             </a:extLst>
           </p:cNvPr>
@@ -18583,7 +18583,7 @@
           <p:cNvPr id="15" name="">
             <a:extLst xmlns:a="http://schemas.openxmlformats.org/drawingml/2006/main">
               <a:ext uri="{FF2B5EF4-FFF2-40B4-BE49-F238E27FC236}">
-                <a16:creationId xmlns:a16="http://schemas.microsoft.com/office/drawing/2014/main" id="{1FA9A5EB-4CFB-415C-B495-94D22F3DD144}"/>
+                <a16:creationId xmlns:a16="http://schemas.microsoft.com/office/drawing/2014/main" id="{EFC4439D-3549-433E-887F-11EDCB8968D6}"/>
               </a:ext>
             </a:extLst>
           </p:cNvPr>
@@ -18645,7 +18645,7 @@
           <p:cNvPr id="16" name="">
             <a:extLst xmlns:a="http://schemas.openxmlformats.org/drawingml/2006/main">
               <a:ext uri="{FF2B5EF4-FFF2-40B4-BE49-F238E27FC236}">
-                <a16:creationId xmlns:a16="http://schemas.microsoft.com/office/drawing/2014/main" id="{5ACC9D2D-3ADC-480F-BD9E-D0D0E41EAEAF}"/>
+                <a16:creationId xmlns:a16="http://schemas.microsoft.com/office/drawing/2014/main" id="{B4008042-72AC-45BD-87B1-A745E1D528E8}"/>
               </a:ext>
             </a:extLst>
           </p:cNvPr>
@@ -18686,7 +18686,7 @@
           <p:cNvPr id="17" name="">
             <a:extLst xmlns:a="http://schemas.openxmlformats.org/drawingml/2006/main">
               <a:ext uri="{FF2B5EF4-FFF2-40B4-BE49-F238E27FC236}">
-                <a16:creationId xmlns:a16="http://schemas.microsoft.com/office/drawing/2014/main" id="{B7BA5803-1FD8-4B37-859B-616FAB10FCA2}"/>
+                <a16:creationId xmlns:a16="http://schemas.microsoft.com/office/drawing/2014/main" id="{1043119F-9FAF-4BBE-A07A-D13B615437EF}"/>
               </a:ext>
             </a:extLst>
           </p:cNvPr>
@@ -18719,7 +18719,7 @@
           <p:cNvPr id="18" name="">
             <a:extLst xmlns:a="http://schemas.openxmlformats.org/drawingml/2006/main">
               <a:ext uri="{FF2B5EF4-FFF2-40B4-BE49-F238E27FC236}">
-                <a16:creationId xmlns:a16="http://schemas.microsoft.com/office/drawing/2014/main" id="{6704C33E-D47E-4E46-A1B7-D1036EFA5EFD}"/>
+                <a16:creationId xmlns:a16="http://schemas.microsoft.com/office/drawing/2014/main" id="{3BF9DD79-A4A8-418B-9D53-C6FA32A1D54B}"/>
               </a:ext>
             </a:extLst>
           </p:cNvPr>
@@ -18781,7 +18781,7 @@
           <p:cNvPr id="19" name="">
             <a:extLst xmlns:a="http://schemas.openxmlformats.org/drawingml/2006/main">
               <a:ext uri="{FF2B5EF4-FFF2-40B4-BE49-F238E27FC236}">
-                <a16:creationId xmlns:a16="http://schemas.microsoft.com/office/drawing/2014/main" id="{9F8F270F-2888-4035-A634-150CFF07E8F6}"/>
+                <a16:creationId xmlns:a16="http://schemas.microsoft.com/office/drawing/2014/main" id="{BF3C68D4-00B0-4DD7-8AEE-F9C59508DB3E}"/>
               </a:ext>
             </a:extLst>
           </p:cNvPr>
@@ -18843,7 +18843,7 @@
           <p:cNvPr id="20" name="">
             <a:extLst xmlns:a="http://schemas.openxmlformats.org/drawingml/2006/main">
               <a:ext uri="{FF2B5EF4-FFF2-40B4-BE49-F238E27FC236}">
-                <a16:creationId xmlns:a16="http://schemas.microsoft.com/office/drawing/2014/main" id="{F335BF94-F497-46CE-908A-DB07511CF5AA}"/>
+                <a16:creationId xmlns:a16="http://schemas.microsoft.com/office/drawing/2014/main" id="{23238372-C497-4D9A-B6F8-1C3E3A932B0A}"/>
               </a:ext>
             </a:extLst>
           </p:cNvPr>
@@ -18905,7 +18905,7 @@
           <p:cNvPr id="21" name="">
             <a:extLst xmlns:a="http://schemas.openxmlformats.org/drawingml/2006/main">
               <a:ext uri="{FF2B5EF4-FFF2-40B4-BE49-F238E27FC236}">
-                <a16:creationId xmlns:a16="http://schemas.microsoft.com/office/drawing/2014/main" id="{52994684-379B-46C5-BE91-27989ED366C1}"/>
+                <a16:creationId xmlns:a16="http://schemas.microsoft.com/office/drawing/2014/main" id="{91D63588-7977-40F0-84C3-0A1AAB309942}"/>
               </a:ext>
             </a:extLst>
           </p:cNvPr>
@@ -18938,7 +18938,7 @@
           <p:cNvPr id="22" name="">
             <a:extLst xmlns:a="http://schemas.openxmlformats.org/drawingml/2006/main">
               <a:ext uri="{FF2B5EF4-FFF2-40B4-BE49-F238E27FC236}">
-                <a16:creationId xmlns:a16="http://schemas.microsoft.com/office/drawing/2014/main" id="{2F43D48E-3370-4762-A19F-93F2BF075AB9}"/>
+                <a16:creationId xmlns:a16="http://schemas.microsoft.com/office/drawing/2014/main" id="{472D6E47-2149-4E05-A63E-627F25EA7B2C}"/>
               </a:ext>
             </a:extLst>
           </p:cNvPr>
@@ -19000,7 +19000,7 @@
           <p:cNvPr id="23" name="">
             <a:extLst xmlns:a="http://schemas.openxmlformats.org/drawingml/2006/main">
               <a:ext uri="{FF2B5EF4-FFF2-40B4-BE49-F238E27FC236}">
-                <a16:creationId xmlns:a16="http://schemas.microsoft.com/office/drawing/2014/main" id="{CECCE32D-28B2-4902-8B5B-15D8731B25B9}"/>
+                <a16:creationId xmlns:a16="http://schemas.microsoft.com/office/drawing/2014/main" id="{601F2A40-40FA-4DA5-BBAE-915E80C5D84D}"/>
               </a:ext>
             </a:extLst>
           </p:cNvPr>
@@ -19062,7 +19062,7 @@
           <p:cNvPr id="24" name="">
             <a:extLst xmlns:a="http://schemas.openxmlformats.org/drawingml/2006/main">
               <a:ext uri="{FF2B5EF4-FFF2-40B4-BE49-F238E27FC236}">
-                <a16:creationId xmlns:a16="http://schemas.microsoft.com/office/drawing/2014/main" id="{187EFA2F-1360-438B-94F9-9073384A5708}"/>
+                <a16:creationId xmlns:a16="http://schemas.microsoft.com/office/drawing/2014/main" id="{51200D25-CDD2-4559-82BE-04099DFB2907}"/>
               </a:ext>
             </a:extLst>
           </p:cNvPr>
@@ -19124,7 +19124,7 @@
           <p:cNvPr id="25" name="">
             <a:extLst xmlns:a="http://schemas.openxmlformats.org/drawingml/2006/main">
               <a:ext uri="{FF2B5EF4-FFF2-40B4-BE49-F238E27FC236}">
-                <a16:creationId xmlns:a16="http://schemas.microsoft.com/office/drawing/2014/main" id="{9D683DD8-6C8C-4146-9151-20EC68D9A102}"/>
+                <a16:creationId xmlns:a16="http://schemas.microsoft.com/office/drawing/2014/main" id="{68F4C073-2483-452F-B40A-CADB6AD7D209}"/>
               </a:ext>
             </a:extLst>
           </p:cNvPr>
@@ -19157,7 +19157,7 @@
           <p:cNvPr id="26" name="">
             <a:extLst xmlns:a="http://schemas.openxmlformats.org/drawingml/2006/main">
               <a:ext uri="{FF2B5EF4-FFF2-40B4-BE49-F238E27FC236}">
-                <a16:creationId xmlns:a16="http://schemas.microsoft.com/office/drawing/2014/main" id="{BD994AEF-73A5-4FD9-8A5C-142D76987A85}"/>
+                <a16:creationId xmlns:a16="http://schemas.microsoft.com/office/drawing/2014/main" id="{BCACC572-358D-49CF-8EE6-5006BF1F800C}"/>
               </a:ext>
             </a:extLst>
           </p:cNvPr>
@@ -19219,7 +19219,7 @@
           <p:cNvPr id="27" name="">
             <a:extLst xmlns:a="http://schemas.openxmlformats.org/drawingml/2006/main">
               <a:ext uri="{FF2B5EF4-FFF2-40B4-BE49-F238E27FC236}">
-                <a16:creationId xmlns:a16="http://schemas.microsoft.com/office/drawing/2014/main" id="{61B21CF9-8B90-43FD-BD4E-258625724E95}"/>
+                <a16:creationId xmlns:a16="http://schemas.microsoft.com/office/drawing/2014/main" id="{7E6AF7AD-F0FE-4FC2-B395-45B1C1F9D223}"/>
               </a:ext>
             </a:extLst>
           </p:cNvPr>
@@ -19281,7 +19281,7 @@
           <p:cNvPr id="28" name="">
             <a:extLst xmlns:a="http://schemas.openxmlformats.org/drawingml/2006/main">
               <a:ext uri="{FF2B5EF4-FFF2-40B4-BE49-F238E27FC236}">
-                <a16:creationId xmlns:a16="http://schemas.microsoft.com/office/drawing/2014/main" id="{A021E836-F1EF-4667-BB5D-B95497FA835E}"/>
+                <a16:creationId xmlns:a16="http://schemas.microsoft.com/office/drawing/2014/main" id="{2D8F98D1-32C6-4256-ACA2-22115852713F}"/>
               </a:ext>
             </a:extLst>
           </p:cNvPr>
@@ -19343,7 +19343,7 @@
           <p:cNvPr id="29" name="">
             <a:extLst xmlns:a="http://schemas.openxmlformats.org/drawingml/2006/main">
               <a:ext uri="{FF2B5EF4-FFF2-40B4-BE49-F238E27FC236}">
-                <a16:creationId xmlns:a16="http://schemas.microsoft.com/office/drawing/2014/main" id="{114FA7DD-1B4E-4E24-9C7F-791DFE2212B5}"/>
+                <a16:creationId xmlns:a16="http://schemas.microsoft.com/office/drawing/2014/main" id="{90E8E7F0-A558-47C7-8585-8EFB8127FAA2}"/>
               </a:ext>
             </a:extLst>
           </p:cNvPr>
@@ -19376,7 +19376,7 @@
           <p:cNvPr id="30" name="">
             <a:extLst xmlns:a="http://schemas.openxmlformats.org/drawingml/2006/main">
               <a:ext uri="{FF2B5EF4-FFF2-40B4-BE49-F238E27FC236}">
-                <a16:creationId xmlns:a16="http://schemas.microsoft.com/office/drawing/2014/main" id="{E1C39744-7B61-4C42-AC07-2358B363DE92}"/>
+                <a16:creationId xmlns:a16="http://schemas.microsoft.com/office/drawing/2014/main" id="{809CD6DF-4112-4640-957E-380278FD3F69}"/>
               </a:ext>
             </a:extLst>
           </p:cNvPr>
@@ -19438,7 +19438,7 @@
           <p:cNvPr id="31" name="">
             <a:extLst xmlns:a="http://schemas.openxmlformats.org/drawingml/2006/main">
               <a:ext uri="{FF2B5EF4-FFF2-40B4-BE49-F238E27FC236}">
-                <a16:creationId xmlns:a16="http://schemas.microsoft.com/office/drawing/2014/main" id="{320FF211-452C-4647-AA93-D875031FC8C7}"/>
+                <a16:creationId xmlns:a16="http://schemas.microsoft.com/office/drawing/2014/main" id="{86E87034-00EE-4305-A64E-E169B3BD9C9C}"/>
               </a:ext>
             </a:extLst>
           </p:cNvPr>
@@ -19500,7 +19500,7 @@
           <p:cNvPr id="32" name="">
             <a:extLst xmlns:a="http://schemas.openxmlformats.org/drawingml/2006/main">
               <a:ext uri="{FF2B5EF4-FFF2-40B4-BE49-F238E27FC236}">
-                <a16:creationId xmlns:a16="http://schemas.microsoft.com/office/drawing/2014/main" id="{2D5B4163-8C27-4E0A-AAE2-1E2BDCF80A04}"/>
+                <a16:creationId xmlns:a16="http://schemas.microsoft.com/office/drawing/2014/main" id="{D7526DEB-75B1-4035-9985-EBE7FAB6CFC3}"/>
               </a:ext>
             </a:extLst>
           </p:cNvPr>
@@ -19562,7 +19562,7 @@
           <p:cNvPr id="33" name="">
             <a:extLst xmlns:a="http://schemas.openxmlformats.org/drawingml/2006/main">
               <a:ext uri="{FF2B5EF4-FFF2-40B4-BE49-F238E27FC236}">
-                <a16:creationId xmlns:a16="http://schemas.microsoft.com/office/drawing/2014/main" id="{F31D440A-502A-44D6-8985-053B3FC95E15}"/>
+                <a16:creationId xmlns:a16="http://schemas.microsoft.com/office/drawing/2014/main" id="{C82324DC-EF90-4C59-B1C0-7787D0A299F5}"/>
               </a:ext>
             </a:extLst>
           </p:cNvPr>
@@ -19595,7 +19595,7 @@
           <p:cNvPr id="34" name="">
             <a:extLst xmlns:a="http://schemas.openxmlformats.org/drawingml/2006/main">
               <a:ext uri="{FF2B5EF4-FFF2-40B4-BE49-F238E27FC236}">
-                <a16:creationId xmlns:a16="http://schemas.microsoft.com/office/drawing/2014/main" id="{9F214C7A-9C3B-4002-9077-9FC409FCB7DB}"/>
+                <a16:creationId xmlns:a16="http://schemas.microsoft.com/office/drawing/2014/main" id="{D818DAD8-3490-46AF-8110-B413A1408BB3}"/>
               </a:ext>
             </a:extLst>
           </p:cNvPr>
@@ -19657,7 +19657,7 @@
           <p:cNvPr id="35" name="">
             <a:extLst xmlns:a="http://schemas.openxmlformats.org/drawingml/2006/main">
               <a:ext uri="{FF2B5EF4-FFF2-40B4-BE49-F238E27FC236}">
-                <a16:creationId xmlns:a16="http://schemas.microsoft.com/office/drawing/2014/main" id="{4221A342-CFD3-49FC-8884-8089875AC0EF}"/>
+                <a16:creationId xmlns:a16="http://schemas.microsoft.com/office/drawing/2014/main" id="{AD838599-5DB0-4BF1-92B9-222AB58B236C}"/>
               </a:ext>
             </a:extLst>
           </p:cNvPr>
@@ -19719,7 +19719,7 @@
           <p:cNvPr id="36" name="">
             <a:extLst xmlns:a="http://schemas.openxmlformats.org/drawingml/2006/main">
               <a:ext uri="{FF2B5EF4-FFF2-40B4-BE49-F238E27FC236}">
-                <a16:creationId xmlns:a16="http://schemas.microsoft.com/office/drawing/2014/main" id="{1880EF5D-BD92-4F51-8E06-F2BAABD163AE}"/>
+                <a16:creationId xmlns:a16="http://schemas.microsoft.com/office/drawing/2014/main" id="{B52A3C45-D7C4-40AE-8739-8B657471773F}"/>
               </a:ext>
             </a:extLst>
           </p:cNvPr>
@@ -19781,7 +19781,7 @@
           <p:cNvPr id="37" name="">
             <a:extLst xmlns:a="http://schemas.openxmlformats.org/drawingml/2006/main">
               <a:ext uri="{FF2B5EF4-FFF2-40B4-BE49-F238E27FC236}">
-                <a16:creationId xmlns:a16="http://schemas.microsoft.com/office/drawing/2014/main" id="{049ABA01-2862-48D6-8379-D2EA17965757}"/>
+                <a16:creationId xmlns:a16="http://schemas.microsoft.com/office/drawing/2014/main" id="{7C2168EF-F102-448C-B1A6-60473C7A58F5}"/>
               </a:ext>
             </a:extLst>
           </p:cNvPr>
@@ -19816,7 +19816,7 @@
           <p:cNvPr id="38" name="">
             <a:extLst xmlns:a="http://schemas.openxmlformats.org/drawingml/2006/main">
               <a:ext uri="{FF2B5EF4-FFF2-40B4-BE49-F238E27FC236}">
-                <a16:creationId xmlns:a16="http://schemas.microsoft.com/office/drawing/2014/main" id="{AE37C0F0-A668-4EA2-B2A9-17CBD30D3BF5}"/>
+                <a16:creationId xmlns:a16="http://schemas.microsoft.com/office/drawing/2014/main" id="{B4C14327-C1C9-4B26-A848-CE95D94A9D81}"/>
               </a:ext>
             </a:extLst>
           </p:cNvPr>
@@ -19876,7 +19876,7 @@
     </p:spTree>
     <p:extLst>
       <p:ext uri="{BB962C8B-B14F-4D97-AF65-F5344CB8AC3E}">
-        <p14:creationId xmlns:p14="http://schemas.microsoft.com/office/powerpoint/2010/main" val="1910707752"/>
+        <p14:creationId xmlns:p14="http://schemas.microsoft.com/office/powerpoint/2010/main" val="818868150"/>
       </p:ext>
     </p:extLst>
   </p:cSld>
@@ -19907,7 +19907,7 @@
           <p:cNvPr id="52" name="">
             <a:extLst xmlns:a="http://schemas.openxmlformats.org/drawingml/2006/main">
               <a:ext uri="{FF2B5EF4-FFF2-40B4-BE49-F238E27FC236}">
-                <a16:creationId xmlns:a16="http://schemas.microsoft.com/office/drawing/2014/main" id="{7B0206D2-01BF-4A0B-9626-681B5E389151}"/>
+                <a16:creationId xmlns:a16="http://schemas.microsoft.com/office/drawing/2014/main" id="{18F60FC3-2EBA-4681-8C6E-B0434D87D3EA}"/>
               </a:ext>
             </a:extLst>
           </p:cNvPr>
@@ -19940,7 +19940,7 @@
           <p:cNvPr id="2" name="">
             <a:extLst xmlns:a="http://schemas.openxmlformats.org/drawingml/2006/main">
               <a:ext uri="{FF2B5EF4-FFF2-40B4-BE49-F238E27FC236}">
-                <a16:creationId xmlns:a16="http://schemas.microsoft.com/office/drawing/2014/main" id="{FF205106-28A7-4EAE-A016-1E18FF92C8FE}"/>
+                <a16:creationId xmlns:a16="http://schemas.microsoft.com/office/drawing/2014/main" id="{780A2563-2612-47C3-999B-E0649BC2D3FA}"/>
               </a:ext>
             </a:extLst>
           </p:cNvPr>
@@ -20002,7 +20002,7 @@
           <p:cNvPr id="3" name="">
             <a:extLst xmlns:a="http://schemas.openxmlformats.org/drawingml/2006/main">
               <a:ext uri="{FF2B5EF4-FFF2-40B4-BE49-F238E27FC236}">
-                <a16:creationId xmlns:a16="http://schemas.microsoft.com/office/drawing/2014/main" id="{C829D666-7AE1-4AF7-BF91-5C6F0944E2E2}"/>
+                <a16:creationId xmlns:a16="http://schemas.microsoft.com/office/drawing/2014/main" id="{C3C36735-3E5C-40A8-91B3-6AE4870E7E07}"/>
               </a:ext>
             </a:extLst>
           </p:cNvPr>
@@ -20064,7 +20064,7 @@
           <p:cNvPr id="4" name="">
             <a:extLst xmlns:a="http://schemas.openxmlformats.org/drawingml/2006/main">
               <a:ext uri="{FF2B5EF4-FFF2-40B4-BE49-F238E27FC236}">
-                <a16:creationId xmlns:a16="http://schemas.microsoft.com/office/drawing/2014/main" id="{1C02A431-F17A-4510-A758-714C435E6BCD}"/>
+                <a16:creationId xmlns:a16="http://schemas.microsoft.com/office/drawing/2014/main" id="{9E9F83DF-B49C-4C97-A601-FC59371BA97B}"/>
               </a:ext>
             </a:extLst>
           </p:cNvPr>
@@ -20097,7 +20097,7 @@
           <p:cNvPr id="5" name="">
             <a:extLst xmlns:a="http://schemas.openxmlformats.org/drawingml/2006/main">
               <a:ext uri="{FF2B5EF4-FFF2-40B4-BE49-F238E27FC236}">
-                <a16:creationId xmlns:a16="http://schemas.microsoft.com/office/drawing/2014/main" id="{E2F9CCE0-C464-4FC8-BE0F-F7AAF8333914}"/>
+                <a16:creationId xmlns:a16="http://schemas.microsoft.com/office/drawing/2014/main" id="{86F4D671-CF50-4490-B14D-472D6A53FD89}"/>
               </a:ext>
             </a:extLst>
           </p:cNvPr>
@@ -20159,7 +20159,7 @@
           <p:cNvPr id="6" name="">
             <a:extLst xmlns:a="http://schemas.openxmlformats.org/drawingml/2006/main">
               <a:ext uri="{FF2B5EF4-FFF2-40B4-BE49-F238E27FC236}">
-                <a16:creationId xmlns:a16="http://schemas.microsoft.com/office/drawing/2014/main" id="{834890B4-2871-47E7-A58A-0B202C8C8C4B}"/>
+                <a16:creationId xmlns:a16="http://schemas.microsoft.com/office/drawing/2014/main" id="{07EE11E8-3B7B-4436-8533-13C4444520E8}"/>
               </a:ext>
             </a:extLst>
           </p:cNvPr>
@@ -20221,7 +20221,7 @@
           <p:cNvPr id="7" name="">
             <a:extLst xmlns:a="http://schemas.openxmlformats.org/drawingml/2006/main">
               <a:ext uri="{FF2B5EF4-FFF2-40B4-BE49-F238E27FC236}">
-                <a16:creationId xmlns:a16="http://schemas.microsoft.com/office/drawing/2014/main" id="{2275EABB-4298-40D3-A735-AC709C641F8A}"/>
+                <a16:creationId xmlns:a16="http://schemas.microsoft.com/office/drawing/2014/main" id="{4AD02169-DF59-4ECF-82DB-D8BD1DAA838A}"/>
               </a:ext>
             </a:extLst>
           </p:cNvPr>
@@ -20254,7 +20254,7 @@
           <p:cNvPr id="8" name="">
             <a:extLst xmlns:a="http://schemas.openxmlformats.org/drawingml/2006/main">
               <a:ext uri="{FF2B5EF4-FFF2-40B4-BE49-F238E27FC236}">
-                <a16:creationId xmlns:a16="http://schemas.microsoft.com/office/drawing/2014/main" id="{B5C1117A-B28F-49A4-8587-A6C8470ECCDE}"/>
+                <a16:creationId xmlns:a16="http://schemas.microsoft.com/office/drawing/2014/main" id="{5C2DF0DA-7C2A-455C-A07B-4462DE715AE6}"/>
               </a:ext>
             </a:extLst>
           </p:cNvPr>
@@ -20293,7 +20293,7 @@
           <p:cNvPr id="9" name="">
             <a:extLst xmlns:a="http://schemas.openxmlformats.org/drawingml/2006/main">
               <a:ext uri="{FF2B5EF4-FFF2-40B4-BE49-F238E27FC236}">
-                <a16:creationId xmlns:a16="http://schemas.microsoft.com/office/drawing/2014/main" id="{13713823-51B5-4995-B656-28F315F505EA}"/>
+                <a16:creationId xmlns:a16="http://schemas.microsoft.com/office/drawing/2014/main" id="{16CC77D1-AD99-475C-B928-F830CD083555}"/>
               </a:ext>
             </a:extLst>
           </p:cNvPr>
@@ -20355,7 +20355,7 @@
           <p:cNvPr id="10" name="">
             <a:extLst xmlns:a="http://schemas.openxmlformats.org/drawingml/2006/main">
               <a:ext uri="{FF2B5EF4-FFF2-40B4-BE49-F238E27FC236}">
-                <a16:creationId xmlns:a16="http://schemas.microsoft.com/office/drawing/2014/main" id="{FA6CDF11-23B9-4E77-9CE3-817F2F4E0AF0}"/>
+                <a16:creationId xmlns:a16="http://schemas.microsoft.com/office/drawing/2014/main" id="{30D4907A-1C27-4666-BEEB-CC5A6AEAC9D7}"/>
               </a:ext>
             </a:extLst>
           </p:cNvPr>
@@ -20390,7 +20390,7 @@
           <p:cNvPr id="11" name="">
             <a:extLst xmlns:a="http://schemas.openxmlformats.org/drawingml/2006/main">
               <a:ext uri="{FF2B5EF4-FFF2-40B4-BE49-F238E27FC236}">
-                <a16:creationId xmlns:a16="http://schemas.microsoft.com/office/drawing/2014/main" id="{F271DB85-777A-495E-9348-FCD747E1290C}"/>
+                <a16:creationId xmlns:a16="http://schemas.microsoft.com/office/drawing/2014/main" id="{FC68CB49-CA01-4CC6-A080-8915F86BF717}"/>
               </a:ext>
             </a:extLst>
           </p:cNvPr>
@@ -20452,7 +20452,7 @@
           <p:cNvPr id="12" name="">
             <a:extLst xmlns:a="http://schemas.openxmlformats.org/drawingml/2006/main">
               <a:ext uri="{FF2B5EF4-FFF2-40B4-BE49-F238E27FC236}">
-                <a16:creationId xmlns:a16="http://schemas.microsoft.com/office/drawing/2014/main" id="{67F3813A-C15D-4A27-BFB1-37B77DCD0386}"/>
+                <a16:creationId xmlns:a16="http://schemas.microsoft.com/office/drawing/2014/main" id="{D32E660D-9A23-4EA9-912E-41AE8DC8FB7E}"/>
               </a:ext>
             </a:extLst>
           </p:cNvPr>
@@ -20514,7 +20514,7 @@
           <p:cNvPr id="13" name="">
             <a:extLst xmlns:a="http://schemas.openxmlformats.org/drawingml/2006/main">
               <a:ext uri="{FF2B5EF4-FFF2-40B4-BE49-F238E27FC236}">
-                <a16:creationId xmlns:a16="http://schemas.microsoft.com/office/drawing/2014/main" id="{F17A0D00-0328-41AB-82F4-632E382395C7}"/>
+                <a16:creationId xmlns:a16="http://schemas.microsoft.com/office/drawing/2014/main" id="{7FC4375D-A516-485F-BBE8-6313ABA639BA}"/>
               </a:ext>
             </a:extLst>
           </p:cNvPr>
@@ -20555,7 +20555,7 @@
           <p:cNvPr id="14" name="">
             <a:extLst xmlns:a="http://schemas.openxmlformats.org/drawingml/2006/main">
               <a:ext uri="{FF2B5EF4-FFF2-40B4-BE49-F238E27FC236}">
-                <a16:creationId xmlns:a16="http://schemas.microsoft.com/office/drawing/2014/main" id="{A6B53799-CFC2-4E43-9336-1CBED86D9485}"/>
+                <a16:creationId xmlns:a16="http://schemas.microsoft.com/office/drawing/2014/main" id="{EFAEFBE9-A6FB-435F-BF37-E6D38FF59539}"/>
               </a:ext>
             </a:extLst>
           </p:cNvPr>
@@ -20671,7 +20671,7 @@
           <p:cNvPr id="15" name="">
             <a:extLst xmlns:a="http://schemas.openxmlformats.org/drawingml/2006/main">
               <a:ext uri="{FF2B5EF4-FFF2-40B4-BE49-F238E27FC236}">
-                <a16:creationId xmlns:a16="http://schemas.microsoft.com/office/drawing/2014/main" id="{DD479E14-5040-4FCB-AD89-BF1EFFA1A940}"/>
+                <a16:creationId xmlns:a16="http://schemas.microsoft.com/office/drawing/2014/main" id="{976E59D0-5FA3-48D9-936F-6B06C1052B67}"/>
               </a:ext>
             </a:extLst>
           </p:cNvPr>
@@ -20710,7 +20710,7 @@
           <p:cNvPr id="16" name="">
             <a:extLst xmlns:a="http://schemas.openxmlformats.org/drawingml/2006/main">
               <a:ext uri="{FF2B5EF4-FFF2-40B4-BE49-F238E27FC236}">
-                <a16:creationId xmlns:a16="http://schemas.microsoft.com/office/drawing/2014/main" id="{552B2572-DC12-4C7F-87BA-3BC0C77D0217}"/>
+                <a16:creationId xmlns:a16="http://schemas.microsoft.com/office/drawing/2014/main" id="{5F2FC8A4-75F1-4A8A-AC83-A10E7729561F}"/>
               </a:ext>
             </a:extLst>
           </p:cNvPr>
@@ -20772,7 +20772,7 @@
           <p:cNvPr id="17" name="">
             <a:extLst xmlns:a="http://schemas.openxmlformats.org/drawingml/2006/main">
               <a:ext uri="{FF2B5EF4-FFF2-40B4-BE49-F238E27FC236}">
-                <a16:creationId xmlns:a16="http://schemas.microsoft.com/office/drawing/2014/main" id="{8D655D28-4ABE-4802-954B-7C781F540AF2}"/>
+                <a16:creationId xmlns:a16="http://schemas.microsoft.com/office/drawing/2014/main" id="{B1BF5CEA-D20C-4E4F-BC87-00C51144D22E}"/>
               </a:ext>
             </a:extLst>
           </p:cNvPr>
@@ -20807,7 +20807,7 @@
           <p:cNvPr id="18" name="">
             <a:extLst xmlns:a="http://schemas.openxmlformats.org/drawingml/2006/main">
               <a:ext uri="{FF2B5EF4-FFF2-40B4-BE49-F238E27FC236}">
-                <a16:creationId xmlns:a16="http://schemas.microsoft.com/office/drawing/2014/main" id="{3A500EFD-5DD7-46EB-8B46-85E2ED84D64F}"/>
+                <a16:creationId xmlns:a16="http://schemas.microsoft.com/office/drawing/2014/main" id="{E04CA23A-F4E2-43AB-9F86-04CFF85D132F}"/>
               </a:ext>
             </a:extLst>
           </p:cNvPr>
@@ -20869,7 +20869,7 @@
           <p:cNvPr id="19" name="">
             <a:extLst xmlns:a="http://schemas.openxmlformats.org/drawingml/2006/main">
               <a:ext uri="{FF2B5EF4-FFF2-40B4-BE49-F238E27FC236}">
-                <a16:creationId xmlns:a16="http://schemas.microsoft.com/office/drawing/2014/main" id="{119504D1-3B5D-4649-A25F-0DADD247DA85}"/>
+                <a16:creationId xmlns:a16="http://schemas.microsoft.com/office/drawing/2014/main" id="{33322C41-6C53-4EF9-8EF1-E8B7C9F8F6CB}"/>
               </a:ext>
             </a:extLst>
           </p:cNvPr>
@@ -20931,7 +20931,7 @@
           <p:cNvPr id="20" name="">
             <a:extLst xmlns:a="http://schemas.openxmlformats.org/drawingml/2006/main">
               <a:ext uri="{FF2B5EF4-FFF2-40B4-BE49-F238E27FC236}">
-                <a16:creationId xmlns:a16="http://schemas.microsoft.com/office/drawing/2014/main" id="{AA46037A-C126-4693-AAB4-6C9A4E9CE30C}"/>
+                <a16:creationId xmlns:a16="http://schemas.microsoft.com/office/drawing/2014/main" id="{50869DC2-8C2B-424E-A25D-0176678F6D70}"/>
               </a:ext>
             </a:extLst>
           </p:cNvPr>
@@ -20972,7 +20972,7 @@
           <p:cNvPr id="21" name="">
             <a:extLst xmlns:a="http://schemas.openxmlformats.org/drawingml/2006/main">
               <a:ext uri="{FF2B5EF4-FFF2-40B4-BE49-F238E27FC236}">
-                <a16:creationId xmlns:a16="http://schemas.microsoft.com/office/drawing/2014/main" id="{5396D89B-0F9D-4318-954B-BF3247FD13E5}"/>
+                <a16:creationId xmlns:a16="http://schemas.microsoft.com/office/drawing/2014/main" id="{A4AF6C29-575A-42C3-8E8F-500CAFB3C0E4}"/>
               </a:ext>
             </a:extLst>
           </p:cNvPr>
@@ -21088,7 +21088,7 @@
           <p:cNvPr id="22" name="">
             <a:extLst xmlns:a="http://schemas.openxmlformats.org/drawingml/2006/main">
               <a:ext uri="{FF2B5EF4-FFF2-40B4-BE49-F238E27FC236}">
-                <a16:creationId xmlns:a16="http://schemas.microsoft.com/office/drawing/2014/main" id="{028AF3AA-B837-483C-B195-249A7AF13012}"/>
+                <a16:creationId xmlns:a16="http://schemas.microsoft.com/office/drawing/2014/main" id="{6AD7F90F-721E-4095-9248-7EBD458DD2E1}"/>
               </a:ext>
             </a:extLst>
           </p:cNvPr>
@@ -21127,7 +21127,7 @@
           <p:cNvPr id="23" name="">
             <a:extLst xmlns:a="http://schemas.openxmlformats.org/drawingml/2006/main">
               <a:ext uri="{FF2B5EF4-FFF2-40B4-BE49-F238E27FC236}">
-                <a16:creationId xmlns:a16="http://schemas.microsoft.com/office/drawing/2014/main" id="{CB97A72B-8A2D-4B7E-A542-9A042B0D6654}"/>
+                <a16:creationId xmlns:a16="http://schemas.microsoft.com/office/drawing/2014/main" id="{A3F27D88-34B0-4173-9209-8C9CD97033DA}"/>
               </a:ext>
             </a:extLst>
           </p:cNvPr>
@@ -21189,7 +21189,7 @@
           <p:cNvPr id="24" name="">
             <a:extLst xmlns:a="http://schemas.openxmlformats.org/drawingml/2006/main">
               <a:ext uri="{FF2B5EF4-FFF2-40B4-BE49-F238E27FC236}">
-                <a16:creationId xmlns:a16="http://schemas.microsoft.com/office/drawing/2014/main" id="{B3A9781D-2B62-47B5-B938-EE4C7D266EBF}"/>
+                <a16:creationId xmlns:a16="http://schemas.microsoft.com/office/drawing/2014/main" id="{557209B9-A1E8-4AB4-8B16-D78B76D02F70}"/>
               </a:ext>
             </a:extLst>
           </p:cNvPr>
@@ -21224,7 +21224,7 @@
           <p:cNvPr id="25" name="">
             <a:extLst xmlns:a="http://schemas.openxmlformats.org/drawingml/2006/main">
               <a:ext uri="{FF2B5EF4-FFF2-40B4-BE49-F238E27FC236}">
-                <a16:creationId xmlns:a16="http://schemas.microsoft.com/office/drawing/2014/main" id="{538C8B2A-45DF-4F5F-99AA-FB3BC86228AE}"/>
+                <a16:creationId xmlns:a16="http://schemas.microsoft.com/office/drawing/2014/main" id="{1931D74A-D388-40AE-A0E7-10711E208302}"/>
               </a:ext>
             </a:extLst>
           </p:cNvPr>
@@ -21286,7 +21286,7 @@
           <p:cNvPr id="26" name="">
             <a:extLst xmlns:a="http://schemas.openxmlformats.org/drawingml/2006/main">
               <a:ext uri="{FF2B5EF4-FFF2-40B4-BE49-F238E27FC236}">
-                <a16:creationId xmlns:a16="http://schemas.microsoft.com/office/drawing/2014/main" id="{834DCAF1-9E06-4C40-9510-AAB2D6F4FC1C}"/>
+                <a16:creationId xmlns:a16="http://schemas.microsoft.com/office/drawing/2014/main" id="{C71AF303-606D-4983-A402-33EF64B272A3}"/>
               </a:ext>
             </a:extLst>
           </p:cNvPr>
@@ -21348,7 +21348,7 @@
           <p:cNvPr id="27" name="">
             <a:extLst xmlns:a="http://schemas.openxmlformats.org/drawingml/2006/main">
               <a:ext uri="{FF2B5EF4-FFF2-40B4-BE49-F238E27FC236}">
-                <a16:creationId xmlns:a16="http://schemas.microsoft.com/office/drawing/2014/main" id="{945787E1-1852-4F42-87CE-360B784E235E}"/>
+                <a16:creationId xmlns:a16="http://schemas.microsoft.com/office/drawing/2014/main" id="{B482CA80-7D3F-489F-9081-177E10366F56}"/>
               </a:ext>
             </a:extLst>
           </p:cNvPr>
@@ -21389,7 +21389,7 @@
           <p:cNvPr id="28" name="">
             <a:extLst xmlns:a="http://schemas.openxmlformats.org/drawingml/2006/main">
               <a:ext uri="{FF2B5EF4-FFF2-40B4-BE49-F238E27FC236}">
-                <a16:creationId xmlns:a16="http://schemas.microsoft.com/office/drawing/2014/main" id="{6711B941-D06A-47D3-A61D-19C213D91C31}"/>
+                <a16:creationId xmlns:a16="http://schemas.microsoft.com/office/drawing/2014/main" id="{6503B412-318B-42E9-9617-914D3674DD7A}"/>
               </a:ext>
             </a:extLst>
           </p:cNvPr>
@@ -21505,7 +21505,7 @@
           <p:cNvPr id="29" name="">
             <a:extLst xmlns:a="http://schemas.openxmlformats.org/drawingml/2006/main">
               <a:ext uri="{FF2B5EF4-FFF2-40B4-BE49-F238E27FC236}">
-                <a16:creationId xmlns:a16="http://schemas.microsoft.com/office/drawing/2014/main" id="{3869285C-FA6E-4C6B-8A2D-EA0EFF54221D}"/>
+                <a16:creationId xmlns:a16="http://schemas.microsoft.com/office/drawing/2014/main" id="{560FD973-6A41-49E4-A810-EE956E75A0DF}"/>
               </a:ext>
             </a:extLst>
           </p:cNvPr>
@@ -21544,7 +21544,7 @@
           <p:cNvPr id="30" name="">
             <a:extLst xmlns:a="http://schemas.openxmlformats.org/drawingml/2006/main">
               <a:ext uri="{FF2B5EF4-FFF2-40B4-BE49-F238E27FC236}">
-                <a16:creationId xmlns:a16="http://schemas.microsoft.com/office/drawing/2014/main" id="{1E7F2BB7-7F90-4C7B-85B1-0207DEA62F15}"/>
+                <a16:creationId xmlns:a16="http://schemas.microsoft.com/office/drawing/2014/main" id="{B630E834-60B9-48E0-AF04-EF7E4183E2FC}"/>
               </a:ext>
             </a:extLst>
           </p:cNvPr>
@@ -21606,7 +21606,7 @@
           <p:cNvPr id="31" name="">
             <a:extLst xmlns:a="http://schemas.openxmlformats.org/drawingml/2006/main">
               <a:ext uri="{FF2B5EF4-FFF2-40B4-BE49-F238E27FC236}">
-                <a16:creationId xmlns:a16="http://schemas.microsoft.com/office/drawing/2014/main" id="{4CE5034F-138C-42B3-84D9-9948802AD6E4}"/>
+                <a16:creationId xmlns:a16="http://schemas.microsoft.com/office/drawing/2014/main" id="{EAB11556-9B45-4572-8CC2-5C686C32A644}"/>
               </a:ext>
             </a:extLst>
           </p:cNvPr>
@@ -21641,7 +21641,7 @@
           <p:cNvPr id="32" name="">
             <a:extLst xmlns:a="http://schemas.openxmlformats.org/drawingml/2006/main">
               <a:ext uri="{FF2B5EF4-FFF2-40B4-BE49-F238E27FC236}">
-                <a16:creationId xmlns:a16="http://schemas.microsoft.com/office/drawing/2014/main" id="{76419A76-B2E4-40A5-8690-F80FEF23839A}"/>
+                <a16:creationId xmlns:a16="http://schemas.microsoft.com/office/drawing/2014/main" id="{67A31A8A-26E8-4C01-B20D-A3C7C8444569}"/>
               </a:ext>
             </a:extLst>
           </p:cNvPr>
@@ -21703,7 +21703,7 @@
           <p:cNvPr id="33" name="">
             <a:extLst xmlns:a="http://schemas.openxmlformats.org/drawingml/2006/main">
               <a:ext uri="{FF2B5EF4-FFF2-40B4-BE49-F238E27FC236}">
-                <a16:creationId xmlns:a16="http://schemas.microsoft.com/office/drawing/2014/main" id="{65B2A9A4-5024-461E-8CB7-37FB168AAC21}"/>
+                <a16:creationId xmlns:a16="http://schemas.microsoft.com/office/drawing/2014/main" id="{5551135B-8485-41FB-9D9C-1FBF62B563D6}"/>
               </a:ext>
             </a:extLst>
           </p:cNvPr>
@@ -21765,7 +21765,7 @@
           <p:cNvPr id="34" name="">
             <a:extLst xmlns:a="http://schemas.openxmlformats.org/drawingml/2006/main">
               <a:ext uri="{FF2B5EF4-FFF2-40B4-BE49-F238E27FC236}">
-                <a16:creationId xmlns:a16="http://schemas.microsoft.com/office/drawing/2014/main" id="{C04FB008-DF2F-42CF-B7E7-B654B5EE1B0C}"/>
+                <a16:creationId xmlns:a16="http://schemas.microsoft.com/office/drawing/2014/main" id="{46AE808D-A788-4CC5-A153-08536F8005A5}"/>
               </a:ext>
             </a:extLst>
           </p:cNvPr>
@@ -21806,7 +21806,7 @@
           <p:cNvPr id="35" name="">
             <a:extLst xmlns:a="http://schemas.openxmlformats.org/drawingml/2006/main">
               <a:ext uri="{FF2B5EF4-FFF2-40B4-BE49-F238E27FC236}">
-                <a16:creationId xmlns:a16="http://schemas.microsoft.com/office/drawing/2014/main" id="{0087936A-3556-4429-B0F5-E4EE1B8A050E}"/>
+                <a16:creationId xmlns:a16="http://schemas.microsoft.com/office/drawing/2014/main" id="{3F702D5A-C85B-4CB9-8485-ECDBB9AFCD03}"/>
               </a:ext>
             </a:extLst>
           </p:cNvPr>
@@ -21922,7 +21922,7 @@
           <p:cNvPr id="36" name="">
             <a:extLst xmlns:a="http://schemas.openxmlformats.org/drawingml/2006/main">
               <a:ext uri="{FF2B5EF4-FFF2-40B4-BE49-F238E27FC236}">
-                <a16:creationId xmlns:a16="http://schemas.microsoft.com/office/drawing/2014/main" id="{4DBBE2C8-EDD5-44A0-BE06-4A657824F288}"/>
+                <a16:creationId xmlns:a16="http://schemas.microsoft.com/office/drawing/2014/main" id="{2BFB75E0-DA8F-4C22-AAC1-57AD306C2F55}"/>
               </a:ext>
             </a:extLst>
           </p:cNvPr>
@@ -21961,7 +21961,7 @@
           <p:cNvPr id="37" name="">
             <a:extLst xmlns:a="http://schemas.openxmlformats.org/drawingml/2006/main">
               <a:ext uri="{FF2B5EF4-FFF2-40B4-BE49-F238E27FC236}">
-                <a16:creationId xmlns:a16="http://schemas.microsoft.com/office/drawing/2014/main" id="{454248E8-1895-4723-92AA-8DBADF10DCC2}"/>
+                <a16:creationId xmlns:a16="http://schemas.microsoft.com/office/drawing/2014/main" id="{216B09A7-F66E-447F-B3EB-746788F925BD}"/>
               </a:ext>
             </a:extLst>
           </p:cNvPr>
@@ -22023,7 +22023,7 @@
           <p:cNvPr id="38" name="">
             <a:extLst xmlns:a="http://schemas.openxmlformats.org/drawingml/2006/main">
               <a:ext uri="{FF2B5EF4-FFF2-40B4-BE49-F238E27FC236}">
-                <a16:creationId xmlns:a16="http://schemas.microsoft.com/office/drawing/2014/main" id="{2BB09DC3-96E0-4739-B02F-02D859C4831C}"/>
+                <a16:creationId xmlns:a16="http://schemas.microsoft.com/office/drawing/2014/main" id="{553000E5-70D9-4A06-AEF1-7BED39476A56}"/>
               </a:ext>
             </a:extLst>
           </p:cNvPr>
@@ -22058,7 +22058,7 @@
           <p:cNvPr id="39" name="">
             <a:extLst xmlns:a="http://schemas.openxmlformats.org/drawingml/2006/main">
               <a:ext uri="{FF2B5EF4-FFF2-40B4-BE49-F238E27FC236}">
-                <a16:creationId xmlns:a16="http://schemas.microsoft.com/office/drawing/2014/main" id="{698585FD-8A9F-46C6-8095-EBFDC543C94D}"/>
+                <a16:creationId xmlns:a16="http://schemas.microsoft.com/office/drawing/2014/main" id="{FD4620BB-7C24-4D75-834F-4132BC571AB7}"/>
               </a:ext>
             </a:extLst>
           </p:cNvPr>
@@ -22120,7 +22120,7 @@
           <p:cNvPr id="40" name="">
             <a:extLst xmlns:a="http://schemas.openxmlformats.org/drawingml/2006/main">
               <a:ext uri="{FF2B5EF4-FFF2-40B4-BE49-F238E27FC236}">
-                <a16:creationId xmlns:a16="http://schemas.microsoft.com/office/drawing/2014/main" id="{F2DFD0BD-C5F1-4FCF-8B35-BEBA171B3686}"/>
+                <a16:creationId xmlns:a16="http://schemas.microsoft.com/office/drawing/2014/main" id="{385B2A2B-B350-4F9C-B6FF-696A69A9E0A8}"/>
               </a:ext>
             </a:extLst>
           </p:cNvPr>
@@ -22182,7 +22182,7 @@
           <p:cNvPr id="41" name="">
             <a:extLst xmlns:a="http://schemas.openxmlformats.org/drawingml/2006/main">
               <a:ext uri="{FF2B5EF4-FFF2-40B4-BE49-F238E27FC236}">
-                <a16:creationId xmlns:a16="http://schemas.microsoft.com/office/drawing/2014/main" id="{E073833E-0CDE-4473-B328-44F7ED75E01D}"/>
+                <a16:creationId xmlns:a16="http://schemas.microsoft.com/office/drawing/2014/main" id="{ED35BFE1-0354-4259-A3C1-E3D3CA41939F}"/>
               </a:ext>
             </a:extLst>
           </p:cNvPr>
@@ -22223,7 +22223,7 @@
           <p:cNvPr id="42" name="">
             <a:extLst xmlns:a="http://schemas.openxmlformats.org/drawingml/2006/main">
               <a:ext uri="{FF2B5EF4-FFF2-40B4-BE49-F238E27FC236}">
-                <a16:creationId xmlns:a16="http://schemas.microsoft.com/office/drawing/2014/main" id="{4D064C54-4FDD-4A0B-818E-7C10F7E4A919}"/>
+                <a16:creationId xmlns:a16="http://schemas.microsoft.com/office/drawing/2014/main" id="{863F7F7C-DEE7-468B-9713-715B90A4F09D}"/>
               </a:ext>
             </a:extLst>
           </p:cNvPr>
@@ -22339,7 +22339,7 @@
           <p:cNvPr id="43" name="">
             <a:extLst xmlns:a="http://schemas.openxmlformats.org/drawingml/2006/main">
               <a:ext uri="{FF2B5EF4-FFF2-40B4-BE49-F238E27FC236}">
-                <a16:creationId xmlns:a16="http://schemas.microsoft.com/office/drawing/2014/main" id="{CA836CD3-1F05-4E06-BBF7-02A44488A85E}"/>
+                <a16:creationId xmlns:a16="http://schemas.microsoft.com/office/drawing/2014/main" id="{F5F96469-8482-433A-B0DA-177CFF2EFCDD}"/>
               </a:ext>
             </a:extLst>
           </p:cNvPr>
@@ -22378,7 +22378,7 @@
           <p:cNvPr id="44" name="">
             <a:extLst xmlns:a="http://schemas.openxmlformats.org/drawingml/2006/main">
               <a:ext uri="{FF2B5EF4-FFF2-40B4-BE49-F238E27FC236}">
-                <a16:creationId xmlns:a16="http://schemas.microsoft.com/office/drawing/2014/main" id="{4CC24D0F-4E04-4D81-9301-20F1DF1D3EB6}"/>
+                <a16:creationId xmlns:a16="http://schemas.microsoft.com/office/drawing/2014/main" id="{13B8A19F-BD6B-4F23-9901-BE9578E99B8B}"/>
               </a:ext>
             </a:extLst>
           </p:cNvPr>
@@ -22440,7 +22440,7 @@
           <p:cNvPr id="45" name="">
             <a:extLst xmlns:a="http://schemas.openxmlformats.org/drawingml/2006/main">
               <a:ext uri="{FF2B5EF4-FFF2-40B4-BE49-F238E27FC236}">
-                <a16:creationId xmlns:a16="http://schemas.microsoft.com/office/drawing/2014/main" id="{DF4523E6-A015-4A59-B55A-8D0258D38F8A}"/>
+                <a16:creationId xmlns:a16="http://schemas.microsoft.com/office/drawing/2014/main" id="{CDE3172A-2161-4FD5-9793-573A61E06EAE}"/>
               </a:ext>
             </a:extLst>
           </p:cNvPr>
@@ -22475,7 +22475,7 @@
           <p:cNvPr id="46" name="">
             <a:extLst xmlns:a="http://schemas.openxmlformats.org/drawingml/2006/main">
               <a:ext uri="{FF2B5EF4-FFF2-40B4-BE49-F238E27FC236}">
-                <a16:creationId xmlns:a16="http://schemas.microsoft.com/office/drawing/2014/main" id="{0E634828-5758-4890-8E43-91C6EC5DD9EE}"/>
+                <a16:creationId xmlns:a16="http://schemas.microsoft.com/office/drawing/2014/main" id="{03601D30-5B3E-4247-9D67-852CF0589C70}"/>
               </a:ext>
             </a:extLst>
           </p:cNvPr>
@@ -22537,7 +22537,7 @@
           <p:cNvPr id="47" name="">
             <a:extLst xmlns:a="http://schemas.openxmlformats.org/drawingml/2006/main">
               <a:ext uri="{FF2B5EF4-FFF2-40B4-BE49-F238E27FC236}">
-                <a16:creationId xmlns:a16="http://schemas.microsoft.com/office/drawing/2014/main" id="{7FDD7036-8BD0-4888-A93E-3202CE3F4626}"/>
+                <a16:creationId xmlns:a16="http://schemas.microsoft.com/office/drawing/2014/main" id="{810F3181-77D1-420F-A81B-7A940980F050}"/>
               </a:ext>
             </a:extLst>
           </p:cNvPr>
@@ -22599,7 +22599,7 @@
           <p:cNvPr id="48" name="">
             <a:extLst xmlns:a="http://schemas.openxmlformats.org/drawingml/2006/main">
               <a:ext uri="{FF2B5EF4-FFF2-40B4-BE49-F238E27FC236}">
-                <a16:creationId xmlns:a16="http://schemas.microsoft.com/office/drawing/2014/main" id="{88E05D3D-713F-40FA-9229-0614F28A9398}"/>
+                <a16:creationId xmlns:a16="http://schemas.microsoft.com/office/drawing/2014/main" id="{54CC7DF2-0BA3-4B01-ABB2-8555F640C317}"/>
               </a:ext>
             </a:extLst>
           </p:cNvPr>
@@ -22640,7 +22640,7 @@
           <p:cNvPr id="49" name="">
             <a:extLst xmlns:a="http://schemas.openxmlformats.org/drawingml/2006/main">
               <a:ext uri="{FF2B5EF4-FFF2-40B4-BE49-F238E27FC236}">
-                <a16:creationId xmlns:a16="http://schemas.microsoft.com/office/drawing/2014/main" id="{E98B5700-CC0C-4681-9B6F-2B682F321622}"/>
+                <a16:creationId xmlns:a16="http://schemas.microsoft.com/office/drawing/2014/main" id="{53F62269-113E-48EF-8E4B-5387F5A18FD7}"/>
               </a:ext>
             </a:extLst>
           </p:cNvPr>
@@ -22756,7 +22756,7 @@
           <p:cNvPr id="50" name="">
             <a:extLst xmlns:a="http://schemas.openxmlformats.org/drawingml/2006/main">
               <a:ext uri="{FF2B5EF4-FFF2-40B4-BE49-F238E27FC236}">
-                <a16:creationId xmlns:a16="http://schemas.microsoft.com/office/drawing/2014/main" id="{F7269CF8-3027-45A9-ACAF-3B02CA3F1F5A}"/>
+                <a16:creationId xmlns:a16="http://schemas.microsoft.com/office/drawing/2014/main" id="{C6A392A2-C8EE-4262-B80C-C199FA878179}"/>
               </a:ext>
             </a:extLst>
           </p:cNvPr>
@@ -22791,7 +22791,7 @@
           <p:cNvPr id="51" name="">
             <a:extLst xmlns:a="http://schemas.openxmlformats.org/drawingml/2006/main">
               <a:ext uri="{FF2B5EF4-FFF2-40B4-BE49-F238E27FC236}">
-                <a16:creationId xmlns:a16="http://schemas.microsoft.com/office/drawing/2014/main" id="{F5341943-1CC4-44BE-AA95-9769DEECE42C}"/>
+                <a16:creationId xmlns:a16="http://schemas.microsoft.com/office/drawing/2014/main" id="{9065E5DF-F209-4184-88D7-1BD748F0B9ED}"/>
               </a:ext>
             </a:extLst>
           </p:cNvPr>
@@ -22851,7 +22851,7 @@
     </p:spTree>
     <p:extLst>
       <p:ext uri="{BB962C8B-B14F-4D97-AF65-F5344CB8AC3E}">
-        <p14:creationId xmlns:p14="http://schemas.microsoft.com/office/powerpoint/2010/main" val="1361480339"/>
+        <p14:creationId xmlns:p14="http://schemas.microsoft.com/office/powerpoint/2010/main" val="1800558871"/>
       </p:ext>
     </p:extLst>
   </p:cSld>
@@ -22882,7 +22882,7 @@
           <p:cNvPr id="29" name="">
             <a:extLst xmlns:a="http://schemas.openxmlformats.org/drawingml/2006/main">
               <a:ext uri="{FF2B5EF4-FFF2-40B4-BE49-F238E27FC236}">
-                <a16:creationId xmlns:a16="http://schemas.microsoft.com/office/drawing/2014/main" id="{ECBA49A3-14B8-4E13-A9B2-3DF288E8E39F}"/>
+                <a16:creationId xmlns:a16="http://schemas.microsoft.com/office/drawing/2014/main" id="{68DB6D8F-14D8-4607-892B-1CDE3EA34040}"/>
               </a:ext>
             </a:extLst>
           </p:cNvPr>
@@ -22915,7 +22915,7 @@
           <p:cNvPr id="2" name="">
             <a:extLst xmlns:a="http://schemas.openxmlformats.org/drawingml/2006/main">
               <a:ext uri="{FF2B5EF4-FFF2-40B4-BE49-F238E27FC236}">
-                <a16:creationId xmlns:a16="http://schemas.microsoft.com/office/drawing/2014/main" id="{BFE962F7-7D8E-4FEB-8836-824C9155C2EC}"/>
+                <a16:creationId xmlns:a16="http://schemas.microsoft.com/office/drawing/2014/main" id="{C5C3F7C5-C421-418F-8A1D-70726E2CC645}"/>
               </a:ext>
             </a:extLst>
           </p:cNvPr>
@@ -22977,7 +22977,7 @@
           <p:cNvPr id="3" name="">
             <a:extLst xmlns:a="http://schemas.openxmlformats.org/drawingml/2006/main">
               <a:ext uri="{FF2B5EF4-FFF2-40B4-BE49-F238E27FC236}">
-                <a16:creationId xmlns:a16="http://schemas.microsoft.com/office/drawing/2014/main" id="{1DA2BC66-CE45-4ECD-8516-CDFFF212A2B5}"/>
+                <a16:creationId xmlns:a16="http://schemas.microsoft.com/office/drawing/2014/main" id="{93B11344-FE8C-42C5-AFA9-1E10A94779B8}"/>
               </a:ext>
             </a:extLst>
           </p:cNvPr>
@@ -23039,7 +23039,7 @@
           <p:cNvPr id="4" name="">
             <a:extLst xmlns:a="http://schemas.openxmlformats.org/drawingml/2006/main">
               <a:ext uri="{FF2B5EF4-FFF2-40B4-BE49-F238E27FC236}">
-                <a16:creationId xmlns:a16="http://schemas.microsoft.com/office/drawing/2014/main" id="{85EE7CC3-A219-45A0-A482-FFB5C055DFC7}"/>
+                <a16:creationId xmlns:a16="http://schemas.microsoft.com/office/drawing/2014/main" id="{E39D30D0-818F-463C-8AAB-3A47DE75DE83}"/>
               </a:ext>
             </a:extLst>
           </p:cNvPr>
@@ -23072,7 +23072,7 @@
           <p:cNvPr id="5" name="">
             <a:extLst xmlns:a="http://schemas.openxmlformats.org/drawingml/2006/main">
               <a:ext uri="{FF2B5EF4-FFF2-40B4-BE49-F238E27FC236}">
-                <a16:creationId xmlns:a16="http://schemas.microsoft.com/office/drawing/2014/main" id="{B56BF051-12B0-47DB-84C8-777113B4610C}"/>
+                <a16:creationId xmlns:a16="http://schemas.microsoft.com/office/drawing/2014/main" id="{AD7AE8CB-6740-4164-A4B5-AED8A2F55C0A}"/>
               </a:ext>
             </a:extLst>
           </p:cNvPr>
@@ -23134,7 +23134,7 @@
           <p:cNvPr id="6" name="">
             <a:extLst xmlns:a="http://schemas.openxmlformats.org/drawingml/2006/main">
               <a:ext uri="{FF2B5EF4-FFF2-40B4-BE49-F238E27FC236}">
-                <a16:creationId xmlns:a16="http://schemas.microsoft.com/office/drawing/2014/main" id="{98D52340-661E-4ADE-A630-375F87CE57DD}"/>
+                <a16:creationId xmlns:a16="http://schemas.microsoft.com/office/drawing/2014/main" id="{35019AB2-5479-4FB1-9361-2FE6E098825B}"/>
               </a:ext>
             </a:extLst>
           </p:cNvPr>
@@ -23196,7 +23196,7 @@
           <p:cNvPr id="7" name="">
             <a:extLst xmlns:a="http://schemas.openxmlformats.org/drawingml/2006/main">
               <a:ext uri="{FF2B5EF4-FFF2-40B4-BE49-F238E27FC236}">
-                <a16:creationId xmlns:a16="http://schemas.microsoft.com/office/drawing/2014/main" id="{49AD3977-E7BE-4A4E-921D-63AE3FEA9896}"/>
+                <a16:creationId xmlns:a16="http://schemas.microsoft.com/office/drawing/2014/main" id="{234A368E-13A5-43C5-979A-7303088C9253}"/>
               </a:ext>
             </a:extLst>
           </p:cNvPr>
@@ -23237,7 +23237,7 @@
           <p:cNvPr id="8" name="">
             <a:extLst xmlns:a="http://schemas.openxmlformats.org/drawingml/2006/main">
               <a:ext uri="{FF2B5EF4-FFF2-40B4-BE49-F238E27FC236}">
-                <a16:creationId xmlns:a16="http://schemas.microsoft.com/office/drawing/2014/main" id="{60FF38EE-BA14-4743-9185-7575BFDA9287}"/>
+                <a16:creationId xmlns:a16="http://schemas.microsoft.com/office/drawing/2014/main" id="{DB0E4C33-167B-43B5-A78A-AB16B1C09415}"/>
               </a:ext>
             </a:extLst>
           </p:cNvPr>
@@ -23270,7 +23270,7 @@
           <p:cNvPr id="9" name="">
             <a:extLst xmlns:a="http://schemas.openxmlformats.org/drawingml/2006/main">
               <a:ext uri="{FF2B5EF4-FFF2-40B4-BE49-F238E27FC236}">
-                <a16:creationId xmlns:a16="http://schemas.microsoft.com/office/drawing/2014/main" id="{0F6C9B99-37BA-4B08-AB7A-A59F665C304C}"/>
+                <a16:creationId xmlns:a16="http://schemas.microsoft.com/office/drawing/2014/main" id="{8DFBA043-5A9C-4B92-A9DF-75115943BB7A}"/>
               </a:ext>
             </a:extLst>
           </p:cNvPr>
@@ -23322,7 +23322,7 @@
                 <a:ea typeface="Malgun Gothic"/>
                 <a:cs typeface="Malgun Gothic"/>
               </a:rPr>
-              <a:t>김민수 · 팀장</a:t>
+              <a:t>이휘 · 팀장</a:t>
             </a:r>
           </a:p>
         </p:txBody>
@@ -23332,7 +23332,7 @@
           <p:cNvPr id="10" name="">
             <a:extLst xmlns:a="http://schemas.openxmlformats.org/drawingml/2006/main">
               <a:ext uri="{FF2B5EF4-FFF2-40B4-BE49-F238E27FC236}">
-                <a16:creationId xmlns:a16="http://schemas.microsoft.com/office/drawing/2014/main" id="{F6A092D2-FA48-4EF7-ABC0-97B84A9037B9}"/>
+                <a16:creationId xmlns:a16="http://schemas.microsoft.com/office/drawing/2014/main" id="{D9B6D81F-872F-4BC0-A8BB-13F8FA726495}"/>
               </a:ext>
             </a:extLst>
           </p:cNvPr>
@@ -23384,7 +23384,7 @@
                 <a:ea typeface="Malgun Gothic"/>
                 <a:cs typeface="Malgun Gothic"/>
               </a:rPr>
-              <a:t>코드 흐름 이해와 설명 · Wokwi/로그 확인 · 시연 영상 진행 · 발표 및 최종 제출 내용 확인</a:t>
+              <a:t>시스템 설계 · 펌웨어/시뮬레이터/웹 구현 · 실물 D 통합 · 문서 작성 · GitHub/구글폼 최종 제출</a:t>
             </a:r>
           </a:p>
         </p:txBody>
@@ -23394,7 +23394,7 @@
           <p:cNvPr id="11" name="">
             <a:extLst xmlns:a="http://schemas.openxmlformats.org/drawingml/2006/main">
               <a:ext uri="{FF2B5EF4-FFF2-40B4-BE49-F238E27FC236}">
-                <a16:creationId xmlns:a16="http://schemas.microsoft.com/office/drawing/2014/main" id="{43FE5487-3627-4BCD-BC57-413968489D5F}"/>
+                <a16:creationId xmlns:a16="http://schemas.microsoft.com/office/drawing/2014/main" id="{5777330F-982D-41FD-BFE9-BD0C53421EC7}"/>
               </a:ext>
             </a:extLst>
           </p:cNvPr>
@@ -23435,7 +23435,7 @@
           <p:cNvPr id="12" name="">
             <a:extLst xmlns:a="http://schemas.openxmlformats.org/drawingml/2006/main">
               <a:ext uri="{FF2B5EF4-FFF2-40B4-BE49-F238E27FC236}">
-                <a16:creationId xmlns:a16="http://schemas.microsoft.com/office/drawing/2014/main" id="{C1A4CD56-E3CD-47CD-90CA-98F41376A290}"/>
+                <a16:creationId xmlns:a16="http://schemas.microsoft.com/office/drawing/2014/main" id="{20ED60D8-1A42-414D-9902-C544CCF04880}"/>
               </a:ext>
             </a:extLst>
           </p:cNvPr>
@@ -23468,7 +23468,7 @@
           <p:cNvPr id="13" name="">
             <a:extLst xmlns:a="http://schemas.openxmlformats.org/drawingml/2006/main">
               <a:ext uri="{FF2B5EF4-FFF2-40B4-BE49-F238E27FC236}">
-                <a16:creationId xmlns:a16="http://schemas.microsoft.com/office/drawing/2014/main" id="{7C54B3A7-CE8B-496F-916E-8CD4EEA70F2A}"/>
+                <a16:creationId xmlns:a16="http://schemas.microsoft.com/office/drawing/2014/main" id="{3134CA8A-6CCE-4729-B415-913A818D079D}"/>
               </a:ext>
             </a:extLst>
           </p:cNvPr>
@@ -23520,7 +23520,7 @@
                 <a:ea typeface="Malgun Gothic"/>
                 <a:cs typeface="Malgun Gothic"/>
               </a:rPr>
-              <a:t>멘토·개발 지원자 · [성명 확인 필요]</a:t>
+              <a:t>김민수 · 팀원</a:t>
             </a:r>
           </a:p>
         </p:txBody>
@@ -23530,7 +23530,7 @@
           <p:cNvPr id="14" name="">
             <a:extLst xmlns:a="http://schemas.openxmlformats.org/drawingml/2006/main">
               <a:ext uri="{FF2B5EF4-FFF2-40B4-BE49-F238E27FC236}">
-                <a16:creationId xmlns:a16="http://schemas.microsoft.com/office/drawing/2014/main" id="{15F592B0-C97B-4760-A166-B4CDB3562AFA}"/>
+                <a16:creationId xmlns:a16="http://schemas.microsoft.com/office/drawing/2014/main" id="{0EAF46D3-366E-49DE-BE0A-05DE9E73F7B2}"/>
               </a:ext>
             </a:extLst>
           </p:cNvPr>
@@ -23582,7 +23582,7 @@
                 <a:ea typeface="Malgun Gothic"/>
                 <a:cs typeface="Malgun Gothic"/>
               </a:rPr>
-              <a:t>시스템 설계 · 펌웨어/시뮬레이터/웹 초안 · 실물 D 통합 · 문서 작성 지원 · GitHub 리뷰</a:t>
+              <a:t>코드 흐름 이해 · Wokwi/로그 확인 · 시연 영상 참여 · 발표 내용 숙지 · 최종 제출 내용 공동 확인</a:t>
             </a:r>
           </a:p>
         </p:txBody>
@@ -23592,7 +23592,7 @@
           <p:cNvPr id="15" name="">
             <a:extLst xmlns:a="http://schemas.openxmlformats.org/drawingml/2006/main">
               <a:ext uri="{FF2B5EF4-FFF2-40B4-BE49-F238E27FC236}">
-                <a16:creationId xmlns:a16="http://schemas.microsoft.com/office/drawing/2014/main" id="{1CE867D2-2FE7-440F-BACA-306F9115553D}"/>
+                <a16:creationId xmlns:a16="http://schemas.microsoft.com/office/drawing/2014/main" id="{A82D1401-1B9D-4808-90F0-C4399D5E05DB}"/>
               </a:ext>
             </a:extLst>
           </p:cNvPr>
@@ -23633,7 +23633,7 @@
           <p:cNvPr id="16" name="">
             <a:extLst xmlns:a="http://schemas.openxmlformats.org/drawingml/2006/main">
               <a:ext uri="{FF2B5EF4-FFF2-40B4-BE49-F238E27FC236}">
-                <a16:creationId xmlns:a16="http://schemas.microsoft.com/office/drawing/2014/main" id="{75A1B64F-2AF9-419A-9EA9-B484FD805937}"/>
+                <a16:creationId xmlns:a16="http://schemas.microsoft.com/office/drawing/2014/main" id="{7949C097-AC10-4665-A751-088E3E9C56F3}"/>
               </a:ext>
             </a:extLst>
           </p:cNvPr>
@@ -23666,7 +23666,7 @@
           <p:cNvPr id="17" name="">
             <a:extLst xmlns:a="http://schemas.openxmlformats.org/drawingml/2006/main">
               <a:ext uri="{FF2B5EF4-FFF2-40B4-BE49-F238E27FC236}">
-                <a16:creationId xmlns:a16="http://schemas.microsoft.com/office/drawing/2014/main" id="{0D47E1DA-8A8E-403F-8471-1F36C889557C}"/>
+                <a16:creationId xmlns:a16="http://schemas.microsoft.com/office/drawing/2014/main" id="{50E7BA2A-ED7A-4F50-9DFE-F5DBD2180E39}"/>
               </a:ext>
             </a:extLst>
           </p:cNvPr>
@@ -23728,7 +23728,7 @@
           <p:cNvPr id="18" name="">
             <a:extLst xmlns:a="http://schemas.openxmlformats.org/drawingml/2006/main">
               <a:ext uri="{FF2B5EF4-FFF2-40B4-BE49-F238E27FC236}">
-                <a16:creationId xmlns:a16="http://schemas.microsoft.com/office/drawing/2014/main" id="{9B408BB3-521D-4734-9410-997A17F3F93B}"/>
+                <a16:creationId xmlns:a16="http://schemas.microsoft.com/office/drawing/2014/main" id="{7442093B-1FCC-4106-BD32-10F69DAD2BE7}"/>
               </a:ext>
             </a:extLst>
           </p:cNvPr>
@@ -23790,7 +23790,7 @@
           <p:cNvPr id="19" name="">
             <a:extLst xmlns:a="http://schemas.openxmlformats.org/drawingml/2006/main">
               <a:ext uri="{FF2B5EF4-FFF2-40B4-BE49-F238E27FC236}">
-                <a16:creationId xmlns:a16="http://schemas.microsoft.com/office/drawing/2014/main" id="{7912013E-FE11-44F7-B0AD-2D753352A7D4}"/>
+                <a16:creationId xmlns:a16="http://schemas.microsoft.com/office/drawing/2014/main" id="{FB924B30-E425-408D-987B-EAD8E1D48738}"/>
               </a:ext>
             </a:extLst>
           </p:cNvPr>
@@ -23825,7 +23825,7 @@
           <p:cNvPr id="20" name="">
             <a:extLst xmlns:a="http://schemas.openxmlformats.org/drawingml/2006/main">
               <a:ext uri="{FF2B5EF4-FFF2-40B4-BE49-F238E27FC236}">
-                <a16:creationId xmlns:a16="http://schemas.microsoft.com/office/drawing/2014/main" id="{549B911C-971F-437C-8E5D-4780BC4BAE57}"/>
+                <a16:creationId xmlns:a16="http://schemas.microsoft.com/office/drawing/2014/main" id="{ABCA0247-505E-46F1-8370-D9729E76BB83}"/>
               </a:ext>
             </a:extLst>
           </p:cNvPr>
@@ -23887,7 +23887,7 @@
           <p:cNvPr id="21" name="">
             <a:extLst xmlns:a="http://schemas.openxmlformats.org/drawingml/2006/main">
               <a:ext uri="{FF2B5EF4-FFF2-40B4-BE49-F238E27FC236}">
-                <a16:creationId xmlns:a16="http://schemas.microsoft.com/office/drawing/2014/main" id="{DA1AD09F-517D-42DB-B622-19E2184FA376}"/>
+                <a16:creationId xmlns:a16="http://schemas.microsoft.com/office/drawing/2014/main" id="{96572888-8BDB-4A41-B2F4-75A7C4869540}"/>
               </a:ext>
             </a:extLst>
           </p:cNvPr>
@@ -23939,7 +23939,7 @@
                 <a:ea typeface="Malgun Gothic"/>
                 <a:cs typeface="Malgun Gothic"/>
               </a:rPr>
-              <a:t>넣을 사진: 민수와 온라인 멘토링 화면 또는 GitHub Pull Request 검토 화면. 개인정보가 보이지 않도록 자릅니다.</a:t>
+              <a:t>넣을 사진: 이휘와 김민수의 온라인 회의 화면 또는 GitHub Pull Request 검토 화면. 개인정보가 보이지 않도록 자릅니다.</a:t>
             </a:r>
           </a:p>
         </p:txBody>
@@ -23949,7 +23949,7 @@
           <p:cNvPr id="22" name="">
             <a:extLst xmlns:a="http://schemas.openxmlformats.org/drawingml/2006/main">
               <a:ext uri="{FF2B5EF4-FFF2-40B4-BE49-F238E27FC236}">
-                <a16:creationId xmlns:a16="http://schemas.microsoft.com/office/drawing/2014/main" id="{AB8C9EA6-3D82-46D9-9E8C-2AA530FFAF7E}"/>
+                <a16:creationId xmlns:a16="http://schemas.microsoft.com/office/drawing/2014/main" id="{853AED3C-1F12-43D5-BBE5-7A7F4342D12C}"/>
               </a:ext>
             </a:extLst>
           </p:cNvPr>
@@ -23984,7 +23984,7 @@
           <p:cNvPr id="23" name="">
             <a:extLst xmlns:a="http://schemas.openxmlformats.org/drawingml/2006/main">
               <a:ext uri="{FF2B5EF4-FFF2-40B4-BE49-F238E27FC236}">
-                <a16:creationId xmlns:a16="http://schemas.microsoft.com/office/drawing/2014/main" id="{9568FF67-1ABF-444B-B0C9-C8BAD8DE0BEA}"/>
+                <a16:creationId xmlns:a16="http://schemas.microsoft.com/office/drawing/2014/main" id="{ABD55C75-8D88-418E-A077-B0BC7AF78585}"/>
               </a:ext>
             </a:extLst>
           </p:cNvPr>
@@ -24046,7 +24046,7 @@
           <p:cNvPr id="24" name="">
             <a:extLst xmlns:a="http://schemas.openxmlformats.org/drawingml/2006/main">
               <a:ext uri="{FF2B5EF4-FFF2-40B4-BE49-F238E27FC236}">
-                <a16:creationId xmlns:a16="http://schemas.microsoft.com/office/drawing/2014/main" id="{DEE00982-4F8E-4F83-907F-6550348B25C9}"/>
+                <a16:creationId xmlns:a16="http://schemas.microsoft.com/office/drawing/2014/main" id="{7A57991E-BA1D-43E7-BE1A-DAE21CAEF8B8}"/>
               </a:ext>
             </a:extLst>
           </p:cNvPr>
@@ -24108,7 +24108,7 @@
           <p:cNvPr id="25" name="">
             <a:extLst xmlns:a="http://schemas.openxmlformats.org/drawingml/2006/main">
               <a:ext uri="{FF2B5EF4-FFF2-40B4-BE49-F238E27FC236}">
-                <a16:creationId xmlns:a16="http://schemas.microsoft.com/office/drawing/2014/main" id="{8A1FA4F5-F1BC-40C9-AED9-675693565219}"/>
+                <a16:creationId xmlns:a16="http://schemas.microsoft.com/office/drawing/2014/main" id="{1E472463-12A9-436D-9727-77E579527CE7}"/>
               </a:ext>
             </a:extLst>
           </p:cNvPr>
@@ -24149,7 +24149,7 @@
           <p:cNvPr id="26" name="">
             <a:extLst xmlns:a="http://schemas.openxmlformats.org/drawingml/2006/main">
               <a:ext uri="{FF2B5EF4-FFF2-40B4-BE49-F238E27FC236}">
-                <a16:creationId xmlns:a16="http://schemas.microsoft.com/office/drawing/2014/main" id="{21B93F61-7B2E-41AC-A66F-8A5BB5FD1C25}"/>
+                <a16:creationId xmlns:a16="http://schemas.microsoft.com/office/drawing/2014/main" id="{2A1F7014-550C-42EE-A339-1BDC6DC7B8F9}"/>
               </a:ext>
             </a:extLst>
           </p:cNvPr>
@@ -24182,7 +24182,7 @@
           <p:cNvPr id="27" name="">
             <a:extLst xmlns:a="http://schemas.openxmlformats.org/drawingml/2006/main">
               <a:ext uri="{FF2B5EF4-FFF2-40B4-BE49-F238E27FC236}">
-                <a16:creationId xmlns:a16="http://schemas.microsoft.com/office/drawing/2014/main" id="{18066B70-CBAE-4C4D-AD7E-5A9EE6E1122B}"/>
+                <a16:creationId xmlns:a16="http://schemas.microsoft.com/office/drawing/2014/main" id="{C7D53CC9-4324-4EEE-B290-8A9AB41A24F5}"/>
               </a:ext>
             </a:extLst>
           </p:cNvPr>
@@ -24244,7 +24244,7 @@
           <p:cNvPr id="28" name="">
             <a:extLst xmlns:a="http://schemas.openxmlformats.org/drawingml/2006/main">
               <a:ext uri="{FF2B5EF4-FFF2-40B4-BE49-F238E27FC236}">
-                <a16:creationId xmlns:a16="http://schemas.microsoft.com/office/drawing/2014/main" id="{21A9B7C8-22CE-4CFB-8367-27FE0CEB4449}"/>
+                <a16:creationId xmlns:a16="http://schemas.microsoft.com/office/drawing/2014/main" id="{B1BD7096-56A2-40E6-8ECE-12B53681075B}"/>
               </a:ext>
             </a:extLst>
           </p:cNvPr>
@@ -24389,7 +24389,7 @@
                 <a:ea typeface="Malgun Gothic"/>
                 <a:cs typeface="Malgun Gothic"/>
               </a:rPr>
-              <a:t>YouTube 링크·팀번호·멘토 성명과 PDF 변환 결과</a:t>
+              <a:t>YouTube 링크·팀번호·참가자 인적사항과 PDF 변환 결과</a:t>
             </a:r>
           </a:p>
         </p:txBody>
@@ -24397,7 +24397,7 @@
     </p:spTree>
     <p:extLst>
       <p:ext uri="{BB962C8B-B14F-4D97-AF65-F5344CB8AC3E}">
-        <p14:creationId xmlns:p14="http://schemas.microsoft.com/office/powerpoint/2010/main" val="1053397307"/>
+        <p14:creationId xmlns:p14="http://schemas.microsoft.com/office/powerpoint/2010/main" val="441148547"/>
       </p:ext>
     </p:extLst>
   </p:cSld>
@@ -24428,7 +24428,7 @@
           <p:cNvPr id="24" name="">
             <a:extLst xmlns:a="http://schemas.openxmlformats.org/drawingml/2006/main">
               <a:ext uri="{FF2B5EF4-FFF2-40B4-BE49-F238E27FC236}">
-                <a16:creationId xmlns:a16="http://schemas.microsoft.com/office/drawing/2014/main" id="{00507548-8FA9-4A87-8161-80FAA2D71078}"/>
+                <a16:creationId xmlns:a16="http://schemas.microsoft.com/office/drawing/2014/main" id="{B3B0580D-0180-4A89-962D-D8C197054C33}"/>
               </a:ext>
             </a:extLst>
           </p:cNvPr>
@@ -24461,7 +24461,7 @@
           <p:cNvPr id="2" name="">
             <a:extLst xmlns:a="http://schemas.openxmlformats.org/drawingml/2006/main">
               <a:ext uri="{FF2B5EF4-FFF2-40B4-BE49-F238E27FC236}">
-                <a16:creationId xmlns:a16="http://schemas.microsoft.com/office/drawing/2014/main" id="{9334A24E-CFC1-47E8-A906-78768F010A48}"/>
+                <a16:creationId xmlns:a16="http://schemas.microsoft.com/office/drawing/2014/main" id="{4B4A0ECA-2328-47FA-846B-561393C92A0D}"/>
               </a:ext>
             </a:extLst>
           </p:cNvPr>
@@ -24523,7 +24523,7 @@
           <p:cNvPr id="3" name="">
             <a:extLst xmlns:a="http://schemas.openxmlformats.org/drawingml/2006/main">
               <a:ext uri="{FF2B5EF4-FFF2-40B4-BE49-F238E27FC236}">
-                <a16:creationId xmlns:a16="http://schemas.microsoft.com/office/drawing/2014/main" id="{53D08AE5-0D3A-46A7-9CE7-FA850FA16A65}"/>
+                <a16:creationId xmlns:a16="http://schemas.microsoft.com/office/drawing/2014/main" id="{32B444D4-7226-49CC-8938-2E524504B474}"/>
               </a:ext>
             </a:extLst>
           </p:cNvPr>
@@ -24585,7 +24585,7 @@
           <p:cNvPr id="4" name="">
             <a:extLst xmlns:a="http://schemas.openxmlformats.org/drawingml/2006/main">
               <a:ext uri="{FF2B5EF4-FFF2-40B4-BE49-F238E27FC236}">
-                <a16:creationId xmlns:a16="http://schemas.microsoft.com/office/drawing/2014/main" id="{C711BA0D-5154-4450-96A6-869F545EA900}"/>
+                <a16:creationId xmlns:a16="http://schemas.microsoft.com/office/drawing/2014/main" id="{102D156C-A295-473F-98C8-274930434573}"/>
               </a:ext>
             </a:extLst>
           </p:cNvPr>
@@ -24618,7 +24618,7 @@
           <p:cNvPr id="5" name="">
             <a:extLst xmlns:a="http://schemas.openxmlformats.org/drawingml/2006/main">
               <a:ext uri="{FF2B5EF4-FFF2-40B4-BE49-F238E27FC236}">
-                <a16:creationId xmlns:a16="http://schemas.microsoft.com/office/drawing/2014/main" id="{94C1E907-83D1-453F-A812-E78C96BDD610}"/>
+                <a16:creationId xmlns:a16="http://schemas.microsoft.com/office/drawing/2014/main" id="{0BFA9788-4B22-4C16-9ED0-4E683CE35E08}"/>
               </a:ext>
             </a:extLst>
           </p:cNvPr>
@@ -24680,7 +24680,7 @@
           <p:cNvPr id="6" name="">
             <a:extLst xmlns:a="http://schemas.openxmlformats.org/drawingml/2006/main">
               <a:ext uri="{FF2B5EF4-FFF2-40B4-BE49-F238E27FC236}">
-                <a16:creationId xmlns:a16="http://schemas.microsoft.com/office/drawing/2014/main" id="{BBC42373-6B00-4F0D-BFF2-43932003304C}"/>
+                <a16:creationId xmlns:a16="http://schemas.microsoft.com/office/drawing/2014/main" id="{4850A2D4-022D-4F16-9F90-FC8AE9B3B7FA}"/>
               </a:ext>
             </a:extLst>
           </p:cNvPr>
@@ -24742,7 +24742,7 @@
           <p:cNvPr id="7" name="">
             <a:extLst xmlns:a="http://schemas.openxmlformats.org/drawingml/2006/main">
               <a:ext uri="{FF2B5EF4-FFF2-40B4-BE49-F238E27FC236}">
-                <a16:creationId xmlns:a16="http://schemas.microsoft.com/office/drawing/2014/main" id="{CF219A9D-FF29-4453-BD2D-76229D6F6DFD}"/>
+                <a16:creationId xmlns:a16="http://schemas.microsoft.com/office/drawing/2014/main" id="{020DF253-30AF-4B4A-B87A-48BEBA723A1F}"/>
               </a:ext>
             </a:extLst>
           </p:cNvPr>
@@ -24783,7 +24783,7 @@
           <p:cNvPr id="8" name="">
             <a:extLst xmlns:a="http://schemas.openxmlformats.org/drawingml/2006/main">
               <a:ext uri="{FF2B5EF4-FFF2-40B4-BE49-F238E27FC236}">
-                <a16:creationId xmlns:a16="http://schemas.microsoft.com/office/drawing/2014/main" id="{266B4E64-E89F-4ACB-9C75-5A1EFD2D7905}"/>
+                <a16:creationId xmlns:a16="http://schemas.microsoft.com/office/drawing/2014/main" id="{9D597EC5-376E-49CB-BCAC-751893C60C4E}"/>
               </a:ext>
             </a:extLst>
           </p:cNvPr>
@@ -24816,7 +24816,7 @@
           <p:cNvPr id="9" name="">
             <a:extLst xmlns:a="http://schemas.openxmlformats.org/drawingml/2006/main">
               <a:ext uri="{FF2B5EF4-FFF2-40B4-BE49-F238E27FC236}">
-                <a16:creationId xmlns:a16="http://schemas.microsoft.com/office/drawing/2014/main" id="{0F194CA9-9B30-4814-8784-12D0828C31C8}"/>
+                <a16:creationId xmlns:a16="http://schemas.microsoft.com/office/drawing/2014/main" id="{8094065D-A8B9-4E8E-8097-A0FE1C3AF1A8}"/>
               </a:ext>
             </a:extLst>
           </p:cNvPr>
@@ -24878,7 +24878,7 @@
           <p:cNvPr id="10" name="">
             <a:extLst xmlns:a="http://schemas.openxmlformats.org/drawingml/2006/main">
               <a:ext uri="{FF2B5EF4-FFF2-40B4-BE49-F238E27FC236}">
-                <a16:creationId xmlns:a16="http://schemas.microsoft.com/office/drawing/2014/main" id="{EE68A8CA-C5EE-4124-9B9E-8025357ECF15}"/>
+                <a16:creationId xmlns:a16="http://schemas.microsoft.com/office/drawing/2014/main" id="{7AB8519C-F451-4BE8-AA00-936BF58BFDCA}"/>
               </a:ext>
             </a:extLst>
           </p:cNvPr>
@@ -24940,7 +24940,7 @@
           <p:cNvPr id="11" name="">
             <a:extLst xmlns:a="http://schemas.openxmlformats.org/drawingml/2006/main">
               <a:ext uri="{FF2B5EF4-FFF2-40B4-BE49-F238E27FC236}">
-                <a16:creationId xmlns:a16="http://schemas.microsoft.com/office/drawing/2014/main" id="{78CB8CBC-7AC4-4B6A-A473-ACC18702FC04}"/>
+                <a16:creationId xmlns:a16="http://schemas.microsoft.com/office/drawing/2014/main" id="{649795D9-170B-4346-9803-6EF75C7BCFF8}"/>
               </a:ext>
             </a:extLst>
           </p:cNvPr>
@@ -24981,7 +24981,7 @@
           <p:cNvPr id="12" name="">
             <a:extLst xmlns:a="http://schemas.openxmlformats.org/drawingml/2006/main">
               <a:ext uri="{FF2B5EF4-FFF2-40B4-BE49-F238E27FC236}">
-                <a16:creationId xmlns:a16="http://schemas.microsoft.com/office/drawing/2014/main" id="{AA91E52A-5CB5-4A11-9940-8370DA3212EF}"/>
+                <a16:creationId xmlns:a16="http://schemas.microsoft.com/office/drawing/2014/main" id="{88282423-2D49-40BB-B0B2-F7CBEF77F32D}"/>
               </a:ext>
             </a:extLst>
           </p:cNvPr>
@@ -25014,7 +25014,7 @@
           <p:cNvPr id="13" name="">
             <a:extLst xmlns:a="http://schemas.openxmlformats.org/drawingml/2006/main">
               <a:ext uri="{FF2B5EF4-FFF2-40B4-BE49-F238E27FC236}">
-                <a16:creationId xmlns:a16="http://schemas.microsoft.com/office/drawing/2014/main" id="{E6BDA171-8629-43E0-BB61-AB0F7BA0C524}"/>
+                <a16:creationId xmlns:a16="http://schemas.microsoft.com/office/drawing/2014/main" id="{A3255D6D-0582-4688-AB21-4052ADC97DF6}"/>
               </a:ext>
             </a:extLst>
           </p:cNvPr>
@@ -25076,7 +25076,7 @@
           <p:cNvPr id="14" name="">
             <a:extLst xmlns:a="http://schemas.openxmlformats.org/drawingml/2006/main">
               <a:ext uri="{FF2B5EF4-FFF2-40B4-BE49-F238E27FC236}">
-                <a16:creationId xmlns:a16="http://schemas.microsoft.com/office/drawing/2014/main" id="{E30B3852-6E40-413A-95F6-5666E2775A15}"/>
+                <a16:creationId xmlns:a16="http://schemas.microsoft.com/office/drawing/2014/main" id="{50D4214E-AB79-4288-8B3B-8A4F25369048}"/>
               </a:ext>
             </a:extLst>
           </p:cNvPr>
@@ -25138,7 +25138,7 @@
           <p:cNvPr id="15" name="">
             <a:extLst xmlns:a="http://schemas.openxmlformats.org/drawingml/2006/main">
               <a:ext uri="{FF2B5EF4-FFF2-40B4-BE49-F238E27FC236}">
-                <a16:creationId xmlns:a16="http://schemas.microsoft.com/office/drawing/2014/main" id="{447CC61B-47FB-4618-9566-870483BB0A3C}"/>
+                <a16:creationId xmlns:a16="http://schemas.microsoft.com/office/drawing/2014/main" id="{37F9A927-6D4C-4EAB-B193-017335AA0753}"/>
               </a:ext>
             </a:extLst>
           </p:cNvPr>
@@ -25173,7 +25173,7 @@
           <p:cNvPr id="16" name="">
             <a:extLst xmlns:a="http://schemas.openxmlformats.org/drawingml/2006/main">
               <a:ext uri="{FF2B5EF4-FFF2-40B4-BE49-F238E27FC236}">
-                <a16:creationId xmlns:a16="http://schemas.microsoft.com/office/drawing/2014/main" id="{D545458F-1169-40FA-983B-BC65FD7654EE}"/>
+                <a16:creationId xmlns:a16="http://schemas.microsoft.com/office/drawing/2014/main" id="{2BDD1A22-EA98-4444-A824-7B9F0DE90735}"/>
               </a:ext>
             </a:extLst>
           </p:cNvPr>
@@ -25235,7 +25235,7 @@
           <p:cNvPr id="17" name="">
             <a:extLst xmlns:a="http://schemas.openxmlformats.org/drawingml/2006/main">
               <a:ext uri="{FF2B5EF4-FFF2-40B4-BE49-F238E27FC236}">
-                <a16:creationId xmlns:a16="http://schemas.microsoft.com/office/drawing/2014/main" id="{A55885EF-B85F-4730-B972-3BC890668EF1}"/>
+                <a16:creationId xmlns:a16="http://schemas.microsoft.com/office/drawing/2014/main" id="{AF5271F5-C6F3-4DC7-A9C8-6CAD1A9126EE}"/>
               </a:ext>
             </a:extLst>
           </p:cNvPr>
@@ -25270,7 +25270,7 @@
           <p:cNvPr id="18" name="">
             <a:extLst xmlns:a="http://schemas.openxmlformats.org/drawingml/2006/main">
               <a:ext uri="{FF2B5EF4-FFF2-40B4-BE49-F238E27FC236}">
-                <a16:creationId xmlns:a16="http://schemas.microsoft.com/office/drawing/2014/main" id="{38463425-DD5D-4831-9D34-B8D698B84F63}"/>
+                <a16:creationId xmlns:a16="http://schemas.microsoft.com/office/drawing/2014/main" id="{195550D9-A5A9-40EF-BC85-580FCE0F12F1}"/>
               </a:ext>
             </a:extLst>
           </p:cNvPr>
@@ -25332,7 +25332,7 @@
           <p:cNvPr id="19" name="">
             <a:extLst xmlns:a="http://schemas.openxmlformats.org/drawingml/2006/main">
               <a:ext uri="{FF2B5EF4-FFF2-40B4-BE49-F238E27FC236}">
-                <a16:creationId xmlns:a16="http://schemas.microsoft.com/office/drawing/2014/main" id="{641879AC-ED84-4057-B31D-B8F6C5C97662}"/>
+                <a16:creationId xmlns:a16="http://schemas.microsoft.com/office/drawing/2014/main" id="{CE7F12BE-DBC0-4E37-BDA2-6FF3686D52FE}"/>
               </a:ext>
             </a:extLst>
           </p:cNvPr>
@@ -25394,7 +25394,7 @@
           <p:cNvPr id="20" name="">
             <a:extLst xmlns:a="http://schemas.openxmlformats.org/drawingml/2006/main">
               <a:ext uri="{FF2B5EF4-FFF2-40B4-BE49-F238E27FC236}">
-                <a16:creationId xmlns:a16="http://schemas.microsoft.com/office/drawing/2014/main" id="{5C9F1A8F-E003-450A-B844-8CF0EF37AECC}"/>
+                <a16:creationId xmlns:a16="http://schemas.microsoft.com/office/drawing/2014/main" id="{DECDB686-6D32-4FC9-8529-61248D0007C4}"/>
               </a:ext>
             </a:extLst>
           </p:cNvPr>
@@ -25429,7 +25429,7 @@
           <p:cNvPr id="21" name="">
             <a:extLst xmlns:a="http://schemas.openxmlformats.org/drawingml/2006/main">
               <a:ext uri="{FF2B5EF4-FFF2-40B4-BE49-F238E27FC236}">
-                <a16:creationId xmlns:a16="http://schemas.microsoft.com/office/drawing/2014/main" id="{ED4809DB-E3E8-4E43-974E-AC67A98B9CB1}"/>
+                <a16:creationId xmlns:a16="http://schemas.microsoft.com/office/drawing/2014/main" id="{0BF1A4D8-09FE-4085-80B7-E4576BE2A0E3}"/>
               </a:ext>
             </a:extLst>
           </p:cNvPr>
@@ -25491,7 +25491,7 @@
           <p:cNvPr id="22" name="">
             <a:extLst xmlns:a="http://schemas.openxmlformats.org/drawingml/2006/main">
               <a:ext uri="{FF2B5EF4-FFF2-40B4-BE49-F238E27FC236}">
-                <a16:creationId xmlns:a16="http://schemas.microsoft.com/office/drawing/2014/main" id="{5F71B224-8B03-49F5-A221-1DDA67AB9578}"/>
+                <a16:creationId xmlns:a16="http://schemas.microsoft.com/office/drawing/2014/main" id="{83F0EF48-722E-4EA9-97C3-C3ED2346CF6B}"/>
               </a:ext>
             </a:extLst>
           </p:cNvPr>
@@ -25553,7 +25553,7 @@
           <p:cNvPr id="23" name="">
             <a:extLst xmlns:a="http://schemas.openxmlformats.org/drawingml/2006/main">
               <a:ext uri="{FF2B5EF4-FFF2-40B4-BE49-F238E27FC236}">
-                <a16:creationId xmlns:a16="http://schemas.microsoft.com/office/drawing/2014/main" id="{23CAC119-9AE8-4076-831B-0189D5E025B0}"/>
+                <a16:creationId xmlns:a16="http://schemas.microsoft.com/office/drawing/2014/main" id="{22A1C958-95AB-4E1C-8D8A-103508CC7219}"/>
               </a:ext>
             </a:extLst>
           </p:cNvPr>
@@ -25613,7 +25613,7 @@
     </p:spTree>
     <p:extLst>
       <p:ext uri="{BB962C8B-B14F-4D97-AF65-F5344CB8AC3E}">
-        <p14:creationId xmlns:p14="http://schemas.microsoft.com/office/powerpoint/2010/main" val="122144507"/>
+        <p14:creationId xmlns:p14="http://schemas.microsoft.com/office/powerpoint/2010/main" val="590212757"/>
       </p:ext>
     </p:extLst>
   </p:cSld>
@@ -25644,7 +25644,7 @@
           <p:cNvPr id="39" name="">
             <a:extLst xmlns:a="http://schemas.openxmlformats.org/drawingml/2006/main">
               <a:ext uri="{FF2B5EF4-FFF2-40B4-BE49-F238E27FC236}">
-                <a16:creationId xmlns:a16="http://schemas.microsoft.com/office/drawing/2014/main" id="{F20FA699-0017-427F-8AF2-DBE164E4CF5E}"/>
+                <a16:creationId xmlns:a16="http://schemas.microsoft.com/office/drawing/2014/main" id="{1D63123F-7E48-4A4E-96E3-3296A324B877}"/>
               </a:ext>
             </a:extLst>
           </p:cNvPr>
@@ -25677,7 +25677,7 @@
           <p:cNvPr id="2" name="">
             <a:extLst xmlns:a="http://schemas.openxmlformats.org/drawingml/2006/main">
               <a:ext uri="{FF2B5EF4-FFF2-40B4-BE49-F238E27FC236}">
-                <a16:creationId xmlns:a16="http://schemas.microsoft.com/office/drawing/2014/main" id="{2E000A5A-A4AF-441D-9B08-E961B7B72C4F}"/>
+                <a16:creationId xmlns:a16="http://schemas.microsoft.com/office/drawing/2014/main" id="{06D7504C-373B-4E50-8C29-B8C93C608AAF}"/>
               </a:ext>
             </a:extLst>
           </p:cNvPr>
@@ -25739,7 +25739,7 @@
           <p:cNvPr id="3" name="">
             <a:extLst xmlns:a="http://schemas.openxmlformats.org/drawingml/2006/main">
               <a:ext uri="{FF2B5EF4-FFF2-40B4-BE49-F238E27FC236}">
-                <a16:creationId xmlns:a16="http://schemas.microsoft.com/office/drawing/2014/main" id="{86D25FF8-AD8C-43A4-9CAA-0F46B14C1A01}"/>
+                <a16:creationId xmlns:a16="http://schemas.microsoft.com/office/drawing/2014/main" id="{CCA73172-D387-4741-9BD5-6FAA32AA0C96}"/>
               </a:ext>
             </a:extLst>
           </p:cNvPr>
@@ -25801,7 +25801,7 @@
           <p:cNvPr id="4" name="">
             <a:extLst xmlns:a="http://schemas.openxmlformats.org/drawingml/2006/main">
               <a:ext uri="{FF2B5EF4-FFF2-40B4-BE49-F238E27FC236}">
-                <a16:creationId xmlns:a16="http://schemas.microsoft.com/office/drawing/2014/main" id="{3946D4B0-A3B9-451C-ADA1-213686798775}"/>
+                <a16:creationId xmlns:a16="http://schemas.microsoft.com/office/drawing/2014/main" id="{BE7A3F18-30DF-4616-AB2D-4CFFE9C5F64E}"/>
               </a:ext>
             </a:extLst>
           </p:cNvPr>
@@ -25834,7 +25834,7 @@
           <p:cNvPr id="5" name="">
             <a:extLst xmlns:a="http://schemas.openxmlformats.org/drawingml/2006/main">
               <a:ext uri="{FF2B5EF4-FFF2-40B4-BE49-F238E27FC236}">
-                <a16:creationId xmlns:a16="http://schemas.microsoft.com/office/drawing/2014/main" id="{A8ABE6B8-FC84-4DB4-A1EB-D8758F12C453}"/>
+                <a16:creationId xmlns:a16="http://schemas.microsoft.com/office/drawing/2014/main" id="{7C514E43-CCFE-494B-9897-240667727620}"/>
               </a:ext>
             </a:extLst>
           </p:cNvPr>
@@ -25896,7 +25896,7 @@
           <p:cNvPr id="6" name="">
             <a:extLst xmlns:a="http://schemas.openxmlformats.org/drawingml/2006/main">
               <a:ext uri="{FF2B5EF4-FFF2-40B4-BE49-F238E27FC236}">
-                <a16:creationId xmlns:a16="http://schemas.microsoft.com/office/drawing/2014/main" id="{9C0ECB22-C85D-4574-B83C-C15081D2EB8F}"/>
+                <a16:creationId xmlns:a16="http://schemas.microsoft.com/office/drawing/2014/main" id="{8F9F911E-0621-4CC3-BFAA-9C93057C0573}"/>
               </a:ext>
             </a:extLst>
           </p:cNvPr>
@@ -25958,7 +25958,7 @@
           <p:cNvPr id="7" name="">
             <a:extLst xmlns:a="http://schemas.openxmlformats.org/drawingml/2006/main">
               <a:ext uri="{FF2B5EF4-FFF2-40B4-BE49-F238E27FC236}">
-                <a16:creationId xmlns:a16="http://schemas.microsoft.com/office/drawing/2014/main" id="{3FFAAD4E-BED8-4DA9-B40B-131D504BB0D7}"/>
+                <a16:creationId xmlns:a16="http://schemas.microsoft.com/office/drawing/2014/main" id="{931C66E2-3236-4271-B7B1-1761192F0E28}"/>
               </a:ext>
             </a:extLst>
           </p:cNvPr>
@@ -25993,7 +25993,7 @@
           <p:cNvPr id="8" name="">
             <a:extLst xmlns:a="http://schemas.openxmlformats.org/drawingml/2006/main">
               <a:ext uri="{FF2B5EF4-FFF2-40B4-BE49-F238E27FC236}">
-                <a16:creationId xmlns:a16="http://schemas.microsoft.com/office/drawing/2014/main" id="{2E7CF4F8-D700-4E8F-AAFA-4C20EE53BADE}"/>
+                <a16:creationId xmlns:a16="http://schemas.microsoft.com/office/drawing/2014/main" id="{6382278E-7812-44C1-B178-0C4420C3F485}"/>
               </a:ext>
             </a:extLst>
           </p:cNvPr>
@@ -26055,7 +26055,7 @@
           <p:cNvPr id="9" name="">
             <a:extLst xmlns:a="http://schemas.openxmlformats.org/drawingml/2006/main">
               <a:ext uri="{FF2B5EF4-FFF2-40B4-BE49-F238E27FC236}">
-                <a16:creationId xmlns:a16="http://schemas.microsoft.com/office/drawing/2014/main" id="{7060B607-143B-47C7-A7D1-DA931FB42210}"/>
+                <a16:creationId xmlns:a16="http://schemas.microsoft.com/office/drawing/2014/main" id="{B408ADB6-8760-4AF8-821B-C9AE7FFDE5CA}"/>
               </a:ext>
             </a:extLst>
           </p:cNvPr>
@@ -26096,7 +26096,7 @@
           <p:cNvPr id="10" name="">
             <a:extLst xmlns:a="http://schemas.openxmlformats.org/drawingml/2006/main">
               <a:ext uri="{FF2B5EF4-FFF2-40B4-BE49-F238E27FC236}">
-                <a16:creationId xmlns:a16="http://schemas.microsoft.com/office/drawing/2014/main" id="{99033468-FB37-450F-ABBE-207E7A3A78BB}"/>
+                <a16:creationId xmlns:a16="http://schemas.microsoft.com/office/drawing/2014/main" id="{D99C20BB-0472-4B7A-A22E-A52D76348B1F}"/>
               </a:ext>
             </a:extLst>
           </p:cNvPr>
@@ -26131,7 +26131,7 @@
           <p:cNvPr id="11" name="">
             <a:extLst xmlns:a="http://schemas.openxmlformats.org/drawingml/2006/main">
               <a:ext uri="{FF2B5EF4-FFF2-40B4-BE49-F238E27FC236}">
-                <a16:creationId xmlns:a16="http://schemas.microsoft.com/office/drawing/2014/main" id="{15346F07-7473-4E27-BCB6-02964DD74442}"/>
+                <a16:creationId xmlns:a16="http://schemas.microsoft.com/office/drawing/2014/main" id="{7625BF69-7C24-4A07-BF1C-45E54BF8B7F8}"/>
               </a:ext>
             </a:extLst>
           </p:cNvPr>
@@ -26193,7 +26193,7 @@
           <p:cNvPr id="12" name="">
             <a:extLst xmlns:a="http://schemas.openxmlformats.org/drawingml/2006/main">
               <a:ext uri="{FF2B5EF4-FFF2-40B4-BE49-F238E27FC236}">
-                <a16:creationId xmlns:a16="http://schemas.microsoft.com/office/drawing/2014/main" id="{CE65531E-537B-471C-969F-8C4ECF5D7F48}"/>
+                <a16:creationId xmlns:a16="http://schemas.microsoft.com/office/drawing/2014/main" id="{8EF87599-566F-432C-BC50-9B2F8CF7C1E4}"/>
               </a:ext>
             </a:extLst>
           </p:cNvPr>
@@ -26255,7 +26255,7 @@
           <p:cNvPr id="13" name="">
             <a:extLst xmlns:a="http://schemas.openxmlformats.org/drawingml/2006/main">
               <a:ext uri="{FF2B5EF4-FFF2-40B4-BE49-F238E27FC236}">
-                <a16:creationId xmlns:a16="http://schemas.microsoft.com/office/drawing/2014/main" id="{012C76CD-D91B-4CC0-AA77-EE38C9196A2A}"/>
+                <a16:creationId xmlns:a16="http://schemas.microsoft.com/office/drawing/2014/main" id="{5032ACA3-8032-449F-A26B-EB667FD6D130}"/>
               </a:ext>
             </a:extLst>
           </p:cNvPr>
@@ -26317,7 +26317,7 @@
           <p:cNvPr id="14" name="">
             <a:extLst xmlns:a="http://schemas.openxmlformats.org/drawingml/2006/main">
               <a:ext uri="{FF2B5EF4-FFF2-40B4-BE49-F238E27FC236}">
-                <a16:creationId xmlns:a16="http://schemas.microsoft.com/office/drawing/2014/main" id="{6CAD7B2D-E475-4D43-A1F7-F586DB811F88}"/>
+                <a16:creationId xmlns:a16="http://schemas.microsoft.com/office/drawing/2014/main" id="{CBF85BDC-321B-4486-8E3A-6CA924860C8E}"/>
               </a:ext>
             </a:extLst>
           </p:cNvPr>
@@ -26358,7 +26358,7 @@
           <p:cNvPr id="15" name="">
             <a:extLst xmlns:a="http://schemas.openxmlformats.org/drawingml/2006/main">
               <a:ext uri="{FF2B5EF4-FFF2-40B4-BE49-F238E27FC236}">
-                <a16:creationId xmlns:a16="http://schemas.microsoft.com/office/drawing/2014/main" id="{EB8CAA46-0E74-4361-A10A-2B5614EACE48}"/>
+                <a16:creationId xmlns:a16="http://schemas.microsoft.com/office/drawing/2014/main" id="{B7668B92-4B36-471B-B7AC-748AC648E07B}"/>
               </a:ext>
             </a:extLst>
           </p:cNvPr>
@@ -26393,7 +26393,7 @@
           <p:cNvPr id="16" name="">
             <a:extLst xmlns:a="http://schemas.openxmlformats.org/drawingml/2006/main">
               <a:ext uri="{FF2B5EF4-FFF2-40B4-BE49-F238E27FC236}">
-                <a16:creationId xmlns:a16="http://schemas.microsoft.com/office/drawing/2014/main" id="{8D4F7B07-AAFB-4834-B7A5-12E48DCA6F41}"/>
+                <a16:creationId xmlns:a16="http://schemas.microsoft.com/office/drawing/2014/main" id="{8FED9BE7-E3D4-4AF5-9506-1D6893932B04}"/>
               </a:ext>
             </a:extLst>
           </p:cNvPr>
@@ -26455,7 +26455,7 @@
           <p:cNvPr id="17" name="">
             <a:extLst xmlns:a="http://schemas.openxmlformats.org/drawingml/2006/main">
               <a:ext uri="{FF2B5EF4-FFF2-40B4-BE49-F238E27FC236}">
-                <a16:creationId xmlns:a16="http://schemas.microsoft.com/office/drawing/2014/main" id="{A7B84FD0-7DB8-415E-A5E1-27D62BCA65BE}"/>
+                <a16:creationId xmlns:a16="http://schemas.microsoft.com/office/drawing/2014/main" id="{D9FC39CD-0452-47A6-ABA5-E4B9556E4F4B}"/>
               </a:ext>
             </a:extLst>
           </p:cNvPr>
@@ -26517,7 +26517,7 @@
           <p:cNvPr id="18" name="">
             <a:extLst xmlns:a="http://schemas.openxmlformats.org/drawingml/2006/main">
               <a:ext uri="{FF2B5EF4-FFF2-40B4-BE49-F238E27FC236}">
-                <a16:creationId xmlns:a16="http://schemas.microsoft.com/office/drawing/2014/main" id="{A1484EFF-FD10-4026-86D8-7AF899A80B2D}"/>
+                <a16:creationId xmlns:a16="http://schemas.microsoft.com/office/drawing/2014/main" id="{1DF0CD1F-7002-4EBD-9625-465676E8E807}"/>
               </a:ext>
             </a:extLst>
           </p:cNvPr>
@@ -26579,7 +26579,7 @@
           <p:cNvPr id="19" name="">
             <a:extLst xmlns:a="http://schemas.openxmlformats.org/drawingml/2006/main">
               <a:ext uri="{FF2B5EF4-FFF2-40B4-BE49-F238E27FC236}">
-                <a16:creationId xmlns:a16="http://schemas.microsoft.com/office/drawing/2014/main" id="{DB76AF91-CF44-404E-BDFA-41B6B0B92F2C}"/>
+                <a16:creationId xmlns:a16="http://schemas.microsoft.com/office/drawing/2014/main" id="{28114814-52C2-4960-8BDF-F43A19F506CE}"/>
               </a:ext>
             </a:extLst>
           </p:cNvPr>
@@ -26620,7 +26620,7 @@
           <p:cNvPr id="20" name="">
             <a:extLst xmlns:a="http://schemas.openxmlformats.org/drawingml/2006/main">
               <a:ext uri="{FF2B5EF4-FFF2-40B4-BE49-F238E27FC236}">
-                <a16:creationId xmlns:a16="http://schemas.microsoft.com/office/drawing/2014/main" id="{D0131B44-F184-435F-8651-41363B381C47}"/>
+                <a16:creationId xmlns:a16="http://schemas.microsoft.com/office/drawing/2014/main" id="{0F515B25-B837-4308-ABF6-CFB21F6CBDCF}"/>
               </a:ext>
             </a:extLst>
           </p:cNvPr>
@@ -26655,7 +26655,7 @@
           <p:cNvPr id="21" name="">
             <a:extLst xmlns:a="http://schemas.openxmlformats.org/drawingml/2006/main">
               <a:ext uri="{FF2B5EF4-FFF2-40B4-BE49-F238E27FC236}">
-                <a16:creationId xmlns:a16="http://schemas.microsoft.com/office/drawing/2014/main" id="{C90A7722-9AB3-45F5-B8A5-9056340B6A55}"/>
+                <a16:creationId xmlns:a16="http://schemas.microsoft.com/office/drawing/2014/main" id="{DD1A659A-2BBE-4C23-B570-90C67CE16DAC}"/>
               </a:ext>
             </a:extLst>
           </p:cNvPr>
@@ -26717,7 +26717,7 @@
           <p:cNvPr id="22" name="">
             <a:extLst xmlns:a="http://schemas.openxmlformats.org/drawingml/2006/main">
               <a:ext uri="{FF2B5EF4-FFF2-40B4-BE49-F238E27FC236}">
-                <a16:creationId xmlns:a16="http://schemas.microsoft.com/office/drawing/2014/main" id="{0FA6A4E3-69A8-4FDB-8DD8-3B04A0CD7FA7}"/>
+                <a16:creationId xmlns:a16="http://schemas.microsoft.com/office/drawing/2014/main" id="{642469D6-57CC-458F-BDBD-2DFD882FD3BD}"/>
               </a:ext>
             </a:extLst>
           </p:cNvPr>
@@ -26779,7 +26779,7 @@
           <p:cNvPr id="23" name="">
             <a:extLst xmlns:a="http://schemas.openxmlformats.org/drawingml/2006/main">
               <a:ext uri="{FF2B5EF4-FFF2-40B4-BE49-F238E27FC236}">
-                <a16:creationId xmlns:a16="http://schemas.microsoft.com/office/drawing/2014/main" id="{95471D54-333F-4EDA-AD43-5CE96A348EEE}"/>
+                <a16:creationId xmlns:a16="http://schemas.microsoft.com/office/drawing/2014/main" id="{E42D968B-E72A-4412-96D0-A8DFE8A13316}"/>
               </a:ext>
             </a:extLst>
           </p:cNvPr>
@@ -26841,7 +26841,7 @@
           <p:cNvPr id="24" name="">
             <a:extLst xmlns:a="http://schemas.openxmlformats.org/drawingml/2006/main">
               <a:ext uri="{FF2B5EF4-FFF2-40B4-BE49-F238E27FC236}">
-                <a16:creationId xmlns:a16="http://schemas.microsoft.com/office/drawing/2014/main" id="{453A5119-6199-496F-B41D-533D22A4EC70}"/>
+                <a16:creationId xmlns:a16="http://schemas.microsoft.com/office/drawing/2014/main" id="{70F3AD87-BEEB-4A78-A64C-AA8D1B1A65EA}"/>
               </a:ext>
             </a:extLst>
           </p:cNvPr>
@@ -26882,7 +26882,7 @@
           <p:cNvPr id="25" name="">
             <a:extLst xmlns:a="http://schemas.openxmlformats.org/drawingml/2006/main">
               <a:ext uri="{FF2B5EF4-FFF2-40B4-BE49-F238E27FC236}">
-                <a16:creationId xmlns:a16="http://schemas.microsoft.com/office/drawing/2014/main" id="{F2EDDD14-8C7E-4AD4-AD44-1F49B1C8139A}"/>
+                <a16:creationId xmlns:a16="http://schemas.microsoft.com/office/drawing/2014/main" id="{7DB9C6E3-0E87-4E65-8B83-BB186827BBF5}"/>
               </a:ext>
             </a:extLst>
           </p:cNvPr>
@@ -26917,7 +26917,7 @@
           <p:cNvPr id="26" name="">
             <a:extLst xmlns:a="http://schemas.openxmlformats.org/drawingml/2006/main">
               <a:ext uri="{FF2B5EF4-FFF2-40B4-BE49-F238E27FC236}">
-                <a16:creationId xmlns:a16="http://schemas.microsoft.com/office/drawing/2014/main" id="{A6330FA1-FB58-43C3-B9BD-48DC8DD7489D}"/>
+                <a16:creationId xmlns:a16="http://schemas.microsoft.com/office/drawing/2014/main" id="{B37FD364-4EAE-4C9A-8AB6-00CA70B73D59}"/>
               </a:ext>
             </a:extLst>
           </p:cNvPr>
@@ -26979,7 +26979,7 @@
           <p:cNvPr id="27" name="">
             <a:extLst xmlns:a="http://schemas.openxmlformats.org/drawingml/2006/main">
               <a:ext uri="{FF2B5EF4-FFF2-40B4-BE49-F238E27FC236}">
-                <a16:creationId xmlns:a16="http://schemas.microsoft.com/office/drawing/2014/main" id="{9DCA6687-2AE4-4158-9524-5F3B79F2F143}"/>
+                <a16:creationId xmlns:a16="http://schemas.microsoft.com/office/drawing/2014/main" id="{03F724C3-C379-4787-B692-2513BEFD65F5}"/>
               </a:ext>
             </a:extLst>
           </p:cNvPr>
@@ -27041,7 +27041,7 @@
           <p:cNvPr id="28" name="">
             <a:extLst xmlns:a="http://schemas.openxmlformats.org/drawingml/2006/main">
               <a:ext uri="{FF2B5EF4-FFF2-40B4-BE49-F238E27FC236}">
-                <a16:creationId xmlns:a16="http://schemas.microsoft.com/office/drawing/2014/main" id="{66EDC4BE-F577-42E2-AC92-499E9AEA247B}"/>
+                <a16:creationId xmlns:a16="http://schemas.microsoft.com/office/drawing/2014/main" id="{AA5C6CFE-F031-4F93-BE1A-E1A9A71AC54B}"/>
               </a:ext>
             </a:extLst>
           </p:cNvPr>
@@ -27103,7 +27103,7 @@
           <p:cNvPr id="29" name="">
             <a:extLst xmlns:a="http://schemas.openxmlformats.org/drawingml/2006/main">
               <a:ext uri="{FF2B5EF4-FFF2-40B4-BE49-F238E27FC236}">
-                <a16:creationId xmlns:a16="http://schemas.microsoft.com/office/drawing/2014/main" id="{EF73F18C-F7B4-49E5-9DB4-9E163F7E1317}"/>
+                <a16:creationId xmlns:a16="http://schemas.microsoft.com/office/drawing/2014/main" id="{E72D6815-F2E2-4314-BA89-5840BEA0A85A}"/>
               </a:ext>
             </a:extLst>
           </p:cNvPr>
@@ -27144,7 +27144,7 @@
           <p:cNvPr id="30" name="">
             <a:extLst xmlns:a="http://schemas.openxmlformats.org/drawingml/2006/main">
               <a:ext uri="{FF2B5EF4-FFF2-40B4-BE49-F238E27FC236}">
-                <a16:creationId xmlns:a16="http://schemas.microsoft.com/office/drawing/2014/main" id="{B1FDF91C-8D8A-424C-B722-D19B22FF37B1}"/>
+                <a16:creationId xmlns:a16="http://schemas.microsoft.com/office/drawing/2014/main" id="{910EBEB3-3D1E-4C47-BF5E-DBCF8768FBEC}"/>
               </a:ext>
             </a:extLst>
           </p:cNvPr>
@@ -27177,7 +27177,7 @@
           <p:cNvPr id="31" name="">
             <a:extLst xmlns:a="http://schemas.openxmlformats.org/drawingml/2006/main">
               <a:ext uri="{FF2B5EF4-FFF2-40B4-BE49-F238E27FC236}">
-                <a16:creationId xmlns:a16="http://schemas.microsoft.com/office/drawing/2014/main" id="{536AC040-6CE6-442A-A5FB-13C0B48B081A}"/>
+                <a16:creationId xmlns:a16="http://schemas.microsoft.com/office/drawing/2014/main" id="{5F872DC4-7B88-47C0-A157-67781CD141AA}"/>
               </a:ext>
             </a:extLst>
           </p:cNvPr>
@@ -27239,7 +27239,7 @@
           <p:cNvPr id="32" name="">
             <a:extLst xmlns:a="http://schemas.openxmlformats.org/drawingml/2006/main">
               <a:ext uri="{FF2B5EF4-FFF2-40B4-BE49-F238E27FC236}">
-                <a16:creationId xmlns:a16="http://schemas.microsoft.com/office/drawing/2014/main" id="{00771F0D-8293-4B05-885B-271DF796D447}"/>
+                <a16:creationId xmlns:a16="http://schemas.microsoft.com/office/drawing/2014/main" id="{21116EA9-A500-4589-B837-02076C98357D}"/>
               </a:ext>
             </a:extLst>
           </p:cNvPr>
@@ -27301,7 +27301,7 @@
           <p:cNvPr id="33" name="">
             <a:extLst xmlns:a="http://schemas.openxmlformats.org/drawingml/2006/main">
               <a:ext uri="{FF2B5EF4-FFF2-40B4-BE49-F238E27FC236}">
-                <a16:creationId xmlns:a16="http://schemas.microsoft.com/office/drawing/2014/main" id="{D22A0403-0370-4EA6-8E28-944510F40763}"/>
+                <a16:creationId xmlns:a16="http://schemas.microsoft.com/office/drawing/2014/main" id="{C9F63C19-584E-4168-8ABE-A2541D8042DA}"/>
               </a:ext>
             </a:extLst>
           </p:cNvPr>
@@ -27363,7 +27363,7 @@
           <p:cNvPr id="34" name="">
             <a:extLst xmlns:a="http://schemas.openxmlformats.org/drawingml/2006/main">
               <a:ext uri="{FF2B5EF4-FFF2-40B4-BE49-F238E27FC236}">
-                <a16:creationId xmlns:a16="http://schemas.microsoft.com/office/drawing/2014/main" id="{9E56A0ED-D2BB-46CD-ABB6-4F466637D69B}"/>
+                <a16:creationId xmlns:a16="http://schemas.microsoft.com/office/drawing/2014/main" id="{BB4AECB7-E181-4974-891D-A1664826CD8A}"/>
               </a:ext>
             </a:extLst>
           </p:cNvPr>
@@ -27425,7 +27425,7 @@
           <p:cNvPr id="35" name="">
             <a:extLst xmlns:a="http://schemas.openxmlformats.org/drawingml/2006/main">
               <a:ext uri="{FF2B5EF4-FFF2-40B4-BE49-F238E27FC236}">
-                <a16:creationId xmlns:a16="http://schemas.microsoft.com/office/drawing/2014/main" id="{173C4E1D-03C1-43D5-BCE6-495B1B348D83}"/>
+                <a16:creationId xmlns:a16="http://schemas.microsoft.com/office/drawing/2014/main" id="{7ADD628B-E6EA-48A3-A311-1870764A7A63}"/>
               </a:ext>
             </a:extLst>
           </p:cNvPr>
@@ -27460,7 +27460,7 @@
           <p:cNvPr id="36" name="">
             <a:extLst xmlns:a="http://schemas.openxmlformats.org/drawingml/2006/main">
               <a:ext uri="{FF2B5EF4-FFF2-40B4-BE49-F238E27FC236}">
-                <a16:creationId xmlns:a16="http://schemas.microsoft.com/office/drawing/2014/main" id="{5BDA9BB1-218B-49D5-8529-6F3418D60B0D}"/>
+                <a16:creationId xmlns:a16="http://schemas.microsoft.com/office/drawing/2014/main" id="{F850D661-BF3F-4289-9661-80A4C0D7E258}"/>
               </a:ext>
             </a:extLst>
           </p:cNvPr>
@@ -27522,7 +27522,7 @@
           <p:cNvPr id="37" name="">
             <a:extLst xmlns:a="http://schemas.openxmlformats.org/drawingml/2006/main">
               <a:ext uri="{FF2B5EF4-FFF2-40B4-BE49-F238E27FC236}">
-                <a16:creationId xmlns:a16="http://schemas.microsoft.com/office/drawing/2014/main" id="{B00B2E42-94D4-4365-B2D2-A957B08711A8}"/>
+                <a16:creationId xmlns:a16="http://schemas.microsoft.com/office/drawing/2014/main" id="{530C3BEA-01C0-4B67-AD4A-131E81EC6A9E}"/>
               </a:ext>
             </a:extLst>
           </p:cNvPr>
@@ -27557,7 +27557,7 @@
           <p:cNvPr id="38" name="">
             <a:extLst xmlns:a="http://schemas.openxmlformats.org/drawingml/2006/main">
               <a:ext uri="{FF2B5EF4-FFF2-40B4-BE49-F238E27FC236}">
-                <a16:creationId xmlns:a16="http://schemas.microsoft.com/office/drawing/2014/main" id="{2ED4BB5C-DCA2-41C7-A5E3-2258A6D6EB44}"/>
+                <a16:creationId xmlns:a16="http://schemas.microsoft.com/office/drawing/2014/main" id="{94DE15DC-1FC3-4C73-87E9-DD5E87835641}"/>
               </a:ext>
             </a:extLst>
           </p:cNvPr>
@@ -27617,7 +27617,7 @@
     </p:spTree>
     <p:extLst>
       <p:ext uri="{BB962C8B-B14F-4D97-AF65-F5344CB8AC3E}">
-        <p14:creationId xmlns:p14="http://schemas.microsoft.com/office/powerpoint/2010/main" val="1552261107"/>
+        <p14:creationId xmlns:p14="http://schemas.microsoft.com/office/powerpoint/2010/main" val="312991274"/>
       </p:ext>
     </p:extLst>
   </p:cSld>
@@ -27648,7 +27648,7 @@
           <p:cNvPr id="36" name="">
             <a:extLst xmlns:a="http://schemas.openxmlformats.org/drawingml/2006/main">
               <a:ext uri="{FF2B5EF4-FFF2-40B4-BE49-F238E27FC236}">
-                <a16:creationId xmlns:a16="http://schemas.microsoft.com/office/drawing/2014/main" id="{E8E65526-6DF8-4DB4-9A72-8BF9188A20C9}"/>
+                <a16:creationId xmlns:a16="http://schemas.microsoft.com/office/drawing/2014/main" id="{95972521-EE7E-4A49-AEDD-80C1F4F5AB38}"/>
               </a:ext>
             </a:extLst>
           </p:cNvPr>
@@ -27681,7 +27681,7 @@
           <p:cNvPr id="2" name="">
             <a:extLst xmlns:a="http://schemas.openxmlformats.org/drawingml/2006/main">
               <a:ext uri="{FF2B5EF4-FFF2-40B4-BE49-F238E27FC236}">
-                <a16:creationId xmlns:a16="http://schemas.microsoft.com/office/drawing/2014/main" id="{03606119-2310-46C7-BD60-BC3FF1718C10}"/>
+                <a16:creationId xmlns:a16="http://schemas.microsoft.com/office/drawing/2014/main" id="{2E8C296C-6CDD-4C36-9E92-F6437120AD3E}"/>
               </a:ext>
             </a:extLst>
           </p:cNvPr>
@@ -27743,7 +27743,7 @@
           <p:cNvPr id="3" name="">
             <a:extLst xmlns:a="http://schemas.openxmlformats.org/drawingml/2006/main">
               <a:ext uri="{FF2B5EF4-FFF2-40B4-BE49-F238E27FC236}">
-                <a16:creationId xmlns:a16="http://schemas.microsoft.com/office/drawing/2014/main" id="{84FD8FFF-18B8-4FA9-9561-F907306502D1}"/>
+                <a16:creationId xmlns:a16="http://schemas.microsoft.com/office/drawing/2014/main" id="{3111612E-2541-4A9B-B2C0-9D8459B2158C}"/>
               </a:ext>
             </a:extLst>
           </p:cNvPr>
@@ -27805,7 +27805,7 @@
           <p:cNvPr id="4" name="">
             <a:extLst xmlns:a="http://schemas.openxmlformats.org/drawingml/2006/main">
               <a:ext uri="{FF2B5EF4-FFF2-40B4-BE49-F238E27FC236}">
-                <a16:creationId xmlns:a16="http://schemas.microsoft.com/office/drawing/2014/main" id="{66A078CA-76E4-40F9-99A2-8FC4B5926D0C}"/>
+                <a16:creationId xmlns:a16="http://schemas.microsoft.com/office/drawing/2014/main" id="{6751F164-DBF4-4458-AEAF-56F1D931A0A1}"/>
               </a:ext>
             </a:extLst>
           </p:cNvPr>
@@ -27867,7 +27867,7 @@
           <p:cNvPr id="5" name="">
             <a:extLst xmlns:a="http://schemas.openxmlformats.org/drawingml/2006/main">
               <a:ext uri="{FF2B5EF4-FFF2-40B4-BE49-F238E27FC236}">
-                <a16:creationId xmlns:a16="http://schemas.microsoft.com/office/drawing/2014/main" id="{950FF84F-1C6C-4F9D-A1F6-36CEF9947288}"/>
+                <a16:creationId xmlns:a16="http://schemas.microsoft.com/office/drawing/2014/main" id="{EC616763-39C2-4DEF-82B6-0C91A0E91DF7}"/>
               </a:ext>
             </a:extLst>
           </p:cNvPr>
@@ -27900,7 +27900,7 @@
           <p:cNvPr id="6" name="">
             <a:extLst xmlns:a="http://schemas.openxmlformats.org/drawingml/2006/main">
               <a:ext uri="{FF2B5EF4-FFF2-40B4-BE49-F238E27FC236}">
-                <a16:creationId xmlns:a16="http://schemas.microsoft.com/office/drawing/2014/main" id="{40C9905A-323B-4BEE-80ED-02865E5027AA}"/>
+                <a16:creationId xmlns:a16="http://schemas.microsoft.com/office/drawing/2014/main" id="{A15B2D9B-729B-4A31-B612-4AA91F72DD18}"/>
               </a:ext>
             </a:extLst>
           </p:cNvPr>
@@ -27962,7 +27962,7 @@
           <p:cNvPr id="7" name="">
             <a:extLst xmlns:a="http://schemas.openxmlformats.org/drawingml/2006/main">
               <a:ext uri="{FF2B5EF4-FFF2-40B4-BE49-F238E27FC236}">
-                <a16:creationId xmlns:a16="http://schemas.microsoft.com/office/drawing/2014/main" id="{CCE726C1-CC87-49D2-9BF4-560FE6F2FEE8}"/>
+                <a16:creationId xmlns:a16="http://schemas.microsoft.com/office/drawing/2014/main" id="{9A82575D-42B7-47A0-9EAC-7BAD3C22FCA3}"/>
               </a:ext>
             </a:extLst>
           </p:cNvPr>
@@ -28024,7 +28024,7 @@
           <p:cNvPr id="8" name="">
             <a:extLst xmlns:a="http://schemas.openxmlformats.org/drawingml/2006/main">
               <a:ext uri="{FF2B5EF4-FFF2-40B4-BE49-F238E27FC236}">
-                <a16:creationId xmlns:a16="http://schemas.microsoft.com/office/drawing/2014/main" id="{F7598131-D192-4214-BDDD-6C2FC2319696}"/>
+                <a16:creationId xmlns:a16="http://schemas.microsoft.com/office/drawing/2014/main" id="{BF24C74D-076C-4765-A5E7-339F2D0BF5A6}"/>
               </a:ext>
             </a:extLst>
           </p:cNvPr>
@@ -28065,7 +28065,7 @@
           <p:cNvPr id="9" name="">
             <a:extLst xmlns:a="http://schemas.openxmlformats.org/drawingml/2006/main">
               <a:ext uri="{FF2B5EF4-FFF2-40B4-BE49-F238E27FC236}">
-                <a16:creationId xmlns:a16="http://schemas.microsoft.com/office/drawing/2014/main" id="{D5F298AC-69BF-4D54-A8C6-86F03E92530D}"/>
+                <a16:creationId xmlns:a16="http://schemas.microsoft.com/office/drawing/2014/main" id="{EAACC927-DD29-4FB4-8A89-0944CD1C14F7}"/>
               </a:ext>
             </a:extLst>
           </p:cNvPr>
@@ -28098,7 +28098,7 @@
           <p:cNvPr id="10" name="">
             <a:extLst xmlns:a="http://schemas.openxmlformats.org/drawingml/2006/main">
               <a:ext uri="{FF2B5EF4-FFF2-40B4-BE49-F238E27FC236}">
-                <a16:creationId xmlns:a16="http://schemas.microsoft.com/office/drawing/2014/main" id="{E6C2910E-D3AB-4D01-87CF-D4C348D763A6}"/>
+                <a16:creationId xmlns:a16="http://schemas.microsoft.com/office/drawing/2014/main" id="{160FB193-2810-40E2-A885-7ABA370BE50B}"/>
               </a:ext>
             </a:extLst>
           </p:cNvPr>
@@ -28160,7 +28160,7 @@
           <p:cNvPr id="11" name="">
             <a:extLst xmlns:a="http://schemas.openxmlformats.org/drawingml/2006/main">
               <a:ext uri="{FF2B5EF4-FFF2-40B4-BE49-F238E27FC236}">
-                <a16:creationId xmlns:a16="http://schemas.microsoft.com/office/drawing/2014/main" id="{023C80A0-E8A8-4CFD-A02D-93E9FD91BDAB}"/>
+                <a16:creationId xmlns:a16="http://schemas.microsoft.com/office/drawing/2014/main" id="{155F3FE9-2797-4A6F-863C-98E4FD80FADF}"/>
               </a:ext>
             </a:extLst>
           </p:cNvPr>
@@ -28222,7 +28222,7 @@
           <p:cNvPr id="12" name="">
             <a:extLst xmlns:a="http://schemas.openxmlformats.org/drawingml/2006/main">
               <a:ext uri="{FF2B5EF4-FFF2-40B4-BE49-F238E27FC236}">
-                <a16:creationId xmlns:a16="http://schemas.microsoft.com/office/drawing/2014/main" id="{E59DA21F-BD62-419F-8FE1-53BDB8399839}"/>
+                <a16:creationId xmlns:a16="http://schemas.microsoft.com/office/drawing/2014/main" id="{970DA3BD-D3B4-4E25-9BA8-9690B681925B}"/>
               </a:ext>
             </a:extLst>
           </p:cNvPr>
@@ -28284,7 +28284,7 @@
           <p:cNvPr id="13" name="">
             <a:extLst xmlns:a="http://schemas.openxmlformats.org/drawingml/2006/main">
               <a:ext uri="{FF2B5EF4-FFF2-40B4-BE49-F238E27FC236}">
-                <a16:creationId xmlns:a16="http://schemas.microsoft.com/office/drawing/2014/main" id="{2219881A-4372-42F6-BC92-0CAADFF0F6FC}"/>
+                <a16:creationId xmlns:a16="http://schemas.microsoft.com/office/drawing/2014/main" id="{90FCDF55-77A1-459C-B10A-C1EFBDBF2DD8}"/>
               </a:ext>
             </a:extLst>
           </p:cNvPr>
@@ -28409,7 +28409,7 @@
           <p:cNvPr id="14" name="">
             <a:extLst xmlns:a="http://schemas.openxmlformats.org/drawingml/2006/main">
               <a:ext uri="{FF2B5EF4-FFF2-40B4-BE49-F238E27FC236}">
-                <a16:creationId xmlns:a16="http://schemas.microsoft.com/office/drawing/2014/main" id="{CE1256E7-24BE-4DE8-8EE6-D1D75284E359}"/>
+                <a16:creationId xmlns:a16="http://schemas.microsoft.com/office/drawing/2014/main" id="{66A19F46-08DE-4DDE-8F42-1A0FE07665D3}"/>
               </a:ext>
             </a:extLst>
           </p:cNvPr>
@@ -28444,7 +28444,7 @@
           <p:cNvPr id="15" name="">
             <a:extLst xmlns:a="http://schemas.openxmlformats.org/drawingml/2006/main">
               <a:ext uri="{FF2B5EF4-FFF2-40B4-BE49-F238E27FC236}">
-                <a16:creationId xmlns:a16="http://schemas.microsoft.com/office/drawing/2014/main" id="{E5156FE8-D574-403A-85E7-D4367EAE5547}"/>
+                <a16:creationId xmlns:a16="http://schemas.microsoft.com/office/drawing/2014/main" id="{10CFFF53-D35C-4B5B-8ECE-D44D46DE100B}"/>
               </a:ext>
             </a:extLst>
           </p:cNvPr>
@@ -28506,7 +28506,7 @@
           <p:cNvPr id="16" name="">
             <a:extLst xmlns:a="http://schemas.openxmlformats.org/drawingml/2006/main">
               <a:ext uri="{FF2B5EF4-FFF2-40B4-BE49-F238E27FC236}">
-                <a16:creationId xmlns:a16="http://schemas.microsoft.com/office/drawing/2014/main" id="{637CD2E6-BF7D-4951-97A7-BC14136A3A74}"/>
+                <a16:creationId xmlns:a16="http://schemas.microsoft.com/office/drawing/2014/main" id="{AB3A8415-9660-48E4-BAB9-FC949945EEF2}"/>
               </a:ext>
             </a:extLst>
           </p:cNvPr>
@@ -28547,7 +28547,7 @@
           <p:cNvPr id="17" name="">
             <a:extLst xmlns:a="http://schemas.openxmlformats.org/drawingml/2006/main">
               <a:ext uri="{FF2B5EF4-FFF2-40B4-BE49-F238E27FC236}">
-                <a16:creationId xmlns:a16="http://schemas.microsoft.com/office/drawing/2014/main" id="{9398AA2E-C9E1-4C6C-A0A9-BEADAF2FF305}"/>
+                <a16:creationId xmlns:a16="http://schemas.microsoft.com/office/drawing/2014/main" id="{6B472EED-EA2A-479B-92B3-54C52546AD05}"/>
               </a:ext>
             </a:extLst>
           </p:cNvPr>
@@ -28580,7 +28580,7 @@
           <p:cNvPr id="18" name="">
             <a:extLst xmlns:a="http://schemas.openxmlformats.org/drawingml/2006/main">
               <a:ext uri="{FF2B5EF4-FFF2-40B4-BE49-F238E27FC236}">
-                <a16:creationId xmlns:a16="http://schemas.microsoft.com/office/drawing/2014/main" id="{0F96FA25-28AE-4810-BF72-512652488615}"/>
+                <a16:creationId xmlns:a16="http://schemas.microsoft.com/office/drawing/2014/main" id="{E94C0BC5-70B1-47AE-AED5-BB86BEDBAF21}"/>
               </a:ext>
             </a:extLst>
           </p:cNvPr>
@@ -28642,7 +28642,7 @@
           <p:cNvPr id="19" name="">
             <a:extLst xmlns:a="http://schemas.openxmlformats.org/drawingml/2006/main">
               <a:ext uri="{FF2B5EF4-FFF2-40B4-BE49-F238E27FC236}">
-                <a16:creationId xmlns:a16="http://schemas.microsoft.com/office/drawing/2014/main" id="{01A142C6-8D28-4935-AB6A-56CD9ABF92B0}"/>
+                <a16:creationId xmlns:a16="http://schemas.microsoft.com/office/drawing/2014/main" id="{DF08CA21-2F5B-47FC-AD28-FFB07DDD14EE}"/>
               </a:ext>
             </a:extLst>
           </p:cNvPr>
@@ -28704,7 +28704,7 @@
           <p:cNvPr id="20" name="">
             <a:extLst xmlns:a="http://schemas.openxmlformats.org/drawingml/2006/main">
               <a:ext uri="{FF2B5EF4-FFF2-40B4-BE49-F238E27FC236}">
-                <a16:creationId xmlns:a16="http://schemas.microsoft.com/office/drawing/2014/main" id="{3D63E25D-C4BF-4FD7-97DD-91BBAC575E50}"/>
+                <a16:creationId xmlns:a16="http://schemas.microsoft.com/office/drawing/2014/main" id="{58E4A5DB-834C-4C7B-985A-90B8774B0E00}"/>
               </a:ext>
             </a:extLst>
           </p:cNvPr>
@@ -28766,7 +28766,7 @@
           <p:cNvPr id="21" name="">
             <a:extLst xmlns:a="http://schemas.openxmlformats.org/drawingml/2006/main">
               <a:ext uri="{FF2B5EF4-FFF2-40B4-BE49-F238E27FC236}">
-                <a16:creationId xmlns:a16="http://schemas.microsoft.com/office/drawing/2014/main" id="{A0B81EC0-DF34-452D-A1F0-94CD89076170}"/>
+                <a16:creationId xmlns:a16="http://schemas.microsoft.com/office/drawing/2014/main" id="{4759D43C-D4BB-496D-889D-DFB734A985C2}"/>
               </a:ext>
             </a:extLst>
           </p:cNvPr>
@@ -28891,7 +28891,7 @@
           <p:cNvPr id="22" name="">
             <a:extLst xmlns:a="http://schemas.openxmlformats.org/drawingml/2006/main">
               <a:ext uri="{FF2B5EF4-FFF2-40B4-BE49-F238E27FC236}">
-                <a16:creationId xmlns:a16="http://schemas.microsoft.com/office/drawing/2014/main" id="{09C53FE1-A53E-4A8C-999C-CFFA8CFE80B8}"/>
+                <a16:creationId xmlns:a16="http://schemas.microsoft.com/office/drawing/2014/main" id="{9F7F7B22-D02D-4875-92DD-61060E45C7D7}"/>
               </a:ext>
             </a:extLst>
           </p:cNvPr>
@@ -28926,7 +28926,7 @@
           <p:cNvPr id="23" name="">
             <a:extLst xmlns:a="http://schemas.openxmlformats.org/drawingml/2006/main">
               <a:ext uri="{FF2B5EF4-FFF2-40B4-BE49-F238E27FC236}">
-                <a16:creationId xmlns:a16="http://schemas.microsoft.com/office/drawing/2014/main" id="{7D8A5364-9BEC-450D-8C6F-52E6BF33FDFD}"/>
+                <a16:creationId xmlns:a16="http://schemas.microsoft.com/office/drawing/2014/main" id="{17C043DE-C30B-4A76-B662-62C9D37FC7B8}"/>
               </a:ext>
             </a:extLst>
           </p:cNvPr>
@@ -28988,7 +28988,7 @@
           <p:cNvPr id="24" name="">
             <a:extLst xmlns:a="http://schemas.openxmlformats.org/drawingml/2006/main">
               <a:ext uri="{FF2B5EF4-FFF2-40B4-BE49-F238E27FC236}">
-                <a16:creationId xmlns:a16="http://schemas.microsoft.com/office/drawing/2014/main" id="{7BDB50FB-AC38-48C3-B6F3-CE0A99524A4B}"/>
+                <a16:creationId xmlns:a16="http://schemas.microsoft.com/office/drawing/2014/main" id="{C1608FE1-56D6-48D2-95D9-9FCB43AE2DE0}"/>
               </a:ext>
             </a:extLst>
           </p:cNvPr>
@@ -29029,7 +29029,7 @@
           <p:cNvPr id="25" name="">
             <a:extLst xmlns:a="http://schemas.openxmlformats.org/drawingml/2006/main">
               <a:ext uri="{FF2B5EF4-FFF2-40B4-BE49-F238E27FC236}">
-                <a16:creationId xmlns:a16="http://schemas.microsoft.com/office/drawing/2014/main" id="{BB3DCA9F-3E72-410B-B133-FFFE46503FC7}"/>
+                <a16:creationId xmlns:a16="http://schemas.microsoft.com/office/drawing/2014/main" id="{68198EDB-2966-4E98-B805-0F2651FF2E0F}"/>
               </a:ext>
             </a:extLst>
           </p:cNvPr>
@@ -29062,7 +29062,7 @@
           <p:cNvPr id="26" name="">
             <a:extLst xmlns:a="http://schemas.openxmlformats.org/drawingml/2006/main">
               <a:ext uri="{FF2B5EF4-FFF2-40B4-BE49-F238E27FC236}">
-                <a16:creationId xmlns:a16="http://schemas.microsoft.com/office/drawing/2014/main" id="{30CD64CF-D161-4BEA-9844-DFC879DC1EEE}"/>
+                <a16:creationId xmlns:a16="http://schemas.microsoft.com/office/drawing/2014/main" id="{13B40D74-77DE-4C95-AB3F-5329BF03D442}"/>
               </a:ext>
             </a:extLst>
           </p:cNvPr>
@@ -29124,7 +29124,7 @@
           <p:cNvPr id="27" name="">
             <a:extLst xmlns:a="http://schemas.openxmlformats.org/drawingml/2006/main">
               <a:ext uri="{FF2B5EF4-FFF2-40B4-BE49-F238E27FC236}">
-                <a16:creationId xmlns:a16="http://schemas.microsoft.com/office/drawing/2014/main" id="{17CEC761-52A7-48A0-9FA6-FCA7DC6A7984}"/>
+                <a16:creationId xmlns:a16="http://schemas.microsoft.com/office/drawing/2014/main" id="{12EBE7D1-8C0B-4B8F-A135-C99187E214EB}"/>
               </a:ext>
             </a:extLst>
           </p:cNvPr>
@@ -29186,7 +29186,7 @@
           <p:cNvPr id="28" name="">
             <a:extLst xmlns:a="http://schemas.openxmlformats.org/drawingml/2006/main">
               <a:ext uri="{FF2B5EF4-FFF2-40B4-BE49-F238E27FC236}">
-                <a16:creationId xmlns:a16="http://schemas.microsoft.com/office/drawing/2014/main" id="{EDB173BB-613F-4273-829C-F4CCB4A41F94}"/>
+                <a16:creationId xmlns:a16="http://schemas.microsoft.com/office/drawing/2014/main" id="{A8D521B9-62CA-4200-AD0B-A34B10681220}"/>
               </a:ext>
             </a:extLst>
           </p:cNvPr>
@@ -29248,7 +29248,7 @@
           <p:cNvPr id="29" name="">
             <a:extLst xmlns:a="http://schemas.openxmlformats.org/drawingml/2006/main">
               <a:ext uri="{FF2B5EF4-FFF2-40B4-BE49-F238E27FC236}">
-                <a16:creationId xmlns:a16="http://schemas.microsoft.com/office/drawing/2014/main" id="{44ABFC32-5061-4D54-B2E8-C281AFC0BA08}"/>
+                <a16:creationId xmlns:a16="http://schemas.microsoft.com/office/drawing/2014/main" id="{2AE5851A-83A9-4B53-AAAE-96225476E54F}"/>
               </a:ext>
             </a:extLst>
           </p:cNvPr>
@@ -29373,7 +29373,7 @@
           <p:cNvPr id="30" name="">
             <a:extLst xmlns:a="http://schemas.openxmlformats.org/drawingml/2006/main">
               <a:ext uri="{FF2B5EF4-FFF2-40B4-BE49-F238E27FC236}">
-                <a16:creationId xmlns:a16="http://schemas.microsoft.com/office/drawing/2014/main" id="{53FD654D-6ED9-4283-9FC6-8B4D7E975062}"/>
+                <a16:creationId xmlns:a16="http://schemas.microsoft.com/office/drawing/2014/main" id="{DDA56810-F28B-4784-BF8E-FD53A41A6A09}"/>
               </a:ext>
             </a:extLst>
           </p:cNvPr>
@@ -29408,7 +29408,7 @@
           <p:cNvPr id="31" name="">
             <a:extLst xmlns:a="http://schemas.openxmlformats.org/drawingml/2006/main">
               <a:ext uri="{FF2B5EF4-FFF2-40B4-BE49-F238E27FC236}">
-                <a16:creationId xmlns:a16="http://schemas.microsoft.com/office/drawing/2014/main" id="{67662D66-8643-49A3-9695-59BDB99D19AA}"/>
+                <a16:creationId xmlns:a16="http://schemas.microsoft.com/office/drawing/2014/main" id="{2072D193-2937-4A6B-8258-C454A4A67487}"/>
               </a:ext>
             </a:extLst>
           </p:cNvPr>
@@ -29470,7 +29470,7 @@
           <p:cNvPr id="32" name="">
             <a:extLst xmlns:a="http://schemas.openxmlformats.org/drawingml/2006/main">
               <a:ext uri="{FF2B5EF4-FFF2-40B4-BE49-F238E27FC236}">
-                <a16:creationId xmlns:a16="http://schemas.microsoft.com/office/drawing/2014/main" id="{96E38A85-7384-4C8E-8A32-212A36EC4067}"/>
+                <a16:creationId xmlns:a16="http://schemas.microsoft.com/office/drawing/2014/main" id="{10C81DBE-F387-421E-BC2F-BFA0B33E800D}"/>
               </a:ext>
             </a:extLst>
           </p:cNvPr>
@@ -29503,7 +29503,7 @@
           <p:cNvPr id="33" name="">
             <a:extLst xmlns:a="http://schemas.openxmlformats.org/drawingml/2006/main">
               <a:ext uri="{FF2B5EF4-FFF2-40B4-BE49-F238E27FC236}">
-                <a16:creationId xmlns:a16="http://schemas.microsoft.com/office/drawing/2014/main" id="{A5BC6023-C648-4974-A976-068ADCDE0054}"/>
+                <a16:creationId xmlns:a16="http://schemas.microsoft.com/office/drawing/2014/main" id="{0D18DEF6-7766-4695-BBEF-1FE9EDAC7C60}"/>
               </a:ext>
             </a:extLst>
           </p:cNvPr>
@@ -29536,7 +29536,7 @@
           <p:cNvPr id="34" name="">
             <a:extLst xmlns:a="http://schemas.openxmlformats.org/drawingml/2006/main">
               <a:ext uri="{FF2B5EF4-FFF2-40B4-BE49-F238E27FC236}">
-                <a16:creationId xmlns:a16="http://schemas.microsoft.com/office/drawing/2014/main" id="{CB052078-28DC-41D1-9F31-5515C2BF4C60}"/>
+                <a16:creationId xmlns:a16="http://schemas.microsoft.com/office/drawing/2014/main" id="{08211993-0DE3-460F-8FBA-588DEF96709F}"/>
               </a:ext>
             </a:extLst>
           </p:cNvPr>
@@ -29571,7 +29571,7 @@
           <p:cNvPr id="35" name="">
             <a:extLst xmlns:a="http://schemas.openxmlformats.org/drawingml/2006/main">
               <a:ext uri="{FF2B5EF4-FFF2-40B4-BE49-F238E27FC236}">
-                <a16:creationId xmlns:a16="http://schemas.microsoft.com/office/drawing/2014/main" id="{3FE5BA2C-8705-40A9-B688-E9FA5D7E379F}"/>
+                <a16:creationId xmlns:a16="http://schemas.microsoft.com/office/drawing/2014/main" id="{4C65BEA2-FE3B-4624-9E23-8D7F61D81E31}"/>
               </a:ext>
             </a:extLst>
           </p:cNvPr>
@@ -29631,7 +29631,7 @@
     </p:spTree>
     <p:extLst>
       <p:ext uri="{BB962C8B-B14F-4D97-AF65-F5344CB8AC3E}">
-        <p14:creationId xmlns:p14="http://schemas.microsoft.com/office/powerpoint/2010/main" val="187167137"/>
+        <p14:creationId xmlns:p14="http://schemas.microsoft.com/office/powerpoint/2010/main" val="94166888"/>
       </p:ext>
     </p:extLst>
   </p:cSld>
@@ -29662,7 +29662,7 @@
           <p:cNvPr id="30" name="">
             <a:extLst xmlns:a="http://schemas.openxmlformats.org/drawingml/2006/main">
               <a:ext uri="{FF2B5EF4-FFF2-40B4-BE49-F238E27FC236}">
-                <a16:creationId xmlns:a16="http://schemas.microsoft.com/office/drawing/2014/main" id="{70795930-045B-401F-B6CA-979FF32543C1}"/>
+                <a16:creationId xmlns:a16="http://schemas.microsoft.com/office/drawing/2014/main" id="{66B08FC6-964C-4192-A6E1-6105C10CD7EC}"/>
               </a:ext>
             </a:extLst>
           </p:cNvPr>
@@ -29695,7 +29695,7 @@
           <p:cNvPr id="2" name="">
             <a:extLst xmlns:a="http://schemas.openxmlformats.org/drawingml/2006/main">
               <a:ext uri="{FF2B5EF4-FFF2-40B4-BE49-F238E27FC236}">
-                <a16:creationId xmlns:a16="http://schemas.microsoft.com/office/drawing/2014/main" id="{F370A730-AF47-4A63-8668-3147964F6F2A}"/>
+                <a16:creationId xmlns:a16="http://schemas.microsoft.com/office/drawing/2014/main" id="{87780CD7-63AB-453B-8A67-B0FDCFB1BDEB}"/>
               </a:ext>
             </a:extLst>
           </p:cNvPr>
@@ -29757,7 +29757,7 @@
           <p:cNvPr id="3" name="">
             <a:extLst xmlns:a="http://schemas.openxmlformats.org/drawingml/2006/main">
               <a:ext uri="{FF2B5EF4-FFF2-40B4-BE49-F238E27FC236}">
-                <a16:creationId xmlns:a16="http://schemas.microsoft.com/office/drawing/2014/main" id="{C40C9D54-8553-43FA-A0A5-568DA85E4A93}"/>
+                <a16:creationId xmlns:a16="http://schemas.microsoft.com/office/drawing/2014/main" id="{BD1066DB-931F-4536-87D2-D308A857E0EC}"/>
               </a:ext>
             </a:extLst>
           </p:cNvPr>
@@ -29819,7 +29819,7 @@
           <p:cNvPr id="4" name="">
             <a:extLst xmlns:a="http://schemas.openxmlformats.org/drawingml/2006/main">
               <a:ext uri="{FF2B5EF4-FFF2-40B4-BE49-F238E27FC236}">
-                <a16:creationId xmlns:a16="http://schemas.microsoft.com/office/drawing/2014/main" id="{2940FAB3-38BA-4357-9116-836D3792FC86}"/>
+                <a16:creationId xmlns:a16="http://schemas.microsoft.com/office/drawing/2014/main" id="{741578D2-5DD4-4F0B-A418-1745DE9AE427}"/>
               </a:ext>
             </a:extLst>
           </p:cNvPr>
@@ -29852,7 +29852,7 @@
           <p:cNvPr id="5" name="">
             <a:extLst xmlns:a="http://schemas.openxmlformats.org/drawingml/2006/main">
               <a:ext uri="{FF2B5EF4-FFF2-40B4-BE49-F238E27FC236}">
-                <a16:creationId xmlns:a16="http://schemas.microsoft.com/office/drawing/2014/main" id="{0D8D0FC7-D0A2-4D80-866F-DA9F061A925A}"/>
+                <a16:creationId xmlns:a16="http://schemas.microsoft.com/office/drawing/2014/main" id="{B82850CC-90AA-497B-A796-CDCF85056A88}"/>
               </a:ext>
             </a:extLst>
           </p:cNvPr>
@@ -29914,7 +29914,7 @@
           <p:cNvPr id="6" name="">
             <a:extLst xmlns:a="http://schemas.openxmlformats.org/drawingml/2006/main">
               <a:ext uri="{FF2B5EF4-FFF2-40B4-BE49-F238E27FC236}">
-                <a16:creationId xmlns:a16="http://schemas.microsoft.com/office/drawing/2014/main" id="{61A1FD9B-98CC-49B3-93D4-066DACB593AD}"/>
+                <a16:creationId xmlns:a16="http://schemas.microsoft.com/office/drawing/2014/main" id="{914EC4CF-3933-413A-99B1-9E3B478A75F0}"/>
               </a:ext>
             </a:extLst>
           </p:cNvPr>
@@ -29976,7 +29976,7 @@
           <p:cNvPr id="7" name="">
             <a:extLst xmlns:a="http://schemas.openxmlformats.org/drawingml/2006/main">
               <a:ext uri="{FF2B5EF4-FFF2-40B4-BE49-F238E27FC236}">
-                <a16:creationId xmlns:a16="http://schemas.microsoft.com/office/drawing/2014/main" id="{B8FC255C-A249-473F-B67E-DDB03BDD4B17}"/>
+                <a16:creationId xmlns:a16="http://schemas.microsoft.com/office/drawing/2014/main" id="{AC96C18B-CBEF-4C3F-8EC4-63A481EA0678}"/>
               </a:ext>
             </a:extLst>
           </p:cNvPr>
@@ -30017,7 +30017,7 @@
           <p:cNvPr id="8" name="">
             <a:extLst xmlns:a="http://schemas.openxmlformats.org/drawingml/2006/main">
               <a:ext uri="{FF2B5EF4-FFF2-40B4-BE49-F238E27FC236}">
-                <a16:creationId xmlns:a16="http://schemas.microsoft.com/office/drawing/2014/main" id="{0585ABB0-C491-4BD3-8B27-0202284FB59A}"/>
+                <a16:creationId xmlns:a16="http://schemas.microsoft.com/office/drawing/2014/main" id="{121601CE-3573-4DD6-BF5A-836DC45CBD37}"/>
               </a:ext>
             </a:extLst>
           </p:cNvPr>
@@ -30050,7 +30050,7 @@
           <p:cNvPr id="9" name="">
             <a:extLst xmlns:a="http://schemas.openxmlformats.org/drawingml/2006/main">
               <a:ext uri="{FF2B5EF4-FFF2-40B4-BE49-F238E27FC236}">
-                <a16:creationId xmlns:a16="http://schemas.microsoft.com/office/drawing/2014/main" id="{E84798F0-1872-4389-826E-791F538259D5}"/>
+                <a16:creationId xmlns:a16="http://schemas.microsoft.com/office/drawing/2014/main" id="{4FB19EF9-4A93-4419-A54F-C30C7C195512}"/>
               </a:ext>
             </a:extLst>
           </p:cNvPr>
@@ -30112,7 +30112,7 @@
           <p:cNvPr id="10" name="">
             <a:extLst xmlns:a="http://schemas.openxmlformats.org/drawingml/2006/main">
               <a:ext uri="{FF2B5EF4-FFF2-40B4-BE49-F238E27FC236}">
-                <a16:creationId xmlns:a16="http://schemas.microsoft.com/office/drawing/2014/main" id="{9B066475-FA50-4C07-A5BB-5EDF694CD25E}"/>
+                <a16:creationId xmlns:a16="http://schemas.microsoft.com/office/drawing/2014/main" id="{3217BDD7-A039-4D12-A77E-88D04E618573}"/>
               </a:ext>
             </a:extLst>
           </p:cNvPr>
@@ -30255,7 +30255,7 @@
           <p:cNvPr id="11" name="">
             <a:extLst xmlns:a="http://schemas.openxmlformats.org/drawingml/2006/main">
               <a:ext uri="{FF2B5EF4-FFF2-40B4-BE49-F238E27FC236}">
-                <a16:creationId xmlns:a16="http://schemas.microsoft.com/office/drawing/2014/main" id="{0F270027-4A2D-4C72-8445-87A475E9AB9C}"/>
+                <a16:creationId xmlns:a16="http://schemas.microsoft.com/office/drawing/2014/main" id="{18739A1A-7264-4A42-BDD0-F0DF67D4716D}"/>
               </a:ext>
             </a:extLst>
           </p:cNvPr>
@@ -30296,7 +30296,7 @@
           <p:cNvPr id="12" name="">
             <a:extLst xmlns:a="http://schemas.openxmlformats.org/drawingml/2006/main">
               <a:ext uri="{FF2B5EF4-FFF2-40B4-BE49-F238E27FC236}">
-                <a16:creationId xmlns:a16="http://schemas.microsoft.com/office/drawing/2014/main" id="{63E8A6AA-8A2D-42B0-BA34-925E5C8F8AAE}"/>
+                <a16:creationId xmlns:a16="http://schemas.microsoft.com/office/drawing/2014/main" id="{45A40744-472C-4D65-B3EC-FFA2ABD7F4A1}"/>
               </a:ext>
             </a:extLst>
           </p:cNvPr>
@@ -30329,7 +30329,7 @@
           <p:cNvPr id="13" name="">
             <a:extLst xmlns:a="http://schemas.openxmlformats.org/drawingml/2006/main">
               <a:ext uri="{FF2B5EF4-FFF2-40B4-BE49-F238E27FC236}">
-                <a16:creationId xmlns:a16="http://schemas.microsoft.com/office/drawing/2014/main" id="{097F293C-A2CB-4957-A075-1A19E0EAD04C}"/>
+                <a16:creationId xmlns:a16="http://schemas.microsoft.com/office/drawing/2014/main" id="{E4CDBC85-55AD-4E1B-AA76-81434D3CC2A1}"/>
               </a:ext>
             </a:extLst>
           </p:cNvPr>
@@ -30391,7 +30391,7 @@
           <p:cNvPr id="14" name="">
             <a:extLst xmlns:a="http://schemas.openxmlformats.org/drawingml/2006/main">
               <a:ext uri="{FF2B5EF4-FFF2-40B4-BE49-F238E27FC236}">
-                <a16:creationId xmlns:a16="http://schemas.microsoft.com/office/drawing/2014/main" id="{BDD88AA6-1D6D-4A0F-B55B-F634026C9561}"/>
+                <a16:creationId xmlns:a16="http://schemas.microsoft.com/office/drawing/2014/main" id="{7DDC4E18-297B-474C-8F48-6DD4B3722812}"/>
               </a:ext>
             </a:extLst>
           </p:cNvPr>
@@ -30561,7 +30561,7 @@
           <p:cNvPr id="15" name="">
             <a:extLst xmlns:a="http://schemas.openxmlformats.org/drawingml/2006/main">
               <a:ext uri="{FF2B5EF4-FFF2-40B4-BE49-F238E27FC236}">
-                <a16:creationId xmlns:a16="http://schemas.microsoft.com/office/drawing/2014/main" id="{DE213D33-40DC-4455-8F2D-519E75C950DE}"/>
+                <a16:creationId xmlns:a16="http://schemas.microsoft.com/office/drawing/2014/main" id="{A65C628A-C60C-4265-9ECF-DC9522D726B4}"/>
               </a:ext>
             </a:extLst>
           </p:cNvPr>
@@ -30596,7 +30596,7 @@
           <p:cNvPr id="16" name="">
             <a:extLst xmlns:a="http://schemas.openxmlformats.org/drawingml/2006/main">
               <a:ext uri="{FF2B5EF4-FFF2-40B4-BE49-F238E27FC236}">
-                <a16:creationId xmlns:a16="http://schemas.microsoft.com/office/drawing/2014/main" id="{78F03CE2-1C58-40F6-B902-4349479605E4}"/>
+                <a16:creationId xmlns:a16="http://schemas.microsoft.com/office/drawing/2014/main" id="{1173196A-D742-431D-B97C-C928D380EF79}"/>
               </a:ext>
             </a:extLst>
           </p:cNvPr>
@@ -30658,7 +30658,7 @@
           <p:cNvPr id="17" name="">
             <a:extLst xmlns:a="http://schemas.openxmlformats.org/drawingml/2006/main">
               <a:ext uri="{FF2B5EF4-FFF2-40B4-BE49-F238E27FC236}">
-                <a16:creationId xmlns:a16="http://schemas.microsoft.com/office/drawing/2014/main" id="{7D37AAD4-C357-4024-AAA5-7DD38B963E7F}"/>
+                <a16:creationId xmlns:a16="http://schemas.microsoft.com/office/drawing/2014/main" id="{C93BADEE-A8DB-4177-8AF2-CACAB1AE2357}"/>
               </a:ext>
             </a:extLst>
           </p:cNvPr>
@@ -30720,7 +30720,7 @@
           <p:cNvPr id="18" name="">
             <a:extLst xmlns:a="http://schemas.openxmlformats.org/drawingml/2006/main">
               <a:ext uri="{FF2B5EF4-FFF2-40B4-BE49-F238E27FC236}">
-                <a16:creationId xmlns:a16="http://schemas.microsoft.com/office/drawing/2014/main" id="{EF621362-6299-4629-9A71-73B7E5160873}"/>
+                <a16:creationId xmlns:a16="http://schemas.microsoft.com/office/drawing/2014/main" id="{673DC3E7-8362-430C-AA01-D469EAD6DFB4}"/>
               </a:ext>
             </a:extLst>
           </p:cNvPr>
@@ -30755,7 +30755,7 @@
           <p:cNvPr id="19" name="">
             <a:extLst xmlns:a="http://schemas.openxmlformats.org/drawingml/2006/main">
               <a:ext uri="{FF2B5EF4-FFF2-40B4-BE49-F238E27FC236}">
-                <a16:creationId xmlns:a16="http://schemas.microsoft.com/office/drawing/2014/main" id="{4EB19EB3-53A5-482B-8D1A-CEA40B180127}"/>
+                <a16:creationId xmlns:a16="http://schemas.microsoft.com/office/drawing/2014/main" id="{C1A380E4-BE2D-4DFF-A301-0516BC7435DC}"/>
               </a:ext>
             </a:extLst>
           </p:cNvPr>
@@ -30817,7 +30817,7 @@
           <p:cNvPr id="20" name="">
             <a:extLst xmlns:a="http://schemas.openxmlformats.org/drawingml/2006/main">
               <a:ext uri="{FF2B5EF4-FFF2-40B4-BE49-F238E27FC236}">
-                <a16:creationId xmlns:a16="http://schemas.microsoft.com/office/drawing/2014/main" id="{8FBEA243-3FF0-4CCE-AEE9-DE5819C9B85C}"/>
+                <a16:creationId xmlns:a16="http://schemas.microsoft.com/office/drawing/2014/main" id="{4325D8F2-05E8-4B88-BFBA-B7D8A7723A8A}"/>
               </a:ext>
             </a:extLst>
           </p:cNvPr>
@@ -30879,7 +30879,7 @@
           <p:cNvPr id="21" name="">
             <a:extLst xmlns:a="http://schemas.openxmlformats.org/drawingml/2006/main">
               <a:ext uri="{FF2B5EF4-FFF2-40B4-BE49-F238E27FC236}">
-                <a16:creationId xmlns:a16="http://schemas.microsoft.com/office/drawing/2014/main" id="{1B146F86-8464-48CF-ABA7-17A6A4B1D7B6}"/>
+                <a16:creationId xmlns:a16="http://schemas.microsoft.com/office/drawing/2014/main" id="{069F1FF2-8263-4CC7-A089-56E143D8D767}"/>
               </a:ext>
             </a:extLst>
           </p:cNvPr>
@@ -30914,7 +30914,7 @@
           <p:cNvPr id="22" name="">
             <a:extLst xmlns:a="http://schemas.openxmlformats.org/drawingml/2006/main">
               <a:ext uri="{FF2B5EF4-FFF2-40B4-BE49-F238E27FC236}">
-                <a16:creationId xmlns:a16="http://schemas.microsoft.com/office/drawing/2014/main" id="{2A84A733-39A6-46B1-B7D9-7BE04F642342}"/>
+                <a16:creationId xmlns:a16="http://schemas.microsoft.com/office/drawing/2014/main" id="{C87F072F-4BEC-4D6D-9FF1-4083C64CE2F4}"/>
               </a:ext>
             </a:extLst>
           </p:cNvPr>
@@ -30976,7 +30976,7 @@
           <p:cNvPr id="23" name="">
             <a:extLst xmlns:a="http://schemas.openxmlformats.org/drawingml/2006/main">
               <a:ext uri="{FF2B5EF4-FFF2-40B4-BE49-F238E27FC236}">
-                <a16:creationId xmlns:a16="http://schemas.microsoft.com/office/drawing/2014/main" id="{152DDB6C-5084-40B7-B187-052995ADBF2B}"/>
+                <a16:creationId xmlns:a16="http://schemas.microsoft.com/office/drawing/2014/main" id="{01422981-A471-4C16-B06B-9644E5BF23B2}"/>
               </a:ext>
             </a:extLst>
           </p:cNvPr>
@@ -31038,7 +31038,7 @@
           <p:cNvPr id="24" name="">
             <a:extLst xmlns:a="http://schemas.openxmlformats.org/drawingml/2006/main">
               <a:ext uri="{FF2B5EF4-FFF2-40B4-BE49-F238E27FC236}">
-                <a16:creationId xmlns:a16="http://schemas.microsoft.com/office/drawing/2014/main" id="{EF2DF6EC-73F0-4E38-93A5-5B3D38F16039}"/>
+                <a16:creationId xmlns:a16="http://schemas.microsoft.com/office/drawing/2014/main" id="{1AE3DEC3-0A29-446C-A008-EA52B390BC47}"/>
               </a:ext>
             </a:extLst>
           </p:cNvPr>
@@ -31073,7 +31073,7 @@
           <p:cNvPr id="25" name="">
             <a:extLst xmlns:a="http://schemas.openxmlformats.org/drawingml/2006/main">
               <a:ext uri="{FF2B5EF4-FFF2-40B4-BE49-F238E27FC236}">
-                <a16:creationId xmlns:a16="http://schemas.microsoft.com/office/drawing/2014/main" id="{53742B62-74A6-48E5-8228-DBC55602FDEE}"/>
+                <a16:creationId xmlns:a16="http://schemas.microsoft.com/office/drawing/2014/main" id="{346523DC-ACD2-472A-B8BB-5723185A3F12}"/>
               </a:ext>
             </a:extLst>
           </p:cNvPr>
@@ -31135,7 +31135,7 @@
           <p:cNvPr id="26" name="">
             <a:extLst xmlns:a="http://schemas.openxmlformats.org/drawingml/2006/main">
               <a:ext uri="{FF2B5EF4-FFF2-40B4-BE49-F238E27FC236}">
-                <a16:creationId xmlns:a16="http://schemas.microsoft.com/office/drawing/2014/main" id="{2CC088B2-5E8C-40A5-939E-57EA5E06FD21}"/>
+                <a16:creationId xmlns:a16="http://schemas.microsoft.com/office/drawing/2014/main" id="{1B3173B6-779F-4F61-91A3-50EF045F856A}"/>
               </a:ext>
             </a:extLst>
           </p:cNvPr>
@@ -31197,7 +31197,7 @@
           <p:cNvPr id="27" name="">
             <a:extLst xmlns:a="http://schemas.openxmlformats.org/drawingml/2006/main">
               <a:ext uri="{FF2B5EF4-FFF2-40B4-BE49-F238E27FC236}">
-                <a16:creationId xmlns:a16="http://schemas.microsoft.com/office/drawing/2014/main" id="{B3BC2935-C7E2-41B0-B756-A68575A2EC11}"/>
+                <a16:creationId xmlns:a16="http://schemas.microsoft.com/office/drawing/2014/main" id="{B012C01B-8CFB-4955-BB27-8C0CCE80F134}"/>
               </a:ext>
             </a:extLst>
           </p:cNvPr>
@@ -31232,7 +31232,7 @@
           <p:cNvPr id="28" name="">
             <a:extLst xmlns:a="http://schemas.openxmlformats.org/drawingml/2006/main">
               <a:ext uri="{FF2B5EF4-FFF2-40B4-BE49-F238E27FC236}">
-                <a16:creationId xmlns:a16="http://schemas.microsoft.com/office/drawing/2014/main" id="{36A11FF8-0DD5-4D9F-A338-D7D723A5F549}"/>
+                <a16:creationId xmlns:a16="http://schemas.microsoft.com/office/drawing/2014/main" id="{9A7ACE3C-579C-4EFF-B206-C3CEC5989742}"/>
               </a:ext>
             </a:extLst>
           </p:cNvPr>
@@ -31294,7 +31294,7 @@
           <p:cNvPr id="29" name="">
             <a:extLst xmlns:a="http://schemas.openxmlformats.org/drawingml/2006/main">
               <a:ext uri="{FF2B5EF4-FFF2-40B4-BE49-F238E27FC236}">
-                <a16:creationId xmlns:a16="http://schemas.microsoft.com/office/drawing/2014/main" id="{323F288E-4FD7-4B20-9F56-741402C81A9D}"/>
+                <a16:creationId xmlns:a16="http://schemas.microsoft.com/office/drawing/2014/main" id="{352268A8-79BF-48AF-A828-2AE7971C4912}"/>
               </a:ext>
             </a:extLst>
           </p:cNvPr>
@@ -31354,7 +31354,7 @@
     </p:spTree>
     <p:extLst>
       <p:ext uri="{BB962C8B-B14F-4D97-AF65-F5344CB8AC3E}">
-        <p14:creationId xmlns:p14="http://schemas.microsoft.com/office/powerpoint/2010/main" val="1236998715"/>
+        <p14:creationId xmlns:p14="http://schemas.microsoft.com/office/powerpoint/2010/main" val="989625691"/>
       </p:ext>
     </p:extLst>
   </p:cSld>
@@ -31385,7 +31385,7 @@
           <p:cNvPr id="38" name="">
             <a:extLst xmlns:a="http://schemas.openxmlformats.org/drawingml/2006/main">
               <a:ext uri="{FF2B5EF4-FFF2-40B4-BE49-F238E27FC236}">
-                <a16:creationId xmlns:a16="http://schemas.microsoft.com/office/drawing/2014/main" id="{389028D8-97FD-4CCA-9A24-38322F59FBE3}"/>
+                <a16:creationId xmlns:a16="http://schemas.microsoft.com/office/drawing/2014/main" id="{153F31F6-A1F8-42BA-B7B7-A45E7983DF31}"/>
               </a:ext>
             </a:extLst>
           </p:cNvPr>
@@ -31418,7 +31418,7 @@
           <p:cNvPr id="2" name="">
             <a:extLst xmlns:a="http://schemas.openxmlformats.org/drawingml/2006/main">
               <a:ext uri="{FF2B5EF4-FFF2-40B4-BE49-F238E27FC236}">
-                <a16:creationId xmlns:a16="http://schemas.microsoft.com/office/drawing/2014/main" id="{14900FDC-050B-4E86-A92D-38853B8B25D3}"/>
+                <a16:creationId xmlns:a16="http://schemas.microsoft.com/office/drawing/2014/main" id="{F32D18BC-CE1E-4D6D-8113-7AC0E2D422D8}"/>
               </a:ext>
             </a:extLst>
           </p:cNvPr>
@@ -31480,7 +31480,7 @@
           <p:cNvPr id="3" name="">
             <a:extLst xmlns:a="http://schemas.openxmlformats.org/drawingml/2006/main">
               <a:ext uri="{FF2B5EF4-FFF2-40B4-BE49-F238E27FC236}">
-                <a16:creationId xmlns:a16="http://schemas.microsoft.com/office/drawing/2014/main" id="{9FE8D712-4C6B-41C0-8BFA-A5CF054E1626}"/>
+                <a16:creationId xmlns:a16="http://schemas.microsoft.com/office/drawing/2014/main" id="{3712D0B8-2052-463B-8DB3-F9FEC3EADE8D}"/>
               </a:ext>
             </a:extLst>
           </p:cNvPr>
@@ -31542,7 +31542,7 @@
           <p:cNvPr id="4" name="">
             <a:extLst xmlns:a="http://schemas.openxmlformats.org/drawingml/2006/main">
               <a:ext uri="{FF2B5EF4-FFF2-40B4-BE49-F238E27FC236}">
-                <a16:creationId xmlns:a16="http://schemas.microsoft.com/office/drawing/2014/main" id="{E0D3C903-519A-4E0E-A9B0-AF9BC2625E49}"/>
+                <a16:creationId xmlns:a16="http://schemas.microsoft.com/office/drawing/2014/main" id="{37866DFC-06FA-4A76-ADA5-B05B2758E492}"/>
               </a:ext>
             </a:extLst>
           </p:cNvPr>
@@ -31604,7 +31604,7 @@
           <p:cNvPr id="5" name="">
             <a:extLst xmlns:a="http://schemas.openxmlformats.org/drawingml/2006/main">
               <a:ext uri="{FF2B5EF4-FFF2-40B4-BE49-F238E27FC236}">
-                <a16:creationId xmlns:a16="http://schemas.microsoft.com/office/drawing/2014/main" id="{522EA0BB-F0AD-4489-AED7-01FC7A809042}"/>
+                <a16:creationId xmlns:a16="http://schemas.microsoft.com/office/drawing/2014/main" id="{04F523C4-05B8-404D-BBF7-F71D839D0C47}"/>
               </a:ext>
             </a:extLst>
           </p:cNvPr>
@@ -31637,7 +31637,7 @@
           <p:cNvPr id="6" name="">
             <a:extLst xmlns:a="http://schemas.openxmlformats.org/drawingml/2006/main">
               <a:ext uri="{FF2B5EF4-FFF2-40B4-BE49-F238E27FC236}">
-                <a16:creationId xmlns:a16="http://schemas.microsoft.com/office/drawing/2014/main" id="{94774813-C68D-40F2-84B6-F7F1698CF850}"/>
+                <a16:creationId xmlns:a16="http://schemas.microsoft.com/office/drawing/2014/main" id="{A8F827C6-A0F0-44BC-B8D5-F3DFAE5A54D6}"/>
               </a:ext>
             </a:extLst>
           </p:cNvPr>
@@ -31699,7 +31699,7 @@
           <p:cNvPr id="7" name="">
             <a:extLst xmlns:a="http://schemas.openxmlformats.org/drawingml/2006/main">
               <a:ext uri="{FF2B5EF4-FFF2-40B4-BE49-F238E27FC236}">
-                <a16:creationId xmlns:a16="http://schemas.microsoft.com/office/drawing/2014/main" id="{6E992358-69BF-4486-93F9-385327473353}"/>
+                <a16:creationId xmlns:a16="http://schemas.microsoft.com/office/drawing/2014/main" id="{C74AFC16-A837-4DF1-83EE-046F3D052447}"/>
               </a:ext>
             </a:extLst>
           </p:cNvPr>
@@ -31761,7 +31761,7 @@
           <p:cNvPr id="8" name="">
             <a:extLst xmlns:a="http://schemas.openxmlformats.org/drawingml/2006/main">
               <a:ext uri="{FF2B5EF4-FFF2-40B4-BE49-F238E27FC236}">
-                <a16:creationId xmlns:a16="http://schemas.microsoft.com/office/drawing/2014/main" id="{FF3BFE05-44BF-404C-BFD3-C3093AC17C2A}"/>
+                <a16:creationId xmlns:a16="http://schemas.microsoft.com/office/drawing/2014/main" id="{8DB83747-D4B6-4ED4-AE75-CE9629E2D539}"/>
               </a:ext>
             </a:extLst>
           </p:cNvPr>
@@ -31796,7 +31796,7 @@
           <p:cNvPr id="9" name="">
             <a:extLst xmlns:a="http://schemas.openxmlformats.org/drawingml/2006/main">
               <a:ext uri="{FF2B5EF4-FFF2-40B4-BE49-F238E27FC236}">
-                <a16:creationId xmlns:a16="http://schemas.microsoft.com/office/drawing/2014/main" id="{C1B6EA79-EFE3-42AB-BB05-4FBA5986EE36}"/>
+                <a16:creationId xmlns:a16="http://schemas.microsoft.com/office/drawing/2014/main" id="{CE869C2E-DCB6-4DB4-9120-B23EF3C6F094}"/>
               </a:ext>
             </a:extLst>
           </p:cNvPr>
@@ -31858,7 +31858,7 @@
           <p:cNvPr id="10" name="">
             <a:extLst xmlns:a="http://schemas.openxmlformats.org/drawingml/2006/main">
               <a:ext uri="{FF2B5EF4-FFF2-40B4-BE49-F238E27FC236}">
-                <a16:creationId xmlns:a16="http://schemas.microsoft.com/office/drawing/2014/main" id="{5DB70141-2AF1-4093-A208-D9CC88B09079}"/>
+                <a16:creationId xmlns:a16="http://schemas.microsoft.com/office/drawing/2014/main" id="{3251574C-C6C5-456B-AB7C-AFC5D42DFB2A}"/>
               </a:ext>
             </a:extLst>
           </p:cNvPr>
@@ -31893,7 +31893,7 @@
           <p:cNvPr id="11" name="">
             <a:extLst xmlns:a="http://schemas.openxmlformats.org/drawingml/2006/main">
               <a:ext uri="{FF2B5EF4-FFF2-40B4-BE49-F238E27FC236}">
-                <a16:creationId xmlns:a16="http://schemas.microsoft.com/office/drawing/2014/main" id="{011916CC-E3E3-4471-AB59-D13D02C1522E}"/>
+                <a16:creationId xmlns:a16="http://schemas.microsoft.com/office/drawing/2014/main" id="{CF9469EF-31D2-49EF-A7B8-E2B727DD7B1D}"/>
               </a:ext>
             </a:extLst>
           </p:cNvPr>
@@ -31955,7 +31955,7 @@
           <p:cNvPr id="12" name="">
             <a:extLst xmlns:a="http://schemas.openxmlformats.org/drawingml/2006/main">
               <a:ext uri="{FF2B5EF4-FFF2-40B4-BE49-F238E27FC236}">
-                <a16:creationId xmlns:a16="http://schemas.microsoft.com/office/drawing/2014/main" id="{84CF6CF0-DC55-4803-B16A-B2F7F7BDAA98}"/>
+                <a16:creationId xmlns:a16="http://schemas.microsoft.com/office/drawing/2014/main" id="{438ABE21-8001-42C5-9D9C-53B62908770C}"/>
               </a:ext>
             </a:extLst>
           </p:cNvPr>
@@ -31996,7 +31996,7 @@
           <p:cNvPr id="13" name="">
             <a:extLst xmlns:a="http://schemas.openxmlformats.org/drawingml/2006/main">
               <a:ext uri="{FF2B5EF4-FFF2-40B4-BE49-F238E27FC236}">
-                <a16:creationId xmlns:a16="http://schemas.microsoft.com/office/drawing/2014/main" id="{368CC3F4-410B-4EB0-88F8-20A556D329B6}"/>
+                <a16:creationId xmlns:a16="http://schemas.microsoft.com/office/drawing/2014/main" id="{ED927AE7-ECAC-42A9-AFD2-E0584F242BC7}"/>
               </a:ext>
             </a:extLst>
           </p:cNvPr>
@@ -32058,7 +32058,7 @@
           <p:cNvPr id="14" name="">
             <a:extLst xmlns:a="http://schemas.openxmlformats.org/drawingml/2006/main">
               <a:ext uri="{FF2B5EF4-FFF2-40B4-BE49-F238E27FC236}">
-                <a16:creationId xmlns:a16="http://schemas.microsoft.com/office/drawing/2014/main" id="{5CFC835A-1F52-4647-889A-C6AA2FB3BB6E}"/>
+                <a16:creationId xmlns:a16="http://schemas.microsoft.com/office/drawing/2014/main" id="{C808C492-5C75-469C-BD83-732E4FF232FF}"/>
               </a:ext>
             </a:extLst>
           </p:cNvPr>
@@ -32120,7 +32120,7 @@
           <p:cNvPr id="15" name="">
             <a:extLst xmlns:a="http://schemas.openxmlformats.org/drawingml/2006/main">
               <a:ext uri="{FF2B5EF4-FFF2-40B4-BE49-F238E27FC236}">
-                <a16:creationId xmlns:a16="http://schemas.microsoft.com/office/drawing/2014/main" id="{5E68B8C5-F375-4BF2-A558-B07EB3407E9C}"/>
+                <a16:creationId xmlns:a16="http://schemas.microsoft.com/office/drawing/2014/main" id="{0D854BBB-B5E4-431D-828D-B22CCBD37A3C}"/>
               </a:ext>
             </a:extLst>
           </p:cNvPr>
@@ -32161,7 +32161,7 @@
           <p:cNvPr id="16" name="">
             <a:extLst xmlns:a="http://schemas.openxmlformats.org/drawingml/2006/main">
               <a:ext uri="{FF2B5EF4-FFF2-40B4-BE49-F238E27FC236}">
-                <a16:creationId xmlns:a16="http://schemas.microsoft.com/office/drawing/2014/main" id="{A085607E-8F67-4173-BC3D-0F1620FC4FF2}"/>
+                <a16:creationId xmlns:a16="http://schemas.microsoft.com/office/drawing/2014/main" id="{2284ED12-1180-45EE-9F0E-FF5877FECDD7}"/>
               </a:ext>
             </a:extLst>
           </p:cNvPr>
@@ -32223,7 +32223,7 @@
           <p:cNvPr id="17" name="">
             <a:extLst xmlns:a="http://schemas.openxmlformats.org/drawingml/2006/main">
               <a:ext uri="{FF2B5EF4-FFF2-40B4-BE49-F238E27FC236}">
-                <a16:creationId xmlns:a16="http://schemas.microsoft.com/office/drawing/2014/main" id="{B8EBA0F3-1B26-4B2A-A3B4-67E79E7D14CA}"/>
+                <a16:creationId xmlns:a16="http://schemas.microsoft.com/office/drawing/2014/main" id="{21546C82-0C1D-477E-8961-2AAB5D847049}"/>
               </a:ext>
             </a:extLst>
           </p:cNvPr>
@@ -32285,7 +32285,7 @@
           <p:cNvPr id="18" name="">
             <a:extLst xmlns:a="http://schemas.openxmlformats.org/drawingml/2006/main">
               <a:ext uri="{FF2B5EF4-FFF2-40B4-BE49-F238E27FC236}">
-                <a16:creationId xmlns:a16="http://schemas.microsoft.com/office/drawing/2014/main" id="{212E1E05-EA21-4D80-AE94-8CFEEE1935D5}"/>
+                <a16:creationId xmlns:a16="http://schemas.microsoft.com/office/drawing/2014/main" id="{B15DBA91-829E-4034-8510-A2A47137C603}"/>
               </a:ext>
             </a:extLst>
           </p:cNvPr>
@@ -32326,7 +32326,7 @@
           <p:cNvPr id="19" name="">
             <a:extLst xmlns:a="http://schemas.openxmlformats.org/drawingml/2006/main">
               <a:ext uri="{FF2B5EF4-FFF2-40B4-BE49-F238E27FC236}">
-                <a16:creationId xmlns:a16="http://schemas.microsoft.com/office/drawing/2014/main" id="{F813B200-465B-4437-9312-BF86337A776A}"/>
+                <a16:creationId xmlns:a16="http://schemas.microsoft.com/office/drawing/2014/main" id="{043E8A5D-FC49-40D1-8668-CA05BD6B72F3}"/>
               </a:ext>
             </a:extLst>
           </p:cNvPr>
@@ -32388,7 +32388,7 @@
           <p:cNvPr id="20" name="">
             <a:extLst xmlns:a="http://schemas.openxmlformats.org/drawingml/2006/main">
               <a:ext uri="{FF2B5EF4-FFF2-40B4-BE49-F238E27FC236}">
-                <a16:creationId xmlns:a16="http://schemas.microsoft.com/office/drawing/2014/main" id="{6915F1EC-BB32-4759-B0C2-405DDDA51C5A}"/>
+                <a16:creationId xmlns:a16="http://schemas.microsoft.com/office/drawing/2014/main" id="{5B7FDF1A-C75F-47CC-91D2-9881B2E293CA}"/>
               </a:ext>
             </a:extLst>
           </p:cNvPr>
@@ -32450,7 +32450,7 @@
           <p:cNvPr id="21" name="">
             <a:extLst xmlns:a="http://schemas.openxmlformats.org/drawingml/2006/main">
               <a:ext uri="{FF2B5EF4-FFF2-40B4-BE49-F238E27FC236}">
-                <a16:creationId xmlns:a16="http://schemas.microsoft.com/office/drawing/2014/main" id="{634E933E-C24C-42DF-807A-85DC5DADA651}"/>
+                <a16:creationId xmlns:a16="http://schemas.microsoft.com/office/drawing/2014/main" id="{51803D00-6261-45A3-8ECD-6E7B2771991D}"/>
               </a:ext>
             </a:extLst>
           </p:cNvPr>
@@ -32491,7 +32491,7 @@
           <p:cNvPr id="22" name="">
             <a:extLst xmlns:a="http://schemas.openxmlformats.org/drawingml/2006/main">
               <a:ext uri="{FF2B5EF4-FFF2-40B4-BE49-F238E27FC236}">
-                <a16:creationId xmlns:a16="http://schemas.microsoft.com/office/drawing/2014/main" id="{444ADAF9-50E4-4B8F-9EE6-E0E4D8C95B6D}"/>
+                <a16:creationId xmlns:a16="http://schemas.microsoft.com/office/drawing/2014/main" id="{E1C7AC22-9783-4DE3-8D65-23F98BAD3ABA}"/>
               </a:ext>
             </a:extLst>
           </p:cNvPr>
@@ -32553,7 +32553,7 @@
           <p:cNvPr id="23" name="">
             <a:extLst xmlns:a="http://schemas.openxmlformats.org/drawingml/2006/main">
               <a:ext uri="{FF2B5EF4-FFF2-40B4-BE49-F238E27FC236}">
-                <a16:creationId xmlns:a16="http://schemas.microsoft.com/office/drawing/2014/main" id="{0192C1CF-44D4-4383-A992-3BBB68FC957D}"/>
+                <a16:creationId xmlns:a16="http://schemas.microsoft.com/office/drawing/2014/main" id="{0F00E6E2-6CC8-4CED-939A-A5E934048141}"/>
               </a:ext>
             </a:extLst>
           </p:cNvPr>
@@ -32719,7 +32719,7 @@
           <p:cNvPr id="28" name="">
             <a:extLst xmlns:a="http://schemas.openxmlformats.org/drawingml/2006/main">
               <a:ext uri="{FF2B5EF4-FFF2-40B4-BE49-F238E27FC236}">
-                <a16:creationId xmlns:a16="http://schemas.microsoft.com/office/drawing/2014/main" id="{33F996E7-44D1-472B-A9FB-5CCC2EA9B92C}"/>
+                <a16:creationId xmlns:a16="http://schemas.microsoft.com/office/drawing/2014/main" id="{DC2D764C-3B08-4C7A-856D-8FA8998A4725}"/>
               </a:ext>
             </a:extLst>
           </p:cNvPr>
@@ -32781,7 +32781,7 @@
           <p:cNvPr id="29" name="">
             <a:extLst xmlns:a="http://schemas.openxmlformats.org/drawingml/2006/main">
               <a:ext uri="{FF2B5EF4-FFF2-40B4-BE49-F238E27FC236}">
-                <a16:creationId xmlns:a16="http://schemas.microsoft.com/office/drawing/2014/main" id="{B4979857-C199-44CD-8183-2FCC8F378EF1}"/>
+                <a16:creationId xmlns:a16="http://schemas.microsoft.com/office/drawing/2014/main" id="{2C7FEB36-69CE-419D-A2E4-4DD42B1F3EA3}"/>
               </a:ext>
             </a:extLst>
           </p:cNvPr>
@@ -32843,7 +32843,7 @@
           <p:cNvPr id="30" name="">
             <a:extLst xmlns:a="http://schemas.openxmlformats.org/drawingml/2006/main">
               <a:ext uri="{FF2B5EF4-FFF2-40B4-BE49-F238E27FC236}">
-                <a16:creationId xmlns:a16="http://schemas.microsoft.com/office/drawing/2014/main" id="{863D700A-13C7-4AAB-A9D0-F20BC11C578B}"/>
+                <a16:creationId xmlns:a16="http://schemas.microsoft.com/office/drawing/2014/main" id="{0F1ABADD-4D16-4D16-8418-A4336C8594AB}"/>
               </a:ext>
             </a:extLst>
           </p:cNvPr>
@@ -32884,7 +32884,7 @@
           <p:cNvPr id="31" name="">
             <a:extLst xmlns:a="http://schemas.openxmlformats.org/drawingml/2006/main">
               <a:ext uri="{FF2B5EF4-FFF2-40B4-BE49-F238E27FC236}">
-                <a16:creationId xmlns:a16="http://schemas.microsoft.com/office/drawing/2014/main" id="{76CA4E71-CD07-4BEA-8BE7-E532918C48D8}"/>
+                <a16:creationId xmlns:a16="http://schemas.microsoft.com/office/drawing/2014/main" id="{4EE61EF2-FD18-4C50-A49F-E26F49A76819}"/>
               </a:ext>
             </a:extLst>
           </p:cNvPr>
@@ -32917,7 +32917,7 @@
           <p:cNvPr id="32" name="">
             <a:extLst xmlns:a="http://schemas.openxmlformats.org/drawingml/2006/main">
               <a:ext uri="{FF2B5EF4-FFF2-40B4-BE49-F238E27FC236}">
-                <a16:creationId xmlns:a16="http://schemas.microsoft.com/office/drawing/2014/main" id="{8488B25B-9085-4529-B0F4-9E5EC5349E45}"/>
+                <a16:creationId xmlns:a16="http://schemas.microsoft.com/office/drawing/2014/main" id="{313B197B-B8CF-4467-A5A5-8120F18C9C09}"/>
               </a:ext>
             </a:extLst>
           </p:cNvPr>
@@ -32979,7 +32979,7 @@
           <p:cNvPr id="33" name="">
             <a:extLst xmlns:a="http://schemas.openxmlformats.org/drawingml/2006/main">
               <a:ext uri="{FF2B5EF4-FFF2-40B4-BE49-F238E27FC236}">
-                <a16:creationId xmlns:a16="http://schemas.microsoft.com/office/drawing/2014/main" id="{8429BFFB-8497-43D8-817F-3582991AC910}"/>
+                <a16:creationId xmlns:a16="http://schemas.microsoft.com/office/drawing/2014/main" id="{F379BC17-6790-4BBC-B796-4EB38DD4F3CC}"/>
               </a:ext>
             </a:extLst>
           </p:cNvPr>
@@ -33122,7 +33122,7 @@
           <p:cNvPr id="34" name="">
             <a:extLst xmlns:a="http://schemas.openxmlformats.org/drawingml/2006/main">
               <a:ext uri="{FF2B5EF4-FFF2-40B4-BE49-F238E27FC236}">
-                <a16:creationId xmlns:a16="http://schemas.microsoft.com/office/drawing/2014/main" id="{BF9845C4-9B7B-472C-9719-4ADACB933CEC}"/>
+                <a16:creationId xmlns:a16="http://schemas.microsoft.com/office/drawing/2014/main" id="{BBB2112C-7FB4-4425-A1DC-D8A61D417F2F}"/>
               </a:ext>
             </a:extLst>
           </p:cNvPr>
@@ -33157,7 +33157,7 @@
           <p:cNvPr id="35" name="">
             <a:extLst xmlns:a="http://schemas.openxmlformats.org/drawingml/2006/main">
               <a:ext uri="{FF2B5EF4-FFF2-40B4-BE49-F238E27FC236}">
-                <a16:creationId xmlns:a16="http://schemas.microsoft.com/office/drawing/2014/main" id="{230A8EB8-1293-4C93-BC62-61D12BE1179E}"/>
+                <a16:creationId xmlns:a16="http://schemas.microsoft.com/office/drawing/2014/main" id="{214B3125-3C65-490E-9740-78E5FF0CEEB7}"/>
               </a:ext>
             </a:extLst>
           </p:cNvPr>
@@ -33219,7 +33219,7 @@
           <p:cNvPr id="36" name="">
             <a:extLst xmlns:a="http://schemas.openxmlformats.org/drawingml/2006/main">
               <a:ext uri="{FF2B5EF4-FFF2-40B4-BE49-F238E27FC236}">
-                <a16:creationId xmlns:a16="http://schemas.microsoft.com/office/drawing/2014/main" id="{32E4FFCE-7533-49ED-BBC9-65D4CB1AC473}"/>
+                <a16:creationId xmlns:a16="http://schemas.microsoft.com/office/drawing/2014/main" id="{14D93013-5A58-43D6-B5E0-A7BFFD5274AE}"/>
               </a:ext>
             </a:extLst>
           </p:cNvPr>
@@ -33254,7 +33254,7 @@
           <p:cNvPr id="37" name="">
             <a:extLst xmlns:a="http://schemas.openxmlformats.org/drawingml/2006/main">
               <a:ext uri="{FF2B5EF4-FFF2-40B4-BE49-F238E27FC236}">
-                <a16:creationId xmlns:a16="http://schemas.microsoft.com/office/drawing/2014/main" id="{E3975091-F018-4BE7-8EEF-9C7CC50997DF}"/>
+                <a16:creationId xmlns:a16="http://schemas.microsoft.com/office/drawing/2014/main" id="{AF1560B3-D253-4185-B402-FEE9E47CAC47}"/>
               </a:ext>
             </a:extLst>
           </p:cNvPr>
@@ -33314,7 +33314,7 @@
     </p:spTree>
     <p:extLst>
       <p:ext uri="{BB962C8B-B14F-4D97-AF65-F5344CB8AC3E}">
-        <p14:creationId xmlns:p14="http://schemas.microsoft.com/office/powerpoint/2010/main" val="1324434200"/>
+        <p14:creationId xmlns:p14="http://schemas.microsoft.com/office/powerpoint/2010/main" val="1301582309"/>
       </p:ext>
     </p:extLst>
   </p:cSld>
@@ -33345,7 +33345,7 @@
           <p:cNvPr id="70" name="">
             <a:extLst xmlns:a="http://schemas.openxmlformats.org/drawingml/2006/main">
               <a:ext uri="{FF2B5EF4-FFF2-40B4-BE49-F238E27FC236}">
-                <a16:creationId xmlns:a16="http://schemas.microsoft.com/office/drawing/2014/main" id="{4E212821-F08F-49F7-A5B4-E7D7EB31E342}"/>
+                <a16:creationId xmlns:a16="http://schemas.microsoft.com/office/drawing/2014/main" id="{0A96BF33-7DC7-4D3D-86A8-8CC55B4D004B}"/>
               </a:ext>
             </a:extLst>
           </p:cNvPr>
@@ -33378,7 +33378,7 @@
           <p:cNvPr id="2" name="">
             <a:extLst xmlns:a="http://schemas.openxmlformats.org/drawingml/2006/main">
               <a:ext uri="{FF2B5EF4-FFF2-40B4-BE49-F238E27FC236}">
-                <a16:creationId xmlns:a16="http://schemas.microsoft.com/office/drawing/2014/main" id="{7D3A67CF-71E8-44FB-B38A-897DB53CDE60}"/>
+                <a16:creationId xmlns:a16="http://schemas.microsoft.com/office/drawing/2014/main" id="{BE2852C6-BBA9-4A1B-A0B7-81A7E81022BB}"/>
               </a:ext>
             </a:extLst>
           </p:cNvPr>
@@ -33440,7 +33440,7 @@
           <p:cNvPr id="3" name="">
             <a:extLst xmlns:a="http://schemas.openxmlformats.org/drawingml/2006/main">
               <a:ext uri="{FF2B5EF4-FFF2-40B4-BE49-F238E27FC236}">
-                <a16:creationId xmlns:a16="http://schemas.microsoft.com/office/drawing/2014/main" id="{D1DE8011-258D-42C7-9A0A-F7725D24B6FD}"/>
+                <a16:creationId xmlns:a16="http://schemas.microsoft.com/office/drawing/2014/main" id="{393E1230-955C-4D9B-A2AA-AAB9B72B722F}"/>
               </a:ext>
             </a:extLst>
           </p:cNvPr>
@@ -33502,7 +33502,7 @@
           <p:cNvPr id="4" name="">
             <a:extLst xmlns:a="http://schemas.openxmlformats.org/drawingml/2006/main">
               <a:ext uri="{FF2B5EF4-FFF2-40B4-BE49-F238E27FC236}">
-                <a16:creationId xmlns:a16="http://schemas.microsoft.com/office/drawing/2014/main" id="{0365BEB7-BF1E-4346-ADDE-D54A9E163002}"/>
+                <a16:creationId xmlns:a16="http://schemas.microsoft.com/office/drawing/2014/main" id="{26459C21-EA71-4478-81AB-AA54FD845D0F}"/>
               </a:ext>
             </a:extLst>
           </p:cNvPr>
@@ -33535,7 +33535,7 @@
           <p:cNvPr id="5" name="">
             <a:extLst xmlns:a="http://schemas.openxmlformats.org/drawingml/2006/main">
               <a:ext uri="{FF2B5EF4-FFF2-40B4-BE49-F238E27FC236}">
-                <a16:creationId xmlns:a16="http://schemas.microsoft.com/office/drawing/2014/main" id="{704064BE-A029-4A0D-B807-3A325FE45EF4}"/>
+                <a16:creationId xmlns:a16="http://schemas.microsoft.com/office/drawing/2014/main" id="{0541BC60-14E8-4F19-A36E-DAC31C1B0445}"/>
               </a:ext>
             </a:extLst>
           </p:cNvPr>
@@ -33597,7 +33597,7 @@
           <p:cNvPr id="6" name="">
             <a:extLst xmlns:a="http://schemas.openxmlformats.org/drawingml/2006/main">
               <a:ext uri="{FF2B5EF4-FFF2-40B4-BE49-F238E27FC236}">
-                <a16:creationId xmlns:a16="http://schemas.microsoft.com/office/drawing/2014/main" id="{7F1B7CC1-6E07-4E6E-9D12-2475B7AA260A}"/>
+                <a16:creationId xmlns:a16="http://schemas.microsoft.com/office/drawing/2014/main" id="{6BCD18EA-E928-427B-959E-C981B6FD3053}"/>
               </a:ext>
             </a:extLst>
           </p:cNvPr>
@@ -33659,7 +33659,7 @@
           <p:cNvPr id="7" name="">
             <a:extLst xmlns:a="http://schemas.openxmlformats.org/drawingml/2006/main">
               <a:ext uri="{FF2B5EF4-FFF2-40B4-BE49-F238E27FC236}">
-                <a16:creationId xmlns:a16="http://schemas.microsoft.com/office/drawing/2014/main" id="{F920B758-AA9F-46C7-9032-57277D872CE8}"/>
+                <a16:creationId xmlns:a16="http://schemas.microsoft.com/office/drawing/2014/main" id="{88F4464A-4F71-46F1-AADC-F3B69D8F7D30}"/>
               </a:ext>
             </a:extLst>
           </p:cNvPr>
@@ -33692,7 +33692,7 @@
           <p:cNvPr id="8" name="">
             <a:extLst xmlns:a="http://schemas.openxmlformats.org/drawingml/2006/main">
               <a:ext uri="{FF2B5EF4-FFF2-40B4-BE49-F238E27FC236}">
-                <a16:creationId xmlns:a16="http://schemas.microsoft.com/office/drawing/2014/main" id="{73149EFD-C0BB-4B25-9FAA-77B88B2D3D9B}"/>
+                <a16:creationId xmlns:a16="http://schemas.microsoft.com/office/drawing/2014/main" id="{CBB9DFCF-F794-4BCC-AD71-0EC8EA3AEC36}"/>
               </a:ext>
             </a:extLst>
           </p:cNvPr>
@@ -33754,7 +33754,7 @@
           <p:cNvPr id="9" name="">
             <a:extLst xmlns:a="http://schemas.openxmlformats.org/drawingml/2006/main">
               <a:ext uri="{FF2B5EF4-FFF2-40B4-BE49-F238E27FC236}">
-                <a16:creationId xmlns:a16="http://schemas.microsoft.com/office/drawing/2014/main" id="{57435352-77CC-426B-9D61-0D81351F9F71}"/>
+                <a16:creationId xmlns:a16="http://schemas.microsoft.com/office/drawing/2014/main" id="{BA21852F-4A45-4A56-9240-45BD1CD6F9A9}"/>
               </a:ext>
             </a:extLst>
           </p:cNvPr>
@@ -33787,7 +33787,7 @@
           <p:cNvPr id="10" name="">
             <a:extLst xmlns:a="http://schemas.openxmlformats.org/drawingml/2006/main">
               <a:ext uri="{FF2B5EF4-FFF2-40B4-BE49-F238E27FC236}">
-                <a16:creationId xmlns:a16="http://schemas.microsoft.com/office/drawing/2014/main" id="{2B4F2C8B-77FC-4AE0-BB93-01295A0AEE30}"/>
+                <a16:creationId xmlns:a16="http://schemas.microsoft.com/office/drawing/2014/main" id="{02798809-11AB-42D0-8888-5ED101AD57A2}"/>
               </a:ext>
             </a:extLst>
           </p:cNvPr>
@@ -33849,7 +33849,7 @@
           <p:cNvPr id="11" name="">
             <a:extLst xmlns:a="http://schemas.openxmlformats.org/drawingml/2006/main">
               <a:ext uri="{FF2B5EF4-FFF2-40B4-BE49-F238E27FC236}">
-                <a16:creationId xmlns:a16="http://schemas.microsoft.com/office/drawing/2014/main" id="{DCAC6BC7-8333-4008-931B-EFDCEBE110D6}"/>
+                <a16:creationId xmlns:a16="http://schemas.microsoft.com/office/drawing/2014/main" id="{A8EA3F37-3CE5-469D-8093-F1544C82ECD1}"/>
               </a:ext>
             </a:extLst>
           </p:cNvPr>
@@ -33882,7 +33882,7 @@
           <p:cNvPr id="12" name="">
             <a:extLst xmlns:a="http://schemas.openxmlformats.org/drawingml/2006/main">
               <a:ext uri="{FF2B5EF4-FFF2-40B4-BE49-F238E27FC236}">
-                <a16:creationId xmlns:a16="http://schemas.microsoft.com/office/drawing/2014/main" id="{9F8019A0-0280-4B36-970D-BCC9789A2F3B}"/>
+                <a16:creationId xmlns:a16="http://schemas.microsoft.com/office/drawing/2014/main" id="{E72810F9-2D78-4183-8B23-378CD22603CF}"/>
               </a:ext>
             </a:extLst>
           </p:cNvPr>
@@ -33944,7 +33944,7 @@
           <p:cNvPr id="13" name="">
             <a:extLst xmlns:a="http://schemas.openxmlformats.org/drawingml/2006/main">
               <a:ext uri="{FF2B5EF4-FFF2-40B4-BE49-F238E27FC236}">
-                <a16:creationId xmlns:a16="http://schemas.microsoft.com/office/drawing/2014/main" id="{95CDC9E6-4DB2-43A0-BE59-D6C983E5C640}"/>
+                <a16:creationId xmlns:a16="http://schemas.microsoft.com/office/drawing/2014/main" id="{B2427FC6-C8A7-493C-B2B9-47F1554D2433}"/>
               </a:ext>
             </a:extLst>
           </p:cNvPr>
@@ -33977,7 +33977,7 @@
           <p:cNvPr id="14" name="">
             <a:extLst xmlns:a="http://schemas.openxmlformats.org/drawingml/2006/main">
               <a:ext uri="{FF2B5EF4-FFF2-40B4-BE49-F238E27FC236}">
-                <a16:creationId xmlns:a16="http://schemas.microsoft.com/office/drawing/2014/main" id="{6AF657F1-C907-406B-9DA7-099E03D29A4B}"/>
+                <a16:creationId xmlns:a16="http://schemas.microsoft.com/office/drawing/2014/main" id="{4BA38B35-9930-49DC-8A2D-018D65AFD96B}"/>
               </a:ext>
             </a:extLst>
           </p:cNvPr>
@@ -34039,7 +34039,7 @@
           <p:cNvPr id="15" name="">
             <a:extLst xmlns:a="http://schemas.openxmlformats.org/drawingml/2006/main">
               <a:ext uri="{FF2B5EF4-FFF2-40B4-BE49-F238E27FC236}">
-                <a16:creationId xmlns:a16="http://schemas.microsoft.com/office/drawing/2014/main" id="{9D5D0D57-91B3-4F6E-A2A0-F3B4C3137025}"/>
+                <a16:creationId xmlns:a16="http://schemas.microsoft.com/office/drawing/2014/main" id="{F3751CFA-9AE2-4670-BD29-A217FC3E7A1D}"/>
               </a:ext>
             </a:extLst>
           </p:cNvPr>
@@ -34072,7 +34072,7 @@
           <p:cNvPr id="16" name="">
             <a:extLst xmlns:a="http://schemas.openxmlformats.org/drawingml/2006/main">
               <a:ext uri="{FF2B5EF4-FFF2-40B4-BE49-F238E27FC236}">
-                <a16:creationId xmlns:a16="http://schemas.microsoft.com/office/drawing/2014/main" id="{264C6F7A-04E1-4F73-BF71-849F6D566840}"/>
+                <a16:creationId xmlns:a16="http://schemas.microsoft.com/office/drawing/2014/main" id="{9F5A5B57-DFD3-4975-A771-FDEA2B0A1504}"/>
               </a:ext>
             </a:extLst>
           </p:cNvPr>
@@ -34134,7 +34134,7 @@
           <p:cNvPr id="17" name="">
             <a:extLst xmlns:a="http://schemas.openxmlformats.org/drawingml/2006/main">
               <a:ext uri="{FF2B5EF4-FFF2-40B4-BE49-F238E27FC236}">
-                <a16:creationId xmlns:a16="http://schemas.microsoft.com/office/drawing/2014/main" id="{C8D3861A-B4C1-4A1B-9998-931C464EDD89}"/>
+                <a16:creationId xmlns:a16="http://schemas.microsoft.com/office/drawing/2014/main" id="{B1953CBD-DEFF-4E7F-BB32-12012BA43749}"/>
               </a:ext>
             </a:extLst>
           </p:cNvPr>
@@ -34167,7 +34167,7 @@
           <p:cNvPr id="18" name="">
             <a:extLst xmlns:a="http://schemas.openxmlformats.org/drawingml/2006/main">
               <a:ext uri="{FF2B5EF4-FFF2-40B4-BE49-F238E27FC236}">
-                <a16:creationId xmlns:a16="http://schemas.microsoft.com/office/drawing/2014/main" id="{D67CDA00-DE3E-4902-B75E-5D6CC56F924C}"/>
+                <a16:creationId xmlns:a16="http://schemas.microsoft.com/office/drawing/2014/main" id="{BBA14499-5530-43F3-841F-4BAF6F05DEBC}"/>
               </a:ext>
             </a:extLst>
           </p:cNvPr>
@@ -34229,7 +34229,7 @@
           <p:cNvPr id="19" name="">
             <a:extLst xmlns:a="http://schemas.openxmlformats.org/drawingml/2006/main">
               <a:ext uri="{FF2B5EF4-FFF2-40B4-BE49-F238E27FC236}">
-                <a16:creationId xmlns:a16="http://schemas.microsoft.com/office/drawing/2014/main" id="{B971E719-388D-4B33-8D94-1753B76EBAB0}"/>
+                <a16:creationId xmlns:a16="http://schemas.microsoft.com/office/drawing/2014/main" id="{91BF5370-BCF2-441E-AB08-4CF75569D3E7}"/>
               </a:ext>
             </a:extLst>
           </p:cNvPr>
@@ -34262,7 +34262,7 @@
           <p:cNvPr id="20" name="">
             <a:extLst xmlns:a="http://schemas.openxmlformats.org/drawingml/2006/main">
               <a:ext uri="{FF2B5EF4-FFF2-40B4-BE49-F238E27FC236}">
-                <a16:creationId xmlns:a16="http://schemas.microsoft.com/office/drawing/2014/main" id="{1B1FF479-F6E5-437D-AC2F-223653837A64}"/>
+                <a16:creationId xmlns:a16="http://schemas.microsoft.com/office/drawing/2014/main" id="{74A7F414-E58F-43E7-AE3C-7BD09537E557}"/>
               </a:ext>
             </a:extLst>
           </p:cNvPr>
@@ -34324,7 +34324,7 @@
           <p:cNvPr id="21" name="">
             <a:extLst xmlns:a="http://schemas.openxmlformats.org/drawingml/2006/main">
               <a:ext uri="{FF2B5EF4-FFF2-40B4-BE49-F238E27FC236}">
-                <a16:creationId xmlns:a16="http://schemas.microsoft.com/office/drawing/2014/main" id="{A361B385-147F-4624-91B0-C17255E397F3}"/>
+                <a16:creationId xmlns:a16="http://schemas.microsoft.com/office/drawing/2014/main" id="{B14BC61F-E19E-4C2B-887C-6811293FD5CC}"/>
               </a:ext>
             </a:extLst>
           </p:cNvPr>
@@ -34357,7 +34357,7 @@
           <p:cNvPr id="22" name="">
             <a:extLst xmlns:a="http://schemas.openxmlformats.org/drawingml/2006/main">
               <a:ext uri="{FF2B5EF4-FFF2-40B4-BE49-F238E27FC236}">
-                <a16:creationId xmlns:a16="http://schemas.microsoft.com/office/drawing/2014/main" id="{C30E31DA-6FD5-4D48-B8BE-F24685D79D77}"/>
+                <a16:creationId xmlns:a16="http://schemas.microsoft.com/office/drawing/2014/main" id="{E4BC9FDD-EC1D-47B9-B4B1-8F1E9C015C0A}"/>
               </a:ext>
             </a:extLst>
           </p:cNvPr>
@@ -34419,7 +34419,7 @@
           <p:cNvPr id="23" name="">
             <a:extLst xmlns:a="http://schemas.openxmlformats.org/drawingml/2006/main">
               <a:ext uri="{FF2B5EF4-FFF2-40B4-BE49-F238E27FC236}">
-                <a16:creationId xmlns:a16="http://schemas.microsoft.com/office/drawing/2014/main" id="{1E24976D-FF5C-4126-B4DF-1F19308C27B7}"/>
+                <a16:creationId xmlns:a16="http://schemas.microsoft.com/office/drawing/2014/main" id="{20469B5E-3096-45F1-8C48-3DE2E5AD41B8}"/>
               </a:ext>
             </a:extLst>
           </p:cNvPr>
@@ -34452,7 +34452,7 @@
           <p:cNvPr id="24" name="">
             <a:extLst xmlns:a="http://schemas.openxmlformats.org/drawingml/2006/main">
               <a:ext uri="{FF2B5EF4-FFF2-40B4-BE49-F238E27FC236}">
-                <a16:creationId xmlns:a16="http://schemas.microsoft.com/office/drawing/2014/main" id="{04B5F66B-1977-434F-B749-50D0BC7BD596}"/>
+                <a16:creationId xmlns:a16="http://schemas.microsoft.com/office/drawing/2014/main" id="{8AAD2FB7-8D84-4C9C-8195-CBF13823385B}"/>
               </a:ext>
             </a:extLst>
           </p:cNvPr>
@@ -34514,7 +34514,7 @@
           <p:cNvPr id="25" name="">
             <a:extLst xmlns:a="http://schemas.openxmlformats.org/drawingml/2006/main">
               <a:ext uri="{FF2B5EF4-FFF2-40B4-BE49-F238E27FC236}">
-                <a16:creationId xmlns:a16="http://schemas.microsoft.com/office/drawing/2014/main" id="{4A4ADE91-EDDE-4DB0-97C2-722464400729}"/>
+                <a16:creationId xmlns:a16="http://schemas.microsoft.com/office/drawing/2014/main" id="{546B1DCF-5207-4216-B175-76EA101F97A3}"/>
               </a:ext>
             </a:extLst>
           </p:cNvPr>
@@ -34547,7 +34547,7 @@
           <p:cNvPr id="26" name="">
             <a:extLst xmlns:a="http://schemas.openxmlformats.org/drawingml/2006/main">
               <a:ext uri="{FF2B5EF4-FFF2-40B4-BE49-F238E27FC236}">
-                <a16:creationId xmlns:a16="http://schemas.microsoft.com/office/drawing/2014/main" id="{27108DFA-14A2-4142-BA21-C1057D870821}"/>
+                <a16:creationId xmlns:a16="http://schemas.microsoft.com/office/drawing/2014/main" id="{7FC8F659-BB79-4C98-8EAD-AB25FD0762C1}"/>
               </a:ext>
             </a:extLst>
           </p:cNvPr>
@@ -34609,7 +34609,7 @@
           <p:cNvPr id="27" name="">
             <a:extLst xmlns:a="http://schemas.openxmlformats.org/drawingml/2006/main">
               <a:ext uri="{FF2B5EF4-FFF2-40B4-BE49-F238E27FC236}">
-                <a16:creationId xmlns:a16="http://schemas.microsoft.com/office/drawing/2014/main" id="{124CC5D3-3E44-438B-810B-E1543636DC75}"/>
+                <a16:creationId xmlns:a16="http://schemas.microsoft.com/office/drawing/2014/main" id="{845E1647-D688-44CD-9D51-FB46386AC8C0}"/>
               </a:ext>
             </a:extLst>
           </p:cNvPr>
@@ -34642,7 +34642,7 @@
           <p:cNvPr id="28" name="">
             <a:extLst xmlns:a="http://schemas.openxmlformats.org/drawingml/2006/main">
               <a:ext uri="{FF2B5EF4-FFF2-40B4-BE49-F238E27FC236}">
-                <a16:creationId xmlns:a16="http://schemas.microsoft.com/office/drawing/2014/main" id="{538CC71B-52C2-4B77-BA83-DAB033554CE7}"/>
+                <a16:creationId xmlns:a16="http://schemas.microsoft.com/office/drawing/2014/main" id="{F71A47DD-4BF8-4F05-90A6-B7AE31D499E2}"/>
               </a:ext>
             </a:extLst>
           </p:cNvPr>
@@ -34704,7 +34704,7 @@
           <p:cNvPr id="29" name="">
             <a:extLst xmlns:a="http://schemas.openxmlformats.org/drawingml/2006/main">
               <a:ext uri="{FF2B5EF4-FFF2-40B4-BE49-F238E27FC236}">
-                <a16:creationId xmlns:a16="http://schemas.microsoft.com/office/drawing/2014/main" id="{A56B1C99-869B-40BA-BA63-2373388644F5}"/>
+                <a16:creationId xmlns:a16="http://schemas.microsoft.com/office/drawing/2014/main" id="{4D01341C-DF8B-416F-B21F-8D3A3EA1B06C}"/>
               </a:ext>
             </a:extLst>
           </p:cNvPr>
@@ -34737,7 +34737,7 @@
           <p:cNvPr id="30" name="">
             <a:extLst xmlns:a="http://schemas.openxmlformats.org/drawingml/2006/main">
               <a:ext uri="{FF2B5EF4-FFF2-40B4-BE49-F238E27FC236}">
-                <a16:creationId xmlns:a16="http://schemas.microsoft.com/office/drawing/2014/main" id="{D442E621-656B-479D-84CB-08DC43FAAE2C}"/>
+                <a16:creationId xmlns:a16="http://schemas.microsoft.com/office/drawing/2014/main" id="{D5C46CC7-A9FF-40E1-8A19-3AA804D7B184}"/>
               </a:ext>
             </a:extLst>
           </p:cNvPr>
@@ -34799,7 +34799,7 @@
           <p:cNvPr id="31" name="">
             <a:extLst xmlns:a="http://schemas.openxmlformats.org/drawingml/2006/main">
               <a:ext uri="{FF2B5EF4-FFF2-40B4-BE49-F238E27FC236}">
-                <a16:creationId xmlns:a16="http://schemas.microsoft.com/office/drawing/2014/main" id="{3C4986B0-EE49-4F46-87E1-41C85113DC6C}"/>
+                <a16:creationId xmlns:a16="http://schemas.microsoft.com/office/drawing/2014/main" id="{DB263A76-593A-480B-B303-B66CE9354331}"/>
               </a:ext>
             </a:extLst>
           </p:cNvPr>
@@ -34832,7 +34832,7 @@
           <p:cNvPr id="32" name="">
             <a:extLst xmlns:a="http://schemas.openxmlformats.org/drawingml/2006/main">
               <a:ext uri="{FF2B5EF4-FFF2-40B4-BE49-F238E27FC236}">
-                <a16:creationId xmlns:a16="http://schemas.microsoft.com/office/drawing/2014/main" id="{25395B35-D582-483A-82C8-6F2DF66322F9}"/>
+                <a16:creationId xmlns:a16="http://schemas.microsoft.com/office/drawing/2014/main" id="{B1C330B2-CE25-41E8-A76E-1C865C524689}"/>
               </a:ext>
             </a:extLst>
           </p:cNvPr>
@@ -34894,7 +34894,7 @@
           <p:cNvPr id="33" name="">
             <a:extLst xmlns:a="http://schemas.openxmlformats.org/drawingml/2006/main">
               <a:ext uri="{FF2B5EF4-FFF2-40B4-BE49-F238E27FC236}">
-                <a16:creationId xmlns:a16="http://schemas.microsoft.com/office/drawing/2014/main" id="{657999B8-288F-4BCE-AB8A-00B2723FB2D4}"/>
+                <a16:creationId xmlns:a16="http://schemas.microsoft.com/office/drawing/2014/main" id="{39393B18-978B-445F-AFBF-4CCCD23FF604}"/>
               </a:ext>
             </a:extLst>
           </p:cNvPr>
@@ -34927,7 +34927,7 @@
           <p:cNvPr id="34" name="">
             <a:extLst xmlns:a="http://schemas.openxmlformats.org/drawingml/2006/main">
               <a:ext uri="{FF2B5EF4-FFF2-40B4-BE49-F238E27FC236}">
-                <a16:creationId xmlns:a16="http://schemas.microsoft.com/office/drawing/2014/main" id="{198216BD-FE37-4EEC-B687-136A6710E146}"/>
+                <a16:creationId xmlns:a16="http://schemas.microsoft.com/office/drawing/2014/main" id="{D736FE40-EE8B-4866-8070-933F34E3C82E}"/>
               </a:ext>
             </a:extLst>
           </p:cNvPr>
@@ -34989,7 +34989,7 @@
           <p:cNvPr id="35" name="">
             <a:extLst xmlns:a="http://schemas.openxmlformats.org/drawingml/2006/main">
               <a:ext uri="{FF2B5EF4-FFF2-40B4-BE49-F238E27FC236}">
-                <a16:creationId xmlns:a16="http://schemas.microsoft.com/office/drawing/2014/main" id="{7DB6DE54-4FCA-4390-B397-05B1FF856564}"/>
+                <a16:creationId xmlns:a16="http://schemas.microsoft.com/office/drawing/2014/main" id="{349E0A73-C999-4DBA-BB59-6B64C5205F51}"/>
               </a:ext>
             </a:extLst>
           </p:cNvPr>
@@ -35022,7 +35022,7 @@
           <p:cNvPr id="36" name="">
             <a:extLst xmlns:a="http://schemas.openxmlformats.org/drawingml/2006/main">
               <a:ext uri="{FF2B5EF4-FFF2-40B4-BE49-F238E27FC236}">
-                <a16:creationId xmlns:a16="http://schemas.microsoft.com/office/drawing/2014/main" id="{B3BF9294-FB5F-4160-9906-696DD1F2E9A5}"/>
+                <a16:creationId xmlns:a16="http://schemas.microsoft.com/office/drawing/2014/main" id="{9765EB49-3278-4849-A388-891BDF96C156}"/>
               </a:ext>
             </a:extLst>
           </p:cNvPr>
@@ -35084,7 +35084,7 @@
           <p:cNvPr id="37" name="">
             <a:extLst xmlns:a="http://schemas.openxmlformats.org/drawingml/2006/main">
               <a:ext uri="{FF2B5EF4-FFF2-40B4-BE49-F238E27FC236}">
-                <a16:creationId xmlns:a16="http://schemas.microsoft.com/office/drawing/2014/main" id="{C4F6B9FC-D6AD-44EB-913F-B854C9FBEEFC}"/>
+                <a16:creationId xmlns:a16="http://schemas.microsoft.com/office/drawing/2014/main" id="{F15E5566-9452-4B0A-8941-A09507C171EE}"/>
               </a:ext>
             </a:extLst>
           </p:cNvPr>
@@ -35117,7 +35117,7 @@
           <p:cNvPr id="38" name="">
             <a:extLst xmlns:a="http://schemas.openxmlformats.org/drawingml/2006/main">
               <a:ext uri="{FF2B5EF4-FFF2-40B4-BE49-F238E27FC236}">
-                <a16:creationId xmlns:a16="http://schemas.microsoft.com/office/drawing/2014/main" id="{2B0CC6A9-E9DF-42A4-B167-739CADEE9667}"/>
+                <a16:creationId xmlns:a16="http://schemas.microsoft.com/office/drawing/2014/main" id="{67B262B0-D5CC-481B-B471-3B422615ABA8}"/>
               </a:ext>
             </a:extLst>
           </p:cNvPr>
@@ -35179,7 +35179,7 @@
           <p:cNvPr id="39" name="">
             <a:extLst xmlns:a="http://schemas.openxmlformats.org/drawingml/2006/main">
               <a:ext uri="{FF2B5EF4-FFF2-40B4-BE49-F238E27FC236}">
-                <a16:creationId xmlns:a16="http://schemas.microsoft.com/office/drawing/2014/main" id="{A8A5AC78-0F11-473A-B9F5-535F2A12EFD6}"/>
+                <a16:creationId xmlns:a16="http://schemas.microsoft.com/office/drawing/2014/main" id="{710B7B38-CBA5-4D13-8E77-238241D3021A}"/>
               </a:ext>
             </a:extLst>
           </p:cNvPr>
@@ -35212,7 +35212,7 @@
           <p:cNvPr id="40" name="">
             <a:extLst xmlns:a="http://schemas.openxmlformats.org/drawingml/2006/main">
               <a:ext uri="{FF2B5EF4-FFF2-40B4-BE49-F238E27FC236}">
-                <a16:creationId xmlns:a16="http://schemas.microsoft.com/office/drawing/2014/main" id="{E279AC21-5F59-4763-9268-EC0A3F2E3C05}"/>
+                <a16:creationId xmlns:a16="http://schemas.microsoft.com/office/drawing/2014/main" id="{D9DA8F91-8CA2-41B0-80AC-64902B73AD39}"/>
               </a:ext>
             </a:extLst>
           </p:cNvPr>
@@ -35274,7 +35274,7 @@
           <p:cNvPr id="41" name="">
             <a:extLst xmlns:a="http://schemas.openxmlformats.org/drawingml/2006/main">
               <a:ext uri="{FF2B5EF4-FFF2-40B4-BE49-F238E27FC236}">
-                <a16:creationId xmlns:a16="http://schemas.microsoft.com/office/drawing/2014/main" id="{841E5ECC-10A2-4188-9492-FB85061B13E7}"/>
+                <a16:creationId xmlns:a16="http://schemas.microsoft.com/office/drawing/2014/main" id="{896D445A-0000-47BC-995B-186494916A06}"/>
               </a:ext>
             </a:extLst>
           </p:cNvPr>
@@ -35307,7 +35307,7 @@
           <p:cNvPr id="42" name="">
             <a:extLst xmlns:a="http://schemas.openxmlformats.org/drawingml/2006/main">
               <a:ext uri="{FF2B5EF4-FFF2-40B4-BE49-F238E27FC236}">
-                <a16:creationId xmlns:a16="http://schemas.microsoft.com/office/drawing/2014/main" id="{8246512B-A6FF-4221-BE76-10885B278FA8}"/>
+                <a16:creationId xmlns:a16="http://schemas.microsoft.com/office/drawing/2014/main" id="{F0D798F4-6039-4ECB-BA48-3AE45B095B44}"/>
               </a:ext>
             </a:extLst>
           </p:cNvPr>
@@ -35369,7 +35369,7 @@
           <p:cNvPr id="43" name="">
             <a:extLst xmlns:a="http://schemas.openxmlformats.org/drawingml/2006/main">
               <a:ext uri="{FF2B5EF4-FFF2-40B4-BE49-F238E27FC236}">
-                <a16:creationId xmlns:a16="http://schemas.microsoft.com/office/drawing/2014/main" id="{2EA6699A-A573-414C-9289-FDC1B07BF1DB}"/>
+                <a16:creationId xmlns:a16="http://schemas.microsoft.com/office/drawing/2014/main" id="{CC35395D-AD03-4F24-89A8-6252E6482B00}"/>
               </a:ext>
             </a:extLst>
           </p:cNvPr>
@@ -35402,7 +35402,7 @@
           <p:cNvPr id="44" name="">
             <a:extLst xmlns:a="http://schemas.openxmlformats.org/drawingml/2006/main">
               <a:ext uri="{FF2B5EF4-FFF2-40B4-BE49-F238E27FC236}">
-                <a16:creationId xmlns:a16="http://schemas.microsoft.com/office/drawing/2014/main" id="{8C74EB9F-FE66-4B65-8940-6870ADFDDDAA}"/>
+                <a16:creationId xmlns:a16="http://schemas.microsoft.com/office/drawing/2014/main" id="{6B6485B1-D8C3-4891-A381-86BEBB874C32}"/>
               </a:ext>
             </a:extLst>
           </p:cNvPr>
@@ -35464,7 +35464,7 @@
           <p:cNvPr id="45" name="">
             <a:extLst xmlns:a="http://schemas.openxmlformats.org/drawingml/2006/main">
               <a:ext uri="{FF2B5EF4-FFF2-40B4-BE49-F238E27FC236}">
-                <a16:creationId xmlns:a16="http://schemas.microsoft.com/office/drawing/2014/main" id="{16CDA22A-E180-4CE0-91D0-CDE989F8D0AB}"/>
+                <a16:creationId xmlns:a16="http://schemas.microsoft.com/office/drawing/2014/main" id="{49EDA95F-450A-4FCC-8129-503B2AD4E3B4}"/>
               </a:ext>
             </a:extLst>
           </p:cNvPr>
@@ -35497,7 +35497,7 @@
           <p:cNvPr id="46" name="">
             <a:extLst xmlns:a="http://schemas.openxmlformats.org/drawingml/2006/main">
               <a:ext uri="{FF2B5EF4-FFF2-40B4-BE49-F238E27FC236}">
-                <a16:creationId xmlns:a16="http://schemas.microsoft.com/office/drawing/2014/main" id="{1C551783-956C-4560-B949-CB0ACAB39B1B}"/>
+                <a16:creationId xmlns:a16="http://schemas.microsoft.com/office/drawing/2014/main" id="{CFAF27F7-6DC2-49EF-A7C1-C58B2D927067}"/>
               </a:ext>
             </a:extLst>
           </p:cNvPr>
@@ -35559,7 +35559,7 @@
           <p:cNvPr id="47" name="">
             <a:extLst xmlns:a="http://schemas.openxmlformats.org/drawingml/2006/main">
               <a:ext uri="{FF2B5EF4-FFF2-40B4-BE49-F238E27FC236}">
-                <a16:creationId xmlns:a16="http://schemas.microsoft.com/office/drawing/2014/main" id="{A78A1773-133A-4CAE-AC34-DA13CA5F2094}"/>
+                <a16:creationId xmlns:a16="http://schemas.microsoft.com/office/drawing/2014/main" id="{8B16B57C-89D3-4D13-BE11-0DDFB3DA5C86}"/>
               </a:ext>
             </a:extLst>
           </p:cNvPr>
@@ -35592,7 +35592,7 @@
           <p:cNvPr id="48" name="">
             <a:extLst xmlns:a="http://schemas.openxmlformats.org/drawingml/2006/main">
               <a:ext uri="{FF2B5EF4-FFF2-40B4-BE49-F238E27FC236}">
-                <a16:creationId xmlns:a16="http://schemas.microsoft.com/office/drawing/2014/main" id="{EB0F52E5-F2AC-4F53-9136-610B847BADEA}"/>
+                <a16:creationId xmlns:a16="http://schemas.microsoft.com/office/drawing/2014/main" id="{95CC0BD7-B95C-471D-95E8-CA1B6A16D05A}"/>
               </a:ext>
             </a:extLst>
           </p:cNvPr>
@@ -35654,7 +35654,7 @@
           <p:cNvPr id="49" name="">
             <a:extLst xmlns:a="http://schemas.openxmlformats.org/drawingml/2006/main">
               <a:ext uri="{FF2B5EF4-FFF2-40B4-BE49-F238E27FC236}">
-                <a16:creationId xmlns:a16="http://schemas.microsoft.com/office/drawing/2014/main" id="{D8A988F1-BA86-4245-8E26-A8E1066B45F8}"/>
+                <a16:creationId xmlns:a16="http://schemas.microsoft.com/office/drawing/2014/main" id="{6AADB744-ECA1-4F28-B946-2A7CF51DED20}"/>
               </a:ext>
             </a:extLst>
           </p:cNvPr>
@@ -35695,7 +35695,7 @@
           <p:cNvPr id="50" name="">
             <a:extLst xmlns:a="http://schemas.openxmlformats.org/drawingml/2006/main">
               <a:ext uri="{FF2B5EF4-FFF2-40B4-BE49-F238E27FC236}">
-                <a16:creationId xmlns:a16="http://schemas.microsoft.com/office/drawing/2014/main" id="{160490D8-ABAA-4D36-8768-578D65EE310C}"/>
+                <a16:creationId xmlns:a16="http://schemas.microsoft.com/office/drawing/2014/main" id="{5EA847A8-ADD0-4645-9255-528635DD7552}"/>
               </a:ext>
             </a:extLst>
           </p:cNvPr>
@@ -35728,7 +35728,7 @@
           <p:cNvPr id="51" name="">
             <a:extLst xmlns:a="http://schemas.openxmlformats.org/drawingml/2006/main">
               <a:ext uri="{FF2B5EF4-FFF2-40B4-BE49-F238E27FC236}">
-                <a16:creationId xmlns:a16="http://schemas.microsoft.com/office/drawing/2014/main" id="{90C0887E-BE7C-43C2-83C8-C8B0493886BF}"/>
+                <a16:creationId xmlns:a16="http://schemas.microsoft.com/office/drawing/2014/main" id="{682FF18B-B6C4-475C-A49A-AE18FF0E29CE}"/>
               </a:ext>
             </a:extLst>
           </p:cNvPr>
@@ -35790,7 +35790,7 @@
           <p:cNvPr id="52" name="">
             <a:extLst xmlns:a="http://schemas.openxmlformats.org/drawingml/2006/main">
               <a:ext uri="{FF2B5EF4-FFF2-40B4-BE49-F238E27FC236}">
-                <a16:creationId xmlns:a16="http://schemas.microsoft.com/office/drawing/2014/main" id="{061BC2DA-723A-4863-A385-C9E574B069CF}"/>
+                <a16:creationId xmlns:a16="http://schemas.microsoft.com/office/drawing/2014/main" id="{A1146FDE-1022-4CAF-B0AE-E82E4CD82F56}"/>
               </a:ext>
             </a:extLst>
           </p:cNvPr>
@@ -35852,7 +35852,7 @@
           <p:cNvPr id="53" name="">
             <a:extLst xmlns:a="http://schemas.openxmlformats.org/drawingml/2006/main">
               <a:ext uri="{FF2B5EF4-FFF2-40B4-BE49-F238E27FC236}">
-                <a16:creationId xmlns:a16="http://schemas.microsoft.com/office/drawing/2014/main" id="{FFA17149-D966-4047-A09B-55FEF33990FA}"/>
+                <a16:creationId xmlns:a16="http://schemas.microsoft.com/office/drawing/2014/main" id="{58192446-712A-406F-811B-6A5F911B8E64}"/>
               </a:ext>
             </a:extLst>
           </p:cNvPr>
@@ -35887,7 +35887,7 @@
           <p:cNvPr id="54" name="">
             <a:extLst xmlns:a="http://schemas.openxmlformats.org/drawingml/2006/main">
               <a:ext uri="{FF2B5EF4-FFF2-40B4-BE49-F238E27FC236}">
-                <a16:creationId xmlns:a16="http://schemas.microsoft.com/office/drawing/2014/main" id="{61EE123B-94F4-468E-812D-2C85580A661F}"/>
+                <a16:creationId xmlns:a16="http://schemas.microsoft.com/office/drawing/2014/main" id="{2AD26A0A-23C9-4019-95CE-6832F9263799}"/>
               </a:ext>
             </a:extLst>
           </p:cNvPr>
@@ -35949,7 +35949,7 @@
           <p:cNvPr id="55" name="">
             <a:extLst xmlns:a="http://schemas.openxmlformats.org/drawingml/2006/main">
               <a:ext uri="{FF2B5EF4-FFF2-40B4-BE49-F238E27FC236}">
-                <a16:creationId xmlns:a16="http://schemas.microsoft.com/office/drawing/2014/main" id="{B8F5FB11-BA52-4A9A-B748-AC0896FD0286}"/>
+                <a16:creationId xmlns:a16="http://schemas.microsoft.com/office/drawing/2014/main" id="{312A3C04-C3BB-4F47-BE4C-3E15623045FD}"/>
               </a:ext>
             </a:extLst>
           </p:cNvPr>
@@ -36011,7 +36011,7 @@
           <p:cNvPr id="56" name="">
             <a:extLst xmlns:a="http://schemas.openxmlformats.org/drawingml/2006/main">
               <a:ext uri="{FF2B5EF4-FFF2-40B4-BE49-F238E27FC236}">
-                <a16:creationId xmlns:a16="http://schemas.microsoft.com/office/drawing/2014/main" id="{F0795D21-67C4-40E8-A13A-0C6635E39A76}"/>
+                <a16:creationId xmlns:a16="http://schemas.microsoft.com/office/drawing/2014/main" id="{86878478-0E42-4749-89C0-075F118A9EBB}"/>
               </a:ext>
             </a:extLst>
           </p:cNvPr>
@@ -36046,7 +36046,7 @@
           <p:cNvPr id="57" name="">
             <a:extLst xmlns:a="http://schemas.openxmlformats.org/drawingml/2006/main">
               <a:ext uri="{FF2B5EF4-FFF2-40B4-BE49-F238E27FC236}">
-                <a16:creationId xmlns:a16="http://schemas.microsoft.com/office/drawing/2014/main" id="{D45EDD22-627E-4FDD-A7D3-8089E5A5F7D6}"/>
+                <a16:creationId xmlns:a16="http://schemas.microsoft.com/office/drawing/2014/main" id="{3C84CE3C-F17E-451E-B565-210A27BF5CD9}"/>
               </a:ext>
             </a:extLst>
           </p:cNvPr>
@@ -36108,7 +36108,7 @@
           <p:cNvPr id="58" name="">
             <a:extLst xmlns:a="http://schemas.openxmlformats.org/drawingml/2006/main">
               <a:ext uri="{FF2B5EF4-FFF2-40B4-BE49-F238E27FC236}">
-                <a16:creationId xmlns:a16="http://schemas.microsoft.com/office/drawing/2014/main" id="{D205B622-CB93-4EE8-832C-8784F853F0E4}"/>
+                <a16:creationId xmlns:a16="http://schemas.microsoft.com/office/drawing/2014/main" id="{3153C87A-55CB-43C4-9616-8E4A5752D060}"/>
               </a:ext>
             </a:extLst>
           </p:cNvPr>
@@ -36170,7 +36170,7 @@
           <p:cNvPr id="59" name="">
             <a:extLst xmlns:a="http://schemas.openxmlformats.org/drawingml/2006/main">
               <a:ext uri="{FF2B5EF4-FFF2-40B4-BE49-F238E27FC236}">
-                <a16:creationId xmlns:a16="http://schemas.microsoft.com/office/drawing/2014/main" id="{DAC9EA80-B942-4865-AE6A-719F3F3ECED4}"/>
+                <a16:creationId xmlns:a16="http://schemas.microsoft.com/office/drawing/2014/main" id="{E825E559-DCF6-4A2D-98D6-30879130AB1E}"/>
               </a:ext>
             </a:extLst>
           </p:cNvPr>
@@ -36205,7 +36205,7 @@
           <p:cNvPr id="60" name="">
             <a:extLst xmlns:a="http://schemas.openxmlformats.org/drawingml/2006/main">
               <a:ext uri="{FF2B5EF4-FFF2-40B4-BE49-F238E27FC236}">
-                <a16:creationId xmlns:a16="http://schemas.microsoft.com/office/drawing/2014/main" id="{0F9FAAC1-B88F-4FEA-883E-5288E132BD8B}"/>
+                <a16:creationId xmlns:a16="http://schemas.microsoft.com/office/drawing/2014/main" id="{0C550172-9072-47C8-8C8A-313D7D59EC75}"/>
               </a:ext>
             </a:extLst>
           </p:cNvPr>
@@ -36267,7 +36267,7 @@
           <p:cNvPr id="61" name="">
             <a:extLst xmlns:a="http://schemas.openxmlformats.org/drawingml/2006/main">
               <a:ext uri="{FF2B5EF4-FFF2-40B4-BE49-F238E27FC236}">
-                <a16:creationId xmlns:a16="http://schemas.microsoft.com/office/drawing/2014/main" id="{0961D5A6-101C-4CD3-935A-0782F7724674}"/>
+                <a16:creationId xmlns:a16="http://schemas.microsoft.com/office/drawing/2014/main" id="{32D460E6-DFA5-4067-990B-4A760174E148}"/>
               </a:ext>
             </a:extLst>
           </p:cNvPr>
@@ -36329,7 +36329,7 @@
           <p:cNvPr id="62" name="">
             <a:extLst xmlns:a="http://schemas.openxmlformats.org/drawingml/2006/main">
               <a:ext uri="{FF2B5EF4-FFF2-40B4-BE49-F238E27FC236}">
-                <a16:creationId xmlns:a16="http://schemas.microsoft.com/office/drawing/2014/main" id="{E6386FB6-41AA-4EF7-94AD-2482A59F571D}"/>
+                <a16:creationId xmlns:a16="http://schemas.microsoft.com/office/drawing/2014/main" id="{55800092-06AB-4C4F-9502-AB975B7D284E}"/>
               </a:ext>
             </a:extLst>
           </p:cNvPr>
@@ -36364,7 +36364,7 @@
           <p:cNvPr id="63" name="">
             <a:extLst xmlns:a="http://schemas.openxmlformats.org/drawingml/2006/main">
               <a:ext uri="{FF2B5EF4-FFF2-40B4-BE49-F238E27FC236}">
-                <a16:creationId xmlns:a16="http://schemas.microsoft.com/office/drawing/2014/main" id="{932C3026-C6CB-4ACE-891C-1DB1150B6FD2}"/>
+                <a16:creationId xmlns:a16="http://schemas.microsoft.com/office/drawing/2014/main" id="{3C743B6C-46DB-4365-A61B-CFB2FFFEE591}"/>
               </a:ext>
             </a:extLst>
           </p:cNvPr>
@@ -36426,7 +36426,7 @@
           <p:cNvPr id="64" name="">
             <a:extLst xmlns:a="http://schemas.openxmlformats.org/drawingml/2006/main">
               <a:ext uri="{FF2B5EF4-FFF2-40B4-BE49-F238E27FC236}">
-                <a16:creationId xmlns:a16="http://schemas.microsoft.com/office/drawing/2014/main" id="{E48D6F53-2D90-4B2F-8F92-5B484B34E324}"/>
+                <a16:creationId xmlns:a16="http://schemas.microsoft.com/office/drawing/2014/main" id="{AF8392A5-8019-496B-91F1-7DF7172FCC05}"/>
               </a:ext>
             </a:extLst>
           </p:cNvPr>
@@ -36467,7 +36467,7 @@
           <p:cNvPr id="65" name="">
             <a:extLst xmlns:a="http://schemas.openxmlformats.org/drawingml/2006/main">
               <a:ext uri="{FF2B5EF4-FFF2-40B4-BE49-F238E27FC236}">
-                <a16:creationId xmlns:a16="http://schemas.microsoft.com/office/drawing/2014/main" id="{1EAC94A4-E944-43A9-9C0F-7C37824FF600}"/>
+                <a16:creationId xmlns:a16="http://schemas.microsoft.com/office/drawing/2014/main" id="{8557E52D-8DBC-49DA-A433-9D6FE03BCA1C}"/>
               </a:ext>
             </a:extLst>
           </p:cNvPr>
@@ -36500,7 +36500,7 @@
           <p:cNvPr id="66" name="">
             <a:extLst xmlns:a="http://schemas.openxmlformats.org/drawingml/2006/main">
               <a:ext uri="{FF2B5EF4-FFF2-40B4-BE49-F238E27FC236}">
-                <a16:creationId xmlns:a16="http://schemas.microsoft.com/office/drawing/2014/main" id="{A95EFB67-F8D9-4117-A321-78A715CF691E}"/>
+                <a16:creationId xmlns:a16="http://schemas.microsoft.com/office/drawing/2014/main" id="{E4B066C5-2CE6-4E3D-9883-998C57599A6A}"/>
               </a:ext>
             </a:extLst>
           </p:cNvPr>
@@ -36562,7 +36562,7 @@
           <p:cNvPr id="67" name="">
             <a:extLst xmlns:a="http://schemas.openxmlformats.org/drawingml/2006/main">
               <a:ext uri="{FF2B5EF4-FFF2-40B4-BE49-F238E27FC236}">
-                <a16:creationId xmlns:a16="http://schemas.microsoft.com/office/drawing/2014/main" id="{3C8EEE35-74C3-4B1B-8569-43191E49084B}"/>
+                <a16:creationId xmlns:a16="http://schemas.microsoft.com/office/drawing/2014/main" id="{37116CC8-2554-4A03-9B28-0A52F1B9B0BF}"/>
               </a:ext>
             </a:extLst>
           </p:cNvPr>
@@ -36651,7 +36651,7 @@
           <p:cNvPr id="68" name="">
             <a:extLst xmlns:a="http://schemas.openxmlformats.org/drawingml/2006/main">
               <a:ext uri="{FF2B5EF4-FFF2-40B4-BE49-F238E27FC236}">
-                <a16:creationId xmlns:a16="http://schemas.microsoft.com/office/drawing/2014/main" id="{1C982B32-E385-49F4-AC6B-CC54F3595389}"/>
+                <a16:creationId xmlns:a16="http://schemas.microsoft.com/office/drawing/2014/main" id="{457C7EFB-2F0A-49B3-87A4-478261C1B3F7}"/>
               </a:ext>
             </a:extLst>
           </p:cNvPr>
@@ -36686,7 +36686,7 @@
           <p:cNvPr id="69" name="">
             <a:extLst xmlns:a="http://schemas.openxmlformats.org/drawingml/2006/main">
               <a:ext uri="{FF2B5EF4-FFF2-40B4-BE49-F238E27FC236}">
-                <a16:creationId xmlns:a16="http://schemas.microsoft.com/office/drawing/2014/main" id="{AFE17EE2-3D2C-47EC-A540-0A559D2A2F73}"/>
+                <a16:creationId xmlns:a16="http://schemas.microsoft.com/office/drawing/2014/main" id="{B161F51F-E1D8-409C-9B21-FC2EB72B25E2}"/>
               </a:ext>
             </a:extLst>
           </p:cNvPr>
@@ -36746,7 +36746,7 @@
     </p:spTree>
     <p:extLst>
       <p:ext uri="{BB962C8B-B14F-4D97-AF65-F5344CB8AC3E}">
-        <p14:creationId xmlns:p14="http://schemas.microsoft.com/office/powerpoint/2010/main" val="19988492"/>
+        <p14:creationId xmlns:p14="http://schemas.microsoft.com/office/powerpoint/2010/main" val="1041266834"/>
       </p:ext>
     </p:extLst>
   </p:cSld>
@@ -36777,7 +36777,7 @@
           <p:cNvPr id="50" name="">
             <a:extLst xmlns:a="http://schemas.openxmlformats.org/drawingml/2006/main">
               <a:ext uri="{FF2B5EF4-FFF2-40B4-BE49-F238E27FC236}">
-                <a16:creationId xmlns:a16="http://schemas.microsoft.com/office/drawing/2014/main" id="{0A4A4960-C2D9-417A-9444-DCAC3734CF78}"/>
+                <a16:creationId xmlns:a16="http://schemas.microsoft.com/office/drawing/2014/main" id="{813E50C0-741F-493C-A267-2B5CFD64DA97}"/>
               </a:ext>
             </a:extLst>
           </p:cNvPr>
@@ -36810,7 +36810,7 @@
           <p:cNvPr id="2" name="">
             <a:extLst xmlns:a="http://schemas.openxmlformats.org/drawingml/2006/main">
               <a:ext uri="{FF2B5EF4-FFF2-40B4-BE49-F238E27FC236}">
-                <a16:creationId xmlns:a16="http://schemas.microsoft.com/office/drawing/2014/main" id="{6FC6C251-096D-4A14-8914-B1F7663B9DFA}"/>
+                <a16:creationId xmlns:a16="http://schemas.microsoft.com/office/drawing/2014/main" id="{8D9BAF54-DF00-4659-AE66-1C74EA434F7A}"/>
               </a:ext>
             </a:extLst>
           </p:cNvPr>
@@ -36872,7 +36872,7 @@
           <p:cNvPr id="3" name="">
             <a:extLst xmlns:a="http://schemas.openxmlformats.org/drawingml/2006/main">
               <a:ext uri="{FF2B5EF4-FFF2-40B4-BE49-F238E27FC236}">
-                <a16:creationId xmlns:a16="http://schemas.microsoft.com/office/drawing/2014/main" id="{94048167-F01E-4DE2-9294-FEDB7253F180}"/>
+                <a16:creationId xmlns:a16="http://schemas.microsoft.com/office/drawing/2014/main" id="{9FD5C48A-4550-4BF0-80BD-5583CFD8DB4A}"/>
               </a:ext>
             </a:extLst>
           </p:cNvPr>
@@ -36934,7 +36934,7 @@
           <p:cNvPr id="4" name="">
             <a:extLst xmlns:a="http://schemas.openxmlformats.org/drawingml/2006/main">
               <a:ext uri="{FF2B5EF4-FFF2-40B4-BE49-F238E27FC236}">
-                <a16:creationId xmlns:a16="http://schemas.microsoft.com/office/drawing/2014/main" id="{584CC934-3948-440B-B715-FF90BD930D05}"/>
+                <a16:creationId xmlns:a16="http://schemas.microsoft.com/office/drawing/2014/main" id="{E009A002-60E6-4F1D-B835-43708F27B49D}"/>
               </a:ext>
             </a:extLst>
           </p:cNvPr>
@@ -36967,7 +36967,7 @@
           <p:cNvPr id="5" name="">
             <a:extLst xmlns:a="http://schemas.openxmlformats.org/drawingml/2006/main">
               <a:ext uri="{FF2B5EF4-FFF2-40B4-BE49-F238E27FC236}">
-                <a16:creationId xmlns:a16="http://schemas.microsoft.com/office/drawing/2014/main" id="{747AB3FE-7B7B-46B5-8CEC-4258B0E4D291}"/>
+                <a16:creationId xmlns:a16="http://schemas.microsoft.com/office/drawing/2014/main" id="{5BBFD09B-B667-4B2B-AA6C-6B7B19C95B69}"/>
               </a:ext>
             </a:extLst>
           </p:cNvPr>
@@ -37029,7 +37029,7 @@
           <p:cNvPr id="6" name="">
             <a:extLst xmlns:a="http://schemas.openxmlformats.org/drawingml/2006/main">
               <a:ext uri="{FF2B5EF4-FFF2-40B4-BE49-F238E27FC236}">
-                <a16:creationId xmlns:a16="http://schemas.microsoft.com/office/drawing/2014/main" id="{523418F1-A160-4589-ABCB-FCAF0257F2B7}"/>
+                <a16:creationId xmlns:a16="http://schemas.microsoft.com/office/drawing/2014/main" id="{14A67EFC-8E97-45C0-9F38-71018C2EC077}"/>
               </a:ext>
             </a:extLst>
           </p:cNvPr>
@@ -37091,7 +37091,7 @@
           <p:cNvPr id="7" name="">
             <a:extLst xmlns:a="http://schemas.openxmlformats.org/drawingml/2006/main">
               <a:ext uri="{FF2B5EF4-FFF2-40B4-BE49-F238E27FC236}">
-                <a16:creationId xmlns:a16="http://schemas.microsoft.com/office/drawing/2014/main" id="{9D0549D7-44DF-474D-8025-30B97B892DE0}"/>
+                <a16:creationId xmlns:a16="http://schemas.microsoft.com/office/drawing/2014/main" id="{AA38C564-CC54-410F-8CA9-6D4D703A2D8B}"/>
               </a:ext>
             </a:extLst>
           </p:cNvPr>
@@ -37132,7 +37132,7 @@
           <p:cNvPr id="8" name="">
             <a:extLst xmlns:a="http://schemas.openxmlformats.org/drawingml/2006/main">
               <a:ext uri="{FF2B5EF4-FFF2-40B4-BE49-F238E27FC236}">
-                <a16:creationId xmlns:a16="http://schemas.microsoft.com/office/drawing/2014/main" id="{76B4491E-0244-428F-B39A-D3E91A59682B}"/>
+                <a16:creationId xmlns:a16="http://schemas.microsoft.com/office/drawing/2014/main" id="{7C957994-89C1-4DBA-8DA1-7074ED2C795E}"/>
               </a:ext>
             </a:extLst>
           </p:cNvPr>
@@ -37194,7 +37194,7 @@
           <p:cNvPr id="9" name="">
             <a:extLst xmlns:a="http://schemas.openxmlformats.org/drawingml/2006/main">
               <a:ext uri="{FF2B5EF4-FFF2-40B4-BE49-F238E27FC236}">
-                <a16:creationId xmlns:a16="http://schemas.microsoft.com/office/drawing/2014/main" id="{10698F01-49E4-4FD6-992B-14E8F118627A}"/>
+                <a16:creationId xmlns:a16="http://schemas.microsoft.com/office/drawing/2014/main" id="{B4EC0C1D-C986-4AF8-8931-507FFEBE2CEF}"/>
               </a:ext>
             </a:extLst>
           </p:cNvPr>
@@ -37256,7 +37256,7 @@
           <p:cNvPr id="10" name="">
             <a:extLst xmlns:a="http://schemas.openxmlformats.org/drawingml/2006/main">
               <a:ext uri="{FF2B5EF4-FFF2-40B4-BE49-F238E27FC236}">
-                <a16:creationId xmlns:a16="http://schemas.microsoft.com/office/drawing/2014/main" id="{AAA7A74F-47A8-4CCB-B3E7-1EB5C0CF1C7A}"/>
+                <a16:creationId xmlns:a16="http://schemas.microsoft.com/office/drawing/2014/main" id="{252F0790-057D-4AB5-907B-FA48C83D574D}"/>
               </a:ext>
             </a:extLst>
           </p:cNvPr>
@@ -37297,7 +37297,7 @@
           <p:cNvPr id="11" name="">
             <a:extLst xmlns:a="http://schemas.openxmlformats.org/drawingml/2006/main">
               <a:ext uri="{FF2B5EF4-FFF2-40B4-BE49-F238E27FC236}">
-                <a16:creationId xmlns:a16="http://schemas.microsoft.com/office/drawing/2014/main" id="{374B8FA2-1B6A-420D-96B5-5E36A113B885}"/>
+                <a16:creationId xmlns:a16="http://schemas.microsoft.com/office/drawing/2014/main" id="{80121DA1-D2CD-451C-A87C-0071953198AF}"/>
               </a:ext>
             </a:extLst>
           </p:cNvPr>
@@ -37359,7 +37359,7 @@
           <p:cNvPr id="12" name="">
             <a:extLst xmlns:a="http://schemas.openxmlformats.org/drawingml/2006/main">
               <a:ext uri="{FF2B5EF4-FFF2-40B4-BE49-F238E27FC236}">
-                <a16:creationId xmlns:a16="http://schemas.microsoft.com/office/drawing/2014/main" id="{7F011D8F-A42C-440B-86AE-B0A531FFFF5B}"/>
+                <a16:creationId xmlns:a16="http://schemas.microsoft.com/office/drawing/2014/main" id="{CE9DF54D-E664-4D0C-B500-E550AF19D6DD}"/>
               </a:ext>
             </a:extLst>
           </p:cNvPr>
@@ -37421,7 +37421,7 @@
           <p:cNvPr id="13" name="">
             <a:extLst xmlns:a="http://schemas.openxmlformats.org/drawingml/2006/main">
               <a:ext uri="{FF2B5EF4-FFF2-40B4-BE49-F238E27FC236}">
-                <a16:creationId xmlns:a16="http://schemas.microsoft.com/office/drawing/2014/main" id="{4E5539A9-8938-4DBE-AE12-D57BA84C8311}"/>
+                <a16:creationId xmlns:a16="http://schemas.microsoft.com/office/drawing/2014/main" id="{043C154D-585B-470B-A9C3-7CA979A2D275}"/>
               </a:ext>
             </a:extLst>
           </p:cNvPr>
@@ -37462,7 +37462,7 @@
           <p:cNvPr id="14" name="">
             <a:extLst xmlns:a="http://schemas.openxmlformats.org/drawingml/2006/main">
               <a:ext uri="{FF2B5EF4-FFF2-40B4-BE49-F238E27FC236}">
-                <a16:creationId xmlns:a16="http://schemas.microsoft.com/office/drawing/2014/main" id="{A5D4F703-5A5D-4FEB-B9B3-6180AB51B39B}"/>
+                <a16:creationId xmlns:a16="http://schemas.microsoft.com/office/drawing/2014/main" id="{A13431EF-0E7D-4A31-B6C6-6351F455FC54}"/>
               </a:ext>
             </a:extLst>
           </p:cNvPr>
@@ -37524,7 +37524,7 @@
           <p:cNvPr id="15" name="">
             <a:extLst xmlns:a="http://schemas.openxmlformats.org/drawingml/2006/main">
               <a:ext uri="{FF2B5EF4-FFF2-40B4-BE49-F238E27FC236}">
-                <a16:creationId xmlns:a16="http://schemas.microsoft.com/office/drawing/2014/main" id="{44A678DB-916C-47FE-8E38-8356F2B13131}"/>
+                <a16:creationId xmlns:a16="http://schemas.microsoft.com/office/drawing/2014/main" id="{0B8D58C5-62EC-4590-AB95-1423F0D988C0}"/>
               </a:ext>
             </a:extLst>
           </p:cNvPr>
@@ -37586,7 +37586,7 @@
           <p:cNvPr id="16" name="">
             <a:extLst xmlns:a="http://schemas.openxmlformats.org/drawingml/2006/main">
               <a:ext uri="{FF2B5EF4-FFF2-40B4-BE49-F238E27FC236}">
-                <a16:creationId xmlns:a16="http://schemas.microsoft.com/office/drawing/2014/main" id="{0C561EF9-AA99-4521-BB56-0CB7E6628B1D}"/>
+                <a16:creationId xmlns:a16="http://schemas.microsoft.com/office/drawing/2014/main" id="{7D3B8340-1F8B-4CF2-925C-FE39B7A8A25B}"/>
               </a:ext>
             </a:extLst>
           </p:cNvPr>
@@ -37627,7 +37627,7 @@
           <p:cNvPr id="17" name="">
             <a:extLst xmlns:a="http://schemas.openxmlformats.org/drawingml/2006/main">
               <a:ext uri="{FF2B5EF4-FFF2-40B4-BE49-F238E27FC236}">
-                <a16:creationId xmlns:a16="http://schemas.microsoft.com/office/drawing/2014/main" id="{5699525F-5382-4EA3-81F4-90AABF3941F3}"/>
+                <a16:creationId xmlns:a16="http://schemas.microsoft.com/office/drawing/2014/main" id="{6C3A454B-F235-46C6-BC0C-E85F6837B5A9}"/>
               </a:ext>
             </a:extLst>
           </p:cNvPr>
@@ -37689,7 +37689,7 @@
           <p:cNvPr id="18" name="">
             <a:extLst xmlns:a="http://schemas.openxmlformats.org/drawingml/2006/main">
               <a:ext uri="{FF2B5EF4-FFF2-40B4-BE49-F238E27FC236}">
-                <a16:creationId xmlns:a16="http://schemas.microsoft.com/office/drawing/2014/main" id="{17A0A555-1B25-46C4-917E-643EFEA829EF}"/>
+                <a16:creationId xmlns:a16="http://schemas.microsoft.com/office/drawing/2014/main" id="{BD9F7D32-5780-45EE-904A-31C7A87F5739}"/>
               </a:ext>
             </a:extLst>
           </p:cNvPr>
@@ -37751,7 +37751,7 @@
           <p:cNvPr id="19" name="">
             <a:extLst xmlns:a="http://schemas.openxmlformats.org/drawingml/2006/main">
               <a:ext uri="{FF2B5EF4-FFF2-40B4-BE49-F238E27FC236}">
-                <a16:creationId xmlns:a16="http://schemas.microsoft.com/office/drawing/2014/main" id="{582DE440-56C1-444E-B4A7-7D67429A1830}"/>
+                <a16:creationId xmlns:a16="http://schemas.microsoft.com/office/drawing/2014/main" id="{1FCD1121-CE76-49F7-B939-61E0FF078BCD}"/>
               </a:ext>
             </a:extLst>
           </p:cNvPr>
@@ -37792,7 +37792,7 @@
           <p:cNvPr id="20" name="">
             <a:extLst xmlns:a="http://schemas.openxmlformats.org/drawingml/2006/main">
               <a:ext uri="{FF2B5EF4-FFF2-40B4-BE49-F238E27FC236}">
-                <a16:creationId xmlns:a16="http://schemas.microsoft.com/office/drawing/2014/main" id="{01E06782-8DD6-424F-B94F-6056B04FF780}"/>
+                <a16:creationId xmlns:a16="http://schemas.microsoft.com/office/drawing/2014/main" id="{D9770233-9481-4492-B901-ED15F36EDB19}"/>
               </a:ext>
             </a:extLst>
           </p:cNvPr>
@@ -37854,7 +37854,7 @@
           <p:cNvPr id="21" name="">
             <a:extLst xmlns:a="http://schemas.openxmlformats.org/drawingml/2006/main">
               <a:ext uri="{FF2B5EF4-FFF2-40B4-BE49-F238E27FC236}">
-                <a16:creationId xmlns:a16="http://schemas.microsoft.com/office/drawing/2014/main" id="{CC5D0284-7B69-4B8E-A22D-16E4B55BB9D3}"/>
+                <a16:creationId xmlns:a16="http://schemas.microsoft.com/office/drawing/2014/main" id="{CE9AA2A4-4C09-440F-928E-D0FD12654796}"/>
               </a:ext>
             </a:extLst>
           </p:cNvPr>
@@ -38023,7 +38023,7 @@
           <p:cNvPr id="26" name="">
             <a:extLst xmlns:a="http://schemas.openxmlformats.org/drawingml/2006/main">
               <a:ext uri="{FF2B5EF4-FFF2-40B4-BE49-F238E27FC236}">
-                <a16:creationId xmlns:a16="http://schemas.microsoft.com/office/drawing/2014/main" id="{38E062CB-7182-4FB5-8E25-DF5F08B75F6F}"/>
+                <a16:creationId xmlns:a16="http://schemas.microsoft.com/office/drawing/2014/main" id="{F9578B92-9B18-40E8-9566-0BABC197DCE7}"/>
               </a:ext>
             </a:extLst>
           </p:cNvPr>
@@ -38058,7 +38058,7 @@
           <p:cNvPr id="27" name="">
             <a:extLst xmlns:a="http://schemas.openxmlformats.org/drawingml/2006/main">
               <a:ext uri="{FF2B5EF4-FFF2-40B4-BE49-F238E27FC236}">
-                <a16:creationId xmlns:a16="http://schemas.microsoft.com/office/drawing/2014/main" id="{DFE93109-C918-4E34-9F3D-336A871432C4}"/>
+                <a16:creationId xmlns:a16="http://schemas.microsoft.com/office/drawing/2014/main" id="{BFE11A1E-625E-47B6-A891-606EE85B0E32}"/>
               </a:ext>
             </a:extLst>
           </p:cNvPr>
@@ -38120,7 +38120,7 @@
           <p:cNvPr id="28" name="">
             <a:extLst xmlns:a="http://schemas.openxmlformats.org/drawingml/2006/main">
               <a:ext uri="{FF2B5EF4-FFF2-40B4-BE49-F238E27FC236}">
-                <a16:creationId xmlns:a16="http://schemas.microsoft.com/office/drawing/2014/main" id="{6F91E781-5A9C-439F-A2E7-AE4F09727FCF}"/>
+                <a16:creationId xmlns:a16="http://schemas.microsoft.com/office/drawing/2014/main" id="{6ECFE4F6-904B-4C26-8270-DD6E4F717671}"/>
               </a:ext>
             </a:extLst>
           </p:cNvPr>
@@ -38155,7 +38155,7 @@
           <p:cNvPr id="29" name="">
             <a:extLst xmlns:a="http://schemas.openxmlformats.org/drawingml/2006/main">
               <a:ext uri="{FF2B5EF4-FFF2-40B4-BE49-F238E27FC236}">
-                <a16:creationId xmlns:a16="http://schemas.microsoft.com/office/drawing/2014/main" id="{507C2786-C3F5-4D41-A6D3-AE326A336ADE}"/>
+                <a16:creationId xmlns:a16="http://schemas.microsoft.com/office/drawing/2014/main" id="{662F9F36-D79C-4A40-AA85-5856D8418B06}"/>
               </a:ext>
             </a:extLst>
           </p:cNvPr>
@@ -38217,7 +38217,7 @@
           <p:cNvPr id="30" name="">
             <a:extLst xmlns:a="http://schemas.openxmlformats.org/drawingml/2006/main">
               <a:ext uri="{FF2B5EF4-FFF2-40B4-BE49-F238E27FC236}">
-                <a16:creationId xmlns:a16="http://schemas.microsoft.com/office/drawing/2014/main" id="{DAD9543F-FCA9-4332-BCF4-87BB9F9ED079}"/>
+                <a16:creationId xmlns:a16="http://schemas.microsoft.com/office/drawing/2014/main" id="{65CEAACA-A152-4EC7-88B2-F9605D868F12}"/>
               </a:ext>
             </a:extLst>
           </p:cNvPr>
@@ -38258,7 +38258,7 @@
           <p:cNvPr id="31" name="">
             <a:extLst xmlns:a="http://schemas.openxmlformats.org/drawingml/2006/main">
               <a:ext uri="{FF2B5EF4-FFF2-40B4-BE49-F238E27FC236}">
-                <a16:creationId xmlns:a16="http://schemas.microsoft.com/office/drawing/2014/main" id="{08C03F48-E614-44DC-92BF-1F8AA8C3F0CE}"/>
+                <a16:creationId xmlns:a16="http://schemas.microsoft.com/office/drawing/2014/main" id="{6070B774-1C6D-4E46-A09A-3FF5F8361C37}"/>
               </a:ext>
             </a:extLst>
           </p:cNvPr>
@@ -38291,7 +38291,7 @@
           <p:cNvPr id="32" name="">
             <a:extLst xmlns:a="http://schemas.openxmlformats.org/drawingml/2006/main">
               <a:ext uri="{FF2B5EF4-FFF2-40B4-BE49-F238E27FC236}">
-                <a16:creationId xmlns:a16="http://schemas.microsoft.com/office/drawing/2014/main" id="{27424018-5455-4961-84B6-CE4717A4E71D}"/>
+                <a16:creationId xmlns:a16="http://schemas.microsoft.com/office/drawing/2014/main" id="{9B7C36FD-77F7-4D27-9D02-8619BA88096A}"/>
               </a:ext>
             </a:extLst>
           </p:cNvPr>
@@ -38353,7 +38353,7 @@
           <p:cNvPr id="33" name="">
             <a:extLst xmlns:a="http://schemas.openxmlformats.org/drawingml/2006/main">
               <a:ext uri="{FF2B5EF4-FFF2-40B4-BE49-F238E27FC236}">
-                <a16:creationId xmlns:a16="http://schemas.microsoft.com/office/drawing/2014/main" id="{95AB2320-9B4D-43FE-87A6-9323A7BE99D7}"/>
+                <a16:creationId xmlns:a16="http://schemas.microsoft.com/office/drawing/2014/main" id="{0238A5BC-0E0E-4CCF-B1A7-AFAC7DB6D840}"/>
               </a:ext>
             </a:extLst>
           </p:cNvPr>
@@ -38415,7 +38415,7 @@
           <p:cNvPr id="34" name="">
             <a:extLst xmlns:a="http://schemas.openxmlformats.org/drawingml/2006/main">
               <a:ext uri="{FF2B5EF4-FFF2-40B4-BE49-F238E27FC236}">
-                <a16:creationId xmlns:a16="http://schemas.microsoft.com/office/drawing/2014/main" id="{218FDA13-85C8-40CC-A57D-804B8C63D0D8}"/>
+                <a16:creationId xmlns:a16="http://schemas.microsoft.com/office/drawing/2014/main" id="{521D5FB9-CDF3-40C2-8739-A61B692945F5}"/>
               </a:ext>
             </a:extLst>
           </p:cNvPr>
@@ -38448,7 +38448,7 @@
           <p:cNvPr id="35" name="">
             <a:extLst xmlns:a="http://schemas.openxmlformats.org/drawingml/2006/main">
               <a:ext uri="{FF2B5EF4-FFF2-40B4-BE49-F238E27FC236}">
-                <a16:creationId xmlns:a16="http://schemas.microsoft.com/office/drawing/2014/main" id="{EA274D56-F0F7-413D-82D5-4E547933AF35}"/>
+                <a16:creationId xmlns:a16="http://schemas.microsoft.com/office/drawing/2014/main" id="{71C6CCDF-71FB-4FE7-AB39-A92272A15797}"/>
               </a:ext>
             </a:extLst>
           </p:cNvPr>
@@ -38510,7 +38510,7 @@
           <p:cNvPr id="36" name="">
             <a:extLst xmlns:a="http://schemas.openxmlformats.org/drawingml/2006/main">
               <a:ext uri="{FF2B5EF4-FFF2-40B4-BE49-F238E27FC236}">
-                <a16:creationId xmlns:a16="http://schemas.microsoft.com/office/drawing/2014/main" id="{DB199DB7-34E3-4FE5-8BB3-FF1C7D9E2CDB}"/>
+                <a16:creationId xmlns:a16="http://schemas.microsoft.com/office/drawing/2014/main" id="{D886BD1E-D70E-4CD2-9C44-B56C7B3F195B}"/>
               </a:ext>
             </a:extLst>
           </p:cNvPr>
@@ -38551,7 +38551,7 @@
           <p:cNvPr id="37" name="">
             <a:extLst xmlns:a="http://schemas.openxmlformats.org/drawingml/2006/main">
               <a:ext uri="{FF2B5EF4-FFF2-40B4-BE49-F238E27FC236}">
-                <a16:creationId xmlns:a16="http://schemas.microsoft.com/office/drawing/2014/main" id="{72A880D2-8A2E-4D66-A2E9-CF198288E24A}"/>
+                <a16:creationId xmlns:a16="http://schemas.microsoft.com/office/drawing/2014/main" id="{8078DBFC-9FA5-4055-B9CE-BC2D4C9C4A95}"/>
               </a:ext>
             </a:extLst>
           </p:cNvPr>
@@ -38584,7 +38584,7 @@
           <p:cNvPr id="38" name="">
             <a:extLst xmlns:a="http://schemas.openxmlformats.org/drawingml/2006/main">
               <a:ext uri="{FF2B5EF4-FFF2-40B4-BE49-F238E27FC236}">
-                <a16:creationId xmlns:a16="http://schemas.microsoft.com/office/drawing/2014/main" id="{C33C80CF-A2B2-470A-A9E0-8902602CF5BD}"/>
+                <a16:creationId xmlns:a16="http://schemas.microsoft.com/office/drawing/2014/main" id="{DD55CF7D-DDE1-44C6-BF93-AF885390D0E8}"/>
               </a:ext>
             </a:extLst>
           </p:cNvPr>
@@ -38646,7 +38646,7 @@
           <p:cNvPr id="39" name="">
             <a:extLst xmlns:a="http://schemas.openxmlformats.org/drawingml/2006/main">
               <a:ext uri="{FF2B5EF4-FFF2-40B4-BE49-F238E27FC236}">
-                <a16:creationId xmlns:a16="http://schemas.microsoft.com/office/drawing/2014/main" id="{878A0616-4D51-4856-BEB4-63A8D8B1E80D}"/>
+                <a16:creationId xmlns:a16="http://schemas.microsoft.com/office/drawing/2014/main" id="{34EB0567-D1E9-48A1-B9D5-D81982C373A0}"/>
               </a:ext>
             </a:extLst>
           </p:cNvPr>
@@ -38708,7 +38708,7 @@
           <p:cNvPr id="40" name="">
             <a:extLst xmlns:a="http://schemas.openxmlformats.org/drawingml/2006/main">
               <a:ext uri="{FF2B5EF4-FFF2-40B4-BE49-F238E27FC236}">
-                <a16:creationId xmlns:a16="http://schemas.microsoft.com/office/drawing/2014/main" id="{2230E1B8-141B-4DC1-B7DB-D4CB0EB570E2}"/>
+                <a16:creationId xmlns:a16="http://schemas.microsoft.com/office/drawing/2014/main" id="{7EAE590A-662B-4807-A755-BE0D629E6552}"/>
               </a:ext>
             </a:extLst>
           </p:cNvPr>
@@ -38741,7 +38741,7 @@
           <p:cNvPr id="41" name="">
             <a:extLst xmlns:a="http://schemas.openxmlformats.org/drawingml/2006/main">
               <a:ext uri="{FF2B5EF4-FFF2-40B4-BE49-F238E27FC236}">
-                <a16:creationId xmlns:a16="http://schemas.microsoft.com/office/drawing/2014/main" id="{CE79009B-51AD-4653-9EBF-8973CD8A7989}"/>
+                <a16:creationId xmlns:a16="http://schemas.microsoft.com/office/drawing/2014/main" id="{0F8C0C70-7AF5-4E1C-BFF3-E03A99E15171}"/>
               </a:ext>
             </a:extLst>
           </p:cNvPr>
@@ -38803,7 +38803,7 @@
           <p:cNvPr id="42" name="">
             <a:extLst xmlns:a="http://schemas.openxmlformats.org/drawingml/2006/main">
               <a:ext uri="{FF2B5EF4-FFF2-40B4-BE49-F238E27FC236}">
-                <a16:creationId xmlns:a16="http://schemas.microsoft.com/office/drawing/2014/main" id="{BDF53703-17BF-41AF-B972-426A82781539}"/>
+                <a16:creationId xmlns:a16="http://schemas.microsoft.com/office/drawing/2014/main" id="{F3887A1F-5EF4-45B6-8EAB-0F88F0D2BFCD}"/>
               </a:ext>
             </a:extLst>
           </p:cNvPr>
@@ -38844,7 +38844,7 @@
           <p:cNvPr id="43" name="">
             <a:extLst xmlns:a="http://schemas.openxmlformats.org/drawingml/2006/main">
               <a:ext uri="{FF2B5EF4-FFF2-40B4-BE49-F238E27FC236}">
-                <a16:creationId xmlns:a16="http://schemas.microsoft.com/office/drawing/2014/main" id="{1869840B-4882-4B34-97A5-BC213A5B8673}"/>
+                <a16:creationId xmlns:a16="http://schemas.microsoft.com/office/drawing/2014/main" id="{8B025E47-B17A-44FA-BCAA-0FDDB53F625A}"/>
               </a:ext>
             </a:extLst>
           </p:cNvPr>
@@ -38877,7 +38877,7 @@
           <p:cNvPr id="44" name="">
             <a:extLst xmlns:a="http://schemas.openxmlformats.org/drawingml/2006/main">
               <a:ext uri="{FF2B5EF4-FFF2-40B4-BE49-F238E27FC236}">
-                <a16:creationId xmlns:a16="http://schemas.microsoft.com/office/drawing/2014/main" id="{16BB9EB9-5937-469E-AF31-D354121016E5}"/>
+                <a16:creationId xmlns:a16="http://schemas.microsoft.com/office/drawing/2014/main" id="{B52AD2C0-E469-457D-AFC3-C61982B3ECBF}"/>
               </a:ext>
             </a:extLst>
           </p:cNvPr>
@@ -38939,7 +38939,7 @@
           <p:cNvPr id="45" name="">
             <a:extLst xmlns:a="http://schemas.openxmlformats.org/drawingml/2006/main">
               <a:ext uri="{FF2B5EF4-FFF2-40B4-BE49-F238E27FC236}">
-                <a16:creationId xmlns:a16="http://schemas.microsoft.com/office/drawing/2014/main" id="{FAA99C6D-A6DB-4F67-9439-288A6F9857B7}"/>
+                <a16:creationId xmlns:a16="http://schemas.microsoft.com/office/drawing/2014/main" id="{09F85F83-64E6-48B5-881C-08DA7BA76111}"/>
               </a:ext>
             </a:extLst>
           </p:cNvPr>
@@ -39001,7 +39001,7 @@
           <p:cNvPr id="46" name="">
             <a:extLst xmlns:a="http://schemas.openxmlformats.org/drawingml/2006/main">
               <a:ext uri="{FF2B5EF4-FFF2-40B4-BE49-F238E27FC236}">
-                <a16:creationId xmlns:a16="http://schemas.microsoft.com/office/drawing/2014/main" id="{30015E20-3799-451E-A95F-2A77F4587085}"/>
+                <a16:creationId xmlns:a16="http://schemas.microsoft.com/office/drawing/2014/main" id="{6574E536-22F9-4900-A9B1-2D5B2905B073}"/>
               </a:ext>
             </a:extLst>
           </p:cNvPr>
@@ -39034,7 +39034,7 @@
           <p:cNvPr id="47" name="">
             <a:extLst xmlns:a="http://schemas.openxmlformats.org/drawingml/2006/main">
               <a:ext uri="{FF2B5EF4-FFF2-40B4-BE49-F238E27FC236}">
-                <a16:creationId xmlns:a16="http://schemas.microsoft.com/office/drawing/2014/main" id="{EA690BB4-9677-4B51-A231-8B46D6176160}"/>
+                <a16:creationId xmlns:a16="http://schemas.microsoft.com/office/drawing/2014/main" id="{6596C59B-4C19-4471-8592-71E3D637D7E3}"/>
               </a:ext>
             </a:extLst>
           </p:cNvPr>
@@ -39096,7 +39096,7 @@
           <p:cNvPr id="48" name="">
             <a:extLst xmlns:a="http://schemas.openxmlformats.org/drawingml/2006/main">
               <a:ext uri="{FF2B5EF4-FFF2-40B4-BE49-F238E27FC236}">
-                <a16:creationId xmlns:a16="http://schemas.microsoft.com/office/drawing/2014/main" id="{9DFAC847-50E2-4D4E-8E9B-ACCF24061EAC}"/>
+                <a16:creationId xmlns:a16="http://schemas.microsoft.com/office/drawing/2014/main" id="{1C1FD860-186A-42FC-A61A-7DCC3B7DA17E}"/>
               </a:ext>
             </a:extLst>
           </p:cNvPr>
@@ -39131,7 +39131,7 @@
           <p:cNvPr id="49" name="">
             <a:extLst xmlns:a="http://schemas.openxmlformats.org/drawingml/2006/main">
               <a:ext uri="{FF2B5EF4-FFF2-40B4-BE49-F238E27FC236}">
-                <a16:creationId xmlns:a16="http://schemas.microsoft.com/office/drawing/2014/main" id="{2C36000B-CD67-4FE9-AC12-471B9D340077}"/>
+                <a16:creationId xmlns:a16="http://schemas.microsoft.com/office/drawing/2014/main" id="{88D79ECE-8F5B-4B17-93F0-F357C88BE353}"/>
               </a:ext>
             </a:extLst>
           </p:cNvPr>
@@ -39191,7 +39191,7 @@
     </p:spTree>
     <p:extLst>
       <p:ext uri="{BB962C8B-B14F-4D97-AF65-F5344CB8AC3E}">
-        <p14:creationId xmlns:p14="http://schemas.microsoft.com/office/powerpoint/2010/main" val="478595750"/>
+        <p14:creationId xmlns:p14="http://schemas.microsoft.com/office/powerpoint/2010/main" val="148902646"/>
       </p:ext>
     </p:extLst>
   </p:cSld>
@@ -39222,7 +39222,7 @@
           <p:cNvPr id="28" name="">
             <a:extLst xmlns:a="http://schemas.openxmlformats.org/drawingml/2006/main">
               <a:ext uri="{FF2B5EF4-FFF2-40B4-BE49-F238E27FC236}">
-                <a16:creationId xmlns:a16="http://schemas.microsoft.com/office/drawing/2014/main" id="{CF9A446F-DD46-41BC-B139-4563D8ADD70F}"/>
+                <a16:creationId xmlns:a16="http://schemas.microsoft.com/office/drawing/2014/main" id="{760FC74F-BEAD-49B1-9687-14E743BA44C2}"/>
               </a:ext>
             </a:extLst>
           </p:cNvPr>
@@ -39255,7 +39255,7 @@
           <p:cNvPr id="2" name="">
             <a:extLst xmlns:a="http://schemas.openxmlformats.org/drawingml/2006/main">
               <a:ext uri="{FF2B5EF4-FFF2-40B4-BE49-F238E27FC236}">
-                <a16:creationId xmlns:a16="http://schemas.microsoft.com/office/drawing/2014/main" id="{859217F3-3A96-4636-9BC0-66F2B7FE8F19}"/>
+                <a16:creationId xmlns:a16="http://schemas.microsoft.com/office/drawing/2014/main" id="{ED0A4112-061F-406E-A2F4-C83BCA90CEC2}"/>
               </a:ext>
             </a:extLst>
           </p:cNvPr>
@@ -39317,7 +39317,7 @@
           <p:cNvPr id="3" name="">
             <a:extLst xmlns:a="http://schemas.openxmlformats.org/drawingml/2006/main">
               <a:ext uri="{FF2B5EF4-FFF2-40B4-BE49-F238E27FC236}">
-                <a16:creationId xmlns:a16="http://schemas.microsoft.com/office/drawing/2014/main" id="{8E433A8A-67C8-4DF9-B192-B5F641AC6028}"/>
+                <a16:creationId xmlns:a16="http://schemas.microsoft.com/office/drawing/2014/main" id="{C9615C7A-D5BB-4B44-8E32-C9224B803995}"/>
               </a:ext>
             </a:extLst>
           </p:cNvPr>
@@ -39379,7 +39379,7 @@
           <p:cNvPr id="4" name="">
             <a:extLst xmlns:a="http://schemas.openxmlformats.org/drawingml/2006/main">
               <a:ext uri="{FF2B5EF4-FFF2-40B4-BE49-F238E27FC236}">
-                <a16:creationId xmlns:a16="http://schemas.microsoft.com/office/drawing/2014/main" id="{8A0B3BDA-C07F-4C91-8E2C-42DE56991FC1}"/>
+                <a16:creationId xmlns:a16="http://schemas.microsoft.com/office/drawing/2014/main" id="{DA19549A-AED7-4D73-8F5B-4AB95D72260D}"/>
               </a:ext>
             </a:extLst>
           </p:cNvPr>
@@ -39412,7 +39412,7 @@
           <p:cNvPr id="5" name="">
             <a:extLst xmlns:a="http://schemas.openxmlformats.org/drawingml/2006/main">
               <a:ext uri="{FF2B5EF4-FFF2-40B4-BE49-F238E27FC236}">
-                <a16:creationId xmlns:a16="http://schemas.microsoft.com/office/drawing/2014/main" id="{608DDCA8-7830-47C1-9D9F-5202A0D50F33}"/>
+                <a16:creationId xmlns:a16="http://schemas.microsoft.com/office/drawing/2014/main" id="{0E403090-9EA5-4F37-922B-0D021C3D1F4D}"/>
               </a:ext>
             </a:extLst>
           </p:cNvPr>
@@ -39474,7 +39474,7 @@
           <p:cNvPr id="6" name="">
             <a:extLst xmlns:a="http://schemas.openxmlformats.org/drawingml/2006/main">
               <a:ext uri="{FF2B5EF4-FFF2-40B4-BE49-F238E27FC236}">
-                <a16:creationId xmlns:a16="http://schemas.microsoft.com/office/drawing/2014/main" id="{432240B6-17C9-4B97-A2C9-3213E4408C58}"/>
+                <a16:creationId xmlns:a16="http://schemas.microsoft.com/office/drawing/2014/main" id="{015F01A9-FB23-4D05-8648-64A544804AC5}"/>
               </a:ext>
             </a:extLst>
           </p:cNvPr>
@@ -39536,7 +39536,7 @@
           <p:cNvPr id="7" name="">
             <a:extLst xmlns:a="http://schemas.openxmlformats.org/drawingml/2006/main">
               <a:ext uri="{FF2B5EF4-FFF2-40B4-BE49-F238E27FC236}">
-                <a16:creationId xmlns:a16="http://schemas.microsoft.com/office/drawing/2014/main" id="{3C4F3472-E18F-4C5A-A053-C384D0D79310}"/>
+                <a16:creationId xmlns:a16="http://schemas.microsoft.com/office/drawing/2014/main" id="{E34707F5-210C-4ABE-B11D-548010ABAEC8}"/>
               </a:ext>
             </a:extLst>
           </p:cNvPr>
@@ -39577,7 +39577,7 @@
           <p:cNvPr id="8" name="">
             <a:extLst xmlns:a="http://schemas.openxmlformats.org/drawingml/2006/main">
               <a:ext uri="{FF2B5EF4-FFF2-40B4-BE49-F238E27FC236}">
-                <a16:creationId xmlns:a16="http://schemas.microsoft.com/office/drawing/2014/main" id="{266C39F3-6559-42DC-857E-449D53014C8C}"/>
+                <a16:creationId xmlns:a16="http://schemas.microsoft.com/office/drawing/2014/main" id="{EA18FB97-ABCD-4B9B-9AAC-6B1179D3C6BD}"/>
               </a:ext>
             </a:extLst>
           </p:cNvPr>
@@ -39639,7 +39639,7 @@
           <p:cNvPr id="9" name="">
             <a:extLst xmlns:a="http://schemas.openxmlformats.org/drawingml/2006/main">
               <a:ext uri="{FF2B5EF4-FFF2-40B4-BE49-F238E27FC236}">
-                <a16:creationId xmlns:a16="http://schemas.microsoft.com/office/drawing/2014/main" id="{F8319CC2-F08A-45A8-B584-9FDEDBD94A56}"/>
+                <a16:creationId xmlns:a16="http://schemas.microsoft.com/office/drawing/2014/main" id="{B6E41DF7-75F6-4717-A893-000C55212ED4}"/>
               </a:ext>
             </a:extLst>
           </p:cNvPr>
@@ -40079,7 +40079,7 @@
           <p:cNvPr id="10" name="">
             <a:extLst xmlns:a="http://schemas.openxmlformats.org/drawingml/2006/main">
               <a:ext uri="{FF2B5EF4-FFF2-40B4-BE49-F238E27FC236}">
-                <a16:creationId xmlns:a16="http://schemas.microsoft.com/office/drawing/2014/main" id="{D21A2665-F870-4D05-8184-D80C775ACBA7}"/>
+                <a16:creationId xmlns:a16="http://schemas.microsoft.com/office/drawing/2014/main" id="{7B510C3E-F776-4F5B-B3C1-EF8DEEE33479}"/>
               </a:ext>
             </a:extLst>
           </p:cNvPr>
@@ -40120,7 +40120,7 @@
           <p:cNvPr id="11" name="">
             <a:extLst xmlns:a="http://schemas.openxmlformats.org/drawingml/2006/main">
               <a:ext uri="{FF2B5EF4-FFF2-40B4-BE49-F238E27FC236}">
-                <a16:creationId xmlns:a16="http://schemas.microsoft.com/office/drawing/2014/main" id="{3D6D42B2-05AF-4012-9BF9-D24211D59D4B}"/>
+                <a16:creationId xmlns:a16="http://schemas.microsoft.com/office/drawing/2014/main" id="{035DB07D-B991-4D4E-8F37-870215D9DE6F}"/>
               </a:ext>
             </a:extLst>
           </p:cNvPr>
@@ -40153,7 +40153,7 @@
           <p:cNvPr id="12" name="">
             <a:extLst xmlns:a="http://schemas.openxmlformats.org/drawingml/2006/main">
               <a:ext uri="{FF2B5EF4-FFF2-40B4-BE49-F238E27FC236}">
-                <a16:creationId xmlns:a16="http://schemas.microsoft.com/office/drawing/2014/main" id="{51DFD1BC-F872-4C8E-BDFC-0A0C08D255A5}"/>
+                <a16:creationId xmlns:a16="http://schemas.microsoft.com/office/drawing/2014/main" id="{4233A042-8C2F-4C20-8511-532530CA3184}"/>
               </a:ext>
             </a:extLst>
           </p:cNvPr>
@@ -40215,7 +40215,7 @@
           <p:cNvPr id="13" name="">
             <a:extLst xmlns:a="http://schemas.openxmlformats.org/drawingml/2006/main">
               <a:ext uri="{FF2B5EF4-FFF2-40B4-BE49-F238E27FC236}">
-                <a16:creationId xmlns:a16="http://schemas.microsoft.com/office/drawing/2014/main" id="{5980FDDA-622A-44B2-9E65-E94AFB381904}"/>
+                <a16:creationId xmlns:a16="http://schemas.microsoft.com/office/drawing/2014/main" id="{25847F98-ED69-4884-8F8A-F192E9F162AC}"/>
               </a:ext>
             </a:extLst>
           </p:cNvPr>
@@ -40304,7 +40304,7 @@
           <p:cNvPr id="14" name="">
             <a:extLst xmlns:a="http://schemas.openxmlformats.org/drawingml/2006/main">
               <a:ext uri="{FF2B5EF4-FFF2-40B4-BE49-F238E27FC236}">
-                <a16:creationId xmlns:a16="http://schemas.microsoft.com/office/drawing/2014/main" id="{9E84152B-D6A4-41A5-AFBD-715E04AF55B7}"/>
+                <a16:creationId xmlns:a16="http://schemas.microsoft.com/office/drawing/2014/main" id="{2E1128AA-DF65-48A4-BD10-E18F6FA2D95C}"/>
               </a:ext>
             </a:extLst>
           </p:cNvPr>
@@ -40345,7 +40345,7 @@
           <p:cNvPr id="15" name="">
             <a:extLst xmlns:a="http://schemas.openxmlformats.org/drawingml/2006/main">
               <a:ext uri="{FF2B5EF4-FFF2-40B4-BE49-F238E27FC236}">
-                <a16:creationId xmlns:a16="http://schemas.microsoft.com/office/drawing/2014/main" id="{727A0F5D-46A5-4514-ADF5-08B99538663A}"/>
+                <a16:creationId xmlns:a16="http://schemas.microsoft.com/office/drawing/2014/main" id="{0BBC1F1C-B41F-44AF-8C41-13449A2260C9}"/>
               </a:ext>
             </a:extLst>
           </p:cNvPr>
@@ -40378,7 +40378,7 @@
           <p:cNvPr id="16" name="">
             <a:extLst xmlns:a="http://schemas.openxmlformats.org/drawingml/2006/main">
               <a:ext uri="{FF2B5EF4-FFF2-40B4-BE49-F238E27FC236}">
-                <a16:creationId xmlns:a16="http://schemas.microsoft.com/office/drawing/2014/main" id="{34181C67-B32D-43E2-8495-0A4B88A04F7A}"/>
+                <a16:creationId xmlns:a16="http://schemas.microsoft.com/office/drawing/2014/main" id="{C0125754-D85C-46F6-A59A-3B0285DBF1F8}"/>
               </a:ext>
             </a:extLst>
           </p:cNvPr>
@@ -40440,7 +40440,7 @@
           <p:cNvPr id="17" name="">
             <a:extLst xmlns:a="http://schemas.openxmlformats.org/drawingml/2006/main">
               <a:ext uri="{FF2B5EF4-FFF2-40B4-BE49-F238E27FC236}">
-                <a16:creationId xmlns:a16="http://schemas.microsoft.com/office/drawing/2014/main" id="{5EDC5214-4EB3-463B-97CF-9857F341C11A}"/>
+                <a16:creationId xmlns:a16="http://schemas.microsoft.com/office/drawing/2014/main" id="{15E915A1-FB0C-4444-885D-38AD5CBBFB0B}"/>
               </a:ext>
             </a:extLst>
           </p:cNvPr>
@@ -40529,7 +40529,7 @@
           <p:cNvPr id="18" name="">
             <a:extLst xmlns:a="http://schemas.openxmlformats.org/drawingml/2006/main">
               <a:ext uri="{FF2B5EF4-FFF2-40B4-BE49-F238E27FC236}">
-                <a16:creationId xmlns:a16="http://schemas.microsoft.com/office/drawing/2014/main" id="{7870CF2C-C8FC-454A-B43B-A662BFFB09E7}"/>
+                <a16:creationId xmlns:a16="http://schemas.microsoft.com/office/drawing/2014/main" id="{57B9698C-DF23-46CF-8528-8EC75E58AEAE}"/>
               </a:ext>
             </a:extLst>
           </p:cNvPr>
@@ -40570,7 +40570,7 @@
           <p:cNvPr id="19" name="">
             <a:extLst xmlns:a="http://schemas.openxmlformats.org/drawingml/2006/main">
               <a:ext uri="{FF2B5EF4-FFF2-40B4-BE49-F238E27FC236}">
-                <a16:creationId xmlns:a16="http://schemas.microsoft.com/office/drawing/2014/main" id="{A1235788-20BF-4378-9433-5CB4D370A8A6}"/>
+                <a16:creationId xmlns:a16="http://schemas.microsoft.com/office/drawing/2014/main" id="{E9F28D14-FAA9-4A78-BBB1-51035E71574A}"/>
               </a:ext>
             </a:extLst>
           </p:cNvPr>
@@ -40603,7 +40603,7 @@
           <p:cNvPr id="20" name="">
             <a:extLst xmlns:a="http://schemas.openxmlformats.org/drawingml/2006/main">
               <a:ext uri="{FF2B5EF4-FFF2-40B4-BE49-F238E27FC236}">
-                <a16:creationId xmlns:a16="http://schemas.microsoft.com/office/drawing/2014/main" id="{EC205275-02FD-499E-A7F0-8740CA8B4DBC}"/>
+                <a16:creationId xmlns:a16="http://schemas.microsoft.com/office/drawing/2014/main" id="{2B327CB0-1935-41F9-B067-AE8E5F781796}"/>
               </a:ext>
             </a:extLst>
           </p:cNvPr>
@@ -40665,7 +40665,7 @@
           <p:cNvPr id="21" name="">
             <a:extLst xmlns:a="http://schemas.openxmlformats.org/drawingml/2006/main">
               <a:ext uri="{FF2B5EF4-FFF2-40B4-BE49-F238E27FC236}">
-                <a16:creationId xmlns:a16="http://schemas.microsoft.com/office/drawing/2014/main" id="{09EC2B3F-636B-498C-8F52-3B707162B404}"/>
+                <a16:creationId xmlns:a16="http://schemas.microsoft.com/office/drawing/2014/main" id="{6101CA64-4C40-4334-8D19-9894BB92FE73}"/>
               </a:ext>
             </a:extLst>
           </p:cNvPr>
@@ -40754,7 +40754,7 @@
           <p:cNvPr id="22" name="">
             <a:extLst xmlns:a="http://schemas.openxmlformats.org/drawingml/2006/main">
               <a:ext uri="{FF2B5EF4-FFF2-40B4-BE49-F238E27FC236}">
-                <a16:creationId xmlns:a16="http://schemas.microsoft.com/office/drawing/2014/main" id="{4A2F2156-F7C7-4DE8-8812-B06F1F1F7887}"/>
+                <a16:creationId xmlns:a16="http://schemas.microsoft.com/office/drawing/2014/main" id="{56957D03-4457-44F5-AFBE-090A915D7B98}"/>
               </a:ext>
             </a:extLst>
           </p:cNvPr>
@@ -40795,7 +40795,7 @@
           <p:cNvPr id="23" name="">
             <a:extLst xmlns:a="http://schemas.openxmlformats.org/drawingml/2006/main">
               <a:ext uri="{FF2B5EF4-FFF2-40B4-BE49-F238E27FC236}">
-                <a16:creationId xmlns:a16="http://schemas.microsoft.com/office/drawing/2014/main" id="{A137343B-ACBD-43E4-AF7E-5E740B44BC65}"/>
+                <a16:creationId xmlns:a16="http://schemas.microsoft.com/office/drawing/2014/main" id="{BE8A471E-E653-42FE-8B16-17EAB3D66706}"/>
               </a:ext>
             </a:extLst>
           </p:cNvPr>
@@ -40828,7 +40828,7 @@
           <p:cNvPr id="24" name="">
             <a:extLst xmlns:a="http://schemas.openxmlformats.org/drawingml/2006/main">
               <a:ext uri="{FF2B5EF4-FFF2-40B4-BE49-F238E27FC236}">
-                <a16:creationId xmlns:a16="http://schemas.microsoft.com/office/drawing/2014/main" id="{5C68DAB7-C025-49B0-A4FE-C8DAD2120553}"/>
+                <a16:creationId xmlns:a16="http://schemas.microsoft.com/office/drawing/2014/main" id="{0D2E3248-EFA7-40BB-9A34-6AC666907DB3}"/>
               </a:ext>
             </a:extLst>
           </p:cNvPr>
@@ -40890,7 +40890,7 @@
           <p:cNvPr id="25" name="">
             <a:extLst xmlns:a="http://schemas.openxmlformats.org/drawingml/2006/main">
               <a:ext uri="{FF2B5EF4-FFF2-40B4-BE49-F238E27FC236}">
-                <a16:creationId xmlns:a16="http://schemas.microsoft.com/office/drawing/2014/main" id="{460599CE-DB5D-4DE3-824B-7A2966A52B35}"/>
+                <a16:creationId xmlns:a16="http://schemas.microsoft.com/office/drawing/2014/main" id="{456243B8-33D9-40B3-B195-254DC518F9D9}"/>
               </a:ext>
             </a:extLst>
           </p:cNvPr>
@@ -40979,7 +40979,7 @@
           <p:cNvPr id="26" name="">
             <a:extLst xmlns:a="http://schemas.openxmlformats.org/drawingml/2006/main">
               <a:ext uri="{FF2B5EF4-FFF2-40B4-BE49-F238E27FC236}">
-                <a16:creationId xmlns:a16="http://schemas.microsoft.com/office/drawing/2014/main" id="{88121889-9B2A-4070-9EEE-7D4FBD2F20D2}"/>
+                <a16:creationId xmlns:a16="http://schemas.microsoft.com/office/drawing/2014/main" id="{AF55018E-A7F1-40B5-8D06-DCC3B455A02E}"/>
               </a:ext>
             </a:extLst>
           </p:cNvPr>
@@ -41014,7 +41014,7 @@
           <p:cNvPr id="27" name="">
             <a:extLst xmlns:a="http://schemas.openxmlformats.org/drawingml/2006/main">
               <a:ext uri="{FF2B5EF4-FFF2-40B4-BE49-F238E27FC236}">
-                <a16:creationId xmlns:a16="http://schemas.microsoft.com/office/drawing/2014/main" id="{585B0EA2-E532-4D2A-A528-1605F5C97EA3}"/>
+                <a16:creationId xmlns:a16="http://schemas.microsoft.com/office/drawing/2014/main" id="{5245A21E-F536-41DA-8E72-24E0E85E68AB}"/>
               </a:ext>
             </a:extLst>
           </p:cNvPr>
@@ -41074,7 +41074,7 @@
     </p:spTree>
     <p:extLst>
       <p:ext uri="{BB962C8B-B14F-4D97-AF65-F5344CB8AC3E}">
-        <p14:creationId xmlns:p14="http://schemas.microsoft.com/office/powerpoint/2010/main" val="1034376255"/>
+        <p14:creationId xmlns:p14="http://schemas.microsoft.com/office/powerpoint/2010/main" val="844634376"/>
       </p:ext>
     </p:extLst>
   </p:cSld>
